--- a/draft.pptx
+++ b/draft.pptx
@@ -6,6 +6,8 @@
   </p:sldMasterIdLst>
   <p:sldIdLst>
     <p:sldId id="256" r:id="rId2"/>
+    <p:sldId id="257" r:id="rId3"/>
+    <p:sldId id="258" r:id="rId4"/>
   </p:sldIdLst>
   <p:sldSz cx="12192000" cy="6858000"/>
   <p:notesSz cx="6858000" cy="9144000"/>
@@ -104,6 +106,11 @@
       </a:defRPr>
     </a:lvl9pPr>
   </p:defaultTextStyle>
+  <p:extLst>
+    <p:ext uri="{EFAFB233-063F-42B5-8137-9DF3F51BA10A}">
+      <p15:sldGuideLst xmlns:p15="http://schemas.microsoft.com/office/powerpoint/2012/main"/>
+    </p:ext>
+  </p:extLst>
 </p:presentation>
 </file>
 
@@ -1382,6 +1389,258 @@
 </inkml:ink>
 </file>
 
+<file path=ppt/ink/ink141.xml><?xml version="1.0" encoding="utf-8"?>
+<inkml:ink xmlns:inkml="http://www.w3.org/2003/InkML">
+  <inkml:definitions>
+    <inkml:context xml:id="ctx0">
+      <inkml:inkSource xml:id="inkSrc0">
+        <inkml:traceFormat>
+          <inkml:channel name="X" type="integer" min="-2.14748E9" max="2.14748E9" units="cm"/>
+          <inkml:channel name="Y" type="integer" min="-2.14748E9" max="2.14748E9" units="cm"/>
+          <inkml:channel name="F" type="integer" max="32767" units="dev"/>
+        </inkml:traceFormat>
+        <inkml:channelProperties>
+          <inkml:channelProperty channel="X" name="resolution" value="1000" units="1/cm"/>
+          <inkml:channelProperty channel="Y" name="resolution" value="1000" units="1/cm"/>
+          <inkml:channelProperty channel="F" name="resolution" value="0" units="1/dev"/>
+        </inkml:channelProperties>
+      </inkml:inkSource>
+      <inkml:timestamp xml:id="ts0" timeString="2026-02-09T10:18:16.628"/>
+    </inkml:context>
+    <inkml:brush xml:id="br0">
+      <inkml:brushProperty name="width" value="0.1" units="cm"/>
+      <inkml:brushProperty name="height" value="0.1" units="cm"/>
+      <inkml:brushProperty name="color" value="#004F8B"/>
+    </inkml:brush>
+  </inkml:definitions>
+  <inkml:trace contextRef="#ctx0" brushRef="#br0">1 273 8192,'0'1'524,"1"1"0,-1 0 1,1 0-1,0 0 0,0-1 0,0 1 1,0-1-1,0 1 0,0-1 0,0 1 1,1-1-1,-1 1 0,0-1 1,1 0-1,-1 0 0,1 0 0,0 0 1,-1 0-1,1 0 0,0 0 0,0 0 1,-1-1-1,1 1 0,2 0 1,45 11 4390,-6-6-4915,-1-2 0,82-2 0,87-20 0,-175 14 0,380-54 0,-373 53 0,270-18 0,-237 13 0,-65 7 0,1 1 0,0 0 0,0 1 0,0 0 0,0 1 0,20 2 0,-30-1 0,1 0 0,-1 0 0,0 0 0,0 0 0,0 0 0,0 0 0,-1 0 0,1 1 0,0-1 0,0 0 0,-1 1 0,1 0 0,-1-1 0,1 1 0,-1 0 0,0 0 0,0 0 0,0 0 0,0 0 0,0 0 0,0 0 0,0 0 0,0 3 0,9 63 0,-4-22 0,-5-42 0,1 0 0,0 1 0,0-1 0,0 0 0,1 0 0,-1 0 0,1-1 0,0 1 0,0-1 0,0 1 0,1-1 0,-1 0 0,1 0 0,0 0 0,-1-1 0,1 1 0,1-1 0,-1 0 0,0 0 0,0-1 0,1 1 0,-1-1 0,1 0 0,-1 0 0,1-1 0,0 1 0,-1-1 0,6 0 0,16 0 0,0-1 0,0-1 0,44-9 0,-67 10 0,166-39-5104,10-2-4363,-143 36 7896,52-1 0,132 9 1700,58-2-72,-228-5 858,73-18 1,6-1-61,-115 22-284,0 0 0,0-1 0,-1-1 0,1-1-1,-1 0 1,0 0 0,0-2 0,-1 1-1,0-2 1,0 1 0,0-2 0,-1 1 0,-1-2-1,1 1 1,-1-2 0,-1 1 0,0-1-1,-1-1 1,0 1 0,0-1 0,-1-1-1,-1 1 1,0-1 0,-1 0 0,6-22 0,-5 7-571</inkml:trace>
+</inkml:ink>
+</file>
+
+<file path=ppt/ink/ink142.xml><?xml version="1.0" encoding="utf-8"?>
+<inkml:ink xmlns:inkml="http://www.w3.org/2003/InkML">
+  <inkml:definitions>
+    <inkml:context xml:id="ctx0">
+      <inkml:inkSource xml:id="inkSrc0">
+        <inkml:traceFormat>
+          <inkml:channel name="X" type="integer" min="-2.14748E9" max="2.14748E9" units="cm"/>
+          <inkml:channel name="Y" type="integer" min="-2.14748E9" max="2.14748E9" units="cm"/>
+          <inkml:channel name="F" type="integer" max="32767" units="dev"/>
+        </inkml:traceFormat>
+        <inkml:channelProperties>
+          <inkml:channelProperty channel="X" name="resolution" value="1000" units="1/cm"/>
+          <inkml:channelProperty channel="Y" name="resolution" value="1000" units="1/cm"/>
+          <inkml:channelProperty channel="F" name="resolution" value="0" units="1/dev"/>
+        </inkml:channelProperties>
+      </inkml:inkSource>
+      <inkml:timestamp xml:id="ts0" timeString="2026-02-09T10:18:17.102"/>
+    </inkml:context>
+    <inkml:brush xml:id="br0">
+      <inkml:brushProperty name="width" value="0.1" units="cm"/>
+      <inkml:brushProperty name="height" value="0.1" units="cm"/>
+      <inkml:brushProperty name="color" value="#004F8B"/>
+    </inkml:brush>
+  </inkml:definitions>
+  <inkml:trace contextRef="#ctx0" brushRef="#br0">1 1 8192,'0'0'0</inkml:trace>
+</inkml:ink>
+</file>
+
+<file path=ppt/ink/ink143.xml><?xml version="1.0" encoding="utf-8"?>
+<inkml:ink xmlns:inkml="http://www.w3.org/2003/InkML">
+  <inkml:definitions>
+    <inkml:context xml:id="ctx0">
+      <inkml:inkSource xml:id="inkSrc0">
+        <inkml:traceFormat>
+          <inkml:channel name="X" type="integer" min="-2.14748E9" max="2.14748E9" units="cm"/>
+          <inkml:channel name="Y" type="integer" min="-2.14748E9" max="2.14748E9" units="cm"/>
+          <inkml:channel name="F" type="integer" max="32767" units="dev"/>
+        </inkml:traceFormat>
+        <inkml:channelProperties>
+          <inkml:channelProperty channel="X" name="resolution" value="1000" units="1/cm"/>
+          <inkml:channelProperty channel="Y" name="resolution" value="1000" units="1/cm"/>
+          <inkml:channelProperty channel="F" name="resolution" value="0" units="1/dev"/>
+        </inkml:channelProperties>
+      </inkml:inkSource>
+      <inkml:timestamp xml:id="ts0" timeString="2026-02-09T10:18:17.416"/>
+    </inkml:context>
+    <inkml:brush xml:id="br0">
+      <inkml:brushProperty name="width" value="0.1" units="cm"/>
+      <inkml:brushProperty name="height" value="0.1" units="cm"/>
+      <inkml:brushProperty name="color" value="#004F8B"/>
+    </inkml:brush>
+  </inkml:definitions>
+  <inkml:trace contextRef="#ctx0" brushRef="#br0">21 0 8192,'0'5'0,"0"5"2971,0 6 2877,-5 4 2109,-1 3-6711,1 2-1246,0-3 0</inkml:trace>
+</inkml:ink>
+</file>
+
+<file path=ppt/ink/ink144.xml><?xml version="1.0" encoding="utf-8"?>
+<inkml:ink xmlns:inkml="http://www.w3.org/2003/InkML">
+  <inkml:definitions>
+    <inkml:context xml:id="ctx0">
+      <inkml:inkSource xml:id="inkSrc0">
+        <inkml:traceFormat>
+          <inkml:channel name="X" type="integer" min="-2.14748E9" max="2.14748E9" units="cm"/>
+          <inkml:channel name="Y" type="integer" min="-2.14748E9" max="2.14748E9" units="cm"/>
+          <inkml:channel name="F" type="integer" max="32767" units="dev"/>
+        </inkml:traceFormat>
+        <inkml:channelProperties>
+          <inkml:channelProperty channel="X" name="resolution" value="1000" units="1/cm"/>
+          <inkml:channelProperty channel="Y" name="resolution" value="1000" units="1/cm"/>
+          <inkml:channelProperty channel="F" name="resolution" value="0" units="1/dev"/>
+        </inkml:channelProperties>
+      </inkml:inkSource>
+      <inkml:timestamp xml:id="ts0" timeString="2026-02-09T10:18:18.117"/>
+    </inkml:context>
+    <inkml:brush xml:id="br0">
+      <inkml:brushProperty name="width" value="0.1" units="cm"/>
+      <inkml:brushProperty name="height" value="0.1" units="cm"/>
+      <inkml:brushProperty name="color" value="#004F8B"/>
+    </inkml:brush>
+  </inkml:definitions>
+  <inkml:trace contextRef="#ctx0" brushRef="#br0">1 1 8192,'0'26'4644,"0"11"5585,1-12-7080,-1-23-3149,0 1 0,0-1 0,1 1 0,-1-1 0,1 1 0,-1-1 0,1 1 0,0-1 0,0 0 0,0 1 0,2 2 0,-2-4 0,-1-1 0,0 0 0,1 1 0,-1-1 0,1 1 0,-1-1 0,1 0 0,-1 0 0,1 1 0,-1-1 0,1 0 0,0 0 0,-1 0 0,1 1 0,-1-1 0,1 0 0,-1 0 0,1 0 0,0 0 0,-1 0 0,1 0 0,-1 0 0,1 0 0,0-1 0,-1 1 0,1 0 0,-1 0 0,1 0 0,0-1 0,5-3 0,0 0 0,0-1 0,-1 1 0,0-1 0,0 0 0,6-8 0,2-1 0,-6 6 0,1 1 0,-1 0 0,2 1 0,-1-1 0,1 2 0,0-1 0,16-7 0,-23 12 0,1 0 0,-1 1 0,0-1 0,1 0 0,-1 1 0,0-1 0,1 1 0,-1 0 0,1 0 0,-1 0 0,1 0 0,-1 0 0,1 0 0,-1 1 0,0-1 0,1 1 0,-1 0 0,0 0 0,1 0 0,-1 0 0,0 0 0,0 0 0,0 0 0,0 1 0,0-1 0,0 1 0,0-1 0,-1 1 0,1 0 0,0 0 0,-1 0 0,1 0 0,-1 0 0,0 0 0,0 0 0,0 0 0,0 1 0,1 2 0,2 7 0,-2-1 0,1 1 0,-1-1 0,-1 1 0,0 0 0,0 0 0,-3 20 0,1-15 0,1-1 0,4 31 0,1-26 0</inkml:trace>
+</inkml:ink>
+</file>
+
+<file path=ppt/ink/ink145.xml><?xml version="1.0" encoding="utf-8"?>
+<inkml:ink xmlns:inkml="http://www.w3.org/2003/InkML">
+  <inkml:definitions>
+    <inkml:context xml:id="ctx0">
+      <inkml:inkSource xml:id="inkSrc0">
+        <inkml:traceFormat>
+          <inkml:channel name="X" type="integer" min="-2.14748E9" max="2.14748E9" units="cm"/>
+          <inkml:channel name="Y" type="integer" min="-2.14748E9" max="2.14748E9" units="cm"/>
+          <inkml:channel name="F" type="integer" max="32767" units="dev"/>
+        </inkml:traceFormat>
+        <inkml:channelProperties>
+          <inkml:channelProperty channel="X" name="resolution" value="1000" units="1/cm"/>
+          <inkml:channelProperty channel="Y" name="resolution" value="1000" units="1/cm"/>
+          <inkml:channelProperty channel="F" name="resolution" value="0" units="1/dev"/>
+        </inkml:channelProperties>
+      </inkml:inkSource>
+      <inkml:timestamp xml:id="ts0" timeString="2026-02-09T10:18:19.111"/>
+    </inkml:context>
+    <inkml:brush xml:id="br0">
+      <inkml:brushProperty name="width" value="0.1" units="cm"/>
+      <inkml:brushProperty name="height" value="0.1" units="cm"/>
+      <inkml:brushProperty name="color" value="#004F8B"/>
+    </inkml:brush>
+  </inkml:definitions>
+  <inkml:trace contextRef="#ctx0" brushRef="#br0">117 53 8192,'-6'1'570,"0"0"-1,1 0 1,-1 0 0,1 1 0,-1 0 0,1 0 0,0 0 0,0 1-1,0 0 1,0 0 0,1 0 0,-1 1 0,1-1 0,0 1 0,-1 0 0,2 0-1,-1 1 1,1-1 0,-1 1 0,1 0 0,0 0 0,-3 8 0,5-11-466,-1 1 1,1-1-1,0 1 1,0 0-1,0-1 1,1 1 0,-1 0-1,1 0 1,-1-1-1,1 1 1,0 0-1,0 0 1,0-1 0,0 1-1,1 0 1,-1 0-1,1-1 1,0 1-1,-1 0 1,1-1 0,1 1-1,-1-1 1,0 1-1,0-1 1,1 1 0,0-1-1,-1 0 1,1 0-1,0 0 1,0 0-1,0 0 1,0 0 0,0 0-1,1-1 1,-1 1-1,0-1 1,1 0-1,0 0 1,-1 0 0,1 0-1,-1 0 1,1 0-1,0-1 1,0 1-1,-1-1 1,5 1 0,5 0-105,-1 1 0,1-1 0,-1-1 0,1 0 0,-1-1 0,1 0 0,0-1 0,-1 0 0,0 0 0,1-2 0,-1 1 0,11-6 0,-17 7 0,-1-1 0,1 0 0,0 0 0,-1 0 0,0 0 0,0-1 0,0 0 0,0 0 0,0 0 0,-1 0 0,1 0 0,-1-1 0,-1 1 0,1-1 0,0 0 0,-1 0 0,0 0 0,0 0 0,-1 0 0,1-1 0,-1 1 0,0 0 0,-1-1 0,1 1 0,-1 0 0,0-1 0,-1-6 0,0 9 0,1 0 0,-1 0 0,0 0 0,0 0 0,0 0 0,0 0 0,0 0 0,-1 0 0,1 1 0,-1-1 0,0 1 0,1-1 0,-1 1 0,0-1 0,-1 1 0,1 0 0,0 0 0,-1 0 0,-4-3 0,0 2 0,0-1 0,0 1 0,-1 0 0,1 1 0,0-1 0,-14-1 0,-2 1 0</inkml:trace>
+</inkml:ink>
+</file>
+
+<file path=ppt/ink/ink146.xml><?xml version="1.0" encoding="utf-8"?>
+<inkml:ink xmlns:inkml="http://www.w3.org/2003/InkML">
+  <inkml:definitions>
+    <inkml:context xml:id="ctx0">
+      <inkml:inkSource xml:id="inkSrc0">
+        <inkml:traceFormat>
+          <inkml:channel name="X" type="integer" min="-2.14748E9" max="2.14748E9" units="cm"/>
+          <inkml:channel name="Y" type="integer" min="-2.14748E9" max="2.14748E9" units="cm"/>
+          <inkml:channel name="F" type="integer" max="32767" units="dev"/>
+        </inkml:traceFormat>
+        <inkml:channelProperties>
+          <inkml:channelProperty channel="X" name="resolution" value="1000" units="1/cm"/>
+          <inkml:channelProperty channel="Y" name="resolution" value="1000" units="1/cm"/>
+          <inkml:channelProperty channel="F" name="resolution" value="0" units="1/dev"/>
+        </inkml:channelProperties>
+      </inkml:inkSource>
+      <inkml:timestamp xml:id="ts0" timeString="2026-02-09T10:18:19.891"/>
+    </inkml:context>
+    <inkml:brush xml:id="br0">
+      <inkml:brushProperty name="width" value="0.1" units="cm"/>
+      <inkml:brushProperty name="height" value="0.1" units="cm"/>
+      <inkml:brushProperty name="color" value="#004F8B"/>
+    </inkml:brush>
+  </inkml:definitions>
+  <inkml:trace contextRef="#ctx0" brushRef="#br0">2 135 8192,'0'67'9850,"0"-51"-4180,0-47-3168,-1 7-2524,1 11-108,-1 0 0,2 0 0,0-1 0,0 1 0,5-18 0,-4 28 24,-1-1 0,0 1 0,1 0 0,-1 0 0,1-1 0,0 1 0,0 0 0,1 1 0,-1-1 0,0 0 0,1 1 0,0-1 0,-1 1 0,1 0 1,0 0-1,0 0 0,1 0 0,-1 0 0,0 1 0,0-1 0,1 1 0,-1 0 0,1 0 0,5-1 0,21-1-2952,0 0 0,0 3-1,45 3 1,-11 0 720,-42-3 2338</inkml:trace>
+</inkml:ink>
+</file>
+
+<file path=ppt/ink/ink147.xml><?xml version="1.0" encoding="utf-8"?>
+<inkml:ink xmlns:inkml="http://www.w3.org/2003/InkML">
+  <inkml:definitions>
+    <inkml:context xml:id="ctx0">
+      <inkml:inkSource xml:id="inkSrc0">
+        <inkml:traceFormat>
+          <inkml:channel name="X" type="integer" min="-2.14748E9" max="2.14748E9" units="cm"/>
+          <inkml:channel name="Y" type="integer" min="-2.14748E9" max="2.14748E9" units="cm"/>
+          <inkml:channel name="F" type="integer" max="32767" units="dev"/>
+        </inkml:traceFormat>
+        <inkml:channelProperties>
+          <inkml:channelProperty channel="X" name="resolution" value="1000" units="1/cm"/>
+          <inkml:channelProperty channel="Y" name="resolution" value="1000" units="1/cm"/>
+          <inkml:channelProperty channel="F" name="resolution" value="0" units="1/dev"/>
+        </inkml:channelProperties>
+      </inkml:inkSource>
+      <inkml:timestamp xml:id="ts0" timeString="2026-02-09T10:18:20.933"/>
+    </inkml:context>
+    <inkml:brush xml:id="br0">
+      <inkml:brushProperty name="width" value="0.1" units="cm"/>
+      <inkml:brushProperty name="height" value="0.1" units="cm"/>
+      <inkml:brushProperty name="color" value="#004F8B"/>
+    </inkml:brush>
+  </inkml:definitions>
+  <inkml:trace contextRef="#ctx0" brushRef="#br0">385 1 8192,'0'29'1378,"-4"114"12519,-6-83-11150,-6 20-2747,10-43 0,-13 44 0,19-80-8,0-1 1,0 1-1,0-1 1,0 1 0,-1-1-1,1 1 1,0-1-1,0 1 1,0-1 0,0 1-1,-1-1 1,1 1-1,0-1 1,-1 1 0,1-1-1,0 0 1,-1 1-1,1-1 1,0 0 0,-1 1-1,1-1 1,-1 0-1,1 1 1,-1-1 0,1 0-1,-1 0 1,1 1 0,0-1-1,-1 0 1,0 0-1,1 0 1,-1 0 0,-13-13-558,-10-35-525,21 40 1008,0 1 172,0-1 0,-1 1 0,0 0 0,0 1 0,0-1 0,-1 1 0,0 0 0,0 0 0,-1 0 0,-6-5 0,7 8-14,-1 0 1,0 0-1,0 1 0,1-1 0,-2 1 0,1 1 1,0-1-1,0 1 0,0 0 0,-1 0 0,1 1 0,-13 0 1,13 1-77,0 0 0,0 0 0,0 0 0,0 1 0,1 0 0,-1 0 0,0 0 0,1 1 0,0 0 0,-1 0 0,1 0 0,1 1 0,-1-1 0,0 1 0,1 1 0,0-1 0,-1 0 0,-3 8 0,4-8 0,1 0 0,0 1 0,1-1 0,-1 1 0,1 0 0,0 0 0,0 0 0,0 0 0,1 0 0,-1 1 0,1-1 0,1 0 0,-1 1 0,1-1 0,0 0 0,0 1 0,0-1 0,1 0 0,0 1 0,0-1 0,2 6 0,-2-9 0,0 1 0,1-1 0,-1 0 0,1 0 0,-1 0 0,1 0 0,0 0 0,0-1 0,0 1 0,0 0 0,0-1 0,0 1 0,0-1 0,0 0 0,1 0 0,-1 0 0,0 0 0,1 0 0,-1 0 0,1-1 0,4 2 0,56 0 0,-54-2 0,14-1 0</inkml:trace>
+</inkml:ink>
+</file>
+
+<file path=ppt/ink/ink148.xml><?xml version="1.0" encoding="utf-8"?>
+<inkml:ink xmlns:inkml="http://www.w3.org/2003/InkML">
+  <inkml:definitions>
+    <inkml:context xml:id="ctx0">
+      <inkml:inkSource xml:id="inkSrc0">
+        <inkml:traceFormat>
+          <inkml:channel name="X" type="integer" min="-2.14748E9" max="2.14748E9" units="cm"/>
+          <inkml:channel name="Y" type="integer" min="-2.14748E9" max="2.14748E9" units="cm"/>
+          <inkml:channel name="F" type="integer" max="32767" units="dev"/>
+        </inkml:traceFormat>
+        <inkml:channelProperties>
+          <inkml:channelProperty channel="X" name="resolution" value="1000" units="1/cm"/>
+          <inkml:channelProperty channel="Y" name="resolution" value="1000" units="1/cm"/>
+          <inkml:channelProperty channel="F" name="resolution" value="0" units="1/dev"/>
+        </inkml:channelProperties>
+      </inkml:inkSource>
+      <inkml:timestamp xml:id="ts0" timeString="2026-02-09T10:18:22.134"/>
+    </inkml:context>
+    <inkml:brush xml:id="br0">
+      <inkml:brushProperty name="width" value="0.1" units="cm"/>
+      <inkml:brushProperty name="height" value="0.1" units="cm"/>
+      <inkml:brushProperty name="color" value="#004F8B"/>
+    </inkml:brush>
+  </inkml:definitions>
+  <inkml:trace contextRef="#ctx0" brushRef="#br0">78 231 8192,'26'-16'16513,"-21"11"-15004,8-6-1509,0-1 0,-1-1 0,-1 0 0,12-16 0,-20 25 0,-1 0 0,1 0 0,-1-1 0,1 1 0,-1-1 0,0 0 0,-1 1 0,1-1 0,-1 0 0,0 0 0,0 0 0,-1 0 0,1 0 0,-1 0 0,0 0 0,0 0 0,-1 0 0,-2-9 0,3 12 0,-1 0 0,1 1 0,-1-1 0,1 0 0,-1 1 0,0-1 0,0 0 0,0 1 0,0-1 0,0 1 0,-1 0 0,1-1 0,0 1 0,-1 0 0,1 0 0,0-1 0,-1 1 0,0 0 0,1 1 0,-1-1 0,0 0 0,1 0 0,-3 0 0,0 1 0,1-1 0,-1 1 0,1 0 0,0 0 0,-1 1 0,1-1 0,0 1 0,0 0 0,-1 0 0,1 0 0,0 0 0,-3 2 0,-3 1 0,0 1 0,1 0 0,0 0 0,0 1 0,0 0 0,1 1 0,0 0 0,-7 8 0,-8 24-1875,17-27 448,0 0 0,1 1-1,1-1 1,-2 14 0,4-16 237,0-1 1,0 1-1,1-1 1,1 1-1,2 18 1,-2-23 921,1 0 1,-1 0-1,1 0 0,0 0 0,0 0 1,5 7-1,-4-8 268,0-1 0,0 0 0,0 0 0,1-1 0,-1 1 0,1-1 0,-1 1 0,1-1 0,0 0 0,0 0 0,0-1 0,0 1 0,0-1 0,0 0 0,0 0 0,0 0 0,1-1 0,3 1 0,15 0 0,-1-1 0,30-4 0,-14 2 0,-11 2 3259,23-2 9296,-30-2-10347,-3-2-2208</inkml:trace>
+</inkml:ink>
+</file>
+
+<file path=ppt/ink/ink149.xml><?xml version="1.0" encoding="utf-8"?>
+<inkml:ink xmlns:inkml="http://www.w3.org/2003/InkML">
+  <inkml:definitions>
+    <inkml:context xml:id="ctx0">
+      <inkml:inkSource xml:id="inkSrc0">
+        <inkml:traceFormat>
+          <inkml:channel name="X" type="integer" min="-2.14748E9" max="2.14748E9" units="cm"/>
+          <inkml:channel name="Y" type="integer" min="-2.14748E9" max="2.14748E9" units="cm"/>
+          <inkml:channel name="F" type="integer" max="32767" units="dev"/>
+        </inkml:traceFormat>
+        <inkml:channelProperties>
+          <inkml:channelProperty channel="X" name="resolution" value="1000" units="1/cm"/>
+          <inkml:channelProperty channel="Y" name="resolution" value="1000" units="1/cm"/>
+          <inkml:channelProperty channel="F" name="resolution" value="0" units="1/dev"/>
+        </inkml:channelProperties>
+      </inkml:inkSource>
+      <inkml:timestamp xml:id="ts0" timeString="2026-02-09T10:18:22.802"/>
+    </inkml:context>
+    <inkml:brush xml:id="br0">
+      <inkml:brushProperty name="width" value="0.1" units="cm"/>
+      <inkml:brushProperty name="height" value="0.1" units="cm"/>
+      <inkml:brushProperty name="color" value="#004F8B"/>
+    </inkml:brush>
+  </inkml:definitions>
+  <inkml:trace contextRef="#ctx0" brushRef="#br0">2 84 8192,'0'35'15373,"0"-19"-12724,-1 26-2571,0-2-52,14-79-690,-11 26-1292,2 0 0,0 0-1,0 0 1,2 1 0,-1 0 0,1-1-1,14-19 1,-16 27 1670,1 0-1,-1 1 1,1-1-1,0 1 1,0 0-1,0 0 1,10-5-1,15-3 3688,7 8 4236,-11 4-1652,-1 1-4506,-2 1-1479</inkml:trace>
+</inkml:ink>
+</file>
+
 <file path=ppt/ink/ink15.xml><?xml version="1.0" encoding="utf-8"?>
 <inkml:ink xmlns:inkml="http://www.w3.org/2003/InkML">
   <inkml:definitions>
@@ -1410,6 +1669,286 @@
 </inkml:ink>
 </file>
 
+<file path=ppt/ink/ink150.xml><?xml version="1.0" encoding="utf-8"?>
+<inkml:ink xmlns:inkml="http://www.w3.org/2003/InkML">
+  <inkml:definitions>
+    <inkml:context xml:id="ctx0">
+      <inkml:inkSource xml:id="inkSrc0">
+        <inkml:traceFormat>
+          <inkml:channel name="X" type="integer" min="-2.14748E9" max="2.14748E9" units="cm"/>
+          <inkml:channel name="Y" type="integer" min="-2.14748E9" max="2.14748E9" units="cm"/>
+          <inkml:channel name="F" type="integer" max="32767" units="dev"/>
+        </inkml:traceFormat>
+        <inkml:channelProperties>
+          <inkml:channelProperty channel="X" name="resolution" value="1000" units="1/cm"/>
+          <inkml:channelProperty channel="Y" name="resolution" value="1000" units="1/cm"/>
+          <inkml:channelProperty channel="F" name="resolution" value="0" units="1/dev"/>
+        </inkml:channelProperties>
+      </inkml:inkSource>
+      <inkml:timestamp xml:id="ts0" timeString="2026-02-09T10:18:23.734"/>
+    </inkml:context>
+    <inkml:brush xml:id="br0">
+      <inkml:brushProperty name="width" value="0.1" units="cm"/>
+      <inkml:brushProperty name="height" value="0.1" units="cm"/>
+      <inkml:brushProperty name="color" value="#004F8B"/>
+    </inkml:brush>
+  </inkml:definitions>
+  <inkml:trace contextRef="#ctx0" brushRef="#br0">129 1 8192,'-14'0'3651,"5"-1"-2203,-1 1 0,0 1 0,1-1 0,-1 2 0,0-1-1,-12 5 1,20-6-1315,0 1-1,0 0 0,0 1 1,0-1-1,0 0 0,0 1 1,0-1-1,0 1 0,1-1 1,-1 1-1,1 0 1,-1 0-1,1 0 0,0 0 1,-1 0-1,1 0 0,0 0 1,0 0-1,1 0 0,-1 0 1,0 1-1,1-1 0,-1 0 1,1 1-1,0-1 0,0 0 1,0 1-1,0-1 1,0 0-1,0 1 0,2 3 1,0 2-133,0 0 0,1 0 0,0 0 0,0-1 0,1 1 0,0-1 0,0 0 0,1 0 0,0-1 0,0 1 0,1-1 0,0 0 0,0-1 0,0 1 0,14 8 0,11 7 0,1-1 0,35 16 0,-66-35 0,18 7 0,38 23 0,-55-30 0,0 1 0,1-1 0,-1 1 0,0 0 0,0 0 0,0-1 0,-1 1 0,1 1 0,0-1 0,-1 0 0,1 0 0,-1 1 0,0-1 0,0 0 0,0 1 0,0-1 0,0 1 0,0 0 0,0 2 0,-2-3-22,1-1 0,-1 1 0,1-1 0,-1 1 0,0-1 1,0 0-1,1 1 0,-1-1 0,0 0 0,0 1 0,0-1 0,0 0 1,-1 0-1,1 0 0,0 0 0,0 0 0,-1 0 0,1 0 1,-1-1-1,1 1 0,0 0 0,-1-1 0,1 1 0,-1-1 0,-3 1 1,-46 10-2318,43-9 1450,-144 16-13135,125-12 13822</inkml:trace>
+</inkml:ink>
+</file>
+
+<file path=ppt/ink/ink151.xml><?xml version="1.0" encoding="utf-8"?>
+<inkml:ink xmlns:inkml="http://www.w3.org/2003/InkML">
+  <inkml:definitions>
+    <inkml:context xml:id="ctx0">
+      <inkml:inkSource xml:id="inkSrc0">
+        <inkml:traceFormat>
+          <inkml:channel name="X" type="integer" min="-2.14748E9" max="2.14748E9" units="cm"/>
+          <inkml:channel name="Y" type="integer" min="-2.14748E9" max="2.14748E9" units="cm"/>
+          <inkml:channel name="F" type="integer" max="32767" units="dev"/>
+        </inkml:traceFormat>
+        <inkml:channelProperties>
+          <inkml:channelProperty channel="X" name="resolution" value="1000" units="1/cm"/>
+          <inkml:channelProperty channel="Y" name="resolution" value="1000" units="1/cm"/>
+          <inkml:channelProperty channel="F" name="resolution" value="0" units="1/dev"/>
+        </inkml:channelProperties>
+      </inkml:inkSource>
+      <inkml:timestamp xml:id="ts0" timeString="2026-02-09T10:18:26.591"/>
+    </inkml:context>
+    <inkml:brush xml:id="br0">
+      <inkml:brushProperty name="width" value="0.1" units="cm"/>
+      <inkml:brushProperty name="height" value="0.1" units="cm"/>
+      <inkml:brushProperty name="color" value="#004F8B"/>
+    </inkml:brush>
+  </inkml:definitions>
+  <inkml:trace contextRef="#ctx0" brushRef="#br0">645 1 8192,'0'5'469,"-1"0"1,1 1 0,-1-1 0,-1 0-1,1 1 1,-1-1 0,0 0 0,0 0-1,0-1 1,-1 1 0,0 0 0,0-1-1,0 1 1,0-1 0,-8 7-1,-5 4 2562,-1 0-1,-29 19 0,11-9-1614,-45 39-1416,-70 53 0,131-105 0,1-1 0,-1-1 0,-1 0 0,0-1 0,0-1 0,-31 7 0,48-14 0,-1 0 0,1 0 0,-1-1 0,0 1 0,1-1 0,-1 0 0,0 0 0,1 0 0,-1 0 0,0-1 0,1 0 0,-1 1 0,1-1 0,-1 0 0,1-1 0,-1 1 0,-3-3 0,5 2 0,0 0 0,-1-1 0,1 1 0,0-1 0,1 1 0,-1-1 0,0 0 0,1 0 0,-1 0 0,1 0 0,0 0 0,0 0 0,0 0 0,1 0 0,-1-1 0,1 1 0,0 0 0,-1 0 0,2-6 0,-1-7 0,-2-5 0,2-1 0,0 1 0,2 0 0,0 0 0,1 0 0,10-33 0,-11 51 0,0 0 0,0 0 0,1-1 0,-1 1 0,1 1 0,0-1 0,0 0 0,0 1 0,0 0 0,0-1 0,1 1 0,-1 0 0,1 1 0,-1-1 0,1 1 0,0-1 0,0 1 0,-1 0 0,1 1 0,0-1 0,0 1 0,0-1 0,0 1 0,4 1 0,10-2 0,0 2 0,0 1 0,34 6 0,-46-7-246,-1 1 1,0-1 0,0 1 0,-1 0-1,1 0 1,0 1 0,0-1 0,-1 1 0,0 0-1,1 0 1,-1 1 0,0-1 0,-1 1 0,1 0-1,4 6 1,-1 1-1320,0 1 0,-1 1 0,-1-1 0,7 18 0,-9-18 868,1-1 0,0-1 0,1 1 0,0-1 0,1 1 0,0-2 0,1 1 0,9 11 0,-15-20 699,23 22 2705,-18-18-1024,0 0-1,0 0 1,0 0-1,1-1 0,0 1 1,0-2-1,8 4 1,12 0 170,-7-4-1853</inkml:trace>
+</inkml:ink>
+</file>
+
+<file path=ppt/ink/ink152.xml><?xml version="1.0" encoding="utf-8"?>
+<inkml:ink xmlns:inkml="http://www.w3.org/2003/InkML">
+  <inkml:definitions>
+    <inkml:context xml:id="ctx0">
+      <inkml:inkSource xml:id="inkSrc0">
+        <inkml:traceFormat>
+          <inkml:channel name="X" type="integer" min="-2.14748E9" max="2.14748E9" units="cm"/>
+          <inkml:channel name="Y" type="integer" min="-2.14748E9" max="2.14748E9" units="cm"/>
+          <inkml:channel name="F" type="integer" max="32767" units="dev"/>
+        </inkml:traceFormat>
+        <inkml:channelProperties>
+          <inkml:channelProperty channel="X" name="resolution" value="1000" units="1/cm"/>
+          <inkml:channelProperty channel="Y" name="resolution" value="1000" units="1/cm"/>
+          <inkml:channelProperty channel="F" name="resolution" value="0" units="1/dev"/>
+        </inkml:channelProperties>
+      </inkml:inkSource>
+      <inkml:timestamp xml:id="ts0" timeString="2026-02-09T10:18:27.446"/>
+    </inkml:context>
+    <inkml:brush xml:id="br0">
+      <inkml:brushProperty name="width" value="0.1" units="cm"/>
+      <inkml:brushProperty name="height" value="0.1" units="cm"/>
+      <inkml:brushProperty name="color" value="#004F8B"/>
+    </inkml:brush>
+  </inkml:definitions>
+  <inkml:trace contextRef="#ctx0" brushRef="#br0">1 1 8192,'0'20'4369,"0"1"0,7 37 0,-5-50-3878,0 0 1,1 0-1,0 0 1,0 0-1,1-1 1,0 1-1,0-1 1,1 0-1,9 11 1,7 3-492,0-1 0,2-1 0,0-1 0,1-1 0,1-1 0,0-1 0,45 18 0,-11-3 0,-54-27 0,1 1 0,-1 0 0,0 0 0,0 0 0,0 1 0,0-1 0,-1 1 0,1 0 0,-2 1 0,1-1 0,0 1 0,-1 0 0,0 0 0,4 11 0,-6-15 0,-1 0 0,1 1 0,0-1 0,-1 0 0,0 1 0,0-1 0,1 1 0,-1-1 0,-1 0 0,1 1 0,0-1 0,0 0 0,-1 1 0,0-1 0,1 0 0,-1 1 0,0-1 0,0 0 0,0 0 0,0 0 0,-1 0 0,1 0 0,0 0 0,-1 0 0,0 0 0,1-1 0,-1 1 0,0 0 0,0-1 0,0 0 0,0 1 0,0-1 0,0 0 0,0 0 0,0 0 0,-1 0 0,1-1 0,0 1 0,0 0 0,-1-1 0,1 0 0,-5 1 0,-21-1 0,28-1 0,0 1 0,-1 0 0,1 0 0,0-1 0,0 1 0,0 0 0,-1 0 0,1-1 0,0 1 0,0 0 0,0 0 0,0-1 0,-1 1 0,1 0 0,0-1 0,0 1 0,0 0 0,0-1 0,0 1 0,0 0 0,0-1 0,0 1 0,0 0 0,0-1 0,0 1 0,0 0 0,0-1 0,0 1 0,0 0 0,1-1 0,-1 1 0,0 0 0,0 0 0,0-1 0,0 1 0,1 0 0,-1-1 0,0 1 0,0 0 0,3-4 0,1 0 0,-1 1 0,0-1 0,1 1 0,0 0 0,0 0 0,0 1 0,6-4 0,20-8 0</inkml:trace>
+</inkml:ink>
+</file>
+
+<file path=ppt/ink/ink153.xml><?xml version="1.0" encoding="utf-8"?>
+<inkml:ink xmlns:inkml="http://www.w3.org/2003/InkML">
+  <inkml:definitions>
+    <inkml:context xml:id="ctx0">
+      <inkml:inkSource xml:id="inkSrc0">
+        <inkml:traceFormat>
+          <inkml:channel name="X" type="integer" min="-2.14748E9" max="2.14748E9" units="cm"/>
+          <inkml:channel name="Y" type="integer" min="-2.14748E9" max="2.14748E9" units="cm"/>
+          <inkml:channel name="F" type="integer" max="32767" units="dev"/>
+        </inkml:traceFormat>
+        <inkml:channelProperties>
+          <inkml:channelProperty channel="X" name="resolution" value="1000" units="1/cm"/>
+          <inkml:channelProperty channel="Y" name="resolution" value="1000" units="1/cm"/>
+          <inkml:channelProperty channel="F" name="resolution" value="0" units="1/dev"/>
+        </inkml:channelProperties>
+      </inkml:inkSource>
+      <inkml:timestamp xml:id="ts0" timeString="2026-02-09T10:18:28.210"/>
+    </inkml:context>
+    <inkml:brush xml:id="br0">
+      <inkml:brushProperty name="width" value="0.1" units="cm"/>
+      <inkml:brushProperty name="height" value="0.1" units="cm"/>
+      <inkml:brushProperty name="color" value="#004F8B"/>
+    </inkml:brush>
+  </inkml:definitions>
+  <inkml:trace contextRef="#ctx0" brushRef="#br0">107 20 8192,'0'-1'336,"0"0"0,-1 0 0,1 0 0,0 1 0,0-1 0,-1 0 0,-5-8 3361,5 9-3361,0-1 0,0 0 0,0 1 0,1-1 0,-1 1 0,0 0 1,0-1-1,0 1 0,0 0 0,0 0 0,0-1 0,0 1 0,0 0 0,0 0 0,0 0 0,0 0 0,0 0 0,0 0 0,0 1 0,-2-1 1,1 0 41,-1 1 0,0-1 0,0 1 0,0-1 0,0 1 0,1 0 0,-1 0 0,0 0 0,1 1 0,-1-1 0,1 0 1,-4 4-1,1 1-378,1 0 0,0 1 0,0 0 0,1-1 0,0 1 0,0 1 0,1-1 0,0 0 0,0 1 0,1-1 0,-2 12 0,1 4 0,1 0 0,3 35 0,-2-55-21,0-1 1,0 1-1,0 0 1,1-1-1,-1 1 1,1 0-1,0-1 1,-1 1-1,1-1 1,0 1-1,1-1 1,-1 1-1,0-1 1,1 0-1,-1 0 0,1 0 1,0 1-1,-1-2 1,5 5-1,-4-5-33,0-1-1,0 1 0,0 0 1,1-1-1,-1 1 0,0-1 1,0 0-1,0 0 0,1 0 0,-1 0 1,0 0-1,0 0 0,0 0 1,1-1-1,-1 1 0,0-1 1,0 0-1,4-1 0,6-5-415,0 0 0,0 0 0,0-1 0,-1-1 0,20-18 0,-1-4-5462,12-12 3811,-36 38 3337,0 0 0,0 0 1,1 0-1,-1 1 0,9-4 0,-14 8-988,0-1 0,1 1 0,-1-1 0,0 1 0,0 0 0,0 0 0,0-1 0,0 1 0,0 0 0,0 0 0,1 0 0,-1 0 0,0 1-1,0-1 1,0 0 0,0 0 0,0 1 0,0-1 0,1 1 0,16 16-1010,3 33-5770,-19-43 6000,15 49-2213,-8-25 464,1 0-1,24 50 1,-34-78 2301,1-1 0,0-1 0,1 1 0,-1 0 0,0 0 0,1 0 0,-1 0 0,1-1 0,-1 1 0,1-1 0,0 1 0,-1-1 0,1 0 0,0 0 0,0 0 0,0 0 0,0 0 0,0 0 0,0 0 0,0 0 0,4 0 0,-5-2 0,1 1 0,0 0 0,0-1 0,-1 1 0,1-1 0,-1 1 0,1-1 0,0 0 0,-1 0 0,1 1 0,-1-1 0,1 0 0,-1-1 0,0 1 0,0 0 0,1 0 0,-1 0 0,0-1 0,0 1 0,0-1 0,0 1 0,0-1 0,-1 1 0,1-1 0,0 0 0,-1 1 0,1-3 0,9-28 0,-1-2 0,7-56 0,-13 73 0,4-31 0</inkml:trace>
+</inkml:ink>
+</file>
+
+<file path=ppt/ink/ink154.xml><?xml version="1.0" encoding="utf-8"?>
+<inkml:ink xmlns:inkml="http://www.w3.org/2003/InkML">
+  <inkml:definitions>
+    <inkml:context xml:id="ctx0">
+      <inkml:inkSource xml:id="inkSrc0">
+        <inkml:traceFormat>
+          <inkml:channel name="X" type="integer" min="-2.14748E9" max="2.14748E9" units="cm"/>
+          <inkml:channel name="Y" type="integer" min="-2.14748E9" max="2.14748E9" units="cm"/>
+          <inkml:channel name="F" type="integer" max="32767" units="dev"/>
+        </inkml:traceFormat>
+        <inkml:channelProperties>
+          <inkml:channelProperty channel="X" name="resolution" value="1000" units="1/cm"/>
+          <inkml:channelProperty channel="Y" name="resolution" value="1000" units="1/cm"/>
+          <inkml:channelProperty channel="F" name="resolution" value="0" units="1/dev"/>
+        </inkml:channelProperties>
+      </inkml:inkSource>
+      <inkml:timestamp xml:id="ts0" timeString="2026-02-09T10:18:28.468"/>
+    </inkml:context>
+    <inkml:brush xml:id="br0">
+      <inkml:brushProperty name="width" value="0.1" units="cm"/>
+      <inkml:brushProperty name="height" value="0.1" units="cm"/>
+      <inkml:brushProperty name="color" value="#004F8B"/>
+    </inkml:brush>
+  </inkml:definitions>
+  <inkml:trace contextRef="#ctx0" brushRef="#br0">1 1 8192,'0'9'11332,"0"6"-11332,0 15 0,0 10 6690,0 12-6690,0 5 0,0 2 0,0-1 0,0 7 0,0-2 0,0-5 0,0-7 0,0-8 0,4-11 0,6-11 0,27-14 0,8-8 0</inkml:trace>
+</inkml:ink>
+</file>
+
+<file path=ppt/ink/ink155.xml><?xml version="1.0" encoding="utf-8"?>
+<inkml:ink xmlns:inkml="http://www.w3.org/2003/InkML">
+  <inkml:definitions>
+    <inkml:context xml:id="ctx0">
+      <inkml:inkSource xml:id="inkSrc0">
+        <inkml:traceFormat>
+          <inkml:channel name="X" type="integer" min="-2.14748E9" max="2.14748E9" units="cm"/>
+          <inkml:channel name="Y" type="integer" min="-2.14748E9" max="2.14748E9" units="cm"/>
+          <inkml:channel name="F" type="integer" max="32767" units="dev"/>
+        </inkml:traceFormat>
+        <inkml:channelProperties>
+          <inkml:channelProperty channel="X" name="resolution" value="1000" units="1/cm"/>
+          <inkml:channelProperty channel="Y" name="resolution" value="1000" units="1/cm"/>
+          <inkml:channelProperty channel="F" name="resolution" value="0" units="1/dev"/>
+        </inkml:channelProperties>
+      </inkml:inkSource>
+      <inkml:timestamp xml:id="ts0" timeString="2026-02-09T10:18:29.187"/>
+    </inkml:context>
+    <inkml:brush xml:id="br0">
+      <inkml:brushProperty name="width" value="0.1" units="cm"/>
+      <inkml:brushProperty name="height" value="0.1" units="cm"/>
+      <inkml:brushProperty name="color" value="#004F8B"/>
+    </inkml:brush>
+  </inkml:definitions>
+  <inkml:trace contextRef="#ctx0" brushRef="#br0">32 269 8192,'33'8'5600,"-1"-1"3973,-9-15-6724,-13 0-2834,-1 1 1,0-1-1,-1-1 1,1 1-1,-2-2 1,1 1-1,-1-1 1,8-15-1,-4 4-189,0 0-1,-2 0 0,11-34 0,-19 51-1101,0 0 0,-1 0-1,1 0 1,-1 0 0,1 0 0,-1 0-1,-1 0 1,1-1 0,0 1-1,-2-5 1,2 8 1188,-1 0 0,1 0-1,-1 0 1,1 1 0,0-1 0,-1 0-1,1 0 1,-1 0 0,0 0-1,1 1 1,-1-1 0,0 0 0,1 1-1,-1-1 1,0 0 0,0 1 0,0-1-1,-30 5 13832,15 5-13325,0 1 0,1 0 0,0 1 0,1 1 0,0 1 0,1 0 0,-23 28 0,26-27-797,0 0 0,1 1 0,-10 23 0,14-26-826,1-1 0,0 0 1,1 1-1,0-1 0,-1 20 1,3-26 1070,1 0 0,0 0 0,0 0 0,0 1 0,1-1 1,-1 0-1,2 0 0,-1 0 0,0 0 0,1 0 0,0 0 0,0 0 1,0 0-1,1-1 0,-1 1 0,6 5 0,-3-5-160,0 0-1,0 0 1,1-1-1,0 1 1,0-1-1,0-1 1,0 1-1,0-1 1,1 0-1,12 3 1,10 1-629,1-1 0,1-2 0,-1-1-1,48-2 1,-63-1 877,34 2-236,68-3 189,-105 0 938,1-1-1,-1 0 1,35-14 7651,-37 9-4656,-8 5-3593,-1 0 0,1 0 1,0 0-1,-1 0 0,1 0 1,-1 0-1,0-1 0,0 1 0,0-1 1,0 1-1,1-4 0,1-12 313</inkml:trace>
+</inkml:ink>
+</file>
+
+<file path=ppt/ink/ink156.xml><?xml version="1.0" encoding="utf-8"?>
+<inkml:ink xmlns:inkml="http://www.w3.org/2003/InkML">
+  <inkml:definitions>
+    <inkml:context xml:id="ctx0">
+      <inkml:inkSource xml:id="inkSrc0">
+        <inkml:traceFormat>
+          <inkml:channel name="X" type="integer" min="-2.14748E9" max="2.14748E9" units="cm"/>
+          <inkml:channel name="Y" type="integer" min="-2.14748E9" max="2.14748E9" units="cm"/>
+          <inkml:channel name="F" type="integer" max="32767" units="dev"/>
+        </inkml:traceFormat>
+        <inkml:channelProperties>
+          <inkml:channelProperty channel="X" name="resolution" value="1000" units="1/cm"/>
+          <inkml:channelProperty channel="Y" name="resolution" value="1000" units="1/cm"/>
+          <inkml:channelProperty channel="F" name="resolution" value="0" units="1/dev"/>
+        </inkml:channelProperties>
+      </inkml:inkSource>
+      <inkml:timestamp xml:id="ts0" timeString="2026-02-09T10:18:30.176"/>
+    </inkml:context>
+    <inkml:brush xml:id="br0">
+      <inkml:brushProperty name="width" value="0.1" units="cm"/>
+      <inkml:brushProperty name="height" value="0.1" units="cm"/>
+      <inkml:brushProperty name="color" value="#004F8B"/>
+    </inkml:brush>
+  </inkml:definitions>
+  <inkml:trace contextRef="#ctx0" brushRef="#br0">131 51 8192,'-9'-18'15575,"6"15"-14277,0 0-149,1 1-1149,1 0 0,0 0 0,-1 0 0,1 0 0,-1 1 0,0-1 0,0 1 0,1-1 0,-1 1 0,0-1 0,0 1 0,0 0 0,-1 0 0,1 0 0,0 0 0,0 1 0,0-1 0,-1 1 0,1-1 0,0 1 0,-1 0 0,1 0 0,0 0 0,-1 0 0,1 0 0,0 0 0,-1 1 0,1-1 0,0 1 0,-3 0 0,2 2 0,-1-1 0,1 0 0,0 1 0,0 0 0,0 0 0,1-1 0,-1 2 0,1-1 0,0 0 0,-1 0 0,2 1 0,-1-1 0,0 1 0,1 0 0,-1 0 0,1-1 0,-1 8 0,0-2 0,0 0 0,0 0 0,1 1 0,1-1 0,0 0 0,0 1 0,1-1 0,2 12 0,-2-16 0,0 0 0,1 0 0,0 1 0,0-2 0,1 1 0,-1 0 0,1 0 0,0-1 0,0 1 0,1-1 0,-1 0 0,1 0 0,0-1 0,0 1 0,6 4 0,27 15 0,0-1 0,59 25 0,-94-46 0,18 8 0,0 1 0,26 18 0,-44-26 0,1-1 0,0 1 0,0 0 0,-1 0 0,1 0 0,-1 0 0,0 0 0,1 0 0,-1 1 0,0-1 0,0 1 0,-1 0 0,1-1 0,0 1 0,-1 0 0,0 0 0,0 0 0,0 0 0,0 0 0,0 0 0,0 1 0,-1-1 0,0 0 0,0 0 0,1 0 0,-2 4 0,0-5 0,0 0 0,0 0 0,-1 1 0,1-2 0,-1 1 0,0 0 0,1 0 0,-1 0 0,0-1 0,0 1 0,0-1 0,0 0 0,0 1 0,0-1 0,-1 0 0,1 0 0,0 0 0,0-1 0,-1 1 0,1 0 0,-1-1 0,1 0 0,-5 1 0,-65 1 0,57-3 0,-44 0 0,35 0 0</inkml:trace>
+</inkml:ink>
+</file>
+
+<file path=ppt/ink/ink157.xml><?xml version="1.0" encoding="utf-8"?>
+<inkml:ink xmlns:inkml="http://www.w3.org/2003/InkML">
+  <inkml:definitions>
+    <inkml:context xml:id="ctx0">
+      <inkml:inkSource xml:id="inkSrc0">
+        <inkml:traceFormat>
+          <inkml:channel name="X" type="integer" min="-2.14748E9" max="2.14748E9" units="cm"/>
+          <inkml:channel name="Y" type="integer" min="-2.14748E9" max="2.14748E9" units="cm"/>
+          <inkml:channel name="F" type="integer" max="32767" units="dev"/>
+        </inkml:traceFormat>
+        <inkml:channelProperties>
+          <inkml:channelProperty channel="X" name="resolution" value="1000" units="1/cm"/>
+          <inkml:channelProperty channel="Y" name="resolution" value="1000" units="1/cm"/>
+          <inkml:channelProperty channel="F" name="resolution" value="0" units="1/dev"/>
+        </inkml:channelProperties>
+      </inkml:inkSource>
+      <inkml:timestamp xml:id="ts0" timeString="2026-02-09T10:18:08.160"/>
+    </inkml:context>
+    <inkml:brush xml:id="br0">
+      <inkml:brushProperty name="width" value="0.1" units="cm"/>
+      <inkml:brushProperty name="height" value="0.1" units="cm"/>
+      <inkml:brushProperty name="color" value="#004F8B"/>
+    </inkml:brush>
+  </inkml:definitions>
+  <inkml:trace contextRef="#ctx0" brushRef="#br0">0 738 8192,'1'-5'812,"0"-1"1,0 1 0,1-1 0,0 1-1,0 0 1,0 0 0,0 0-1,1 0 1,0 0 0,0 0-1,0 1 1,0-1 0,1 1-1,0 0 1,8-7 0,9-7 1695,43-29 0,-63 46-2505,69-43-1688,2 3-1,2 4 1,141-52 0,253-42-7044,280-12 6177,-526 113 2552,84-15 0,-252 35 5185,57-5-1,-79 14 2469</inkml:trace>
+</inkml:ink>
+</file>
+
+<file path=ppt/ink/ink158.xml><?xml version="1.0" encoding="utf-8"?>
+<inkml:ink xmlns:inkml="http://www.w3.org/2003/InkML">
+  <inkml:definitions>
+    <inkml:context xml:id="ctx0">
+      <inkml:inkSource xml:id="inkSrc0">
+        <inkml:traceFormat>
+          <inkml:channel name="X" type="integer" min="-2.14748E9" max="2.14748E9" units="cm"/>
+          <inkml:channel name="Y" type="integer" min="-2.14748E9" max="2.14748E9" units="cm"/>
+          <inkml:channel name="F" type="integer" max="32767" units="dev"/>
+        </inkml:traceFormat>
+        <inkml:channelProperties>
+          <inkml:channelProperty channel="X" name="resolution" value="1000" units="1/cm"/>
+          <inkml:channelProperty channel="Y" name="resolution" value="1000" units="1/cm"/>
+          <inkml:channelProperty channel="F" name="resolution" value="0" units="1/dev"/>
+        </inkml:channelProperties>
+      </inkml:inkSource>
+      <inkml:timestamp xml:id="ts0" timeString="2026-02-09T10:18:08.704"/>
+    </inkml:context>
+    <inkml:brush xml:id="br0">
+      <inkml:brushProperty name="width" value="0.1" units="cm"/>
+      <inkml:brushProperty name="height" value="0.1" units="cm"/>
+      <inkml:brushProperty name="color" value="#004F8B"/>
+    </inkml:brush>
+  </inkml:definitions>
+  <inkml:trace contextRef="#ctx0" brushRef="#br0">0 1 8192,'27'18'14427,"-11"-10"-11542,-8-4-2175,402 220-710,-401-218 0,-1 0 0,0 1 0,0-1 0,0 1 0,-1 1 0,0 0 0,0 0 0,-1 0 0,0 1 0,9 16 0,-13-21 0,0 0 0,-1 0 0,1 0 0,-1 1 0,0-1 0,0 1 0,0-1 0,-1 1 0,1-1 0,-1 1 0,0-1 0,0 1 0,-1-1 0,1 1 0,-1-1 0,0 1 0,-1-1 0,1 1 0,-1-1 0,1 0 0,-1 0 0,-1 0 0,1 0 0,0 0 0,-1 0 0,-5 5 0,-6 4-622,0-1 1,0 0-1,-30 17 1,32-22-268,-1 1 0,1 0 1,0 1-1,1 1 0,0 0 0,1 0 1,-13 16-1,21-22-163,0-2 618,0 1 0,0-1 1,1 0-1,-1 1 0,1-1 0,-1 1 1,1 0-1,0-1 0,0 1 0,0 0 0,0 0 1,1 0-1,-1 0 0,1 0 0,0-1 1,0 6-1,5 7 434</inkml:trace>
+</inkml:ink>
+</file>
+
+<file path=ppt/ink/ink159.xml><?xml version="1.0" encoding="utf-8"?>
+<inkml:ink xmlns:inkml="http://www.w3.org/2003/InkML">
+  <inkml:definitions>
+    <inkml:context xml:id="ctx0">
+      <inkml:inkSource xml:id="inkSrc0">
+        <inkml:traceFormat>
+          <inkml:channel name="X" type="integer" min="-2.14748E9" max="2.14748E9" units="cm"/>
+          <inkml:channel name="Y" type="integer" min="-2.14748E9" max="2.14748E9" units="cm"/>
+          <inkml:channel name="F" type="integer" max="32767" units="dev"/>
+        </inkml:traceFormat>
+        <inkml:channelProperties>
+          <inkml:channelProperty channel="X" name="resolution" value="1000" units="1/cm"/>
+          <inkml:channelProperty channel="Y" name="resolution" value="1000" units="1/cm"/>
+          <inkml:channelProperty channel="F" name="resolution" value="0" units="1/dev"/>
+        </inkml:channelProperties>
+      </inkml:inkSource>
+      <inkml:timestamp xml:id="ts0" timeString="2026-02-09T10:18:09.726"/>
+    </inkml:context>
+    <inkml:brush xml:id="br0">
+      <inkml:brushProperty name="width" value="0.1" units="cm"/>
+      <inkml:brushProperty name="height" value="0.1" units="cm"/>
+      <inkml:brushProperty name="color" value="#004F8B"/>
+    </inkml:brush>
+  </inkml:definitions>
+  <inkml:trace contextRef="#ctx0" brushRef="#br0">546 128 8192,'-34'-31'2616,"25"23"-361,-1 0 0,0 1 0,0 0 1,-1 0-1,-20-8 0,-6 3-380,4 3-1875,0 1 0,0 2 0,-1 1 0,1 2 0,-52 2 0,81 1 0,0 0 0,0 1 0,1 0 0,-1 0 0,0 0 0,0 1 0,1-1 0,-1 1 0,1-1 0,0 1 0,-1 1 0,1-1 0,0 0 0,0 1 0,0-1 0,1 1 0,-1 0 0,0 0 0,1 0 0,0 0 0,0 0 0,0 1 0,0-1 0,0 1 0,1-1 0,0 1 0,0 0 0,-2 6 0,2-5 0,0 0 0,1 0 0,-1 1 0,1-1 0,0 0 0,0 1 0,1-1 0,0 0 0,0 0 0,0 0 0,0 1 0,1-1 0,0 0 0,0-1 0,0 1 0,0 0 0,1-1 0,0 1 0,0-1 0,6 6 0,1-1 0,1-1 0,0 0 0,0-1 0,15 7 0,-12-7 0,0 2 0,24 17 0,-35-24 0,1 1 0,-1 0 0,0 1 0,0-1 0,-1 1 0,1-1 0,-1 1 0,1 0 0,-1 0 0,0 0 0,-1 0 0,1 0 0,-1 0 0,2 8 0,-3-9 0,0 1 0,0-1 0,-1 0 0,1 0 0,-1 0 0,0 1 0,0-1 0,0 0 0,0 0 0,-1 0 0,1 0 0,-1-1 0,0 1 0,0 0 0,0-1 0,0 1 0,0-1 0,0 0 0,-1 1 0,1-1 0,-1 0 0,0-1 0,1 1 0,-1 0 0,0-1 0,0 1 0,-6 1 0,-3 2 0,0 0 0,0-1 0,-1 0 0,1-1 0,-24 2 0,26-4 0,4 0 0,-1 0 0,1 0 0,-1 0 0,0-1 0,1-1 0,-1 1 0,0-1 0,1 0 0,-1 0 0,1-1 0,-1 0 0,-10-4 0,12 0 0</inkml:trace>
+</inkml:ink>
+</file>
+
 <file path=ppt/ink/ink16.xml><?xml version="1.0" encoding="utf-8"?>
 <inkml:ink xmlns:inkml="http://www.w3.org/2003/InkML">
   <inkml:definitions>
@@ -1438,6 +1977,286 @@
 </inkml:ink>
 </file>
 
+<file path=ppt/ink/ink160.xml><?xml version="1.0" encoding="utf-8"?>
+<inkml:ink xmlns:inkml="http://www.w3.org/2003/InkML">
+  <inkml:definitions>
+    <inkml:context xml:id="ctx0">
+      <inkml:inkSource xml:id="inkSrc0">
+        <inkml:traceFormat>
+          <inkml:channel name="X" type="integer" min="-2.14748E9" max="2.14748E9" units="cm"/>
+          <inkml:channel name="Y" type="integer" min="-2.14748E9" max="2.14748E9" units="cm"/>
+          <inkml:channel name="F" type="integer" max="32767" units="dev"/>
+        </inkml:traceFormat>
+        <inkml:channelProperties>
+          <inkml:channelProperty channel="X" name="resolution" value="1000" units="1/cm"/>
+          <inkml:channelProperty channel="Y" name="resolution" value="1000" units="1/cm"/>
+          <inkml:channelProperty channel="F" name="resolution" value="0" units="1/dev"/>
+        </inkml:channelProperties>
+      </inkml:inkSource>
+      <inkml:timestamp xml:id="ts0" timeString="2026-02-09T10:18:10.428"/>
+    </inkml:context>
+    <inkml:brush xml:id="br0">
+      <inkml:brushProperty name="width" value="0.1" units="cm"/>
+      <inkml:brushProperty name="height" value="0.1" units="cm"/>
+      <inkml:brushProperty name="color" value="#004F8B"/>
+    </inkml:brush>
+  </inkml:definitions>
+  <inkml:trace contextRef="#ctx0" brushRef="#br0">389 24 8192,'-28'-11'12642,"2"1"-7262,13 9-5380,0 0 0,0 0 0,0 1 0,0 1 0,0 0 0,0 1 0,0 0 0,0 1 0,1 1 0,-1 0 0,1 0 0,0 1 0,0 1 0,0 0 0,1 0 0,0 2 0,0-1 0,1 1 0,0 1 0,1 0 0,-1 0 0,2 1 0,-1 0 0,1 0 0,1 1 0,0 0 0,0 0 0,-6 18 0,10-21 0,0 0 0,1 0 0,0 1 0,0-1 0,1 0 0,0 1 0,1-1 0,0 1 0,0-1 0,1 1 0,0-1 0,1 1 0,-1-1 0,2 0 0,-1 0 0,1 0 0,0 0 0,1 0 0,0-1 0,0 1 0,0-1 0,1 0 0,0 0 0,1-1 0,-1 0 0,1 0 0,1 0 0,-1 0 0,1-1 0,0 0 0,0-1 0,11 6 0,5 2 0,0-1 0,1-1 0,0-1 0,0-1 0,1-1 0,0-1 0,0-2 0,1 0 0,-1-2 0,36-1 0,-38-5 0,-7-2 0</inkml:trace>
+</inkml:ink>
+</file>
+
+<file path=ppt/ink/ink161.xml><?xml version="1.0" encoding="utf-8"?>
+<inkml:ink xmlns:inkml="http://www.w3.org/2003/InkML">
+  <inkml:definitions>
+    <inkml:context xml:id="ctx0">
+      <inkml:inkSource xml:id="inkSrc0">
+        <inkml:traceFormat>
+          <inkml:channel name="X" type="integer" min="-2.14748E9" max="2.14748E9" units="cm"/>
+          <inkml:channel name="Y" type="integer" min="-2.14748E9" max="2.14748E9" units="cm"/>
+          <inkml:channel name="F" type="integer" max="32767" units="dev"/>
+        </inkml:traceFormat>
+        <inkml:channelProperties>
+          <inkml:channelProperty channel="X" name="resolution" value="1000" units="1/cm"/>
+          <inkml:channelProperty channel="Y" name="resolution" value="1000" units="1/cm"/>
+          <inkml:channelProperty channel="F" name="resolution" value="0" units="1/dev"/>
+        </inkml:channelProperties>
+      </inkml:inkSource>
+      <inkml:timestamp xml:id="ts0" timeString="2026-02-09T10:18:10.994"/>
+    </inkml:context>
+    <inkml:brush xml:id="br0">
+      <inkml:brushProperty name="width" value="0.1" units="cm"/>
+      <inkml:brushProperty name="height" value="0.1" units="cm"/>
+      <inkml:brushProperty name="color" value="#004F8B"/>
+    </inkml:brush>
+  </inkml:definitions>
+  <inkml:trace contextRef="#ctx0" brushRef="#br0">1 56 8192,'0'21'11430,"0"6"-5847,0 32-3088,0-17-4980,0-37 1845,0-14 1719,0-9-1539,-1 3-1138,1 1-1,1 0 1,0-1-1,1 1 1,7-27-1,-8 37 1303,1 0-1,0 0 1,0 0-1,0 0 1,1 1-1,-1-1 1,1 1 0,0-1-1,0 1 1,0 0-1,0 0 1,1 1-1,-1-1 1,1 1-1,-1-1 1,1 1-1,0 0 1,0 1 0,0-1-1,0 1 1,1-1-1,-1 1 1,0 0-1,7 0 1,44-2 3442,-32 3-4404,0 1-630</inkml:trace>
+</inkml:ink>
+</file>
+
+<file path=ppt/ink/ink162.xml><?xml version="1.0" encoding="utf-8"?>
+<inkml:ink xmlns:inkml="http://www.w3.org/2003/InkML">
+  <inkml:definitions>
+    <inkml:context xml:id="ctx0">
+      <inkml:inkSource xml:id="inkSrc0">
+        <inkml:traceFormat>
+          <inkml:channel name="X" type="integer" min="-2.14748E9" max="2.14748E9" units="cm"/>
+          <inkml:channel name="Y" type="integer" min="-2.14748E9" max="2.14748E9" units="cm"/>
+          <inkml:channel name="F" type="integer" max="32767" units="dev"/>
+        </inkml:traceFormat>
+        <inkml:channelProperties>
+          <inkml:channelProperty channel="X" name="resolution" value="1000" units="1/cm"/>
+          <inkml:channelProperty channel="Y" name="resolution" value="1000" units="1/cm"/>
+          <inkml:channelProperty channel="F" name="resolution" value="0" units="1/dev"/>
+        </inkml:channelProperties>
+      </inkml:inkSource>
+      <inkml:timestamp xml:id="ts0" timeString="2026-02-09T10:18:11.621"/>
+    </inkml:context>
+    <inkml:brush xml:id="br0">
+      <inkml:brushProperty name="width" value="0.1" units="cm"/>
+      <inkml:brushProperty name="height" value="0.1" units="cm"/>
+      <inkml:brushProperty name="color" value="#004F8B"/>
+    </inkml:brush>
+  </inkml:definitions>
+  <inkml:trace contextRef="#ctx0" brushRef="#br0">121 0 8192,'-3'1'676,"1"-1"1,-1 1 0,1 0 0,-1 0-1,1 0 1,-1 0 0,1 0-1,-1 0 1,1 1 0,0-1-1,0 1 1,0 0 0,0-1-1,0 1 1,0 0 0,0 0-1,1 0 1,-3 4 0,-25 42 4470,28-46-5129,-7 15-18,3-9 0,0 1 0,0-1 0,1 1 0,0 0 0,0 1 0,1-1 0,1 1 0,0-1 0,0 1 0,1 0 0,-1 15 0,2-23-111,1 0 1,-1 0 0,1 0 0,-1-1-1,1 1 1,0 0 0,0-1 0,-1 1-1,1-1 1,0 1 0,1-1 0,-1 1-1,0-1 1,0 0 0,1 1 0,1 0-1,-1 0-398,1-1-1,0 1 0,0-1 0,0 0 1,0 0-1,1 0 0,-1 0 0,0-1 0,0 1 1,0-1-1,1 0 0,-1 0 0,6-1 1,-2 1-681,0-1 1,0-1-1,0 1 1,-1-1-1,14-6 1,5-8-685,-22 12 2274,1 1 0,-2-1 1,1 0-1,0-1 0,-1 1 0,1 0 1,-1-1-1,-1 1 0,1-1 0,-1 0 1,1 0-1,-1 1 0,0-1 0,-1 0 1,1 0-1,-1 0 0,-1-9 0,0 3 939,-1 0 0,0 0 0,-1 0 0,0 1 0,0-1 0,-10-17 0,3 6 106</inkml:trace>
+</inkml:ink>
+</file>
+
+<file path=ppt/ink/ink163.xml><?xml version="1.0" encoding="utf-8"?>
+<inkml:ink xmlns:inkml="http://www.w3.org/2003/InkML">
+  <inkml:definitions>
+    <inkml:context xml:id="ctx0">
+      <inkml:inkSource xml:id="inkSrc0">
+        <inkml:traceFormat>
+          <inkml:channel name="X" type="integer" min="-2.14748E9" max="2.14748E9" units="cm"/>
+          <inkml:channel name="Y" type="integer" min="-2.14748E9" max="2.14748E9" units="cm"/>
+          <inkml:channel name="F" type="integer" max="32767" units="dev"/>
+        </inkml:traceFormat>
+        <inkml:channelProperties>
+          <inkml:channelProperty channel="X" name="resolution" value="1000" units="1/cm"/>
+          <inkml:channelProperty channel="Y" name="resolution" value="1000" units="1/cm"/>
+          <inkml:channelProperty channel="F" name="resolution" value="0" units="1/dev"/>
+        </inkml:channelProperties>
+      </inkml:inkSource>
+      <inkml:timestamp xml:id="ts0" timeString="2026-02-09T10:18:11.974"/>
+    </inkml:context>
+    <inkml:brush xml:id="br0">
+      <inkml:brushProperty name="width" value="0.1" units="cm"/>
+      <inkml:brushProperty name="height" value="0.1" units="cm"/>
+      <inkml:brushProperty name="color" value="#004F8B"/>
+    </inkml:brush>
+  </inkml:definitions>
+  <inkml:trace contextRef="#ctx0" brushRef="#br0">0 1 8192,'5'17'3356,"0"15"-3356,1 10 5483,-2 6-5483,-1 0 7957,-1-4-7957,-1-1 1226,-1-3-1226,0-5 0,0-3 0,0-12 0,4-22 0,2-11 0</inkml:trace>
+</inkml:ink>
+</file>
+
+<file path=ppt/ink/ink164.xml><?xml version="1.0" encoding="utf-8"?>
+<inkml:ink xmlns:inkml="http://www.w3.org/2003/InkML">
+  <inkml:definitions>
+    <inkml:context xml:id="ctx0">
+      <inkml:inkSource xml:id="inkSrc0">
+        <inkml:traceFormat>
+          <inkml:channel name="X" type="integer" min="-2.14748E9" max="2.14748E9" units="cm"/>
+          <inkml:channel name="Y" type="integer" min="-2.14748E9" max="2.14748E9" units="cm"/>
+          <inkml:channel name="F" type="integer" max="32767" units="dev"/>
+        </inkml:traceFormat>
+        <inkml:channelProperties>
+          <inkml:channelProperty channel="X" name="resolution" value="1000" units="1/cm"/>
+          <inkml:channelProperty channel="Y" name="resolution" value="1000" units="1/cm"/>
+          <inkml:channelProperty channel="F" name="resolution" value="0" units="1/dev"/>
+        </inkml:channelProperties>
+      </inkml:inkSource>
+      <inkml:timestamp xml:id="ts0" timeString="2026-02-09T10:18:12.318"/>
+    </inkml:context>
+    <inkml:brush xml:id="br0">
+      <inkml:brushProperty name="width" value="0.1" units="cm"/>
+      <inkml:brushProperty name="height" value="0.1" units="cm"/>
+      <inkml:brushProperty name="color" value="#004F8B"/>
+    </inkml:brush>
+  </inkml:definitions>
+  <inkml:trace contextRef="#ctx0" brushRef="#br0">0 1 8192,'13'192'13470,"-3"-89"-8918,-9-74-5322,6 53-5361,-6-78 5551,0 1 0,0-1 0,0 1 1,0-1-1,1 1 0,0-1 0,0 0 0,0 0 0,0 0 1,1 0-1,-1 0 0,1-1 0,6 7 0,-7-8 335,0-1 0,0 0-1,-1 0 1,1 0 0,0 0-1,0-1 1,0 1 0,0 0-1,0-1 1,0 1-1,0-1 1,3 0 0,0 0 625,0 0 0,0 0 0,0-1 1,0 0-1,-1 0 0,10-3 1,13-7 114</inkml:trace>
+</inkml:ink>
+</file>
+
+<file path=ppt/ink/ink165.xml><?xml version="1.0" encoding="utf-8"?>
+<inkml:ink xmlns:inkml="http://www.w3.org/2003/InkML">
+  <inkml:definitions>
+    <inkml:context xml:id="ctx0">
+      <inkml:inkSource xml:id="inkSrc0">
+        <inkml:traceFormat>
+          <inkml:channel name="X" type="integer" min="-2.14748E9" max="2.14748E9" units="cm"/>
+          <inkml:channel name="Y" type="integer" min="-2.14748E9" max="2.14748E9" units="cm"/>
+          <inkml:channel name="F" type="integer" max="32767" units="dev"/>
+        </inkml:traceFormat>
+        <inkml:channelProperties>
+          <inkml:channelProperty channel="X" name="resolution" value="1000" units="1/cm"/>
+          <inkml:channelProperty channel="Y" name="resolution" value="1000" units="1/cm"/>
+          <inkml:channelProperty channel="F" name="resolution" value="0" units="1/dev"/>
+        </inkml:channelProperties>
+      </inkml:inkSource>
+      <inkml:timestamp xml:id="ts0" timeString="2026-02-09T10:18:13.273"/>
+    </inkml:context>
+    <inkml:brush xml:id="br0">
+      <inkml:brushProperty name="width" value="0.1" units="cm"/>
+      <inkml:brushProperty name="height" value="0.1" units="cm"/>
+      <inkml:brushProperty name="color" value="#004F8B"/>
+    </inkml:brush>
+  </inkml:definitions>
+  <inkml:trace contextRef="#ctx0" brushRef="#br0">0 0 8192,'6'18'2117,"0"0"-1,-2 0 1,-1 0 0,0 1 0,-1-1 0,-1 1 0,-1 29-1,0-10-1028,0 20-1088,-1-38 0,0 1 0,2-1 0,1 1 0,0-1 0,7 27 0,-9-46-58,1 0 0,-1 0 1,0 0-1,1 0 0,-1 0 1,1 0-1,-1 0 0,1 0 1,0 0-1,-1 0 0,1 0 1,0 0-1,0 0 0,0 0 1,0-1-1,0 1 0,-1 0 1,1-1-1,0 1 0,1 0 1,-1-1-1,0 0 0,0 1 1,1 0-1,1-1-235,-1 0 1,0 0-1,1 0 1,-1-1-1,0 1 1,1 0-1,-1-1 0,0 1 1,0-1-1,0 0 1,5-2-1,7-5-1793,0-1-1,-1 0 1,15-13 0,-8 5-67,3 1 1244,0 0 0,1 2-1,45-20 1,-62 31 1264,1 1 0,-1 0 0,1 0 1,0 0-1,-1 1 0,1 0 0,0 1 0,9 0 0,-13 1 442,0-1 0,0 1-1,0 0 1,0 0 0,0 0-1,0 1 1,-1-1 0,1 1-1,0 0 1,-1 0 0,1 0-1,-1 1 1,0-1 0,0 1-1,0 0 1,4 5 0,-3-2-619,0-1 1,-1 1 0,0 0-1,0 0 1,-1 0-1,0 0 1,0 1 0,0-1-1,-1 1 1,1-1-1,-2 1 1,1 6 0,-1-9-178,1 0 0,-1-1 0,0 1 0,-1-1 0,1 1 0,-1 0 0,1-1 1,-1 1-1,0-1 0,0 1 0,-1-1 0,1 0 0,-1 1 0,1-1 1,-1 0-1,0 0 0,-1 0 0,1 0 0,0 0 0,-1-1 0,1 1 0,-7 3 1,-7 1-2,0-1 0,-1 0 0,0-2 0,0 0 0,0-1 0,-1 0 0,1-2 0,-1 0 0,1-1 0,-1 0 0,-20-4 0,38 3 0,-1 2 0,0-1 0,0 0 0,1 0 0,-1 0 0,0 0 0,0 0 0,1 0 0,-1 0 0,0 0 0,0 0 0,0-1 0,1 1 0,-1 0 0,0 0 0,1-1 0,-1 1 0,0 0 0,1-1 0,-1 1 0,0-1 0,1 1 0,-1-1 0,1 1 0,-1-1 0,0 1 0,1-1 0,0 0 0,-1 1 0,1-1 0,-1 0 0,1 1 0,0-1 0,-1 0 0,1 0 0,0 1 0,0-2 0,5-10 0</inkml:trace>
+</inkml:ink>
+</file>
+
+<file path=ppt/ink/ink166.xml><?xml version="1.0" encoding="utf-8"?>
+<inkml:ink xmlns:inkml="http://www.w3.org/2003/InkML">
+  <inkml:definitions>
+    <inkml:context xml:id="ctx0">
+      <inkml:inkSource xml:id="inkSrc0">
+        <inkml:traceFormat>
+          <inkml:channel name="X" type="integer" min="-2.14748E9" max="2.14748E9" units="cm"/>
+          <inkml:channel name="Y" type="integer" min="-2.14748E9" max="2.14748E9" units="cm"/>
+          <inkml:channel name="F" type="integer" max="32767" units="dev"/>
+        </inkml:traceFormat>
+        <inkml:channelProperties>
+          <inkml:channelProperty channel="X" name="resolution" value="1000" units="1/cm"/>
+          <inkml:channelProperty channel="Y" name="resolution" value="1000" units="1/cm"/>
+          <inkml:channelProperty channel="F" name="resolution" value="0" units="1/dev"/>
+        </inkml:channelProperties>
+      </inkml:inkSource>
+      <inkml:timestamp xml:id="ts0" timeString="2026-02-09T10:18:14.307"/>
+    </inkml:context>
+    <inkml:brush xml:id="br0">
+      <inkml:brushProperty name="width" value="0.1" units="cm"/>
+      <inkml:brushProperty name="height" value="0.1" units="cm"/>
+      <inkml:brushProperty name="color" value="#004F8B"/>
+    </inkml:brush>
+  </inkml:definitions>
+  <inkml:trace contextRef="#ctx0" brushRef="#br0">132 1 8192,'-6'-1'690,"1"1"-1,-1 1 1,1-1 0,0 1 0,-1 0 0,1 1 0,0-1-1,-1 1 1,1 0 0,0 0 0,0 0 0,0 1 0,1 0-1,-1 0 1,1 0 0,-1 1 0,1-1 0,-6 7 0,7-5-383,-1 1 0,1-1 0,0 1 0,0 0 1,0-1-1,1 1 0,0 1 0,0-1 0,0 0 0,1 0 1,0 1-1,0-1 0,1 0 0,0 1 0,1 10 1,-1-14-308,1 1 0,-1-1 0,1 0 0,0 1 0,0-1 0,1 0 0,-1 0 0,1 0 0,-1 0 0,1 0 0,0 0 0,0 0 0,0-1 0,1 1 0,-1-1 0,1 1 0,-1-1 0,1 0 0,0 0 0,-1 0 0,1 0 0,0-1 0,1 1 0,-1-1 0,0 0 0,5 2 0,-4-2 0,-1 0 0,1 0 0,0-1 0,-1 1 0,1-1 0,0 0 0,0 0 0,0 0 0,-1-1 0,1 1 0,0-1 0,0 0 0,-1 0 0,1 0 0,-1 0 0,1-1 0,-1 1 0,1-1 0,-1 0 0,0 0 0,0 0 0,0-1 0,5-3 0,7-15 164,0 0 1,24-44 0,-7 9-3663,2 99-11520,-30-32 15018,2-1 0,-1 1 0,2-1 0,-1 0 0,1 0 0,1-1 0,-1 0 0,2 0 0,-1-1 0,1 0 0,0 0 0,1-1 0,0 0 0,17 8 0,1-5 0</inkml:trace>
+</inkml:ink>
+</file>
+
+<file path=ppt/ink/ink167.xml><?xml version="1.0" encoding="utf-8"?>
+<inkml:ink xmlns:inkml="http://www.w3.org/2003/InkML">
+  <inkml:definitions>
+    <inkml:context xml:id="ctx0">
+      <inkml:inkSource xml:id="inkSrc0">
+        <inkml:traceFormat>
+          <inkml:channel name="X" type="integer" min="-2.14748E9" max="2.14748E9" units="cm"/>
+          <inkml:channel name="Y" type="integer" min="-2.14748E9" max="2.14748E9" units="cm"/>
+          <inkml:channel name="F" type="integer" max="32767" units="dev"/>
+        </inkml:traceFormat>
+        <inkml:channelProperties>
+          <inkml:channelProperty channel="X" name="resolution" value="1000" units="1/cm"/>
+          <inkml:channelProperty channel="Y" name="resolution" value="1000" units="1/cm"/>
+          <inkml:channelProperty channel="F" name="resolution" value="0" units="1/dev"/>
+        </inkml:channelProperties>
+      </inkml:inkSource>
+      <inkml:timestamp xml:id="ts0" timeString="2026-02-09T10:18:14.850"/>
+    </inkml:context>
+    <inkml:brush xml:id="br0">
+      <inkml:brushProperty name="width" value="0.1" units="cm"/>
+      <inkml:brushProperty name="height" value="0.1" units="cm"/>
+      <inkml:brushProperty name="color" value="#004F8B"/>
+    </inkml:brush>
+  </inkml:definitions>
+  <inkml:trace contextRef="#ctx0" brushRef="#br0">4 6 8192,'0'126'14777,"0"-84"-11532,-2-74-3245,1 19 0,1 0 0,0 0 0,0 0 0,4-21 0,-3 31 0,-1 1 0,1-1 0,0 0 0,0 1 0,0-1 0,0 1 0,1-1 0,-1 1 0,1 0 0,-1-1 0,1 1 0,0 0 0,0 0 0,0 0 0,0 0 0,0 1 0,0-1 0,0 1 0,1-1 0,-1 1 0,0 0 0,1-1 0,0 1 0,-1 1 0,1-1 0,-1 0 0,5 0 0,11-1-1017,1 1 1,0 0-1,0 2 1,0 0 0,26 5-1,97 28-8275,-83-18 7670,68 12 1223,-66-16 195,0 3 1,104 40 0,-148-48 203</inkml:trace>
+</inkml:ink>
+</file>
+
+<file path=ppt/ink/ink168.xml><?xml version="1.0" encoding="utf-8"?>
+<inkml:ink xmlns:inkml="http://www.w3.org/2003/InkML">
+  <inkml:definitions>
+    <inkml:context xml:id="ctx0">
+      <inkml:inkSource xml:id="inkSrc0">
+        <inkml:traceFormat>
+          <inkml:channel name="X" type="integer" min="-2.14748E9" max="2.14748E9" units="cm"/>
+          <inkml:channel name="Y" type="integer" min="-2.14748E9" max="2.14748E9" units="cm"/>
+          <inkml:channel name="F" type="integer" max="32767" units="dev"/>
+        </inkml:traceFormat>
+        <inkml:channelProperties>
+          <inkml:channelProperty channel="X" name="resolution" value="1000" units="1/cm"/>
+          <inkml:channelProperty channel="Y" name="resolution" value="1000" units="1/cm"/>
+          <inkml:channelProperty channel="F" name="resolution" value="0" units="1/dev"/>
+        </inkml:channelProperties>
+      </inkml:inkSource>
+      <inkml:timestamp xml:id="ts0" timeString="2026-02-09T10:18:53.995"/>
+    </inkml:context>
+    <inkml:brush xml:id="br0">
+      <inkml:brushProperty name="width" value="0.1" units="cm"/>
+      <inkml:brushProperty name="height" value="0.1" units="cm"/>
+      <inkml:brushProperty name="color" value="#004F8B"/>
+    </inkml:brush>
+  </inkml:definitions>
+  <inkml:trace contextRef="#ctx0" brushRef="#br0">1 1219 8192,'12'-17'8134,"-10"12"-6101,1 0 1,2-8-1,11-21 1755,6 4-3952,2 1 1,0 1 0,2 1 0,0 2 0,47-35 0,162-93-1655,-81 70-859,3 6-1,233-78 1,354-51-4516,195 64 7193,9 78 0,509 34 0,-1017 26 0,556-8 0,2368-8 0,-2957 31 0,-2 18 0,464 93 0,-849-118-2,34 5 191,-1 3 1,0 2-1,-1 2 0,61 27 0,-69-4 16889,-45-48-17078</inkml:trace>
+</inkml:ink>
+</file>
+
+<file path=ppt/ink/ink169.xml><?xml version="1.0" encoding="utf-8"?>
+<inkml:ink xmlns:inkml="http://www.w3.org/2003/InkML">
+  <inkml:definitions>
+    <inkml:context xml:id="ctx0">
+      <inkml:inkSource xml:id="inkSrc0">
+        <inkml:traceFormat>
+          <inkml:channel name="X" type="integer" min="-2.14748E9" max="2.14748E9" units="cm"/>
+          <inkml:channel name="Y" type="integer" min="-2.14748E9" max="2.14748E9" units="cm"/>
+          <inkml:channel name="F" type="integer" max="32767" units="dev"/>
+        </inkml:traceFormat>
+        <inkml:channelProperties>
+          <inkml:channelProperty channel="X" name="resolution" value="1000" units="1/cm"/>
+          <inkml:channelProperty channel="Y" name="resolution" value="1000" units="1/cm"/>
+          <inkml:channelProperty channel="F" name="resolution" value="0" units="1/dev"/>
+        </inkml:channelProperties>
+      </inkml:inkSource>
+      <inkml:timestamp xml:id="ts0" timeString="2026-02-09T10:18:54.595"/>
+    </inkml:context>
+    <inkml:brush xml:id="br0">
+      <inkml:brushProperty name="width" value="0.1" units="cm"/>
+      <inkml:brushProperty name="height" value="0.1" units="cm"/>
+      <inkml:brushProperty name="color" value="#004F8B"/>
+    </inkml:brush>
+  </inkml:definitions>
+  <inkml:trace contextRef="#ctx0" brushRef="#br0">355 0 8192,'1'7'1247,"0"-1"0,0 1 1,1-1-1,0 1 0,0-1 1,1 0-1,-1 0 0,1 0 0,6 8 1,21 32 3224,-11-18-3395,123 175-1077,-82-124 0,54 98 0,-113-176 0,0 0 0,-1 1 0,1-1 0,-1 0 0,1 0 0,0 0 0,-1 1 0,0-1 0,1 0 0,-1 1 0,0-1 0,0 0 0,0 1 0,0-1 0,0 0 0,0 1 0,0-1 0,0 0 0,0 1 0,-1-1 0,1 0 0,0 1 0,-1-1 0,0 0 0,0 2 0,-1-1 0,0 0 0,0 0 0,0-1 0,0 1 0,0-1 0,0 0 0,0 1 0,-1-1 0,1 0 0,0 0 0,-1 0 0,1-1 0,-3 1 0,-13 2 0,1 0 0,-1-2 0,-22-1 0,26 0 0,-586-3-1470,592 3 2940</inkml:trace>
+</inkml:ink>
+</file>
+
 <file path=ppt/ink/ink17.xml><?xml version="1.0" encoding="utf-8"?>
 <inkml:ink xmlns:inkml="http://www.w3.org/2003/InkML">
   <inkml:definitions>
@@ -1466,6 +2285,276 @@
 </inkml:ink>
 </file>
 
+<file path=ppt/ink/ink170.xml><?xml version="1.0" encoding="utf-8"?>
+<inkml:ink xmlns:inkml="http://www.w3.org/2003/InkML">
+  <inkml:definitions>
+    <inkml:context xml:id="ctx0">
+      <inkml:inkSource xml:id="inkSrc0">
+        <inkml:traceFormat>
+          <inkml:channel name="X" type="integer" min="-2.14748E9" max="2.14748E9" units="cm"/>
+          <inkml:channel name="Y" type="integer" min="-2.14748E9" max="2.14748E9" units="cm"/>
+          <inkml:channel name="F" type="integer" max="32767" units="dev"/>
+        </inkml:traceFormat>
+        <inkml:channelProperties>
+          <inkml:channelProperty channel="X" name="resolution" value="1000" units="1/cm"/>
+          <inkml:channelProperty channel="Y" name="resolution" value="1000" units="1/cm"/>
+          <inkml:channelProperty channel="F" name="resolution" value="0" units="1/dev"/>
+        </inkml:channelProperties>
+      </inkml:inkSource>
+      <inkml:timestamp xml:id="ts0" timeString="2026-02-09T10:21:05.054"/>
+    </inkml:context>
+    <inkml:brush xml:id="br0">
+      <inkml:brushProperty name="width" value="0.035" units="cm"/>
+      <inkml:brushProperty name="height" value="0.035" units="cm"/>
+    </inkml:brush>
+  </inkml:definitions>
+  <inkml:trace contextRef="#ctx0" brushRef="#br0">52 0 24575,'0'9'0,"0"7"0,0 5 0,0 3 0,-5 20 0,-1 6 0,1-1 0,0-4 0,-2-2 0,-1-3 0,2-5 0,1-3 0,2-4 0,1-5-8191</inkml:trace>
+</inkml:ink>
+</file>
+
+<file path=ppt/ink/ink171.xml><?xml version="1.0" encoding="utf-8"?>
+<inkml:ink xmlns:inkml="http://www.w3.org/2003/InkML">
+  <inkml:definitions>
+    <inkml:context xml:id="ctx0">
+      <inkml:inkSource xml:id="inkSrc0">
+        <inkml:traceFormat>
+          <inkml:channel name="X" type="integer" min="-2.14748E9" max="2.14748E9" units="cm"/>
+          <inkml:channel name="Y" type="integer" min="-2.14748E9" max="2.14748E9" units="cm"/>
+          <inkml:channel name="F" type="integer" max="32767" units="dev"/>
+        </inkml:traceFormat>
+        <inkml:channelProperties>
+          <inkml:channelProperty channel="X" name="resolution" value="1000" units="1/cm"/>
+          <inkml:channelProperty channel="Y" name="resolution" value="1000" units="1/cm"/>
+          <inkml:channelProperty channel="F" name="resolution" value="0" units="1/dev"/>
+        </inkml:channelProperties>
+      </inkml:inkSource>
+      <inkml:timestamp xml:id="ts0" timeString="2026-02-09T10:21:06.199"/>
+    </inkml:context>
+    <inkml:brush xml:id="br0">
+      <inkml:brushProperty name="width" value="0.035" units="cm"/>
+      <inkml:brushProperty name="height" value="0.035" units="cm"/>
+    </inkml:brush>
+  </inkml:definitions>
+  <inkml:trace contextRef="#ctx0" brushRef="#br0">742 185 24575,'-1'-7'0,"0"1"0,0 0 0,-1 0 0,0 1 0,0-1 0,-1 0 0,1 0 0,-1 1 0,0 0 0,-1-1 0,1 1 0,-1 1 0,0-1 0,0 0 0,-1 1 0,1 0 0,-1 0 0,0 0 0,-10-5 0,0-1 0,-2 0 0,1 2 0,-1 0 0,0 0 0,-25-6 0,10 8 0,-1 1 0,1 1 0,-1 1 0,0 3 0,1 0 0,-36 6 0,61-5 0,0 1 0,0 0 0,0 0 0,0 1 0,1 0 0,-1 0 0,1 0 0,0 1 0,0 0 0,0 0 0,1 1 0,-1 0 0,1 0 0,0 0 0,0 0 0,1 1 0,0 0 0,-5 7 0,-8 16 0,2 0 0,-21 50 0,33-70 0,-15 32 0,2 1 0,2 1 0,2 1 0,1 0 0,3 0 0,-5 82 0,11-89 0,1-11 0,1-1 0,4 41 0,-3-59 0,0 0 0,1 0 0,0-1 0,0 1 0,1 0 0,0-1 0,0 1 0,0-1 0,1 0 0,0 0 0,0 0 0,0-1 0,10 11 0,4-3 0,0 0 0,1 0 0,1-2 0,-1 0 0,2-2 0,-1 0 0,1-1 0,1-1 0,-1-1 0,1-1 0,24 2 0,32 2 0,138-2 0,-177-7 0,-16 1 0,0 0 0,-1-2 0,1 0 0,0-2 0,-1 0 0,1-2 0,-1 0 0,27-11 0,-45 13 0,0 0 0,0 0 0,0 0 0,0 0 0,0-1 0,-1 1 0,0-1 0,1 0 0,-1 0 0,-1 0 0,1-1 0,-1 1 0,1-1 0,-1 1 0,-1-1 0,1 0 0,-1 0 0,1 0 0,0-9 0,1-11 0,-1-1 0,-2-43 0,0 39 0,0 4 14,-1 1-1,-2 0 0,0 0 0,-2 0 1,0 0-1,-2 1 0,-1 0 1,-21-46-1,19 51-148,-2 0 0,0 1 0,0 1 0,-2 0 0,0 1 0,-2 0 0,1 1 0,-2 0 0,0 2 0,-33-21 0,24 19-6691</inkml:trace>
+</inkml:ink>
+</file>
+
+<file path=ppt/ink/ink172.xml><?xml version="1.0" encoding="utf-8"?>
+<inkml:ink xmlns:inkml="http://www.w3.org/2003/InkML">
+  <inkml:definitions>
+    <inkml:context xml:id="ctx0">
+      <inkml:inkSource xml:id="inkSrc0">
+        <inkml:traceFormat>
+          <inkml:channel name="X" type="integer" min="-2.14748E9" max="2.14748E9" units="cm"/>
+          <inkml:channel name="Y" type="integer" min="-2.14748E9" max="2.14748E9" units="cm"/>
+          <inkml:channel name="F" type="integer" max="32767" units="dev"/>
+        </inkml:traceFormat>
+        <inkml:channelProperties>
+          <inkml:channelProperty channel="X" name="resolution" value="1000" units="1/cm"/>
+          <inkml:channelProperty channel="Y" name="resolution" value="1000" units="1/cm"/>
+          <inkml:channelProperty channel="F" name="resolution" value="0" units="1/dev"/>
+        </inkml:channelProperties>
+      </inkml:inkSource>
+      <inkml:timestamp xml:id="ts0" timeString="2026-02-09T10:21:07.337"/>
+    </inkml:context>
+    <inkml:brush xml:id="br0">
+      <inkml:brushProperty name="width" value="0.035" units="cm"/>
+      <inkml:brushProperty name="height" value="0.035" units="cm"/>
+    </inkml:brush>
+  </inkml:definitions>
+  <inkml:trace contextRef="#ctx0" brushRef="#br0">3 0 24575,'-1'104'0,"0"19"0,20 180 0,-13-264 0,1 1 0,2-1 0,2 0 0,1-1 0,3-1 0,0 0 0,3 0 0,34 52 0,-18-39 0,3-2 0,78 80 0,-94-108 0,1 0 0,1-2 0,1-1 0,1 0 0,0-2 0,1-1 0,52 20 0,-22-18 0,90 14 0,-91-20 0,-7-3 0,0-3 0,0-1 0,0-3 0,55-6 0,-101 6-57,0 0 0,0 0 1,1-1-1,-1 1 0,0-1 0,0 1 0,0-1 0,0 0 0,1 0 0,-1 0 0,0 0 1,-1 0-1,1-1 0,0 1 0,0-1 0,0 1 0,-1-1 0,1 1 0,-1-1 1,1 0-1,-1 0 0,0 0 0,1-2 0,4-11-6769</inkml:trace>
+</inkml:ink>
+</file>
+
+<file path=ppt/ink/ink173.xml><?xml version="1.0" encoding="utf-8"?>
+<inkml:ink xmlns:inkml="http://www.w3.org/2003/InkML">
+  <inkml:definitions>
+    <inkml:context xml:id="ctx0">
+      <inkml:inkSource xml:id="inkSrc0">
+        <inkml:traceFormat>
+          <inkml:channel name="X" type="integer" min="-2.14748E9" max="2.14748E9" units="cm"/>
+          <inkml:channel name="Y" type="integer" min="-2.14748E9" max="2.14748E9" units="cm"/>
+          <inkml:channel name="F" type="integer" max="32767" units="dev"/>
+        </inkml:traceFormat>
+        <inkml:channelProperties>
+          <inkml:channelProperty channel="X" name="resolution" value="1000" units="1/cm"/>
+          <inkml:channelProperty channel="Y" name="resolution" value="1000" units="1/cm"/>
+          <inkml:channelProperty channel="F" name="resolution" value="0" units="1/dev"/>
+        </inkml:channelProperties>
+      </inkml:inkSource>
+      <inkml:timestamp xml:id="ts0" timeString="2026-02-09T10:21:08.021"/>
+    </inkml:context>
+    <inkml:brush xml:id="br0">
+      <inkml:brushProperty name="width" value="0.035" units="cm"/>
+      <inkml:brushProperty name="height" value="0.035" units="cm"/>
+    </inkml:brush>
+  </inkml:definitions>
+  <inkml:trace contextRef="#ctx0" brushRef="#br0">8 1 24575,'12'9'0,"0"1"0,1-2 0,0 0 0,0 0 0,1-1 0,15 5 0,-15-6 0,1 1 0,-1 0 0,-1 1 0,26 19 0,-37-25 0,0 0 0,0 0 0,1 0 0,-1 1 0,-1-1 0,1 0 0,0 1 0,-1 0 0,1-1 0,-1 1 0,0 0 0,0 0 0,0 0 0,0 0 0,0 0 0,-1 0 0,1 0 0,-1 5 0,0-3 0,-1 0 0,0 0 0,0 0 0,0 0 0,-1 0 0,1 0 0,-1 0 0,-1 0 0,1-1 0,-4 6 0,-8 9 0,0-2 0,-1 0 0,-1 0 0,-18 14 0,24-23 0,-90 91-1365,88-89-5461</inkml:trace>
+</inkml:ink>
+</file>
+
+<file path=ppt/ink/ink174.xml><?xml version="1.0" encoding="utf-8"?>
+<inkml:ink xmlns:inkml="http://www.w3.org/2003/InkML">
+  <inkml:definitions>
+    <inkml:context xml:id="ctx0">
+      <inkml:inkSource xml:id="inkSrc0">
+        <inkml:traceFormat>
+          <inkml:channel name="X" type="integer" min="-2.14748E9" max="2.14748E9" units="cm"/>
+          <inkml:channel name="Y" type="integer" min="-2.14748E9" max="2.14748E9" units="cm"/>
+          <inkml:channel name="F" type="integer" max="32767" units="dev"/>
+        </inkml:traceFormat>
+        <inkml:channelProperties>
+          <inkml:channelProperty channel="X" name="resolution" value="1000" units="1/cm"/>
+          <inkml:channelProperty channel="Y" name="resolution" value="1000" units="1/cm"/>
+          <inkml:channelProperty channel="F" name="resolution" value="0" units="1/dev"/>
+        </inkml:channelProperties>
+      </inkml:inkSource>
+      <inkml:timestamp xml:id="ts0" timeString="2026-02-09T10:21:10.243"/>
+    </inkml:context>
+    <inkml:brush xml:id="br0">
+      <inkml:brushProperty name="width" value="0.035" units="cm"/>
+      <inkml:brushProperty name="height" value="0.035" units="cm"/>
+    </inkml:brush>
+  </inkml:definitions>
+  <inkml:trace contextRef="#ctx0" brushRef="#br0">1859 107 24575,'-7'-5'0,"-1"0"0,0 0 0,0 1 0,0 0 0,-1 1 0,0-1 0,1 2 0,-15-4 0,-1-1 0,-22-4 0,-1 1 0,0 3 0,-90-3 0,4 1 0,36 0 0,-1 4 0,-128 10 0,212-3 0,1 1 0,0 0 0,-1 0 0,1 1 0,1 1 0,-1 0 0,1 1 0,0 1 0,0 0 0,-20 15 0,-4 8 0,-59 63 0,43-40 0,-13 14 0,4 2 0,2 4 0,3 2 0,4 2 0,3 2 0,-61 137 0,93-176-1035,3 2-1,-16 73 0,-6 90-2579,33-182 3553,-11 120 2910,9 276 1,8-229-1762,-5-9-1087,0 0 0,25 221 0,-16-346 0,3 0 0,2-1 0,2 0 0,3-1 0,2-1 0,2-1 0,3 0 0,38 59 0,-38-73 0,2-1 0,1-2 0,3-1 0,0-1 0,38 31 0,-46-47 0,0 0 0,1-2 0,1 0 0,1-2 0,0-1 0,0-1 0,1-1 0,1-1 0,37 8 0,31-3 0,0-4 0,1-4 0,186-14 0,-260 6 0,-1-2 0,1 0 0,-1-1 0,0-1 0,-1-2 0,0 0 0,0-1 0,0 0 0,-1-2 0,-1 0 0,32-26 0,9-14 0,-3-2 0,50-61 0,-42 44 0,-16 20 0,-2-1 0,-3-3 0,-2-1 0,-2-2 0,56-113 0,-67 97 0,-4-1 0,-3-1 0,-3 0 0,-4-2 0,5-82 0,-11-286 0,-11 250 0,2 122 0,-2-1 0,-4 1 0,-29-134 0,-1 83 0,-5 2 0,-6 1 0,-5 3 0,-77-126 0,107 203 0,-104-170 0,100 172 0,-2 1 0,-1 1 0,-40-37 0,47 54-1365,1 4-5461</inkml:trace>
+</inkml:ink>
+</file>
+
+<file path=ppt/ink/ink175.xml><?xml version="1.0" encoding="utf-8"?>
+<inkml:ink xmlns:inkml="http://www.w3.org/2003/InkML">
+  <inkml:definitions>
+    <inkml:context xml:id="ctx0">
+      <inkml:inkSource xml:id="inkSrc0">
+        <inkml:traceFormat>
+          <inkml:channel name="X" type="integer" min="-2.14748E9" max="2.14748E9" units="cm"/>
+          <inkml:channel name="Y" type="integer" min="-2.14748E9" max="2.14748E9" units="cm"/>
+          <inkml:channel name="F" type="integer" max="32767" units="dev"/>
+        </inkml:traceFormat>
+        <inkml:channelProperties>
+          <inkml:channelProperty channel="X" name="resolution" value="1000" units="1/cm"/>
+          <inkml:channelProperty channel="Y" name="resolution" value="1000" units="1/cm"/>
+          <inkml:channelProperty channel="F" name="resolution" value="0" units="1/dev"/>
+        </inkml:channelProperties>
+      </inkml:inkSource>
+      <inkml:timestamp xml:id="ts0" timeString="2026-02-09T10:21:11.729"/>
+    </inkml:context>
+    <inkml:brush xml:id="br0">
+      <inkml:brushProperty name="width" value="0.035" units="cm"/>
+      <inkml:brushProperty name="height" value="0.035" units="cm"/>
+    </inkml:brush>
+  </inkml:definitions>
+  <inkml:trace contextRef="#ctx0" brushRef="#br0">10 47 24575,'0'-2'0,"0"0"0,0 1 0,0-1 0,0 0 0,0 0 0,0 0 0,1 1 0,-1-1 0,1 0 0,-1 0 0,1 1 0,0-1 0,0 0 0,-1 1 0,1-1 0,0 1 0,1-1 0,-1 1 0,0-1 0,0 1 0,1 0 0,-1 0 0,0 0 0,1 0 0,-1 0 0,1 0 0,0 0 0,-1 0 0,1 0 0,0 1 0,-1-1 0,1 1 0,0-1 0,0 1 0,0 0 0,-1-1 0,1 1 0,0 0 0,0 0 0,0 0 0,2 1 0,-1-1 0,1 1 0,-1 0 0,1 0 0,-1 0 0,1 0 0,-1 0 0,0 1 0,1-1 0,-1 1 0,0 0 0,0 0 0,0 0 0,0 0 0,-1 1 0,1-1 0,0 1 0,-1 0 0,0-1 0,0 1 0,3 5 0,2 7 0,-1 0 0,-1 0 0,0 1 0,-1 0 0,-1-1 0,0 1 0,-1 0 0,-1 1 0,-1-1 0,0 0 0,-3 17 0,3-30 0,-1 0 0,0-1 0,0 1 0,0-1 0,0 1 0,0-1 0,-1 1 0,1-1 0,-1 1 0,0-1 0,1 0 0,-1 0 0,0 0 0,0 0 0,-1 0 0,1-1 0,0 1 0,0-1 0,-1 1 0,1-1 0,-1 0 0,0 0 0,-2 1 0,-5 0 0,0 0 0,0-1 0,1 0 0,-1 0 0,-12-2 0,-20 2 0,94 24 0,-21-17 0,2-2 0,-1-1 0,1-2 0,-1-1 0,1-1 0,40-5 0,-70 5-45,0-1-1,1 0 1,-1 0-1,0-1 1,0 1-1,0-1 1,0 1-1,0-1 1,0 0-1,0 0 1,0 0-1,0-1 1,0 1-1,0-1 1,-1 1-1,1-1 1,0 0-1,-1 0 1,0 0-1,1-1 1,-1 1-1,0 0 1,0-1-1,0 0 0,-1 1 1,1-1-1,-1 0 1,1 0-1,0-4 1,2-12-6781</inkml:trace>
+</inkml:ink>
+</file>
+
+<file path=ppt/ink/ink176.xml><?xml version="1.0" encoding="utf-8"?>
+<inkml:ink xmlns:inkml="http://www.w3.org/2003/InkML">
+  <inkml:definitions>
+    <inkml:context xml:id="ctx0">
+      <inkml:inkSource xml:id="inkSrc0">
+        <inkml:traceFormat>
+          <inkml:channel name="X" type="integer" min="-2.14748E9" max="2.14748E9" units="cm"/>
+          <inkml:channel name="Y" type="integer" min="-2.14748E9" max="2.14748E9" units="cm"/>
+          <inkml:channel name="F" type="integer" max="32767" units="dev"/>
+        </inkml:traceFormat>
+        <inkml:channelProperties>
+          <inkml:channelProperty channel="X" name="resolution" value="1000" units="1/cm"/>
+          <inkml:channelProperty channel="Y" name="resolution" value="1000" units="1/cm"/>
+          <inkml:channelProperty channel="F" name="resolution" value="0" units="1/dev"/>
+        </inkml:channelProperties>
+      </inkml:inkSource>
+      <inkml:timestamp xml:id="ts0" timeString="2026-02-09T10:21:12.890"/>
+    </inkml:context>
+    <inkml:brush xml:id="br0">
+      <inkml:brushProperty name="width" value="0.035" units="cm"/>
+      <inkml:brushProperty name="height" value="0.035" units="cm"/>
+    </inkml:brush>
+  </inkml:definitions>
+  <inkml:trace contextRef="#ctx0" brushRef="#br0">793 155 24575,'-1'-2'0,"1"0"0,-1-1 0,1 1 0,-1 0 0,0 0 0,0 0 0,0 0 0,-1 0 0,1 0 0,0 0 0,-1 0 0,1 0 0,-1 0 0,0 1 0,1-1 0,-1 1 0,-3-3 0,-37-23 0,36 23 0,-21-10 0,-1 1 0,0 1 0,0 2 0,-1 1 0,-1 1 0,1 1 0,-1 2 0,0 1 0,-1 1 0,1 1 0,-36 4 0,60-1 0,0 0 0,0 0 0,1 1 0,-1 0 0,0 0 0,1 1 0,-1 0 0,1 0 0,0 0 0,0 0 0,0 1 0,0 0 0,1 0 0,-1 0 0,1 0 0,-5 7 0,-6 10 0,1 0 0,-19 37 0,17-28 0,-22 37 0,3 1 0,-32 89 0,61-140 0,1 0 0,2 0 0,-1 0 0,2 0 0,0 0 0,1 1 0,1-1 0,1 1 0,0-1 0,6 25 0,-5-31 0,1 0 0,1-1 0,0 1 0,0-1 0,1 0 0,0 0 0,0-1 0,1 0 0,1 0 0,0 0 0,0 0 0,0-1 0,1-1 0,0 1 0,1-1 0,0 0 0,16 9 0,10 1 0,0-2 0,1-1 0,0-2 0,1-1 0,0-2 0,1-1 0,42 2 0,274-1 0,-320-9 0,-19 0 0,0-1 0,0 0 0,0-1 0,26-6 0,-37 7 0,0-1 0,0 1 0,0-1 0,0 0 0,-1 0 0,1 0 0,0 0 0,-1-1 0,0 0 0,0 1 0,0-1 0,0 0 0,0-1 0,0 1 0,-1 0 0,0-1 0,1 1 0,-1-1 0,-1 0 0,1 0 0,2-7 0,5-36-25,-1-1 0,-3-1 0,-1 1 0,-7-91 0,1 39-1215,2 78-5586</inkml:trace>
+</inkml:ink>
+</file>
+
+<file path=ppt/ink/ink177.xml><?xml version="1.0" encoding="utf-8"?>
+<inkml:ink xmlns:inkml="http://www.w3.org/2003/InkML">
+  <inkml:definitions>
+    <inkml:context xml:id="ctx0">
+      <inkml:inkSource xml:id="inkSrc0">
+        <inkml:traceFormat>
+          <inkml:channel name="X" type="integer" min="-2.14748E9" max="2.14748E9" units="cm"/>
+          <inkml:channel name="Y" type="integer" min="-2.14748E9" max="2.14748E9" units="cm"/>
+          <inkml:channel name="F" type="integer" max="32767" units="dev"/>
+        </inkml:traceFormat>
+        <inkml:channelProperties>
+          <inkml:channelProperty channel="X" name="resolution" value="1000" units="1/cm"/>
+          <inkml:channelProperty channel="Y" name="resolution" value="1000" units="1/cm"/>
+          <inkml:channelProperty channel="F" name="resolution" value="0" units="1/dev"/>
+        </inkml:channelProperties>
+      </inkml:inkSource>
+      <inkml:timestamp xml:id="ts0" timeString="2026-02-09T10:21:16.497"/>
+    </inkml:context>
+    <inkml:brush xml:id="br0">
+      <inkml:brushProperty name="width" value="0.035" units="cm"/>
+      <inkml:brushProperty name="height" value="0.035" units="cm"/>
+    </inkml:brush>
+  </inkml:definitions>
+  <inkml:trace contextRef="#ctx0" brushRef="#br0">0 153 24575,'1'-3'0,"-1"0"0,1 0 0,0 0 0,0-1 0,0 1 0,0 0 0,1 0 0,-1 0 0,1 1 0,-1-1 0,1 0 0,0 0 0,0 1 0,1 0 0,-1-1 0,0 1 0,1 0 0,-1 0 0,1 0 0,3-2 0,10-5 0,0 0 0,24-10 0,-18 9 0,-2 1 0,-1 2 0,2 0 0,-1 0 0,1 2 0,0 1 0,0 0 0,1 2 0,24 0 0,-33 2 0,0 0 0,-1 1 0,1 1 0,-1 0 0,0 0 0,1 2 0,-1-1 0,-1 1 0,1 1 0,0 0 0,-1 1 0,0 0 0,-1 1 0,1 0 0,12 12 0,-16-11 0,-1 0 0,1 1 0,-2 0 0,1 1 0,-1-1 0,-1 1 0,1 0 0,-2 0 0,0 0 0,0 0 0,0 1 0,-1-1 0,-1 1 0,1 15 0,-2-13 0,1-1 0,-2 0 0,1 1 0,-2-1 0,0 0 0,0 0 0,-1 1 0,0-2 0,-1 1 0,-1 0 0,0-1 0,-8 15 0,7-19 0,-1 0 0,0 1 0,0-2 0,0 1 0,-1-1 0,0 0 0,0-1 0,-1 0 0,1 0 0,-1-1 0,0 0 0,0 0 0,-1-1 0,1-1 0,-1 1 0,1-2 0,-1 1 0,0-1 0,0 0 0,1-1 0,-14-2 0,6 1 0,-1 0 0,0-2 0,1 0 0,-1-1 0,1-1 0,0-1 0,1 0 0,-1-1 0,1-1 0,-28-18 0,27 12 0,0 0 0,1-2 0,-16-19 0,32 34 0,0 1 0,-1 0 0,1 0 0,0-1 0,0 1 0,0 0 0,0 0 0,0-1 0,0 1 0,-1 0 0,1 0 0,0 0 0,0-1 0,0 1 0,0 0 0,-1 0 0,1 0 0,0-1 0,0 1 0,-1 0 0,1 0 0,0 0 0,0 0 0,-1 0 0,1 0 0,0 0 0,0 0 0,-1-1 0,1 1 0,0 0 0,0 0 0,-1 0 0,1 0 0,0 0 0,-1 0 0,1 1 0,0-1 0,0 0 0,-1 0 0,1 0 0,0 0 0,0 0 0,-1 0 0,1 0 0,0 0 0,0 1 0,0-1 0,-1 0 0,1 0 0,0 0 0,-1 1 0,-1 20 0,8 42 0,-4-50 0,5 83 0,-4 0 0,-18 178 0,15-228 0,0-46 0,0 0 0,0 0 0,0 1 0,0-1 0,0 0 0,0 0 0,0 1 0,0-1 0,1 0 0,-1 0 0,0 1 0,0-1 0,0 0 0,0 0 0,1 0 0,-1 0 0,0 1 0,0-1 0,0 0 0,1 0 0,-1 0 0,0 0 0,0 0 0,1 1 0,-1-1 0,0 0 0,0 0 0,1 0 0,-1 0 0,0 0 0,0 0 0,1 0 0,-1 0 0,0 0 0,0 0 0,1 0 0,-1 0 0,0 0 0,0 0 0,1 0 0,-1 0 0,0-1 0,20-17 0,37-56-1365,-26 36-5461</inkml:trace>
+</inkml:ink>
+</file>
+
+<file path=ppt/ink/ink178.xml><?xml version="1.0" encoding="utf-8"?>
+<inkml:ink xmlns:inkml="http://www.w3.org/2003/InkML">
+  <inkml:definitions>
+    <inkml:context xml:id="ctx0">
+      <inkml:inkSource xml:id="inkSrc0">
+        <inkml:traceFormat>
+          <inkml:channel name="X" type="integer" min="-2.14748E9" max="2.14748E9" units="cm"/>
+          <inkml:channel name="Y" type="integer" min="-2.14748E9" max="2.14748E9" units="cm"/>
+          <inkml:channel name="F" type="integer" max="32767" units="dev"/>
+        </inkml:traceFormat>
+        <inkml:channelProperties>
+          <inkml:channelProperty channel="X" name="resolution" value="1000" units="1/cm"/>
+          <inkml:channelProperty channel="Y" name="resolution" value="1000" units="1/cm"/>
+          <inkml:channelProperty channel="F" name="resolution" value="0" units="1/dev"/>
+        </inkml:channelProperties>
+      </inkml:inkSource>
+      <inkml:timestamp xml:id="ts0" timeString="2026-02-09T10:21:16.864"/>
+    </inkml:context>
+    <inkml:brush xml:id="br0">
+      <inkml:brushProperty name="width" value="0.035" units="cm"/>
+      <inkml:brushProperty name="height" value="0.035" units="cm"/>
+    </inkml:brush>
+  </inkml:definitions>
+  <inkml:trace contextRef="#ctx0" brushRef="#br0">1 0 24575,'0'10'0,"1"1"0,1-1 0,0 0 0,1 0 0,-1-1 0,2 1 0,-1 0 0,2-1 0,-1 0 0,10 15 0,-6-13 0,0 1 0,1-2 0,0 1 0,1-1 0,0 0 0,0-1 0,16 11 0,-15-14 10,0 0-1,0-1 1,1 0-1,-1 0 0,1-2 1,0 1-1,0-1 1,25 2-1,4-3-352,56-3 0,-63-1-421,-9 2-6062</inkml:trace>
+</inkml:ink>
+</file>
+
+<file path=ppt/ink/ink179.xml><?xml version="1.0" encoding="utf-8"?>
+<inkml:ink xmlns:inkml="http://www.w3.org/2003/InkML">
+  <inkml:definitions>
+    <inkml:context xml:id="ctx0">
+      <inkml:inkSource xml:id="inkSrc0">
+        <inkml:traceFormat>
+          <inkml:channel name="X" type="integer" min="-2.14748E9" max="2.14748E9" units="cm"/>
+          <inkml:channel name="Y" type="integer" min="-2.14748E9" max="2.14748E9" units="cm"/>
+          <inkml:channel name="F" type="integer" max="32767" units="dev"/>
+        </inkml:traceFormat>
+        <inkml:channelProperties>
+          <inkml:channelProperty channel="X" name="resolution" value="1000" units="1/cm"/>
+          <inkml:channelProperty channel="Y" name="resolution" value="1000" units="1/cm"/>
+          <inkml:channelProperty channel="F" name="resolution" value="0" units="1/dev"/>
+        </inkml:channelProperties>
+      </inkml:inkSource>
+      <inkml:timestamp xml:id="ts0" timeString="2026-02-09T10:21:17.525"/>
+    </inkml:context>
+    <inkml:brush xml:id="br0">
+      <inkml:brushProperty name="width" value="0.035" units="cm"/>
+      <inkml:brushProperty name="height" value="0.035" units="cm"/>
+    </inkml:brush>
+  </inkml:definitions>
+  <inkml:trace contextRef="#ctx0" brushRef="#br0">83 387 24575,'60'-53'0,"-42"39"0,-1-1 0,21-23 0,-33 32 0,0 0 0,-1-1 0,0 1 0,0-1 0,0 0 0,-1 0 0,0 0 0,0 0 0,-1-1 0,3-13 0,-3 6 0,0 0 0,-1 0 0,-1 1 0,0-1 0,-1 0 0,-4-18 0,5 30 0,-1 0 0,1 1 0,-1-1 0,0 1 0,1-1 0,-1 1 0,0 0 0,0-1 0,-1 1 0,1 0 0,0 0 0,-1 0 0,0 0 0,1 0 0,-1 0 0,0 0 0,0 0 0,0 1 0,0-1 0,0 1 0,0-1 0,0 1 0,-1 0 0,1 0 0,0 0 0,-1 0 0,1 0 0,-1 1 0,1-1 0,-1 1 0,0-1 0,1 1 0,-1 0 0,1 0 0,-1 0 0,1 0 0,-1 1 0,0-1 0,1 1 0,-1 0 0,1-1 0,0 1 0,-1 0 0,-2 2 0,-4 2 0,-1 0 0,1 0 0,1 1 0,-1 0 0,1 0 0,0 1 0,0 0 0,1 1 0,0-1 0,0 2 0,1-1 0,0 1 0,0 0 0,1 0 0,-4 10 0,1-1 0,1 0 0,0 1 0,1-1 0,1 1 0,1 1 0,1-1 0,-1 23 0,3-33 0,1-1 0,0 1 0,1-1 0,0 0 0,0 1 0,1-1 0,0 0 0,0 1 0,1-1 0,4 9 0,-4-12 0,1 1 0,0-1 0,0 0 0,0 0 0,0 0 0,1 0 0,0-1 0,0 0 0,0 0 0,1 0 0,-1-1 0,1 0 0,11 5 0,6 1 0,1-1 0,0-1 0,1-1 0,0-1 0,35 2 0,-11-4 0,90-7 0,-128 2-227,0 1-1,-1-1 1,1 0-1,-1-1 1,20-8-1,-10 0-6598</inkml:trace>
+</inkml:ink>
+</file>
+
 <file path=ppt/ink/ink18.xml><?xml version="1.0" encoding="utf-8"?>
 <inkml:ink xmlns:inkml="http://www.w3.org/2003/InkML">
   <inkml:definitions>
@@ -1494,6 +2583,276 @@
 </inkml:ink>
 </file>
 
+<file path=ppt/ink/ink180.xml><?xml version="1.0" encoding="utf-8"?>
+<inkml:ink xmlns:inkml="http://www.w3.org/2003/InkML">
+  <inkml:definitions>
+    <inkml:context xml:id="ctx0">
+      <inkml:inkSource xml:id="inkSrc0">
+        <inkml:traceFormat>
+          <inkml:channel name="X" type="integer" min="-2.14748E9" max="2.14748E9" units="cm"/>
+          <inkml:channel name="Y" type="integer" min="-2.14748E9" max="2.14748E9" units="cm"/>
+          <inkml:channel name="F" type="integer" max="32767" units="dev"/>
+        </inkml:traceFormat>
+        <inkml:channelProperties>
+          <inkml:channelProperty channel="X" name="resolution" value="1000" units="1/cm"/>
+          <inkml:channelProperty channel="Y" name="resolution" value="1000" units="1/cm"/>
+          <inkml:channelProperty channel="F" name="resolution" value="0" units="1/dev"/>
+        </inkml:channelProperties>
+      </inkml:inkSource>
+      <inkml:timestamp xml:id="ts0" timeString="2026-02-09T10:21:18.335"/>
+    </inkml:context>
+    <inkml:brush xml:id="br0">
+      <inkml:brushProperty name="width" value="0.035" units="cm"/>
+      <inkml:brushProperty name="height" value="0.035" units="cm"/>
+    </inkml:brush>
+  </inkml:definitions>
+  <inkml:trace contextRef="#ctx0" brushRef="#br0">433 2 24575,'-36'-1'0,"0"2"0,-1 1 0,1 2 0,-70 18 0,96-19 0,0 0 0,0 1 0,0 0 0,1 1 0,-1 0 0,1 0 0,1 1 0,-1 0 0,1 1 0,0 0 0,0 0 0,1 0 0,0 1 0,0 0 0,1 1 0,0 0 0,1 0 0,0 0 0,0 0 0,1 1 0,-6 19 0,7-20 0,1 0 0,0 0 0,0 0 0,1 0 0,1 0 0,0 0 0,0 0 0,0 0 0,3 10 0,-3-16 0,1 1 0,0-1 0,0 0 0,1 0 0,-1 0 0,1 0 0,-1 0 0,1 0 0,0 0 0,0-1 0,0 1 0,1-1 0,-1 1 0,1-1 0,-1 0 0,1 0 0,0 0 0,-1 0 0,1 0 0,0-1 0,0 0 0,1 1 0,-1-1 0,0 0 0,0 0 0,0-1 0,6 2 0,8 0 0,0 0 0,1-1 0,-1-1 0,1-1 0,-1 0 0,0-1 0,31-8 0,-38 8 0,-1-1 0,0-1 0,0 0 0,0 0 0,0 0 0,-1-1 0,0-1 0,0 1 0,0-1 0,0-1 0,-1 1 0,0-1 0,-1-1 0,1 1 0,5-10 0,-6 6 0,22-29 0,-28 40 0,0-1 0,1 1 0,-1 0 0,1-1 0,-1 1 0,0 0 0,1 0 0,-1-1 0,1 1 0,-1 0 0,1 0 0,-1-1 0,1 1 0,-1 0 0,1 0 0,-1 0 0,1 0 0,-1 0 0,1 0 0,-1 0 0,1 0 0,-1 0 0,1 0 0,-1 0 0,1 0 0,-1 0 0,1 1 0,0-1 0,0 1 0,0 0 0,0 1 0,0-1 0,0 0 0,0 0 0,-1 1 0,1-1 0,0 1 0,-1-1 0,1 1 0,-1-1 0,1 1 0,-1-1 0,1 3 0,0 5 0,1 0 0,1 0 0,0-1 0,0 1 0,1-1 0,0 0 0,0 0 0,1 0 0,0-1 0,0 0 0,1 0 0,-1 0 0,2 0 0,-1-1 0,1 0 0,0 0 0,0-1 0,1 0 0,-1 0 0,1-1 0,0 0 0,1 0 0,-1-1 0,1 0 0,17 4 0,-1-2-114,0-1 1,0-1-1,0-1 0,1-1 0,-1-2 1,1 0-1,-1-1 0,0-2 0,0-1 1,0 0-1,25-11 0,-22 8-6712</inkml:trace>
+</inkml:ink>
+</file>
+
+<file path=ppt/ink/ink181.xml><?xml version="1.0" encoding="utf-8"?>
+<inkml:ink xmlns:inkml="http://www.w3.org/2003/InkML">
+  <inkml:definitions>
+    <inkml:context xml:id="ctx0">
+      <inkml:inkSource xml:id="inkSrc0">
+        <inkml:traceFormat>
+          <inkml:channel name="X" type="integer" min="-2.14748E9" max="2.14748E9" units="cm"/>
+          <inkml:channel name="Y" type="integer" min="-2.14748E9" max="2.14748E9" units="cm"/>
+          <inkml:channel name="F" type="integer" max="32767" units="dev"/>
+        </inkml:traceFormat>
+        <inkml:channelProperties>
+          <inkml:channelProperty channel="X" name="resolution" value="1000" units="1/cm"/>
+          <inkml:channelProperty channel="Y" name="resolution" value="1000" units="1/cm"/>
+          <inkml:channelProperty channel="F" name="resolution" value="0" units="1/dev"/>
+        </inkml:channelProperties>
+      </inkml:inkSource>
+      <inkml:timestamp xml:id="ts0" timeString="2026-02-09T10:21:19.159"/>
+    </inkml:context>
+    <inkml:brush xml:id="br0">
+      <inkml:brushProperty name="width" value="0.035" units="cm"/>
+      <inkml:brushProperty name="height" value="0.035" units="cm"/>
+    </inkml:brush>
+  </inkml:definitions>
+  <inkml:trace contextRef="#ctx0" brushRef="#br0">612 0 24575,'-14'375'-5591,"4"-179"3206,7-67 4708,-4-167 3429,-33-94-5851,32 109 99,-1 1 0,-1 0 0,-2 1 0,1 0 0,-2 1 0,-1 1 0,-1 0 0,-31-32 0,39 44 0,0 0 0,-1 1 0,0 0 0,0 1 0,0 0 0,-1 0 0,0 0 0,0 1 0,0 1 0,0-1 0,-1 2 0,1-1 0,-1 1 0,0 1 0,0-1 0,1 2 0,-1-1 0,0 2 0,0-1 0,0 1 0,1 1 0,-1-1 0,0 2 0,-10 3 0,9-1 0,1 1 0,-1 0 0,1 1 0,1 0 0,-1 0 0,1 1 0,0 0 0,1 0 0,0 1 0,1 1 0,-1-1 0,2 1 0,-1 0 0,1 1 0,1-1 0,0 1 0,1 0 0,0 1 0,-5 20 0,7-23 0,1 0 0,-1 1 0,2-1 0,-1 0 0,1 0 0,0 1 0,1-1 0,0 0 0,1 0 0,0 0 0,5 15 0,-4-18 0,0 0 0,0 0 0,1 0 0,0 0 0,0-1 0,0 1 0,0-1 0,1 0 0,0 0 0,0-1 0,1 0 0,-1 0 0,1 0 0,0 0 0,0-1 0,0 0 0,7 3 0,14 3 0,1-1 0,0-1 0,0-1 0,44 3 0,120-3 0,-136-5 0,26-1-1365,-55-1-5461</inkml:trace>
+</inkml:ink>
+</file>
+
+<file path=ppt/ink/ink182.xml><?xml version="1.0" encoding="utf-8"?>
+<inkml:ink xmlns:inkml="http://www.w3.org/2003/InkML">
+  <inkml:definitions>
+    <inkml:context xml:id="ctx0">
+      <inkml:inkSource xml:id="inkSrc0">
+        <inkml:traceFormat>
+          <inkml:channel name="X" type="integer" min="-2.14748E9" max="2.14748E9" units="cm"/>
+          <inkml:channel name="Y" type="integer" min="-2.14748E9" max="2.14748E9" units="cm"/>
+          <inkml:channel name="F" type="integer" max="32767" units="dev"/>
+        </inkml:traceFormat>
+        <inkml:channelProperties>
+          <inkml:channelProperty channel="X" name="resolution" value="1000" units="1/cm"/>
+          <inkml:channelProperty channel="Y" name="resolution" value="1000" units="1/cm"/>
+          <inkml:channelProperty channel="F" name="resolution" value="0" units="1/dev"/>
+        </inkml:channelProperties>
+      </inkml:inkSource>
+      <inkml:timestamp xml:id="ts0" timeString="2026-02-09T10:21:19.941"/>
+    </inkml:context>
+    <inkml:brush xml:id="br0">
+      <inkml:brushProperty name="width" value="0.035" units="cm"/>
+      <inkml:brushProperty name="height" value="0.035" units="cm"/>
+    </inkml:brush>
+  </inkml:definitions>
+  <inkml:trace contextRef="#ctx0" brushRef="#br0">437 0 24575,'-1'158'0,"3"170"0,-2-321 0,1-1 0,-1 1 0,1 0 0,1 0 0,-1-1 0,3 8 0,1-10 0,-3-12 0,-1-14 0,-2 11 0,-1 1 0,0-1 0,-1 0 0,0 0 0,-1 1 0,0 0 0,-1 0 0,0 0 0,0 0 0,-1 1 0,0 0 0,-1 0 0,0 0 0,-1 1 0,1 0 0,-16-11 0,12 11 0,0 0 0,0 1 0,-1 0 0,0 1 0,0 1 0,-1 0 0,1 0 0,-1 1 0,0 1 0,-1 0 0,1 1 0,0 0 0,-18 1 0,22 1 0,-4 0 0,0 0 0,0 0 0,0 2 0,0 0 0,-21 5 0,30-6 0,1 1 0,0-1 0,0 1 0,0 0 0,0 0 0,0 0 0,0 0 0,0 0 0,1 1 0,-1-1 0,1 1 0,-1 0 0,1-1 0,0 1 0,0 0 0,1 0 0,-1 1 0,0-1 0,1 0 0,0 1 0,0-1 0,0 0 0,0 1 0,1-1 0,-1 6 0,0-2 4,0 0 0,1-1-1,-1 1 1,2 0 0,-1 0 0,1-1-1,0 1 1,0 0 0,1-1 0,0 1-1,0-1 1,0 0 0,1 1 0,0-1-1,0 0 1,1-1 0,-1 1 0,1-1-1,1 1 1,-1-1 0,1 0 0,0-1-1,0 1 1,0-1 0,0 0 0,1 0-1,0-1 1,0 1 0,0-1 0,0-1-1,9 4 1,9 1-216,1 0 0,0-2 0,0-1-1,1 0 1,0-2 0,49-3 0,-51 0-6614</inkml:trace>
+</inkml:ink>
+</file>
+
+<file path=ppt/ink/ink183.xml><?xml version="1.0" encoding="utf-8"?>
+<inkml:ink xmlns:inkml="http://www.w3.org/2003/InkML">
+  <inkml:definitions>
+    <inkml:context xml:id="ctx0">
+      <inkml:inkSource xml:id="inkSrc0">
+        <inkml:traceFormat>
+          <inkml:channel name="X" type="integer" min="-2.14748E9" max="2.14748E9" units="cm"/>
+          <inkml:channel name="Y" type="integer" min="-2.14748E9" max="2.14748E9" units="cm"/>
+          <inkml:channel name="F" type="integer" max="32767" units="dev"/>
+        </inkml:traceFormat>
+        <inkml:channelProperties>
+          <inkml:channelProperty channel="X" name="resolution" value="1000" units="1/cm"/>
+          <inkml:channelProperty channel="Y" name="resolution" value="1000" units="1/cm"/>
+          <inkml:channelProperty channel="F" name="resolution" value="0" units="1/dev"/>
+        </inkml:channelProperties>
+      </inkml:inkSource>
+      <inkml:timestamp xml:id="ts0" timeString="2026-02-09T10:21:20.572"/>
+    </inkml:context>
+    <inkml:brush xml:id="br0">
+      <inkml:brushProperty name="width" value="0.035" units="cm"/>
+      <inkml:brushProperty name="height" value="0.035" units="cm"/>
+    </inkml:brush>
+  </inkml:definitions>
+  <inkml:trace contextRef="#ctx0" brushRef="#br0">120 1 24575,'-5'0'0,"0"0"0,0 1 0,0 0 0,0 0 0,0 1 0,0-1 0,0 1 0,1 0 0,-1 1 0,1-1 0,-1 1 0,1-1 0,0 1 0,0 1 0,0-1 0,1 0 0,-1 1 0,1 0 0,-6 8 0,5-7 0,1 0 0,0 0 0,0 1 0,1-1 0,0 1 0,0-1 0,0 1 0,0 0 0,1 0 0,0 0 0,0 0 0,1 0 0,-1 0 0,1 0 0,1 0 0,1 10 0,-1-13 0,0 0 0,1 0 0,0 0 0,-1-1 0,1 1 0,0 0 0,0-1 0,1 1 0,-1-1 0,0 0 0,1 0 0,-1 0 0,1 0 0,0 0 0,0 0 0,0-1 0,0 0 0,0 1 0,0-1 0,0 0 0,0 0 0,0-1 0,0 1 0,1-1 0,-1 1 0,0-1 0,5 0 0,3 0 0,0 0 0,0 0 0,0-1 0,0 0 0,-1-1 0,1 0 0,11-4 0,-17 4-41,-1-1 0,1-1-1,0 1 1,-1-1-1,0 1 1,0-1 0,0 0-1,0-1 1,-1 1 0,0-1-1,1 1 1,-2-1-1,1 0 1,-1 0 0,1 0-1,-1-1 1,-1 1 0,1 0-1,-1-1 1,0 1-1,0-1 1,0 0 0,-1 1-1,0-1 1,0 1 0,0-1-1,-1 0 1,0 1-1,0-1 1,-1 1 0,1-1-1,-3-5 1,-8-6-6785</inkml:trace>
+</inkml:ink>
+</file>
+
+<file path=ppt/ink/ink184.xml><?xml version="1.0" encoding="utf-8"?>
+<inkml:ink xmlns:inkml="http://www.w3.org/2003/InkML">
+  <inkml:definitions>
+    <inkml:context xml:id="ctx0">
+      <inkml:inkSource xml:id="inkSrc0">
+        <inkml:traceFormat>
+          <inkml:channel name="X" type="integer" min="-2.14748E9" max="2.14748E9" units="cm"/>
+          <inkml:channel name="Y" type="integer" min="-2.14748E9" max="2.14748E9" units="cm"/>
+          <inkml:channel name="F" type="integer" max="32767" units="dev"/>
+        </inkml:traceFormat>
+        <inkml:channelProperties>
+          <inkml:channelProperty channel="X" name="resolution" value="1000" units="1/cm"/>
+          <inkml:channelProperty channel="Y" name="resolution" value="1000" units="1/cm"/>
+          <inkml:channelProperty channel="F" name="resolution" value="0" units="1/dev"/>
+        </inkml:channelProperties>
+      </inkml:inkSource>
+      <inkml:timestamp xml:id="ts0" timeString="2026-02-09T10:21:21.125"/>
+    </inkml:context>
+    <inkml:brush xml:id="br0">
+      <inkml:brushProperty name="width" value="0.035" units="cm"/>
+      <inkml:brushProperty name="height" value="0.035" units="cm"/>
+    </inkml:brush>
+  </inkml:definitions>
+  <inkml:trace contextRef="#ctx0" brushRef="#br0">198 1 24575,'-8'0'0,"1"0"0,-1 0 0,0 0 0,1 1 0,-1 0 0,1 1 0,-1 0 0,1 0 0,0 0 0,0 1 0,0 0 0,0 0 0,0 1 0,1 0 0,-1 0 0,1 1 0,0 0 0,1 0 0,-1 0 0,1 0 0,0 1 0,0 0 0,1 0 0,-1 0 0,1 1 0,-3 8 0,3-9 0,1-1 0,0 1 0,1 0 0,-1 0 0,1 1 0,1-1 0,-1 0 0,1 1 0,0-1 0,0 1 0,1-1 0,0 1 0,0-1 0,0 1 0,1-1 0,0 1 0,0-1 0,5 12 0,-2-10 0,0 0 0,1 0 0,0 0 0,0 0 0,1-1 0,0 0 0,1 0 0,-1-1 0,1 0 0,0 0 0,1 0 0,15 8 0,5 1 0,1-1 0,0-1 0,1-2 0,0-1 0,43 8 0,159 18 0,-218-34 0,621 31 0,-484-30 0,-71 5-1365,-56-4-5461</inkml:trace>
+</inkml:ink>
+</file>
+
+<file path=ppt/ink/ink185.xml><?xml version="1.0" encoding="utf-8"?>
+<inkml:ink xmlns:inkml="http://www.w3.org/2003/InkML">
+  <inkml:definitions>
+    <inkml:context xml:id="ctx0">
+      <inkml:inkSource xml:id="inkSrc0">
+        <inkml:traceFormat>
+          <inkml:channel name="X" type="integer" min="-2.14748E9" max="2.14748E9" units="cm"/>
+          <inkml:channel name="Y" type="integer" min="-2.14748E9" max="2.14748E9" units="cm"/>
+          <inkml:channel name="F" type="integer" max="32767" units="dev"/>
+        </inkml:traceFormat>
+        <inkml:channelProperties>
+          <inkml:channelProperty channel="X" name="resolution" value="1000" units="1/cm"/>
+          <inkml:channelProperty channel="Y" name="resolution" value="1000" units="1/cm"/>
+          <inkml:channelProperty channel="F" name="resolution" value="0" units="1/dev"/>
+        </inkml:channelProperties>
+      </inkml:inkSource>
+      <inkml:timestamp xml:id="ts0" timeString="2026-02-09T10:21:26.661"/>
+    </inkml:context>
+    <inkml:brush xml:id="br0">
+      <inkml:brushProperty name="width" value="0.035" units="cm"/>
+      <inkml:brushProperty name="height" value="0.035" units="cm"/>
+    </inkml:brush>
+  </inkml:definitions>
+  <inkml:trace contextRef="#ctx0" brushRef="#br0">0 0 24575,'2'1'0,"0"0"0,0-1 0,-1 1 0,1 0 0,-1 0 0,1 0 0,-1 0 0,1 0 0,-1 0 0,1 0 0,-1 0 0,0 1 0,0-1 0,1 0 0,-1 1 0,0-1 0,0 1 0,-1 0 0,1-1 0,0 1 0,0 0 0,-1-1 0,1 4 0,12 44 0,4 64 0,3 159 0,-21 121 0,-2-166 0,2-92 0,4 170 0,-1-277 0,1 0 0,2 0 0,1-1 0,1 1 0,1-1 0,1-1 0,24 47 0,-23-56 0,0 0 0,1-1 0,1 0 0,0 0 0,1-2 0,1 0 0,0 0 0,1-1 0,0-1 0,1 0 0,1-2 0,19 11 0,35 10 0,1-2 0,1-4 0,2-3 0,0-4 0,1-2 0,144 9 0,-184-25-1365,-9-2-5461</inkml:trace>
+</inkml:ink>
+</file>
+
+<file path=ppt/ink/ink186.xml><?xml version="1.0" encoding="utf-8"?>
+<inkml:ink xmlns:inkml="http://www.w3.org/2003/InkML">
+  <inkml:definitions>
+    <inkml:context xml:id="ctx0">
+      <inkml:inkSource xml:id="inkSrc0">
+        <inkml:traceFormat>
+          <inkml:channel name="X" type="integer" min="-2.14748E9" max="2.14748E9" units="cm"/>
+          <inkml:channel name="Y" type="integer" min="-2.14748E9" max="2.14748E9" units="cm"/>
+          <inkml:channel name="F" type="integer" max="32767" units="dev"/>
+        </inkml:traceFormat>
+        <inkml:channelProperties>
+          <inkml:channelProperty channel="X" name="resolution" value="1000" units="1/cm"/>
+          <inkml:channelProperty channel="Y" name="resolution" value="1000" units="1/cm"/>
+          <inkml:channelProperty channel="F" name="resolution" value="0" units="1/dev"/>
+        </inkml:channelProperties>
+      </inkml:inkSource>
+      <inkml:timestamp xml:id="ts0" timeString="2026-02-09T10:21:27.066"/>
+    </inkml:context>
+    <inkml:brush xml:id="br0">
+      <inkml:brushProperty name="width" value="0.035" units="cm"/>
+      <inkml:brushProperty name="height" value="0.035" units="cm"/>
+    </inkml:brush>
+  </inkml:definitions>
+  <inkml:trace contextRef="#ctx0" brushRef="#br0">248 0 24575,'1'10'0,"1"-1"0,0 0 0,0 1 0,1-1 0,0 0 0,8 15 0,4 11 0,5 18 0,-13-41 0,-2 1 0,0-1 0,-1 1 0,0 0 0,0 0 0,-2 1 0,0-1 0,0 1 0,-1 20 0,-2-30 0,1-1 0,-1 0 0,-1 1 0,1-1 0,0 0 0,-1 0 0,0 0 0,0 0 0,0 0 0,0 0 0,0-1 0,0 1 0,-1-1 0,1 1 0,-1-1 0,0 0 0,1 0 0,-6 3 0,-6 3 0,0-1 0,-27 10 0,17-8 0,-30 12-60,26-10-266,1 0 0,0 2-1,-28 18 1,37-18-6500</inkml:trace>
+</inkml:ink>
+</file>
+
+<file path=ppt/ink/ink187.xml><?xml version="1.0" encoding="utf-8"?>
+<inkml:ink xmlns:inkml="http://www.w3.org/2003/InkML">
+  <inkml:definitions>
+    <inkml:context xml:id="ctx0">
+      <inkml:inkSource xml:id="inkSrc0">
+        <inkml:traceFormat>
+          <inkml:channel name="X" type="integer" min="-2.14748E9" max="2.14748E9" units="cm"/>
+          <inkml:channel name="Y" type="integer" min="-2.14748E9" max="2.14748E9" units="cm"/>
+          <inkml:channel name="F" type="integer" max="32767" units="dev"/>
+        </inkml:traceFormat>
+        <inkml:channelProperties>
+          <inkml:channelProperty channel="X" name="resolution" value="1000" units="1/cm"/>
+          <inkml:channelProperty channel="Y" name="resolution" value="1000" units="1/cm"/>
+          <inkml:channelProperty channel="F" name="resolution" value="0" units="1/dev"/>
+        </inkml:channelProperties>
+      </inkml:inkSource>
+      <inkml:timestamp xml:id="ts0" timeString="2026-02-09T10:21:28.055"/>
+    </inkml:context>
+    <inkml:brush xml:id="br0">
+      <inkml:brushProperty name="width" value="0.035" units="cm"/>
+      <inkml:brushProperty name="height" value="0.035" units="cm"/>
+    </inkml:brush>
+  </inkml:definitions>
+  <inkml:trace contextRef="#ctx0" brushRef="#br0">8636 1703 24575,'-1'3'0,"-1"0"0,0-1 0,0 1 0,0 0 0,0-1 0,-1 0 0,1 0 0,0 1 0,-1-2 0,0 1 0,1 0 0,-1 0 0,0-1 0,0 1 0,0-1 0,-4 1 0,0 1 0,-30 13 0,-1-2 0,-67 16 0,41-13 0,-143 36 0,-382 46 0,-233-64 0,-919-138-543,1260 41 272,-757-198 0,1143 234 143,-408-118-3170,13-33 792,325 100 1308,113 49 2291,2-2 0,-80-62 1,107 73-742,0-1 1,1 0-1,2-2 1,0 0-1,1-2 1,2 0-1,0-1 1,1 0 0,2-2-1,1 1 1,1-2-1,1 0 1,-9-35-1,9 11-352,-2-3 0,-1 0 0,-23-54 0,30 93 0,0 0 0,-1 1 0,0 0 0,-2 0 0,1 1 0,-2 0 0,0 1 0,-1 0 0,0 1 0,0 0 0,-17-11 0,0 5 0,0 2 0,-2 0 0,1 3 0,-2 0 0,1 2 0,-65-14 0,-208-17 0,211 32 0,-468-10-683,500 20 1,39 0-6144</inkml:trace>
+</inkml:ink>
+</file>
+
+<file path=ppt/ink/ink188.xml><?xml version="1.0" encoding="utf-8"?>
+<inkml:ink xmlns:inkml="http://www.w3.org/2003/InkML">
+  <inkml:definitions>
+    <inkml:context xml:id="ctx0">
+      <inkml:inkSource xml:id="inkSrc0">
+        <inkml:traceFormat>
+          <inkml:channel name="X" type="integer" min="-2.14748E9" max="2.14748E9" units="cm"/>
+          <inkml:channel name="Y" type="integer" min="-2.14748E9" max="2.14748E9" units="cm"/>
+          <inkml:channel name="F" type="integer" max="32767" units="dev"/>
+        </inkml:traceFormat>
+        <inkml:channelProperties>
+          <inkml:channelProperty channel="X" name="resolution" value="1000" units="1/cm"/>
+          <inkml:channelProperty channel="Y" name="resolution" value="1000" units="1/cm"/>
+          <inkml:channelProperty channel="F" name="resolution" value="0" units="1/dev"/>
+        </inkml:channelProperties>
+      </inkml:inkSource>
+      <inkml:timestamp xml:id="ts0" timeString="2026-02-09T10:21:28.656"/>
+    </inkml:context>
+    <inkml:brush xml:id="br0">
+      <inkml:brushProperty name="width" value="0.035" units="cm"/>
+      <inkml:brushProperty name="height" value="0.035" units="cm"/>
+    </inkml:brush>
+  </inkml:definitions>
+  <inkml:trace contextRef="#ctx0" brushRef="#br0">344 1 24575,'-19'1'0,"0"0"0,0 2 0,0 1 0,0 0 0,1 1 0,-29 12 0,-100 56 0,144-73 0,1 1 0,0 0 0,0 0 0,1 0 0,-1 0 0,0 0 0,0 0 0,0 0 0,1 1 0,-1-1 0,0 1 0,1-1 0,0 1 0,-1 0 0,1 0 0,0-1 0,0 1 0,0 0 0,0 0 0,0 0 0,0 0 0,1 0 0,-1 0 0,1 0 0,-1 1 0,1-1 0,0 0 0,0 0 0,0 0 0,0 3 0,2 0 0,1 1 0,-1-1 0,1 0 0,0 0 0,1-1 0,-1 1 0,1-1 0,0 1 0,0-1 0,7 6 0,41 31 0,1-2 0,2-3 0,66 33 0,-69-39 0,472 233 0,-474-238-1365,-33-16-5461</inkml:trace>
+</inkml:ink>
+</file>
+
+<file path=ppt/ink/ink189.xml><?xml version="1.0" encoding="utf-8"?>
+<inkml:ink xmlns:inkml="http://www.w3.org/2003/InkML">
+  <inkml:definitions>
+    <inkml:context xml:id="ctx0">
+      <inkml:inkSource xml:id="inkSrc0">
+        <inkml:traceFormat>
+          <inkml:channel name="X" type="integer" min="-2.14748E9" max="2.14748E9" units="cm"/>
+          <inkml:channel name="Y" type="integer" min="-2.14748E9" max="2.14748E9" units="cm"/>
+          <inkml:channel name="F" type="integer" max="32767" units="dev"/>
+        </inkml:traceFormat>
+        <inkml:channelProperties>
+          <inkml:channelProperty channel="X" name="resolution" value="1000" units="1/cm"/>
+          <inkml:channelProperty channel="Y" name="resolution" value="1000" units="1/cm"/>
+          <inkml:channelProperty channel="F" name="resolution" value="0" units="1/dev"/>
+        </inkml:channelProperties>
+      </inkml:inkSource>
+      <inkml:timestamp xml:id="ts0" timeString="2026-02-09T10:21:35.254"/>
+    </inkml:context>
+    <inkml:brush xml:id="br0">
+      <inkml:brushProperty name="width" value="0.035" units="cm"/>
+      <inkml:brushProperty name="height" value="0.035" units="cm"/>
+    </inkml:brush>
+  </inkml:definitions>
+  <inkml:trace contextRef="#ctx0" brushRef="#br0">766 1225 24575,'-67'-71'0,"3"-4"0,3-2 0,4-2 0,3-3 0,-56-115 0,-1-55 0,14 4 0,61 177 0,33 66 0,-1 0 0,1 0 0,-1 1 0,0-1 0,0 1 0,-1-1 0,1 1 0,-1 1 0,0-1 0,0 1 0,-6-4 0,10 7 0,0-1 0,0 1 0,0 0 0,0-1 0,-1 1 0,1 0 0,0-1 0,0 1 0,0 0 0,0 0 0,-1 0 0,1 0 0,0 0 0,0 0 0,0 1 0,-1-1 0,1 0 0,0 1 0,0-1 0,0 1 0,0-1 0,0 1 0,0-1 0,0 1 0,0 0 0,0-1 0,-1 2 0,0 0 0,0 1 0,0 0 0,1-1 0,-1 1 0,1 0 0,0 0 0,0-1 0,0 1 0,0 0 0,-1 5 0,0 10 0,1-1 0,1 35 0,0-44 0,3 11 0,3-36 0,3-9 0,-4 14 0,1 1 0,0-1 0,0 1 0,1 0 0,1 1 0,10-12 0,-13 17 0,0 1 0,0 1 0,0-1 0,0 1 0,0-1 0,1 2 0,0-1 0,-1 1 0,1-1 0,0 2 0,0-1 0,0 1 0,0-1 0,1 2 0,6-1 0,4 1-3,0 0 0,1 2 0,-1 0-1,29 8 1,-2-1-1346,-21-5-5477</inkml:trace>
+</inkml:ink>
+</file>
+
 <file path=ppt/ink/ink19.xml><?xml version="1.0" encoding="utf-8"?>
 <inkml:ink xmlns:inkml="http://www.w3.org/2003/InkML">
   <inkml:definitions>
@@ -1522,6 +2881,276 @@
 </inkml:ink>
 </file>
 
+<file path=ppt/ink/ink190.xml><?xml version="1.0" encoding="utf-8"?>
+<inkml:ink xmlns:inkml="http://www.w3.org/2003/InkML">
+  <inkml:definitions>
+    <inkml:context xml:id="ctx0">
+      <inkml:inkSource xml:id="inkSrc0">
+        <inkml:traceFormat>
+          <inkml:channel name="X" type="integer" min="-2.14748E9" max="2.14748E9" units="cm"/>
+          <inkml:channel name="Y" type="integer" min="-2.14748E9" max="2.14748E9" units="cm"/>
+          <inkml:channel name="F" type="integer" max="32767" units="dev"/>
+        </inkml:traceFormat>
+        <inkml:channelProperties>
+          <inkml:channelProperty channel="X" name="resolution" value="1000" units="1/cm"/>
+          <inkml:channelProperty channel="Y" name="resolution" value="1000" units="1/cm"/>
+          <inkml:channelProperty channel="F" name="resolution" value="0" units="1/dev"/>
+        </inkml:channelProperties>
+      </inkml:inkSource>
+      <inkml:timestamp xml:id="ts0" timeString="2026-02-09T10:21:36.265"/>
+    </inkml:context>
+    <inkml:brush xml:id="br0">
+      <inkml:brushProperty name="width" value="0.035" units="cm"/>
+      <inkml:brushProperty name="height" value="0.035" units="cm"/>
+    </inkml:brush>
+  </inkml:definitions>
+  <inkml:trace contextRef="#ctx0" brushRef="#br0">498 166 24575,'0'-17'0,"-1"0"0,0 1 0,-1-1 0,-7-29 0,9 44 0,-1-1 0,0 1 0,1-1 0,-1 0 0,0 1 0,0 0 0,-1-1 0,1 1 0,0 0 0,-1-1 0,0 1 0,1 0 0,-1 0 0,0 0 0,0 0 0,0 1 0,0-1 0,0 0 0,0 1 0,-1-1 0,1 1 0,-1 0 0,1 0 0,-1 0 0,1 0 0,-1 0 0,1 1 0,-1-1 0,0 1 0,1 0 0,-1 0 0,0 0 0,1 0 0,-1 0 0,0 0 0,1 1 0,-1-1 0,-5 2 0,4 0 0,0 1 0,0-1 0,0 1 0,1-1 0,-1 1 0,0 0 0,1 1 0,0-1 0,0 1 0,0-1 0,0 1 0,0 0 0,1 0 0,0 0 0,0 0 0,0 0 0,0 1 0,1-1 0,-2 5 0,2-6 0,0-1 0,0 1 0,1-1 0,-1 1 0,1 0 0,-1-1 0,1 1 0,0 0 0,0-1 0,0 1 0,0 0 0,0 0 0,1-1 0,-1 1 0,1-1 0,0 1 0,0 0 0,0-1 0,0 1 0,0-1 0,0 0 0,1 1 0,-1-1 0,1 0 0,0 0 0,-1 0 0,1 0 0,0 0 0,0 0 0,0-1 0,1 1 0,-1-1 0,3 2 0,-2-2 0,0-1 0,1 1 0,-1-1 0,0 0 0,0 0 0,0-1 0,0 1 0,0 0 0,0-1 0,0 0 0,0 0 0,0 0 0,0 0 0,0 0 0,0-1 0,0 1 0,-1-1 0,5-4 0,49-40 0,-48 39 0,-1 1 0,-1 0 0,1 1 0,0-1 0,13-5 0,-20 10 0,1 1 0,-1 0 0,1 0 0,0-1 0,-1 1 0,1 0 0,-1 0 0,1 0 0,-1-1 0,1 1 0,0 0 0,-1 0 0,1 0 0,-1 0 0,1 0 0,-1 0 0,1 0 0,0 0 0,-1 1 0,1-1 0,-1 0 0,1 0 0,-1 0 0,1 1 0,-1-1 0,1 0 0,-1 0 0,1 1 0,-1-1 0,1 1 0,0 1 0,-1 0 0,1 0 0,-1-1 0,0 1 0,1 0 0,-1 0 0,0 0 0,0 0 0,-1 0 0,1 0 0,0 0 0,-1 0 0,1-1 0,-1 1 0,-1 3 0,-8 22 0,-1 0 0,-1-1 0,-2 0 0,0-1 0,-2 0 0,-1-1 0,0-1 0,-2-1 0,-36 33 0,49-50 0,-1 0 0,0-1 0,1 0 0,-2 0 0,1-1 0,0 0 0,-1 0 0,1-1 0,-1 1 0,-13 0 0,-83 7 0,93-10 0,-127 2-1365,109-2-5461</inkml:trace>
+</inkml:ink>
+</file>
+
+<file path=ppt/ink/ink191.xml><?xml version="1.0" encoding="utf-8"?>
+<inkml:ink xmlns:inkml="http://www.w3.org/2003/InkML">
+  <inkml:definitions>
+    <inkml:context xml:id="ctx0">
+      <inkml:inkSource xml:id="inkSrc0">
+        <inkml:traceFormat>
+          <inkml:channel name="X" type="integer" min="-2.14748E9" max="2.14748E9" units="cm"/>
+          <inkml:channel name="Y" type="integer" min="-2.14748E9" max="2.14748E9" units="cm"/>
+          <inkml:channel name="F" type="integer" max="32767" units="dev"/>
+        </inkml:traceFormat>
+        <inkml:channelProperties>
+          <inkml:channelProperty channel="X" name="resolution" value="1000" units="1/cm"/>
+          <inkml:channelProperty channel="Y" name="resolution" value="1000" units="1/cm"/>
+          <inkml:channelProperty channel="F" name="resolution" value="0" units="1/dev"/>
+        </inkml:channelProperties>
+      </inkml:inkSource>
+      <inkml:timestamp xml:id="ts0" timeString="2026-02-09T10:21:37.049"/>
+    </inkml:context>
+    <inkml:brush xml:id="br0">
+      <inkml:brushProperty name="width" value="0.035" units="cm"/>
+      <inkml:brushProperty name="height" value="0.035" units="cm"/>
+    </inkml:brush>
+  </inkml:definitions>
+  <inkml:trace contextRef="#ctx0" brushRef="#br0">1 221 24575,'26'-1'0,"1"-1"0,-1-2 0,0-1 0,0-1 0,0-1 0,-1-1 0,26-12 0,1-4 0,-1-3 0,56-37 0,-101 60 0,1-1 0,-1 0 0,0 0 0,0 0 0,10-12 0,-13 5 0,-14 14 0,-18 12 0,10 1 0,1 0 0,0 1 0,1 0 0,1 2 0,0 0 0,2 1 0,0 0 0,1 1 0,1 1 0,-15 33 0,25-52 0,1 1 0,0-1 0,0 1 0,0-1 0,0 1 0,1-1 0,-1 1 0,1 0 0,-1-1 0,1 1 0,0-1 0,0 1 0,0 0 0,0-1 0,1 1 0,-1 0 0,1-1 0,-1 1 0,1-1 0,0 1 0,2 3 0,-1-4 0,0 0 0,1 0 0,-1 0 0,1 0 0,-1-1 0,1 1 0,0-1 0,-1 1 0,1-1 0,0 0 0,0 0 0,0 0 0,0-1 0,0 1 0,0-1 0,0 0 0,0 1 0,5-2 0,39-4-1365,-29-2-5461</inkml:trace>
+</inkml:ink>
+</file>
+
+<file path=ppt/ink/ink192.xml><?xml version="1.0" encoding="utf-8"?>
+<inkml:ink xmlns:inkml="http://www.w3.org/2003/InkML">
+  <inkml:definitions>
+    <inkml:context xml:id="ctx0">
+      <inkml:inkSource xml:id="inkSrc0">
+        <inkml:traceFormat>
+          <inkml:channel name="X" type="integer" min="-2.14748E9" max="2.14748E9" units="cm"/>
+          <inkml:channel name="Y" type="integer" min="-2.14748E9" max="2.14748E9" units="cm"/>
+          <inkml:channel name="F" type="integer" max="32767" units="dev"/>
+        </inkml:traceFormat>
+        <inkml:channelProperties>
+          <inkml:channelProperty channel="X" name="resolution" value="1000" units="1/cm"/>
+          <inkml:channelProperty channel="Y" name="resolution" value="1000" units="1/cm"/>
+          <inkml:channelProperty channel="F" name="resolution" value="0" units="1/dev"/>
+        </inkml:channelProperties>
+      </inkml:inkSource>
+      <inkml:timestamp xml:id="ts0" timeString="2026-02-09T10:21:37.337"/>
+    </inkml:context>
+    <inkml:brush xml:id="br0">
+      <inkml:brushProperty name="width" value="0.035" units="cm"/>
+      <inkml:brushProperty name="height" value="0.035" units="cm"/>
+    </inkml:brush>
+  </inkml:definitions>
+  <inkml:trace contextRef="#ctx0" brushRef="#br0">1 83 24575,'4'0'0,"10"0"0,8 0 0,3 0 0,3 0 0,4 0 0,2 0 0,-1 0 0,7 0 0,1-4 0,-2-6 0,-4-2 0,-3 2 0,-2 3 0,-8-3 0,-2 2 0,0-3 0,-4 0-8191</inkml:trace>
+</inkml:ink>
+</file>
+
+<file path=ppt/ink/ink193.xml><?xml version="1.0" encoding="utf-8"?>
+<inkml:ink xmlns:inkml="http://www.w3.org/2003/InkML">
+  <inkml:definitions>
+    <inkml:context xml:id="ctx0">
+      <inkml:inkSource xml:id="inkSrc0">
+        <inkml:traceFormat>
+          <inkml:channel name="X" type="integer" min="-2.14748E9" max="2.14748E9" units="cm"/>
+          <inkml:channel name="Y" type="integer" min="-2.14748E9" max="2.14748E9" units="cm"/>
+          <inkml:channel name="F" type="integer" max="32767" units="dev"/>
+        </inkml:traceFormat>
+        <inkml:channelProperties>
+          <inkml:channelProperty channel="X" name="resolution" value="1000" units="1/cm"/>
+          <inkml:channelProperty channel="Y" name="resolution" value="1000" units="1/cm"/>
+          <inkml:channelProperty channel="F" name="resolution" value="0" units="1/dev"/>
+        </inkml:channelProperties>
+      </inkml:inkSource>
+      <inkml:timestamp xml:id="ts0" timeString="2026-02-09T10:21:37.673"/>
+    </inkml:context>
+    <inkml:brush xml:id="br0">
+      <inkml:brushProperty name="width" value="0.035" units="cm"/>
+      <inkml:brushProperty name="height" value="0.035" units="cm"/>
+    </inkml:brush>
+  </inkml:definitions>
+  <inkml:trace contextRef="#ctx0" brushRef="#br0">102 1 24575,'-5'9'0,"0"7"0,-5 9 0,0 10 0,-3 2 0,-4 4 0,2 4 0,3-2 0,3-3 0,4-10-8191</inkml:trace>
+</inkml:ink>
+</file>
+
+<file path=ppt/ink/ink194.xml><?xml version="1.0" encoding="utf-8"?>
+<inkml:ink xmlns:inkml="http://www.w3.org/2003/InkML">
+  <inkml:definitions>
+    <inkml:context xml:id="ctx0">
+      <inkml:inkSource xml:id="inkSrc0">
+        <inkml:traceFormat>
+          <inkml:channel name="X" type="integer" min="-2.14748E9" max="2.14748E9" units="cm"/>
+          <inkml:channel name="Y" type="integer" min="-2.14748E9" max="2.14748E9" units="cm"/>
+          <inkml:channel name="F" type="integer" max="32767" units="dev"/>
+        </inkml:traceFormat>
+        <inkml:channelProperties>
+          <inkml:channelProperty channel="X" name="resolution" value="1000" units="1/cm"/>
+          <inkml:channelProperty channel="Y" name="resolution" value="1000" units="1/cm"/>
+          <inkml:channelProperty channel="F" name="resolution" value="0" units="1/dev"/>
+        </inkml:channelProperties>
+      </inkml:inkSource>
+      <inkml:timestamp xml:id="ts0" timeString="2026-02-09T10:21:38.509"/>
+    </inkml:context>
+    <inkml:brush xml:id="br0">
+      <inkml:brushProperty name="width" value="0.035" units="cm"/>
+      <inkml:brushProperty name="height" value="0.035" units="cm"/>
+    </inkml:brush>
+  </inkml:definitions>
+  <inkml:trace contextRef="#ctx0" brushRef="#br0">1 248 24575,'27'-47'0,"-17"23"0,2 0 0,1 0 0,21-29 0,-30 47 0,0 0 0,1 0 0,-1 1 0,1 0 0,0 0 0,1 0 0,-1 0 0,1 1 0,0 0 0,0 0 0,1 1 0,-1 0 0,0 0 0,1 0 0,0 1 0,0 0 0,12-2 0,-17 4 0,1 0 0,-1 1 0,0-1 0,0 1 0,0-1 0,0 1 0,0 0 0,0-1 0,0 1 0,0 0 0,0 1 0,-1-1 0,1 0 0,0 0 0,-1 1 0,1-1 0,-1 1 0,1-1 0,-1 1 0,0 0 0,1 0 0,-1 0 0,0-1 0,0 1 0,-1 0 0,1 0 0,0 0 0,0 0 0,-1 0 0,0 1 0,1-1 0,-1 0 0,0 4 0,2 11 0,0 1 0,-2-1 0,-1 20 0,0-24 0,-5 46 0,6-59 0,0 0 0,0 0 0,0 0 0,0 0 0,0 1 0,0-1 0,0 0 0,0 0 0,0 0 0,0 0 0,0 0 0,0 1 0,0-1 0,0 0 0,0 0 0,0 0 0,0 0 0,1 0 0,-1 0 0,0 0 0,0 1 0,0-1 0,0 0 0,0 0 0,0 0 0,0 0 0,1 0 0,-1 0 0,0 0 0,0 0 0,0 0 0,0 0 0,0 0 0,1 0 0,-1 0 0,0 0 0,0 0 0,0 0 0,0 0 0,1 0 0,-1 0 0,0 0 0,0 0 0,0 0 0,0 0 0,0 0 0,1 0 0,-1 0 0,0 0 0,0 0 0,0 0 0,0 0 0,0-1 0,0 1 0,0 0 0,1 0 0,-1 0 0,0 0 0,0 0 0,0 0 0,0 0 0,0-1 0,0 1 0,0 0 0,0 0 0,20-13 0,28-26 0,-39 31 0,25-17 0,1 0 0,1 3 0,1 1 0,51-21 0,-84 40 0,0 0 0,0 0 0,0 1 0,1 0 0,-1 0 0,1 0 0,-1 0 0,1 0 0,-1 1 0,1 0 0,5 0 0,-8 1 0,0 0 0,0 0 0,0-1 0,0 1 0,0 0 0,0 0 0,0 1 0,-1-1 0,1 0 0,0 1 0,-1-1 0,1 1 0,-1-1 0,0 1 0,1-1 0,-1 1 0,0 0 0,0 0 0,0 0 0,0 0 0,0 0 0,-1 0 0,1 0 0,-1 0 0,1 4 0,3 11-151,-1 2-1,-1-1 0,-1 0 0,-1 0 1,0 1-1,-1-1 0,-1 0 1,-8 31-1,4-31-6674</inkml:trace>
+</inkml:ink>
+</file>
+
+<file path=ppt/ink/ink195.xml><?xml version="1.0" encoding="utf-8"?>
+<inkml:ink xmlns:inkml="http://www.w3.org/2003/InkML">
+  <inkml:definitions>
+    <inkml:context xml:id="ctx0">
+      <inkml:inkSource xml:id="inkSrc0">
+        <inkml:traceFormat>
+          <inkml:channel name="X" type="integer" min="-2.14748E9" max="2.14748E9" units="cm"/>
+          <inkml:channel name="Y" type="integer" min="-2.14748E9" max="2.14748E9" units="cm"/>
+          <inkml:channel name="F" type="integer" max="32767" units="dev"/>
+        </inkml:traceFormat>
+        <inkml:channelProperties>
+          <inkml:channelProperty channel="X" name="resolution" value="1000" units="1/cm"/>
+          <inkml:channelProperty channel="Y" name="resolution" value="1000" units="1/cm"/>
+          <inkml:channelProperty channel="F" name="resolution" value="0" units="1/dev"/>
+        </inkml:channelProperties>
+      </inkml:inkSource>
+      <inkml:timestamp xml:id="ts0" timeString="2026-02-09T10:21:39.357"/>
+    </inkml:context>
+    <inkml:brush xml:id="br0">
+      <inkml:brushProperty name="width" value="0.035" units="cm"/>
+      <inkml:brushProperty name="height" value="0.035" units="cm"/>
+    </inkml:brush>
+  </inkml:definitions>
+  <inkml:trace contextRef="#ctx0" brushRef="#br0">159 1 24575,'-4'0'0,"0"0"0,0 1 0,0-1 0,0 1 0,1 0 0,-1 0 0,0 0 0,0 0 0,1 1 0,-1-1 0,1 1 0,-1 0 0,1 0 0,-6 6 0,7-7 0,1 0 0,0 1 0,0 0 0,-1-1 0,1 1 0,0 0 0,1-1 0,-1 1 0,0 0 0,0 0 0,1 0 0,-1-1 0,1 1 0,0 0 0,-1 0 0,1 0 0,0 0 0,0 0 0,0 0 0,1 0 0,-1 0 0,0 0 0,1 0 0,-1 0 0,1-1 0,-1 1 0,1 0 0,0 0 0,0 0 0,0-1 0,0 1 0,2 2 0,3 3 0,-1 0 0,1-1 0,1 0 0,-1 0 0,1 0 0,12 7 0,-12-9 0,-1 1 0,1 0 0,-1 0 0,0 1 0,-1 0 0,7 7 0,-11-10 0,1 0 0,0 0 0,-1 1 0,1-1 0,-1 1 0,0-1 0,0 1 0,0-1 0,-1 1 0,1 0 0,-1-1 0,0 1 0,0 0 0,0 0 0,-1-1 0,1 1 0,-3 6 0,2-5 4,0 0-1,-1-1 1,0 1-1,0 0 1,0-1-1,0 0 1,-1 1-1,0-1 1,0 0-1,0 0 1,0-1-1,-1 1 1,1-1-1,-1 1 1,0-1-1,0 0 1,0-1-1,-6 4 1,-6 1-116,0 0 0,-1-1 0,-30 7 0,11-3-872,19-5-5842</inkml:trace>
+</inkml:ink>
+</file>
+
+<file path=ppt/ink/ink196.xml><?xml version="1.0" encoding="utf-8"?>
+<inkml:ink xmlns:inkml="http://www.w3.org/2003/InkML">
+  <inkml:definitions>
+    <inkml:context xml:id="ctx0">
+      <inkml:inkSource xml:id="inkSrc0">
+        <inkml:traceFormat>
+          <inkml:channel name="X" type="integer" min="-2.14748E9" max="2.14748E9" units="cm"/>
+          <inkml:channel name="Y" type="integer" min="-2.14748E9" max="2.14748E9" units="cm"/>
+          <inkml:channel name="F" type="integer" max="32767" units="dev"/>
+        </inkml:traceFormat>
+        <inkml:channelProperties>
+          <inkml:channelProperty channel="X" name="resolution" value="1000" units="1/cm"/>
+          <inkml:channelProperty channel="Y" name="resolution" value="1000" units="1/cm"/>
+          <inkml:channelProperty channel="F" name="resolution" value="0" units="1/dev"/>
+        </inkml:channelProperties>
+      </inkml:inkSource>
+      <inkml:timestamp xml:id="ts0" timeString="2026-02-09T10:21:40.880"/>
+    </inkml:context>
+    <inkml:brush xml:id="br0">
+      <inkml:brushProperty name="width" value="0.035" units="cm"/>
+      <inkml:brushProperty name="height" value="0.035" units="cm"/>
+    </inkml:brush>
+  </inkml:definitions>
+  <inkml:trace contextRef="#ctx0" brushRef="#br0">805 56 24575,'1'0'0,"-1"-1"0,1 1 0,0 0 0,0-1 0,-1 1 0,1 0 0,0-1 0,-1 1 0,1-1 0,0 1 0,-1-1 0,1 1 0,-1-1 0,1 1 0,0-1 0,-1 0 0,0 1 0,1-1 0,-1 0 0,1 1 0,-1-1 0,0 0 0,1 0 0,-1 1 0,0-1 0,0 0 0,0 0 0,0 1 0,0-1 0,0 0 0,0 0 0,0 0 0,0 1 0,0-1 0,0 0 0,0 0 0,0 0 0,-1 1 0,1-1 0,0 0 0,-1 0 0,1 1 0,0-1 0,-1 0 0,1 1 0,-1-1 0,1 0 0,-1 1 0,1-1 0,-1 1 0,0-1 0,1 1 0,-1-1 0,0 1 0,1 0 0,-2-1 0,-5-3 0,-1 1 0,1 0 0,-1 1 0,1 0 0,-1 0 0,0 0 0,0 1 0,0 0 0,0 1 0,0 0 0,0 0 0,0 1 0,0 0 0,1 0 0,-1 0 0,0 1 0,0 1 0,1-1 0,0 1 0,-1 1 0,1-1 0,0 1 0,1 0 0,-1 1 0,1-1 0,-1 2 0,1-1 0,1 0 0,-1 1 0,1 0 0,0 0 0,1 1 0,-1 0 0,-4 10 0,0 4 0,1 1 0,-10 42 0,17-59 0,0 0 0,0 1 0,0-1 0,1 1 0,-1-1 0,2 1 0,-1-1 0,0 0 0,1 1 0,0-1 0,0 0 0,1 1 0,-1-1 0,1 0 0,0 0 0,1 0 0,-1 0 0,5 5 0,-4-7 0,0-1 0,0 1 0,0-1 0,0 0 0,0 0 0,1 0 0,-1-1 0,1 1 0,-1-1 0,1 0 0,0 0 0,-1 0 0,1 0 0,0-1 0,4 1 0,64-2 0,-47 0 0,-3 0 0,0-1 0,-1-1 0,1 0 0,-1-2 0,36-12 0,-46 13 0,0-1 0,0 0 0,-1-1 0,1 0 0,-1-1 0,-1 0 0,1-1 0,-1 1 0,0-2 0,-1 1 0,13-19 0,-9 16 0,-10 21 0,-10 23 0,-37 58 0,-5-2 0,-112 153 0,120-185 0,-3-2 0,-2-2 0,-2-2 0,-70 55 0,112-101 0,-1 0 0,0 0 0,-1-1 0,1 0 0,-1 0 0,0-1 0,0 0 0,0-1 0,0 0 0,-11 1 0,-1-1 0,0-1 0,1-2 0,-33-3 0,42 2 0,1-1 0,-1 0 0,0-1 0,1 0 0,0-1 0,0 0 0,-11-7 0,-63-48 0,52 25-1365,21 17-5461</inkml:trace>
+</inkml:ink>
+</file>
+
+<file path=ppt/ink/ink197.xml><?xml version="1.0" encoding="utf-8"?>
+<inkml:ink xmlns:inkml="http://www.w3.org/2003/InkML">
+  <inkml:definitions>
+    <inkml:context xml:id="ctx0">
+      <inkml:inkSource xml:id="inkSrc0">
+        <inkml:traceFormat>
+          <inkml:channel name="X" type="integer" min="-2.14748E9" max="2.14748E9" units="cm"/>
+          <inkml:channel name="Y" type="integer" min="-2.14748E9" max="2.14748E9" units="cm"/>
+          <inkml:channel name="F" type="integer" max="32767" units="dev"/>
+        </inkml:traceFormat>
+        <inkml:channelProperties>
+          <inkml:channelProperty channel="X" name="resolution" value="1000" units="1/cm"/>
+          <inkml:channelProperty channel="Y" name="resolution" value="1000" units="1/cm"/>
+          <inkml:channelProperty channel="F" name="resolution" value="0" units="1/dev"/>
+        </inkml:channelProperties>
+      </inkml:inkSource>
+      <inkml:timestamp xml:id="ts0" timeString="2026-02-09T10:21:42.742"/>
+    </inkml:context>
+    <inkml:brush xml:id="br0">
+      <inkml:brushProperty name="width" value="0.035" units="cm"/>
+      <inkml:brushProperty name="height" value="0.035" units="cm"/>
+    </inkml:brush>
+  </inkml:definitions>
+  <inkml:trace contextRef="#ctx0" brushRef="#br0">1 83 24575,'0'149'0,"2"-163"11,1 1 0,0 0 0,0 0 0,2 1 0,-1-1 0,2 1-1,-1 0 1,2 0 0,0 1 0,11-16 0,-13 20-94,1 1 1,-1 0-1,1 0 1,0 0-1,1 0 1,-1 1-1,1 0 1,0 1-1,0 0 1,1 0-1,-1 0 1,1 1-1,0 0 1,0 0-1,0 1 1,0 0-1,14-1 1,0 3-6744</inkml:trace>
+</inkml:ink>
+</file>
+
+<file path=ppt/ink/ink198.xml><?xml version="1.0" encoding="utf-8"?>
+<inkml:ink xmlns:inkml="http://www.w3.org/2003/InkML">
+  <inkml:definitions>
+    <inkml:context xml:id="ctx0">
+      <inkml:inkSource xml:id="inkSrc0">
+        <inkml:traceFormat>
+          <inkml:channel name="X" type="integer" min="-2.14748E9" max="2.14748E9" units="cm"/>
+          <inkml:channel name="Y" type="integer" min="-2.14748E9" max="2.14748E9" units="cm"/>
+          <inkml:channel name="F" type="integer" max="32767" units="dev"/>
+        </inkml:traceFormat>
+        <inkml:channelProperties>
+          <inkml:channelProperty channel="X" name="resolution" value="1000" units="1/cm"/>
+          <inkml:channelProperty channel="Y" name="resolution" value="1000" units="1/cm"/>
+          <inkml:channelProperty channel="F" name="resolution" value="0" units="1/dev"/>
+        </inkml:channelProperties>
+      </inkml:inkSource>
+      <inkml:timestamp xml:id="ts0" timeString="2026-02-09T10:21:43.623"/>
+    </inkml:context>
+    <inkml:brush xml:id="br0">
+      <inkml:brushProperty name="width" value="0.035" units="cm"/>
+      <inkml:brushProperty name="height" value="0.035" units="cm"/>
+    </inkml:brush>
+  </inkml:definitions>
+  <inkml:trace contextRef="#ctx0" brushRef="#br0">26 205 24575,'13'1'0,"1"-2"0,-1 0 0,0 0 0,1-1 0,-1-1 0,0 0 0,0 0 0,12-7 0,-19 7 0,0 0 0,0-1 0,-1 1 0,1-1 0,-1-1 0,0 1 0,-1-1 0,1 1 0,-1-2 0,0 1 0,0 0 0,0-1 0,-1 1 0,1-1 0,-2 0 0,1 0 0,-1-1 0,3-7 0,-4 12 0,-1 0 0,1-1 0,0 1 0,-1 0 0,1-1 0,-1 1 0,0-1 0,0 1 0,0-1 0,0 1 0,0 0 0,0-1 0,-1 1 0,1-1 0,-1 1 0,0 0 0,1-1 0,-1 1 0,0 0 0,0 0 0,-1 0 0,1 0 0,0 0 0,-1 0 0,1 0 0,-1 0 0,0 0 0,0 1 0,1-1 0,-1 1 0,0-1 0,0 1 0,0 0 0,-1 0 0,1 0 0,0 0 0,0 0 0,-1 0 0,1 0 0,-5 0 0,2 0 0,0 1 0,-1-1 0,1 1 0,0 0 0,0 0 0,-1 0 0,1 1 0,0 0 0,0 0 0,0 0 0,0 1 0,0 0 0,0 0 0,0 0 0,1 0 0,-1 1 0,1 0 0,-7 5 0,0 5 0,0 0 0,1 1 0,1 1 0,1-1 0,0 1 0,1 0 0,0 1 0,1 0 0,1 0 0,-4 20 0,8-32 0,1 0 0,-1 0 0,1 0 0,0 0 0,0 1 0,0-1 0,1 0 0,-1 0 0,1 0 0,0 0 0,0 0 0,0 0 0,1 0 0,-1 0 0,1-1 0,0 1 0,0 0 0,1-1 0,2 5 0,0-3 0,1-1 0,-1 1 0,1-1 0,0 0 0,0 0 0,0 0 0,0-1 0,1 0 0,-1 0 0,11 2 0,9 2 0,0-2 0,0-1 0,1-1 0,50-1 0,-71-2-105,0 0 0,0 0 0,0-1 0,0 0 0,0 0 0,-1 0 0,1-1 0,-1 0 0,1 0 0,-1 0 0,1-1 0,6-4 0,0-3-6721</inkml:trace>
+</inkml:ink>
+</file>
+
+<file path=ppt/ink/ink199.xml><?xml version="1.0" encoding="utf-8"?>
+<inkml:ink xmlns:inkml="http://www.w3.org/2003/InkML">
+  <inkml:definitions>
+    <inkml:context xml:id="ctx0">
+      <inkml:inkSource xml:id="inkSrc0">
+        <inkml:traceFormat>
+          <inkml:channel name="X" type="integer" min="-2.14748E9" max="2.14748E9" units="cm"/>
+          <inkml:channel name="Y" type="integer" min="-2.14748E9" max="2.14748E9" units="cm"/>
+          <inkml:channel name="F" type="integer" max="32767" units="dev"/>
+        </inkml:traceFormat>
+        <inkml:channelProperties>
+          <inkml:channelProperty channel="X" name="resolution" value="1000" units="1/cm"/>
+          <inkml:channelProperty channel="Y" name="resolution" value="1000" units="1/cm"/>
+          <inkml:channelProperty channel="F" name="resolution" value="0" units="1/dev"/>
+        </inkml:channelProperties>
+      </inkml:inkSource>
+      <inkml:timestamp xml:id="ts0" timeString="2026-02-09T10:21:44.524"/>
+    </inkml:context>
+    <inkml:brush xml:id="br0">
+      <inkml:brushProperty name="width" value="0.035" units="cm"/>
+      <inkml:brushProperty name="height" value="0.035" units="cm"/>
+    </inkml:brush>
+  </inkml:definitions>
+  <inkml:trace contextRef="#ctx0" brushRef="#br0">286 1 24575,'-21'0'0,"1"0"0,-1 2 0,1 0 0,0 1 0,-1 2 0,1 0 0,-24 9 0,38-11 0,0 0 0,0 0 0,0 0 0,1 1 0,-1-1 0,1 1 0,0 1 0,0-1 0,0 1 0,0 0 0,1 0 0,0 0 0,0 0 0,1 1 0,-1 0 0,1 0 0,0 0 0,1 0 0,-1 0 0,1 0 0,1 1 0,-1-1 0,1 1 0,0-1 0,0 1 0,1 8 0,0-11 0,0 0 0,0 0 0,0 1 0,0-1 0,1 0 0,0 0 0,0 0 0,0-1 0,0 1 0,0 0 0,1 0 0,0-1 0,0 1 0,0 0 0,0-1 0,0 0 0,1 0 0,0 1 0,-1-2 0,1 1 0,0 0 0,1 0 0,-1-1 0,5 3 0,-1-2 0,-1 0 0,1-1 0,0 0 0,1-1 0,-1 1 0,0-1 0,0 0 0,1-1 0,-1 0 0,0 0 0,1-1 0,13-2 0,-3-1 0,-1 0 0,1-1 0,-1 0 0,0-2 0,24-12 0,-34 15 0,0 0 0,0-1 0,0 0 0,0 0 0,-1 0 0,0-1 0,0 0 0,0 0 0,-1-1 0,0 1 0,0-1 0,-1 0 0,0-1 0,4-7 0,-8 15 0,0 0 0,0-1 0,0 1 0,1 0 0,-1-1 0,0 1 0,0 0 0,0-1 0,0 1 0,0 0 0,1-1 0,-1 1 0,0 0 0,0-1 0,0 1 0,0-1 0,0 1 0,0 0 0,0-1 0,-1 1 0,1 0 0,0-1 0,0 1 0,0-1 0,0 1 0,0 0 0,0-1 0,-1 1 0,1 0 0,0 0 0,0-1 0,0 1 0,-1 0 0,1-1 0,0 1 0,-1 0 0,0 0 0,1 0 0,-1 0 0,1 0 0,-1 0 0,1 0 0,-1 0 0,1 0 0,-1 1 0,1-1 0,-1 0 0,1 1 0,-1-1 0,1 0 0,-1 0 0,1 1 0,-1-1 0,1 1 0,0-1 0,-1 1 0,1-1 0,0 0 0,-1 1 0,1-1 0,-1 2 0,-3 8 0,0 1 0,0 0 0,1-1 0,0 1 0,1 0 0,0 1 0,1-1 0,1 0 0,-1 1 0,2-1 0,-1 0 0,5 18 0,-5-27 3,0-1-1,0 0 1,0 1-1,1-1 1,-1 0 0,1 1-1,-1-1 1,1 0-1,0 1 1,-1-1-1,1 0 1,0 0-1,0 0 1,0 0-1,-1 0 1,1 0 0,1 0-1,-1 0 1,0 0-1,0 0 1,0 0-1,0-1 1,1 1-1,-1 0 1,0-1-1,0 1 1,1-1 0,-1 0-1,0 1 1,1-1-1,-1 0 1,1 0-1,-1 0 1,0 0-1,1 0 1,-1 0-1,1 0 1,-1 0 0,0-1-1,1 1 1,-1 0-1,0-1 1,1 1-1,-1-1 1,0 0-1,2 0 1,2-2-152,0 0 1,-1-1-1,1 0 1,-1 0-1,1 0 1,-1 0-1,-1 0 1,1-1-1,5-9 1,3-9-6678</inkml:trace>
+</inkml:ink>
+</file>
+
 <file path=ppt/ink/ink2.xml><?xml version="1.0" encoding="utf-8"?>
 <inkml:ink xmlns:inkml="http://www.w3.org/2003/InkML">
   <inkml:definitions>
@@ -1578,6 +3207,276 @@
 </inkml:ink>
 </file>
 
+<file path=ppt/ink/ink200.xml><?xml version="1.0" encoding="utf-8"?>
+<inkml:ink xmlns:inkml="http://www.w3.org/2003/InkML">
+  <inkml:definitions>
+    <inkml:context xml:id="ctx0">
+      <inkml:inkSource xml:id="inkSrc0">
+        <inkml:traceFormat>
+          <inkml:channel name="X" type="integer" min="-2.14748E9" max="2.14748E9" units="cm"/>
+          <inkml:channel name="Y" type="integer" min="-2.14748E9" max="2.14748E9" units="cm"/>
+          <inkml:channel name="F" type="integer" max="32767" units="dev"/>
+        </inkml:traceFormat>
+        <inkml:channelProperties>
+          <inkml:channelProperty channel="X" name="resolution" value="1000" units="1/cm"/>
+          <inkml:channelProperty channel="Y" name="resolution" value="1000" units="1/cm"/>
+          <inkml:channelProperty channel="F" name="resolution" value="0" units="1/dev"/>
+        </inkml:channelProperties>
+      </inkml:inkSource>
+      <inkml:timestamp xml:id="ts0" timeString="2026-02-09T10:21:44.885"/>
+    </inkml:context>
+    <inkml:brush xml:id="br0">
+      <inkml:brushProperty name="width" value="0.035" units="cm"/>
+      <inkml:brushProperty name="height" value="0.035" units="cm"/>
+    </inkml:brush>
+  </inkml:definitions>
+  <inkml:trace contextRef="#ctx0" brushRef="#br0">0 0 24575,'0'5'0,"0"9"0,0 16 0,0 11 0,0 7 0,0 5 0,0 1 0,0-4 0,0 3 0,0-4 0,0-1 0,0-5 0,0-5 0,0 0 0,4-7 0,2-13 0,4-14 0,0-8-8191</inkml:trace>
+</inkml:ink>
+</file>
+
+<file path=ppt/ink/ink201.xml><?xml version="1.0" encoding="utf-8"?>
+<inkml:ink xmlns:inkml="http://www.w3.org/2003/InkML">
+  <inkml:definitions>
+    <inkml:context xml:id="ctx0">
+      <inkml:inkSource xml:id="inkSrc0">
+        <inkml:traceFormat>
+          <inkml:channel name="X" type="integer" min="-2.14748E9" max="2.14748E9" units="cm"/>
+          <inkml:channel name="Y" type="integer" min="-2.14748E9" max="2.14748E9" units="cm"/>
+          <inkml:channel name="F" type="integer" max="32767" units="dev"/>
+        </inkml:traceFormat>
+        <inkml:channelProperties>
+          <inkml:channelProperty channel="X" name="resolution" value="1000" units="1/cm"/>
+          <inkml:channelProperty channel="Y" name="resolution" value="1000" units="1/cm"/>
+          <inkml:channelProperty channel="F" name="resolution" value="0" units="1/dev"/>
+        </inkml:channelProperties>
+      </inkml:inkSource>
+      <inkml:timestamp xml:id="ts0" timeString="2026-02-09T10:21:45.195"/>
+    </inkml:context>
+    <inkml:brush xml:id="br0">
+      <inkml:brushProperty name="width" value="0.035" units="cm"/>
+      <inkml:brushProperty name="height" value="0.035" units="cm"/>
+    </inkml:brush>
+  </inkml:definitions>
+  <inkml:trace contextRef="#ctx0" brushRef="#br0">1 1 24575,'4'0'0,"6"0"0,6 0 0,4 0 0,3 0 0,2 0 0,1 0 0,-4 0-8191</inkml:trace>
+</inkml:ink>
+</file>
+
+<file path=ppt/ink/ink202.xml><?xml version="1.0" encoding="utf-8"?>
+<inkml:ink xmlns:inkml="http://www.w3.org/2003/InkML">
+  <inkml:definitions>
+    <inkml:context xml:id="ctx0">
+      <inkml:inkSource xml:id="inkSrc0">
+        <inkml:traceFormat>
+          <inkml:channel name="X" type="integer" min="-2.14748E9" max="2.14748E9" units="cm"/>
+          <inkml:channel name="Y" type="integer" min="-2.14748E9" max="2.14748E9" units="cm"/>
+          <inkml:channel name="F" type="integer" max="32767" units="dev"/>
+        </inkml:traceFormat>
+        <inkml:channelProperties>
+          <inkml:channelProperty channel="X" name="resolution" value="1000" units="1/cm"/>
+          <inkml:channelProperty channel="Y" name="resolution" value="1000" units="1/cm"/>
+          <inkml:channelProperty channel="F" name="resolution" value="0" units="1/dev"/>
+        </inkml:channelProperties>
+      </inkml:inkSource>
+      <inkml:timestamp xml:id="ts0" timeString="2026-02-09T10:21:45.643"/>
+    </inkml:context>
+    <inkml:brush xml:id="br0">
+      <inkml:brushProperty name="width" value="0.035" units="cm"/>
+      <inkml:brushProperty name="height" value="0.035" units="cm"/>
+    </inkml:brush>
+  </inkml:definitions>
+  <inkml:trace contextRef="#ctx0" brushRef="#br0">49 0 24575,'0'5'0,"0"9"0,0 7 0,0 5 0,0 5 0,-4 3 0,-2 0 0,-3 6 0,-1 2 0,1 1 0,3 8 0,2-11 0,6-15 0,2-13-8191</inkml:trace>
+</inkml:ink>
+</file>
+
+<file path=ppt/ink/ink203.xml><?xml version="1.0" encoding="utf-8"?>
+<inkml:ink xmlns:inkml="http://www.w3.org/2003/InkML">
+  <inkml:definitions>
+    <inkml:context xml:id="ctx0">
+      <inkml:inkSource xml:id="inkSrc0">
+        <inkml:traceFormat>
+          <inkml:channel name="X" type="integer" min="-2.14748E9" max="2.14748E9" units="cm"/>
+          <inkml:channel name="Y" type="integer" min="-2.14748E9" max="2.14748E9" units="cm"/>
+          <inkml:channel name="F" type="integer" max="32767" units="dev"/>
+        </inkml:traceFormat>
+        <inkml:channelProperties>
+          <inkml:channelProperty channel="X" name="resolution" value="1000" units="1/cm"/>
+          <inkml:channelProperty channel="Y" name="resolution" value="1000" units="1/cm"/>
+          <inkml:channelProperty channel="F" name="resolution" value="0" units="1/dev"/>
+        </inkml:channelProperties>
+      </inkml:inkSource>
+      <inkml:timestamp xml:id="ts0" timeString="2026-02-09T10:21:45.852"/>
+    </inkml:context>
+    <inkml:brush xml:id="br0">
+      <inkml:brushProperty name="width" value="0.035" units="cm"/>
+      <inkml:brushProperty name="height" value="0.035" units="cm"/>
+    </inkml:brush>
+  </inkml:definitions>
+  <inkml:trace contextRef="#ctx0" brushRef="#br0">1 0 24575,'0'0'-8191</inkml:trace>
+</inkml:ink>
+</file>
+
+<file path=ppt/ink/ink204.xml><?xml version="1.0" encoding="utf-8"?>
+<inkml:ink xmlns:inkml="http://www.w3.org/2003/InkML">
+  <inkml:definitions>
+    <inkml:context xml:id="ctx0">
+      <inkml:inkSource xml:id="inkSrc0">
+        <inkml:traceFormat>
+          <inkml:channel name="X" type="integer" min="-2.14748E9" max="2.14748E9" units="cm"/>
+          <inkml:channel name="Y" type="integer" min="-2.14748E9" max="2.14748E9" units="cm"/>
+          <inkml:channel name="F" type="integer" max="32767" units="dev"/>
+        </inkml:traceFormat>
+        <inkml:channelProperties>
+          <inkml:channelProperty channel="X" name="resolution" value="1000" units="1/cm"/>
+          <inkml:channelProperty channel="Y" name="resolution" value="1000" units="1/cm"/>
+          <inkml:channelProperty channel="F" name="resolution" value="0" units="1/dev"/>
+        </inkml:channelProperties>
+      </inkml:inkSource>
+      <inkml:timestamp xml:id="ts0" timeString="2026-02-09T10:21:46.138"/>
+    </inkml:context>
+    <inkml:brush xml:id="br0">
+      <inkml:brushProperty name="width" value="0.035" units="cm"/>
+      <inkml:brushProperty name="height" value="0.035" units="cm"/>
+    </inkml:brush>
+  </inkml:definitions>
+  <inkml:trace contextRef="#ctx0" brushRef="#br0">1 0 24575,'0'4'0,"0"6"0,0 6 0,0 4 0,0 3 0,0 2 0,0 1 0,0 1 0,0-1 0,0 1 0,0-1 0,0 0 0,0-5-8191</inkml:trace>
+</inkml:ink>
+</file>
+
+<file path=ppt/ink/ink205.xml><?xml version="1.0" encoding="utf-8"?>
+<inkml:ink xmlns:inkml="http://www.w3.org/2003/InkML">
+  <inkml:definitions>
+    <inkml:context xml:id="ctx0">
+      <inkml:inkSource xml:id="inkSrc0">
+        <inkml:traceFormat>
+          <inkml:channel name="X" type="integer" min="-2.14748E9" max="2.14748E9" units="cm"/>
+          <inkml:channel name="Y" type="integer" min="-2.14748E9" max="2.14748E9" units="cm"/>
+          <inkml:channel name="F" type="integer" max="32767" units="dev"/>
+        </inkml:traceFormat>
+        <inkml:channelProperties>
+          <inkml:channelProperty channel="X" name="resolution" value="1000" units="1/cm"/>
+          <inkml:channelProperty channel="Y" name="resolution" value="1000" units="1/cm"/>
+          <inkml:channelProperty channel="F" name="resolution" value="0" units="1/dev"/>
+        </inkml:channelProperties>
+      </inkml:inkSource>
+      <inkml:timestamp xml:id="ts0" timeString="2026-02-09T10:21:47.090"/>
+    </inkml:context>
+    <inkml:brush xml:id="br0">
+      <inkml:brushProperty name="width" value="0.035" units="cm"/>
+      <inkml:brushProperty name="height" value="0.035" units="cm"/>
+    </inkml:brush>
+  </inkml:definitions>
+  <inkml:trace contextRef="#ctx0" brushRef="#br0">1 42 24575,'0'39'0,"-1"14"0,2-39 0,0-17 0,1-8 0,0 0 0,0 1 0,1 0 0,0-1 0,1 1 0,1 0 0,-1 0 0,1 1 0,1 0 0,10-14 0,-15 22 0,-1 1 0,0-1 0,1 1 0,-1 0 0,0 0 0,1-1 0,-1 1 0,1 0 0,-1-1 0,1 1 0,-1 0 0,1 0 0,-1 0 0,1 0 0,-1-1 0,1 1 0,-1 0 0,1 0 0,-1 0 0,1 0 0,-1 0 0,1 0 0,-1 0 0,1 0 0,-1 0 0,1 1 0,-1-1 0,1 0 0,-1 0 0,0 0 0,1 1 0,-1-1 0,1 0 0,-1 0 0,1 1 0,-1-1 0,0 0 0,1 1 0,-1-1 0,0 0 0,1 1 0,-1-1 0,0 1 0,1-1 0,-1 0 0,0 1 0,0-1 0,0 1 0,1-1 0,-1 1 0,0-1 0,0 1 0,0-1 0,0 1 0,0-1 0,0 1 0,0-1 0,0 2 0,5 34 0,-5-33 0,0 23 0,-1-20 0,0-1 0,1 1 0,0 0 0,0 0 0,1 0 0,0-1 0,0 1 0,0 0 0,0-1 0,1 1 0,3 7 0,-4-13 0,0 1 0,-1-1 0,1 0 0,0 1 0,-1-1 0,1 0 0,0 0 0,-1 0 0,1 0 0,0 1 0,0-1 0,-1 0 0,1 0 0,0 0 0,0 0 0,-1 0 0,1-1 0,0 1 0,0 0 0,-1 0 0,1 0 0,0-1 0,-1 1 0,1 0 0,0-1 0,-1 1 0,1-1 0,-1 1 0,1 0 0,0-1 0,-1 0 0,1 1 0,-1-1 0,1 1 0,-1-1 0,0 1 0,1-1 0,-1-1 0,25-29 0,-21 26 0,8-12 0,1 1 0,0 1 0,1 0 0,1 1 0,0 0 0,19-12 0,-33 25-3,0 0 0,0 0 0,0 0-1,0 1 1,1-1 0,-1 0 0,0 1 0,0-1-1,1 0 1,-1 1 0,1 0 0,-1-1-1,0 1 1,1 0 0,-1 0 0,1 0 0,-1 0-1,1 0 1,-1 0 0,1 0 0,-1 0-1,0 1 1,1-1 0,1 1 0,-2 0 14,0 1 0,0-1 0,1 0 0,-1 0 0,0 1 1,-1-1-1,1 0 0,0 1 0,0-1 0,-1 1 0,1-1 0,-1 1 0,1 0 1,-1-1-1,0 1 0,1-1 0,-1 4 0,0 3-197,0 0 1,0 0-1,-1 0 0,0 0 1,0 0-1,-1 0 1,-3 11-1,-7 7-6640</inkml:trace>
+</inkml:ink>
+</file>
+
+<file path=ppt/ink/ink206.xml><?xml version="1.0" encoding="utf-8"?>
+<inkml:ink xmlns:inkml="http://www.w3.org/2003/InkML">
+  <inkml:definitions>
+    <inkml:context xml:id="ctx0">
+      <inkml:inkSource xml:id="inkSrc0">
+        <inkml:traceFormat>
+          <inkml:channel name="X" type="integer" min="-2.14748E9" max="2.14748E9" units="cm"/>
+          <inkml:channel name="Y" type="integer" min="-2.14748E9" max="2.14748E9" units="cm"/>
+          <inkml:channel name="F" type="integer" max="32767" units="dev"/>
+        </inkml:traceFormat>
+        <inkml:channelProperties>
+          <inkml:channelProperty channel="X" name="resolution" value="1000" units="1/cm"/>
+          <inkml:channelProperty channel="Y" name="resolution" value="1000" units="1/cm"/>
+          <inkml:channelProperty channel="F" name="resolution" value="0" units="1/dev"/>
+        </inkml:channelProperties>
+      </inkml:inkSource>
+      <inkml:timestamp xml:id="ts0" timeString="2026-02-09T10:21:47.916"/>
+    </inkml:context>
+    <inkml:brush xml:id="br0">
+      <inkml:brushProperty name="width" value="0.035" units="cm"/>
+      <inkml:brushProperty name="height" value="0.035" units="cm"/>
+    </inkml:brush>
+  </inkml:definitions>
+  <inkml:trace contextRef="#ctx0" brushRef="#br0">0 185 24575,'79'1'0,"-17"1"0,63-7 0,-109 4 0,1-1 0,-1-1 0,0-1 0,1 0 0,-2-1 0,1-1 0,-1 0 0,26-15 0,-38 19 0,0 0 0,0 0 0,0 0 0,-1 0 0,1 0 0,0-1 0,-1 1 0,0-1 0,1 1 0,-1-1 0,0 0 0,-1 0 0,1 0 0,0 0 0,-1-1 0,0 1 0,1 0 0,-1-1 0,-1 1 0,1 0 0,0-1 0,-1 1 0,0-6 0,0 6 0,-1 0 0,0 1 0,0-1 0,0 0 0,-1 1 0,1-1 0,0 1 0,-1-1 0,0 1 0,0 0 0,1-1 0,-1 1 0,-1 0 0,1 0 0,0 1 0,0-1 0,-1 0 0,1 1 0,-1-1 0,1 1 0,-1 0 0,0 0 0,1 0 0,-1 0 0,0 1 0,0-1 0,0 0 0,-4 1 0,0-2 0,0 1 0,-1 0 0,1 0 0,0 0 0,-1 1 0,1 0 0,-1 1 0,1-1 0,-1 2 0,1-1 0,0 1 0,0 0 0,0 0 0,0 1 0,0 0 0,0 0 0,1 1 0,-1 0 0,1 0 0,0 0 0,0 1 0,1 0 0,-1 0 0,1 0 0,0 1 0,-6 8 0,1 2 0,0 1 0,0-1 0,2 1 0,0 1 0,1 0 0,1 0 0,1 0 0,0 1 0,1 0 0,2 0 0,-1 0 0,2 32 0,0-28 0,2 0 0,0-1 0,1 1 0,2-1 0,0 0 0,10 28 0,-11-40 0,1 0 0,0-1 0,1 1 0,0-1 0,1 0 0,0 0 0,0-1 0,1 0 0,0 0 0,0 0 0,1-1 0,0 0 0,0-1 0,1 0 0,15 9 0,-5-5-273,1-1 0,-1-1 0,2 0 0,41 8 0,-40-12-6553</inkml:trace>
+</inkml:ink>
+</file>
+
+<file path=ppt/ink/ink207.xml><?xml version="1.0" encoding="utf-8"?>
+<inkml:ink xmlns:inkml="http://www.w3.org/2003/InkML">
+  <inkml:definitions>
+    <inkml:context xml:id="ctx0">
+      <inkml:inkSource xml:id="inkSrc0">
+        <inkml:traceFormat>
+          <inkml:channel name="X" type="integer" min="-2.14748E9" max="2.14748E9" units="cm"/>
+          <inkml:channel name="Y" type="integer" min="-2.14748E9" max="2.14748E9" units="cm"/>
+          <inkml:channel name="F" type="integer" max="32767" units="dev"/>
+        </inkml:traceFormat>
+        <inkml:channelProperties>
+          <inkml:channelProperty channel="X" name="resolution" value="1000" units="1/cm"/>
+          <inkml:channelProperty channel="Y" name="resolution" value="1000" units="1/cm"/>
+          <inkml:channelProperty channel="F" name="resolution" value="0" units="1/dev"/>
+        </inkml:channelProperties>
+      </inkml:inkSource>
+      <inkml:timestamp xml:id="ts0" timeString="2026-02-09T10:21:49.266"/>
+    </inkml:context>
+    <inkml:brush xml:id="br0">
+      <inkml:brushProperty name="width" value="0.035" units="cm"/>
+      <inkml:brushProperty name="height" value="0.035" units="cm"/>
+    </inkml:brush>
+  </inkml:definitions>
+  <inkml:trace contextRef="#ctx0" brushRef="#br0">1425 6 24575,'-135'-3'0,"55"0"0,0 3 0,0 4 0,-82 15 0,134-14 0,0 2 0,1 1 0,0 1 0,0 1 0,1 2 0,1 0 0,0 2 0,0 1 0,1 0 0,1 2 0,1 1 0,1 1 0,0 0 0,-32 42 0,-148 252 0,168-251 0,3 2 0,2 1 0,-25 92 0,17-11 0,-25 214 0,22 153 0,35 108 0,6-366 0,3 10 0,46 304 0,-40-499 0,3-2 0,3 0 0,36 92 0,-45-135-1365,-5-8-5461</inkml:trace>
+</inkml:ink>
+</file>
+
+<file path=ppt/ink/ink208.xml><?xml version="1.0" encoding="utf-8"?>
+<inkml:ink xmlns:inkml="http://www.w3.org/2003/InkML">
+  <inkml:definitions>
+    <inkml:context xml:id="ctx0">
+      <inkml:inkSource xml:id="inkSrc0">
+        <inkml:traceFormat>
+          <inkml:channel name="X" type="integer" min="-2.14748E9" max="2.14748E9" units="cm"/>
+          <inkml:channel name="Y" type="integer" min="-2.14748E9" max="2.14748E9" units="cm"/>
+          <inkml:channel name="F" type="integer" max="32767" units="dev"/>
+        </inkml:traceFormat>
+        <inkml:channelProperties>
+          <inkml:channelProperty channel="X" name="resolution" value="1000" units="1/cm"/>
+          <inkml:channelProperty channel="Y" name="resolution" value="1000" units="1/cm"/>
+          <inkml:channelProperty channel="F" name="resolution" value="0" units="1/dev"/>
+        </inkml:channelProperties>
+      </inkml:inkSource>
+      <inkml:timestamp xml:id="ts0" timeString="2026-02-09T10:21:49.797"/>
+    </inkml:context>
+    <inkml:brush xml:id="br0">
+      <inkml:brushProperty name="width" value="0.035" units="cm"/>
+      <inkml:brushProperty name="height" value="0.035" units="cm"/>
+    </inkml:brush>
+  </inkml:definitions>
+  <inkml:trace contextRef="#ctx0" brushRef="#br0">0 1 24575,'3'39'0,"1"0"0,2 0 0,2 0 0,2-1 0,1 0 0,1 0 0,3-2 0,1 0 0,1 0 0,29 41 0,-45-73 0,1-1 0,1 1 0,-1-1 0,0 0 0,1 0 0,0 0 0,-1 0 0,1 0 0,1-1 0,-1 1 0,0-1 0,0 0 0,1 1 0,-1-2 0,1 1 0,0 0 0,0-1 0,0 0 0,4 1 0,-3-2 0,0 0 0,0 0 0,-1-1 0,1 0 0,0 0 0,-1-1 0,1 1 0,-1-1 0,1 0 0,-1 0 0,0 0 0,0-1 0,0 1 0,0-1 0,7-6 0,143-133 100,25-19-1565,-148 137-5361</inkml:trace>
+</inkml:ink>
+</file>
+
+<file path=ppt/ink/ink209.xml><?xml version="1.0" encoding="utf-8"?>
+<inkml:ink xmlns:inkml="http://www.w3.org/2003/InkML">
+  <inkml:definitions>
+    <inkml:context xml:id="ctx0">
+      <inkml:inkSource xml:id="inkSrc0">
+        <inkml:traceFormat>
+          <inkml:channel name="X" type="integer" min="-2.14748E9" max="2.14748E9" units="cm"/>
+          <inkml:channel name="Y" type="integer" min="-2.14748E9" max="2.14748E9" units="cm"/>
+          <inkml:channel name="F" type="integer" max="32767" units="dev"/>
+        </inkml:traceFormat>
+        <inkml:channelProperties>
+          <inkml:channelProperty channel="X" name="resolution" value="1000" units="1/cm"/>
+          <inkml:channelProperty channel="Y" name="resolution" value="1000" units="1/cm"/>
+          <inkml:channelProperty channel="F" name="resolution" value="0" units="1/dev"/>
+        </inkml:channelProperties>
+      </inkml:inkSource>
+      <inkml:timestamp xml:id="ts0" timeString="2026-02-09T10:21:53.266"/>
+    </inkml:context>
+    <inkml:brush xml:id="br0">
+      <inkml:brushProperty name="width" value="0.035" units="cm"/>
+      <inkml:brushProperty name="height" value="0.035" units="cm"/>
+    </inkml:brush>
+  </inkml:definitions>
+  <inkml:trace contextRef="#ctx0" brushRef="#br0">3283 4239 24575,'-23'-1'0,"1"-1"0,0-1 0,0-1 0,1-1 0,-1 0 0,1-2 0,-27-12 0,-136-79 0,153 79 0,-157-89 0,-459-280 0,477 274 0,-263-228 0,340 252 0,3-3 0,5-5 0,-125-186 0,-154-360 0,132 158 0,185 371 0,5-2 0,-36-163 0,-9-47 0,37 138 0,32 127 0,11 42 0,1 0 0,1 0 0,0-1 0,-2-38 0,7 37 0,-2 6 0,2 0 0,-1 0 0,2 0 0,0 0 0,1 0 0,1 0 0,0 0 0,2 0 0,5-16 0,-3 88 0,-8 152 0,-1-251 0,1-44 0,2 81 0,-1 0 0,1 0 0,0 0 0,1 0 0,-1 0 0,1 0 0,0 0 0,1 0 0,-1 0 0,6-7 0,-6 10 0,0 1 0,0 0 0,1-1 0,-1 1 0,1 0 0,-1 0 0,1 1 0,0-1 0,0 0 0,0 1 0,0 0 0,0 0 0,0 0 0,0 0 0,0 0 0,1 0 0,-1 1 0,0 0 0,0 0 0,0 0 0,1 0 0,-1 0 0,0 0 0,0 1 0,1 0 0,5 1 0,9 5 0,1-1 0,-2 2 0,28 16 0,0-1 0,48 18-1365,-75-30-5461</inkml:trace>
+</inkml:ink>
+</file>
+
 <file path=ppt/ink/ink21.xml><?xml version="1.0" encoding="utf-8"?>
 <inkml:ink xmlns:inkml="http://www.w3.org/2003/InkML">
   <inkml:definitions>
@@ -1603,6 +3502,60 @@
     </inkml:brush>
   </inkml:definitions>
   <inkml:trace contextRef="#ctx0" brushRef="#br0">757 46 9830,'-144'-2'1485,"-160"5"326,292-2-1701,-1 1 0,0 0 0,1 0 0,-1 2 0,1-1 0,0 1 0,0 1 0,1 0 0,-1 1 0,1 0 0,-20 15 0,22-13 2,1 0 0,1 0 0,-1 1 0,1 0 0,1 0 0,-1 0 0,2 1 0,-1 0 1,1 0-1,1 1 0,0-1 0,0 1 0,-3 21 0,-4 35 623,-2 85 0,1-10 44,-10 431 2436,22-517-2880,0-46-253,0 1 1,1-1 0,0 0 0,1 0 0,0 0-1,0-1 1,1 1 0,0 0 0,1-1 0,0 0 0,0 1-1,1-2 1,7 11 0,-6-13-12,0 1 0,0-1 0,1 0 1,-1 0-1,2-1 0,-1 0 0,0 0 0,1-1 0,0 0 0,0 0 1,0-1-1,1 0 0,-1-1 0,1 1 0,11 0 0,-17-2-46,58 9 535,-1 3-1,61 22 0,-81-23-473,0-2 1,0-2-1,48 4 1,4 0-33,55 5-54,1-7 0,191-10 0,-128-3 0,-140 5 0,-49 0 0,-1 0 0,1-2 0,0 0 0,0-2 0,0 0 0,0-2 0,-1 0 0,25-9 0,-36 7-38,-1-1 0,0 0 1,-1 0-1,1-1 0,-1-1 0,-1 1 1,1-1-1,-2 0 0,1-1 1,-1 1-1,5-12 0,12-16-92,-1 2-290,-1-1 1,-2-1-1,-1 0 1,21-69-1,10-29-344,11-31-450,-57 153 1116,62-237-1500,-48 172 1037,-7 38 79,6-57 0,-15 82 361,0 0 1,-2 1-1,1-1 1,-2 0-1,0 1 1,0-1-1,-8-22 1,5 25 90,0 0 1,0 0-1,-1 0 1,0 1-1,-1 0 1,-1 0 0,1 0-1,-2 1 1,1 0-1,-2 1 1,1 0 0,-1 1-1,0 0 1,-1 0-1,0 1 1,-15-7-1,5 4 138,-1 1-1,0 2 0,-1 0 0,0 1 0,0 1 0,0 2 0,-1 0 1,-27 0-1,8 0 219,-69-14 0,69 9-3,-71-5 1,-381 13 1521,230 1-955,227-1-863</inkml:trace>
+</inkml:ink>
+</file>
+
+<file path=ppt/ink/ink210.xml><?xml version="1.0" encoding="utf-8"?>
+<inkml:ink xmlns:inkml="http://www.w3.org/2003/InkML">
+  <inkml:definitions>
+    <inkml:context xml:id="ctx0">
+      <inkml:inkSource xml:id="inkSrc0">
+        <inkml:traceFormat>
+          <inkml:channel name="X" type="integer" min="-2.14748E9" max="2.14748E9" units="cm"/>
+          <inkml:channel name="Y" type="integer" min="-2.14748E9" max="2.14748E9" units="cm"/>
+          <inkml:channel name="F" type="integer" max="32767" units="dev"/>
+        </inkml:traceFormat>
+        <inkml:channelProperties>
+          <inkml:channelProperty channel="X" name="resolution" value="1000" units="1/cm"/>
+          <inkml:channelProperty channel="Y" name="resolution" value="1000" units="1/cm"/>
+          <inkml:channelProperty channel="F" name="resolution" value="0" units="1/dev"/>
+        </inkml:channelProperties>
+      </inkml:inkSource>
+      <inkml:timestamp xml:id="ts0" timeString="2026-02-09T10:21:54.742"/>
+    </inkml:context>
+    <inkml:brush xml:id="br0">
+      <inkml:brushProperty name="width" value="0.035" units="cm"/>
+      <inkml:brushProperty name="height" value="0.035" units="cm"/>
+    </inkml:brush>
+  </inkml:definitions>
+  <inkml:trace contextRef="#ctx0" brushRef="#br0">0 132 24575,'0'-7'0,"0"1"0,0-1 0,1 0 0,0 1 0,0-1 0,0 0 0,1 1 0,0-1 0,0 1 0,1 0 0,4-9 0,-4 11 0,0 1 0,0 0 0,0 0 0,1 0 0,-1 0 0,1 0 0,-1 1 0,1-1 0,0 1 0,0 0 0,0 0 0,1 1 0,-1-1 0,0 1 0,1 0 0,-1 0 0,0 0 0,7 0 0,22-2 0,0 2 0,0 1 0,0 1 0,46 9 0,131 35 0,-51-8 0,-57-12 0,-68-15 0,1-2 0,65 7 0,-68-18-1365,-8-5-5461</inkml:trace>
+</inkml:ink>
+</file>
+
+<file path=ppt/ink/ink211.xml><?xml version="1.0" encoding="utf-8"?>
+<inkml:ink xmlns:inkml="http://www.w3.org/2003/InkML">
+  <inkml:definitions>
+    <inkml:context xml:id="ctx0">
+      <inkml:inkSource xml:id="inkSrc0">
+        <inkml:traceFormat>
+          <inkml:channel name="X" type="integer" min="-2.14748E9" max="2.14748E9" units="cm"/>
+          <inkml:channel name="Y" type="integer" min="-2.14748E9" max="2.14748E9" units="cm"/>
+          <inkml:channel name="F" type="integer" max="32767" units="dev"/>
+        </inkml:traceFormat>
+        <inkml:channelProperties>
+          <inkml:channelProperty channel="X" name="resolution" value="1000" units="1/cm"/>
+          <inkml:channelProperty channel="Y" name="resolution" value="1000" units="1/cm"/>
+          <inkml:channelProperty channel="F" name="resolution" value="0" units="1/dev"/>
+        </inkml:channelProperties>
+      </inkml:inkSource>
+      <inkml:timestamp xml:id="ts0" timeString="2026-02-09T10:21:55.323"/>
+    </inkml:context>
+    <inkml:brush xml:id="br0">
+      <inkml:brushProperty name="width" value="0.035" units="cm"/>
+      <inkml:brushProperty name="height" value="0.035" units="cm"/>
+    </inkml:brush>
+  </inkml:definitions>
+  <inkml:trace contextRef="#ctx0" brushRef="#br0">161 1 24575,'0'13'0,"1"0"0,0-1 0,1 1 0,0 0 0,1 0 0,1-1 0,5 15 0,4 0 0,31 49 0,-42-73 0,0 1 0,0-1 0,0 1 0,0 0 0,0-1 0,-1 1 0,0 0 0,1 0 0,-2 0 0,1 0 0,0 0 0,-1 0 0,0 0 0,1 0 0,-2 0 0,1 0 0,0 0 0,-1 1 0,0-1 0,0-1 0,0 1 0,0 0 0,-1 0 0,0 0 0,-3 6 0,-4 2 0,-1-1 0,0 0 0,0 0 0,-1-1 0,-22 15 0,10-7 0,5-3 0,-5 2 0,1 2 0,1 0 0,-25 31 0,45-49 3,0-1-1,1 1 1,-1 0 0,0 0-1,1 0 1,-1 0-1,1 0 1,-1 0 0,1 0-1,0 0 1,-1 0-1,1 0 1,0 0-1,0 0 1,-1 1 0,1-1-1,0 0 1,0 0-1,1 0 1,-1 0 0,0 0-1,0 0 1,0 0-1,1 0 1,-1 0-1,0 0 1,1 1 0,0 0-1,25 19-1442,4-5-5386</inkml:trace>
 </inkml:ink>
 </file>
 
@@ -4105,7 +6058,7 @@
           <a:p>
             <a:fld id="{7313C947-0C62-40F7-BC48-6B3EDD12B3DE}" type="datetimeFigureOut">
               <a:rPr lang="en-US" smtClean="0"/>
-              <a:t>08-Feb-26</a:t>
+              <a:t>09-Feb-26</a:t>
             </a:fld>
             <a:endParaRPr lang="en-US"/>
           </a:p>
@@ -4303,7 +6256,7 @@
           <a:p>
             <a:fld id="{7313C947-0C62-40F7-BC48-6B3EDD12B3DE}" type="datetimeFigureOut">
               <a:rPr lang="en-US" smtClean="0"/>
-              <a:t>08-Feb-26</a:t>
+              <a:t>09-Feb-26</a:t>
             </a:fld>
             <a:endParaRPr lang="en-US"/>
           </a:p>
@@ -4511,7 +6464,7 @@
           <a:p>
             <a:fld id="{7313C947-0C62-40F7-BC48-6B3EDD12B3DE}" type="datetimeFigureOut">
               <a:rPr lang="en-US" smtClean="0"/>
-              <a:t>08-Feb-26</a:t>
+              <a:t>09-Feb-26</a:t>
             </a:fld>
             <a:endParaRPr lang="en-US"/>
           </a:p>
@@ -4709,7 +6662,7 @@
           <a:p>
             <a:fld id="{7313C947-0C62-40F7-BC48-6B3EDD12B3DE}" type="datetimeFigureOut">
               <a:rPr lang="en-US" smtClean="0"/>
-              <a:t>08-Feb-26</a:t>
+              <a:t>09-Feb-26</a:t>
             </a:fld>
             <a:endParaRPr lang="en-US"/>
           </a:p>
@@ -4984,7 +6937,7 @@
           <a:p>
             <a:fld id="{7313C947-0C62-40F7-BC48-6B3EDD12B3DE}" type="datetimeFigureOut">
               <a:rPr lang="en-US" smtClean="0"/>
-              <a:t>08-Feb-26</a:t>
+              <a:t>09-Feb-26</a:t>
             </a:fld>
             <a:endParaRPr lang="en-US"/>
           </a:p>
@@ -5249,7 +7202,7 @@
           <a:p>
             <a:fld id="{7313C947-0C62-40F7-BC48-6B3EDD12B3DE}" type="datetimeFigureOut">
               <a:rPr lang="en-US" smtClean="0"/>
-              <a:t>08-Feb-26</a:t>
+              <a:t>09-Feb-26</a:t>
             </a:fld>
             <a:endParaRPr lang="en-US"/>
           </a:p>
@@ -5661,7 +7614,7 @@
           <a:p>
             <a:fld id="{7313C947-0C62-40F7-BC48-6B3EDD12B3DE}" type="datetimeFigureOut">
               <a:rPr lang="en-US" smtClean="0"/>
-              <a:t>08-Feb-26</a:t>
+              <a:t>09-Feb-26</a:t>
             </a:fld>
             <a:endParaRPr lang="en-US"/>
           </a:p>
@@ -5802,7 +7755,7 @@
           <a:p>
             <a:fld id="{7313C947-0C62-40F7-BC48-6B3EDD12B3DE}" type="datetimeFigureOut">
               <a:rPr lang="en-US" smtClean="0"/>
-              <a:t>08-Feb-26</a:t>
+              <a:t>09-Feb-26</a:t>
             </a:fld>
             <a:endParaRPr lang="en-US"/>
           </a:p>
@@ -5915,7 +7868,7 @@
           <a:p>
             <a:fld id="{7313C947-0C62-40F7-BC48-6B3EDD12B3DE}" type="datetimeFigureOut">
               <a:rPr lang="en-US" smtClean="0"/>
-              <a:t>08-Feb-26</a:t>
+              <a:t>09-Feb-26</a:t>
             </a:fld>
             <a:endParaRPr lang="en-US"/>
           </a:p>
@@ -6226,7 +8179,7 @@
           <a:p>
             <a:fld id="{7313C947-0C62-40F7-BC48-6B3EDD12B3DE}" type="datetimeFigureOut">
               <a:rPr lang="en-US" smtClean="0"/>
-              <a:t>08-Feb-26</a:t>
+              <a:t>09-Feb-26</a:t>
             </a:fld>
             <a:endParaRPr lang="en-US"/>
           </a:p>
@@ -6514,7 +8467,7 @@
           <a:p>
             <a:fld id="{7313C947-0C62-40F7-BC48-6B3EDD12B3DE}" type="datetimeFigureOut">
               <a:rPr lang="en-US" smtClean="0"/>
-              <a:t>08-Feb-26</a:t>
+              <a:t>09-Feb-26</a:t>
             </a:fld>
             <a:endParaRPr lang="en-US"/>
           </a:p>
@@ -6755,7 +8708,7 @@
           <a:p>
             <a:fld id="{7313C947-0C62-40F7-BC48-6B3EDD12B3DE}" type="datetimeFigureOut">
               <a:rPr lang="en-US" smtClean="0"/>
-              <a:t>08-Feb-26</a:t>
+              <a:t>09-Feb-26</a:t>
             </a:fld>
             <a:endParaRPr lang="en-US"/>
           </a:p>
@@ -7494,8 +9447,8 @@
           </a:p>
         </p:txBody>
       </p:sp>
-      <mc:AlternateContent xmlns:mc="http://schemas.openxmlformats.org/markup-compatibility/2006">
-        <mc:Choice xmlns:p14="http://schemas.microsoft.com/office/powerpoint/2010/main" Requires="p14">
+      <mc:AlternateContent xmlns:mc="http://schemas.openxmlformats.org/markup-compatibility/2006" xmlns:p14="http://schemas.microsoft.com/office/powerpoint/2010/main">
+        <mc:Choice Requires="p14">
           <p:contentPart p14:bwMode="auto" r:id="rId2">
             <p14:nvContentPartPr>
               <p14:cNvPr id="16" name="Ink 15">
@@ -7514,7 +9467,7 @@
             </p14:xfrm>
           </p:contentPart>
         </mc:Choice>
-        <mc:Fallback>
+        <mc:Fallback xmlns="">
           <p:pic>
             <p:nvPicPr>
               <p:cNvPr id="16" name="Ink 15">
@@ -7565,8 +9518,8 @@
             <a:chExt cx="831600" cy="367920"/>
           </a:xfrm>
         </p:grpSpPr>
-        <mc:AlternateContent xmlns:mc="http://schemas.openxmlformats.org/markup-compatibility/2006">
-          <mc:Choice xmlns:p14="http://schemas.microsoft.com/office/powerpoint/2010/main" Requires="p14">
+        <mc:AlternateContent xmlns:mc="http://schemas.openxmlformats.org/markup-compatibility/2006" xmlns:p14="http://schemas.microsoft.com/office/powerpoint/2010/main">
+          <mc:Choice Requires="p14">
             <p:contentPart p14:bwMode="auto" r:id="rId4">
               <p14:nvContentPartPr>
                 <p14:cNvPr id="17" name="Ink 16">
@@ -7585,7 +9538,7 @@
               </p14:xfrm>
             </p:contentPart>
           </mc:Choice>
-          <mc:Fallback>
+          <mc:Fallback xmlns="">
             <p:pic>
               <p:nvPicPr>
                 <p:cNvPr id="17" name="Ink 16">
@@ -7616,8 +9569,8 @@
             </p:pic>
           </mc:Fallback>
         </mc:AlternateContent>
-        <mc:AlternateContent xmlns:mc="http://schemas.openxmlformats.org/markup-compatibility/2006">
-          <mc:Choice xmlns:p14="http://schemas.microsoft.com/office/powerpoint/2010/main" Requires="p14">
+        <mc:AlternateContent xmlns:mc="http://schemas.openxmlformats.org/markup-compatibility/2006" xmlns:p14="http://schemas.microsoft.com/office/powerpoint/2010/main">
+          <mc:Choice Requires="p14">
             <p:contentPart p14:bwMode="auto" r:id="rId6">
               <p14:nvContentPartPr>
                 <p14:cNvPr id="18" name="Ink 17">
@@ -7636,7 +9589,7 @@
               </p14:xfrm>
             </p:contentPart>
           </mc:Choice>
-          <mc:Fallback>
+          <mc:Fallback xmlns="">
             <p:pic>
               <p:nvPicPr>
                 <p:cNvPr id="18" name="Ink 17">
@@ -7667,8 +9620,8 @@
             </p:pic>
           </mc:Fallback>
         </mc:AlternateContent>
-        <mc:AlternateContent xmlns:mc="http://schemas.openxmlformats.org/markup-compatibility/2006">
-          <mc:Choice xmlns:p14="http://schemas.microsoft.com/office/powerpoint/2010/main" Requires="p14">
+        <mc:AlternateContent xmlns:mc="http://schemas.openxmlformats.org/markup-compatibility/2006" xmlns:p14="http://schemas.microsoft.com/office/powerpoint/2010/main">
+          <mc:Choice Requires="p14">
             <p:contentPart p14:bwMode="auto" r:id="rId8">
               <p14:nvContentPartPr>
                 <p14:cNvPr id="19" name="Ink 18">
@@ -7687,7 +9640,7 @@
               </p14:xfrm>
             </p:contentPart>
           </mc:Choice>
-          <mc:Fallback>
+          <mc:Fallback xmlns="">
             <p:pic>
               <p:nvPicPr>
                 <p:cNvPr id="19" name="Ink 18">
@@ -7718,8 +9671,8 @@
             </p:pic>
           </mc:Fallback>
         </mc:AlternateContent>
-        <mc:AlternateContent xmlns:mc="http://schemas.openxmlformats.org/markup-compatibility/2006">
-          <mc:Choice xmlns:p14="http://schemas.microsoft.com/office/powerpoint/2010/main" Requires="p14">
+        <mc:AlternateContent xmlns:mc="http://schemas.openxmlformats.org/markup-compatibility/2006" xmlns:p14="http://schemas.microsoft.com/office/powerpoint/2010/main">
+          <mc:Choice Requires="p14">
             <p:contentPart p14:bwMode="auto" r:id="rId10">
               <p14:nvContentPartPr>
                 <p14:cNvPr id="22" name="Ink 21">
@@ -7738,7 +9691,7 @@
               </p14:xfrm>
             </p:contentPart>
           </mc:Choice>
-          <mc:Fallback>
+          <mc:Fallback xmlns="">
             <p:pic>
               <p:nvPicPr>
                 <p:cNvPr id="22" name="Ink 21">
@@ -7770,8 +9723,8 @@
           </mc:Fallback>
         </mc:AlternateContent>
       </p:grpSp>
-      <mc:AlternateContent xmlns:mc="http://schemas.openxmlformats.org/markup-compatibility/2006">
-        <mc:Choice xmlns:p14="http://schemas.microsoft.com/office/powerpoint/2010/main" Requires="p14">
+      <mc:AlternateContent xmlns:mc="http://schemas.openxmlformats.org/markup-compatibility/2006" xmlns:p14="http://schemas.microsoft.com/office/powerpoint/2010/main">
+        <mc:Choice Requires="p14">
           <p:contentPart p14:bwMode="auto" r:id="rId12">
             <p14:nvContentPartPr>
               <p14:cNvPr id="24" name="Ink 23">
@@ -7790,7 +9743,7 @@
             </p14:xfrm>
           </p:contentPart>
         </mc:Choice>
-        <mc:Fallback>
+        <mc:Fallback xmlns="">
           <p:pic>
             <p:nvPicPr>
               <p:cNvPr id="24" name="Ink 23">
@@ -7841,8 +9794,8 @@
             <a:chExt cx="738360" cy="479160"/>
           </a:xfrm>
         </p:grpSpPr>
-        <mc:AlternateContent xmlns:mc="http://schemas.openxmlformats.org/markup-compatibility/2006">
-          <mc:Choice xmlns:p14="http://schemas.microsoft.com/office/powerpoint/2010/main" Requires="p14">
+        <mc:AlternateContent xmlns:mc="http://schemas.openxmlformats.org/markup-compatibility/2006" xmlns:p14="http://schemas.microsoft.com/office/powerpoint/2010/main">
+          <mc:Choice Requires="p14">
             <p:contentPart p14:bwMode="auto" r:id="rId14">
               <p14:nvContentPartPr>
                 <p14:cNvPr id="25" name="Ink 24">
@@ -7861,7 +9814,7 @@
               </p14:xfrm>
             </p:contentPart>
           </mc:Choice>
-          <mc:Fallback>
+          <mc:Fallback xmlns="">
             <p:pic>
               <p:nvPicPr>
                 <p:cNvPr id="25" name="Ink 24">
@@ -7892,8 +9845,8 @@
             </p:pic>
           </mc:Fallback>
         </mc:AlternateContent>
-        <mc:AlternateContent xmlns:mc="http://schemas.openxmlformats.org/markup-compatibility/2006">
-          <mc:Choice xmlns:p14="http://schemas.microsoft.com/office/powerpoint/2010/main" Requires="p14">
+        <mc:AlternateContent xmlns:mc="http://schemas.openxmlformats.org/markup-compatibility/2006" xmlns:p14="http://schemas.microsoft.com/office/powerpoint/2010/main">
+          <mc:Choice Requires="p14">
             <p:contentPart p14:bwMode="auto" r:id="rId16">
               <p14:nvContentPartPr>
                 <p14:cNvPr id="26" name="Ink 25">
@@ -7912,7 +9865,7 @@
               </p14:xfrm>
             </p:contentPart>
           </mc:Choice>
-          <mc:Fallback>
+          <mc:Fallback xmlns="">
             <p:pic>
               <p:nvPicPr>
                 <p:cNvPr id="26" name="Ink 25">
@@ -7943,8 +9896,8 @@
             </p:pic>
           </mc:Fallback>
         </mc:AlternateContent>
-        <mc:AlternateContent xmlns:mc="http://schemas.openxmlformats.org/markup-compatibility/2006">
-          <mc:Choice xmlns:p14="http://schemas.microsoft.com/office/powerpoint/2010/main" Requires="p14">
+        <mc:AlternateContent xmlns:mc="http://schemas.openxmlformats.org/markup-compatibility/2006" xmlns:p14="http://schemas.microsoft.com/office/powerpoint/2010/main">
+          <mc:Choice Requires="p14">
             <p:contentPart p14:bwMode="auto" r:id="rId18">
               <p14:nvContentPartPr>
                 <p14:cNvPr id="27" name="Ink 26">
@@ -7963,7 +9916,7 @@
               </p14:xfrm>
             </p:contentPart>
           </mc:Choice>
-          <mc:Fallback>
+          <mc:Fallback xmlns="">
             <p:pic>
               <p:nvPicPr>
                 <p:cNvPr id="27" name="Ink 26">
@@ -7994,8 +9947,8 @@
             </p:pic>
           </mc:Fallback>
         </mc:AlternateContent>
-        <mc:AlternateContent xmlns:mc="http://schemas.openxmlformats.org/markup-compatibility/2006">
-          <mc:Choice xmlns:p14="http://schemas.microsoft.com/office/powerpoint/2010/main" Requires="p14">
+        <mc:AlternateContent xmlns:mc="http://schemas.openxmlformats.org/markup-compatibility/2006" xmlns:p14="http://schemas.microsoft.com/office/powerpoint/2010/main">
+          <mc:Choice Requires="p14">
             <p:contentPart p14:bwMode="auto" r:id="rId20">
               <p14:nvContentPartPr>
                 <p14:cNvPr id="28" name="Ink 27">
@@ -8014,7 +9967,7 @@
               </p14:xfrm>
             </p:contentPart>
           </mc:Choice>
-          <mc:Fallback>
+          <mc:Fallback xmlns="">
             <p:pic>
               <p:nvPicPr>
                 <p:cNvPr id="28" name="Ink 27">
@@ -8045,8 +9998,8 @@
             </p:pic>
           </mc:Fallback>
         </mc:AlternateContent>
-        <mc:AlternateContent xmlns:mc="http://schemas.openxmlformats.org/markup-compatibility/2006">
-          <mc:Choice xmlns:p14="http://schemas.microsoft.com/office/powerpoint/2010/main" Requires="p14">
+        <mc:AlternateContent xmlns:mc="http://schemas.openxmlformats.org/markup-compatibility/2006" xmlns:p14="http://schemas.microsoft.com/office/powerpoint/2010/main">
+          <mc:Choice Requires="p14">
             <p:contentPart p14:bwMode="auto" r:id="rId22">
               <p14:nvContentPartPr>
                 <p14:cNvPr id="30" name="Ink 29">
@@ -8065,7 +10018,7 @@
               </p14:xfrm>
             </p:contentPart>
           </mc:Choice>
-          <mc:Fallback>
+          <mc:Fallback xmlns="">
             <p:pic>
               <p:nvPicPr>
                 <p:cNvPr id="30" name="Ink 29">
@@ -8096,8 +10049,8 @@
             </p:pic>
           </mc:Fallback>
         </mc:AlternateContent>
-        <mc:AlternateContent xmlns:mc="http://schemas.openxmlformats.org/markup-compatibility/2006">
-          <mc:Choice xmlns:p14="http://schemas.microsoft.com/office/powerpoint/2010/main" Requires="p14">
+        <mc:AlternateContent xmlns:mc="http://schemas.openxmlformats.org/markup-compatibility/2006" xmlns:p14="http://schemas.microsoft.com/office/powerpoint/2010/main">
+          <mc:Choice Requires="p14">
             <p:contentPart p14:bwMode="auto" r:id="rId24">
               <p14:nvContentPartPr>
                 <p14:cNvPr id="31" name="Ink 30">
@@ -8116,7 +10069,7 @@
               </p14:xfrm>
             </p:contentPart>
           </mc:Choice>
-          <mc:Fallback>
+          <mc:Fallback xmlns="">
             <p:pic>
               <p:nvPicPr>
                 <p:cNvPr id="31" name="Ink 30">
@@ -8168,8 +10121,8 @@
             <a:chExt cx="1045800" cy="460440"/>
           </a:xfrm>
         </p:grpSpPr>
-        <mc:AlternateContent xmlns:mc="http://schemas.openxmlformats.org/markup-compatibility/2006">
-          <mc:Choice xmlns:p14="http://schemas.microsoft.com/office/powerpoint/2010/main" Requires="p14">
+        <mc:AlternateContent xmlns:mc="http://schemas.openxmlformats.org/markup-compatibility/2006" xmlns:p14="http://schemas.microsoft.com/office/powerpoint/2010/main">
+          <mc:Choice Requires="p14">
             <p:contentPart p14:bwMode="auto" r:id="rId26">
               <p14:nvContentPartPr>
                 <p14:cNvPr id="33" name="Ink 32">
@@ -8188,7 +10141,7 @@
               </p14:xfrm>
             </p:contentPart>
           </mc:Choice>
-          <mc:Fallback>
+          <mc:Fallback xmlns="">
             <p:pic>
               <p:nvPicPr>
                 <p:cNvPr id="33" name="Ink 32">
@@ -8219,8 +10172,8 @@
             </p:pic>
           </mc:Fallback>
         </mc:AlternateContent>
-        <mc:AlternateContent xmlns:mc="http://schemas.openxmlformats.org/markup-compatibility/2006">
-          <mc:Choice xmlns:p14="http://schemas.microsoft.com/office/powerpoint/2010/main" Requires="p14">
+        <mc:AlternateContent xmlns:mc="http://schemas.openxmlformats.org/markup-compatibility/2006" xmlns:p14="http://schemas.microsoft.com/office/powerpoint/2010/main">
+          <mc:Choice Requires="p14">
             <p:contentPart p14:bwMode="auto" r:id="rId28">
               <p14:nvContentPartPr>
                 <p14:cNvPr id="34" name="Ink 33">
@@ -8239,7 +10192,7 @@
               </p14:xfrm>
             </p:contentPart>
           </mc:Choice>
-          <mc:Fallback>
+          <mc:Fallback xmlns="">
             <p:pic>
               <p:nvPicPr>
                 <p:cNvPr id="34" name="Ink 33">
@@ -8270,8 +10223,8 @@
             </p:pic>
           </mc:Fallback>
         </mc:AlternateContent>
-        <mc:AlternateContent xmlns:mc="http://schemas.openxmlformats.org/markup-compatibility/2006">
-          <mc:Choice xmlns:p14="http://schemas.microsoft.com/office/powerpoint/2010/main" Requires="p14">
+        <mc:AlternateContent xmlns:mc="http://schemas.openxmlformats.org/markup-compatibility/2006" xmlns:p14="http://schemas.microsoft.com/office/powerpoint/2010/main">
+          <mc:Choice Requires="p14">
             <p:contentPart p14:bwMode="auto" r:id="rId30">
               <p14:nvContentPartPr>
                 <p14:cNvPr id="35" name="Ink 34">
@@ -8290,7 +10243,7 @@
               </p14:xfrm>
             </p:contentPart>
           </mc:Choice>
-          <mc:Fallback>
+          <mc:Fallback xmlns="">
             <p:pic>
               <p:nvPicPr>
                 <p:cNvPr id="35" name="Ink 34">
@@ -8321,8 +10274,8 @@
             </p:pic>
           </mc:Fallback>
         </mc:AlternateContent>
-        <mc:AlternateContent xmlns:mc="http://schemas.openxmlformats.org/markup-compatibility/2006">
-          <mc:Choice xmlns:p14="http://schemas.microsoft.com/office/powerpoint/2010/main" Requires="p14">
+        <mc:AlternateContent xmlns:mc="http://schemas.openxmlformats.org/markup-compatibility/2006" xmlns:p14="http://schemas.microsoft.com/office/powerpoint/2010/main">
+          <mc:Choice Requires="p14">
             <p:contentPart p14:bwMode="auto" r:id="rId32">
               <p14:nvContentPartPr>
                 <p14:cNvPr id="36" name="Ink 35">
@@ -8341,7 +10294,7 @@
               </p14:xfrm>
             </p:contentPart>
           </mc:Choice>
-          <mc:Fallback>
+          <mc:Fallback xmlns="">
             <p:pic>
               <p:nvPicPr>
                 <p:cNvPr id="36" name="Ink 35">
@@ -8372,8 +10325,8 @@
             </p:pic>
           </mc:Fallback>
         </mc:AlternateContent>
-        <mc:AlternateContent xmlns:mc="http://schemas.openxmlformats.org/markup-compatibility/2006">
-          <mc:Choice xmlns:p14="http://schemas.microsoft.com/office/powerpoint/2010/main" Requires="p14">
+        <mc:AlternateContent xmlns:mc="http://schemas.openxmlformats.org/markup-compatibility/2006" xmlns:p14="http://schemas.microsoft.com/office/powerpoint/2010/main">
+          <mc:Choice Requires="p14">
             <p:contentPart p14:bwMode="auto" r:id="rId34">
               <p14:nvContentPartPr>
                 <p14:cNvPr id="38" name="Ink 37">
@@ -8392,7 +10345,7 @@
               </p14:xfrm>
             </p:contentPart>
           </mc:Choice>
-          <mc:Fallback>
+          <mc:Fallback xmlns="">
             <p:pic>
               <p:nvPicPr>
                 <p:cNvPr id="38" name="Ink 37">
@@ -8423,8 +10376,8 @@
             </p:pic>
           </mc:Fallback>
         </mc:AlternateContent>
-        <mc:AlternateContent xmlns:mc="http://schemas.openxmlformats.org/markup-compatibility/2006">
-          <mc:Choice xmlns:p14="http://schemas.microsoft.com/office/powerpoint/2010/main" Requires="p14">
+        <mc:AlternateContent xmlns:mc="http://schemas.openxmlformats.org/markup-compatibility/2006" xmlns:p14="http://schemas.microsoft.com/office/powerpoint/2010/main">
+          <mc:Choice Requires="p14">
             <p:contentPart p14:bwMode="auto" r:id="rId36">
               <p14:nvContentPartPr>
                 <p14:cNvPr id="39" name="Ink 38">
@@ -8443,7 +10396,7 @@
               </p14:xfrm>
             </p:contentPart>
           </mc:Choice>
-          <mc:Fallback>
+          <mc:Fallback xmlns="">
             <p:pic>
               <p:nvPicPr>
                 <p:cNvPr id="39" name="Ink 38">
@@ -8474,8 +10427,8 @@
             </p:pic>
           </mc:Fallback>
         </mc:AlternateContent>
-        <mc:AlternateContent xmlns:mc="http://schemas.openxmlformats.org/markup-compatibility/2006">
-          <mc:Choice xmlns:p14="http://schemas.microsoft.com/office/powerpoint/2010/main" Requires="p14">
+        <mc:AlternateContent xmlns:mc="http://schemas.openxmlformats.org/markup-compatibility/2006" xmlns:p14="http://schemas.microsoft.com/office/powerpoint/2010/main">
+          <mc:Choice Requires="p14">
             <p:contentPart p14:bwMode="auto" r:id="rId38">
               <p14:nvContentPartPr>
                 <p14:cNvPr id="40" name="Ink 39">
@@ -8494,7 +10447,7 @@
               </p14:xfrm>
             </p:contentPart>
           </mc:Choice>
-          <mc:Fallback>
+          <mc:Fallback xmlns="">
             <p:pic>
               <p:nvPicPr>
                 <p:cNvPr id="40" name="Ink 39">
@@ -8525,8 +10478,8 @@
             </p:pic>
           </mc:Fallback>
         </mc:AlternateContent>
-        <mc:AlternateContent xmlns:mc="http://schemas.openxmlformats.org/markup-compatibility/2006">
-          <mc:Choice xmlns:p14="http://schemas.microsoft.com/office/powerpoint/2010/main" Requires="p14">
+        <mc:AlternateContent xmlns:mc="http://schemas.openxmlformats.org/markup-compatibility/2006" xmlns:p14="http://schemas.microsoft.com/office/powerpoint/2010/main">
+          <mc:Choice Requires="p14">
             <p:contentPart p14:bwMode="auto" r:id="rId40">
               <p14:nvContentPartPr>
                 <p14:cNvPr id="41" name="Ink 40">
@@ -8545,7 +10498,7 @@
               </p14:xfrm>
             </p:contentPart>
           </mc:Choice>
-          <mc:Fallback>
+          <mc:Fallback xmlns="">
             <p:pic>
               <p:nvPicPr>
                 <p:cNvPr id="41" name="Ink 40">
@@ -8577,8 +10530,8 @@
           </mc:Fallback>
         </mc:AlternateContent>
       </p:grpSp>
-      <mc:AlternateContent xmlns:mc="http://schemas.openxmlformats.org/markup-compatibility/2006">
-        <mc:Choice xmlns:p14="http://schemas.microsoft.com/office/powerpoint/2010/main" Requires="p14">
+      <mc:AlternateContent xmlns:mc="http://schemas.openxmlformats.org/markup-compatibility/2006" xmlns:p14="http://schemas.microsoft.com/office/powerpoint/2010/main">
+        <mc:Choice Requires="p14">
           <p:contentPart p14:bwMode="auto" r:id="rId42">
             <p14:nvContentPartPr>
               <p14:cNvPr id="43" name="Ink 42">
@@ -8597,7 +10550,7 @@
             </p14:xfrm>
           </p:contentPart>
         </mc:Choice>
-        <mc:Fallback>
+        <mc:Fallback xmlns="">
           <p:pic>
             <p:nvPicPr>
               <p:cNvPr id="43" name="Ink 42">
@@ -8628,8 +10581,8 @@
           </p:pic>
         </mc:Fallback>
       </mc:AlternateContent>
-      <mc:AlternateContent xmlns:mc="http://schemas.openxmlformats.org/markup-compatibility/2006">
-        <mc:Choice xmlns:p14="http://schemas.microsoft.com/office/powerpoint/2010/main" Requires="p14">
+      <mc:AlternateContent xmlns:mc="http://schemas.openxmlformats.org/markup-compatibility/2006" xmlns:p14="http://schemas.microsoft.com/office/powerpoint/2010/main">
+        <mc:Choice Requires="p14">
           <p:contentPart p14:bwMode="auto" r:id="rId44">
             <p14:nvContentPartPr>
               <p14:cNvPr id="77" name="Ink 76">
@@ -8648,7 +10601,7 @@
             </p14:xfrm>
           </p:contentPart>
         </mc:Choice>
-        <mc:Fallback>
+        <mc:Fallback xmlns="">
           <p:pic>
             <p:nvPicPr>
               <p:cNvPr id="77" name="Ink 76">
@@ -8699,8 +10652,8 @@
             <a:chExt cx="1992240" cy="436320"/>
           </a:xfrm>
         </p:grpSpPr>
-        <mc:AlternateContent xmlns:mc="http://schemas.openxmlformats.org/markup-compatibility/2006">
-          <mc:Choice xmlns:p14="http://schemas.microsoft.com/office/powerpoint/2010/main" Requires="p14">
+        <mc:AlternateContent xmlns:mc="http://schemas.openxmlformats.org/markup-compatibility/2006" xmlns:p14="http://schemas.microsoft.com/office/powerpoint/2010/main">
+          <mc:Choice Requires="p14">
             <p:contentPart p14:bwMode="auto" r:id="rId46">
               <p14:nvContentPartPr>
                 <p14:cNvPr id="84" name="Ink 83">
@@ -8719,7 +10672,7 @@
               </p14:xfrm>
             </p:contentPart>
           </mc:Choice>
-          <mc:Fallback>
+          <mc:Fallback xmlns="">
             <p:pic>
               <p:nvPicPr>
                 <p:cNvPr id="84" name="Ink 83">
@@ -8750,8 +10703,8 @@
             </p:pic>
           </mc:Fallback>
         </mc:AlternateContent>
-        <mc:AlternateContent xmlns:mc="http://schemas.openxmlformats.org/markup-compatibility/2006">
-          <mc:Choice xmlns:p14="http://schemas.microsoft.com/office/powerpoint/2010/main" Requires="p14">
+        <mc:AlternateContent xmlns:mc="http://schemas.openxmlformats.org/markup-compatibility/2006" xmlns:p14="http://schemas.microsoft.com/office/powerpoint/2010/main">
+          <mc:Choice Requires="p14">
             <p:contentPart p14:bwMode="auto" r:id="rId48">
               <p14:nvContentPartPr>
                 <p14:cNvPr id="85" name="Ink 84">
@@ -8770,7 +10723,7 @@
               </p14:xfrm>
             </p:contentPart>
           </mc:Choice>
-          <mc:Fallback>
+          <mc:Fallback xmlns="">
             <p:pic>
               <p:nvPicPr>
                 <p:cNvPr id="85" name="Ink 84">
@@ -8801,8 +10754,8 @@
             </p:pic>
           </mc:Fallback>
         </mc:AlternateContent>
-        <mc:AlternateContent xmlns:mc="http://schemas.openxmlformats.org/markup-compatibility/2006">
-          <mc:Choice xmlns:p14="http://schemas.microsoft.com/office/powerpoint/2010/main" Requires="p14">
+        <mc:AlternateContent xmlns:mc="http://schemas.openxmlformats.org/markup-compatibility/2006" xmlns:p14="http://schemas.microsoft.com/office/powerpoint/2010/main">
+          <mc:Choice Requires="p14">
             <p:contentPart p14:bwMode="auto" r:id="rId50">
               <p14:nvContentPartPr>
                 <p14:cNvPr id="86" name="Ink 85">
@@ -8821,7 +10774,7 @@
               </p14:xfrm>
             </p:contentPart>
           </mc:Choice>
-          <mc:Fallback>
+          <mc:Fallback xmlns="">
             <p:pic>
               <p:nvPicPr>
                 <p:cNvPr id="86" name="Ink 85">
@@ -8852,8 +10805,8 @@
             </p:pic>
           </mc:Fallback>
         </mc:AlternateContent>
-        <mc:AlternateContent xmlns:mc="http://schemas.openxmlformats.org/markup-compatibility/2006">
-          <mc:Choice xmlns:p14="http://schemas.microsoft.com/office/powerpoint/2010/main" Requires="p14">
+        <mc:AlternateContent xmlns:mc="http://schemas.openxmlformats.org/markup-compatibility/2006" xmlns:p14="http://schemas.microsoft.com/office/powerpoint/2010/main">
+          <mc:Choice Requires="p14">
             <p:contentPart p14:bwMode="auto" r:id="rId52">
               <p14:nvContentPartPr>
                 <p14:cNvPr id="87" name="Ink 86">
@@ -8872,7 +10825,7 @@
               </p14:xfrm>
             </p:contentPart>
           </mc:Choice>
-          <mc:Fallback>
+          <mc:Fallback xmlns="">
             <p:pic>
               <p:nvPicPr>
                 <p:cNvPr id="87" name="Ink 86">
@@ -8903,8 +10856,8 @@
             </p:pic>
           </mc:Fallback>
         </mc:AlternateContent>
-        <mc:AlternateContent xmlns:mc="http://schemas.openxmlformats.org/markup-compatibility/2006">
-          <mc:Choice xmlns:p14="http://schemas.microsoft.com/office/powerpoint/2010/main" Requires="p14">
+        <mc:AlternateContent xmlns:mc="http://schemas.openxmlformats.org/markup-compatibility/2006" xmlns:p14="http://schemas.microsoft.com/office/powerpoint/2010/main">
+          <mc:Choice Requires="p14">
             <p:contentPart p14:bwMode="auto" r:id="rId54">
               <p14:nvContentPartPr>
                 <p14:cNvPr id="88" name="Ink 87">
@@ -8923,7 +10876,7 @@
               </p14:xfrm>
             </p:contentPart>
           </mc:Choice>
-          <mc:Fallback>
+          <mc:Fallback xmlns="">
             <p:pic>
               <p:nvPicPr>
                 <p:cNvPr id="88" name="Ink 87">
@@ -8954,8 +10907,8 @@
             </p:pic>
           </mc:Fallback>
         </mc:AlternateContent>
-        <mc:AlternateContent xmlns:mc="http://schemas.openxmlformats.org/markup-compatibility/2006">
-          <mc:Choice xmlns:p14="http://schemas.microsoft.com/office/powerpoint/2010/main" Requires="p14">
+        <mc:AlternateContent xmlns:mc="http://schemas.openxmlformats.org/markup-compatibility/2006" xmlns:p14="http://schemas.microsoft.com/office/powerpoint/2010/main">
+          <mc:Choice Requires="p14">
             <p:contentPart p14:bwMode="auto" r:id="rId56">
               <p14:nvContentPartPr>
                 <p14:cNvPr id="90" name="Ink 89">
@@ -8974,7 +10927,7 @@
               </p14:xfrm>
             </p:contentPart>
           </mc:Choice>
-          <mc:Fallback>
+          <mc:Fallback xmlns="">
             <p:pic>
               <p:nvPicPr>
                 <p:cNvPr id="90" name="Ink 89">
@@ -9005,8 +10958,8 @@
             </p:pic>
           </mc:Fallback>
         </mc:AlternateContent>
-        <mc:AlternateContent xmlns:mc="http://schemas.openxmlformats.org/markup-compatibility/2006">
-          <mc:Choice xmlns:p14="http://schemas.microsoft.com/office/powerpoint/2010/main" Requires="p14">
+        <mc:AlternateContent xmlns:mc="http://schemas.openxmlformats.org/markup-compatibility/2006" xmlns:p14="http://schemas.microsoft.com/office/powerpoint/2010/main">
+          <mc:Choice Requires="p14">
             <p:contentPart p14:bwMode="auto" r:id="rId58">
               <p14:nvContentPartPr>
                 <p14:cNvPr id="91" name="Ink 90">
@@ -9025,7 +10978,7 @@
               </p14:xfrm>
             </p:contentPart>
           </mc:Choice>
-          <mc:Fallback>
+          <mc:Fallback xmlns="">
             <p:pic>
               <p:nvPicPr>
                 <p:cNvPr id="91" name="Ink 90">
@@ -9077,8 +11030,8 @@
             <a:chExt cx="148320" cy="113760"/>
           </a:xfrm>
         </p:grpSpPr>
-        <mc:AlternateContent xmlns:mc="http://schemas.openxmlformats.org/markup-compatibility/2006">
-          <mc:Choice xmlns:p14="http://schemas.microsoft.com/office/powerpoint/2010/main" Requires="p14">
+        <mc:AlternateContent xmlns:mc="http://schemas.openxmlformats.org/markup-compatibility/2006" xmlns:p14="http://schemas.microsoft.com/office/powerpoint/2010/main">
+          <mc:Choice Requires="p14">
             <p:contentPart p14:bwMode="auto" r:id="rId60">
               <p14:nvContentPartPr>
                 <p14:cNvPr id="92" name="Ink 91">
@@ -9097,7 +11050,7 @@
               </p14:xfrm>
             </p:contentPart>
           </mc:Choice>
-          <mc:Fallback>
+          <mc:Fallback xmlns="">
             <p:pic>
               <p:nvPicPr>
                 <p:cNvPr id="92" name="Ink 91">
@@ -9128,8 +11081,8 @@
             </p:pic>
           </mc:Fallback>
         </mc:AlternateContent>
-        <mc:AlternateContent xmlns:mc="http://schemas.openxmlformats.org/markup-compatibility/2006">
-          <mc:Choice xmlns:p14="http://schemas.microsoft.com/office/powerpoint/2010/main" Requires="p14">
+        <mc:AlternateContent xmlns:mc="http://schemas.openxmlformats.org/markup-compatibility/2006" xmlns:p14="http://schemas.microsoft.com/office/powerpoint/2010/main">
+          <mc:Choice Requires="p14">
             <p:contentPart p14:bwMode="auto" r:id="rId62">
               <p14:nvContentPartPr>
                 <p14:cNvPr id="93" name="Ink 92">
@@ -9148,7 +11101,7 @@
               </p14:xfrm>
             </p:contentPart>
           </mc:Choice>
-          <mc:Fallback>
+          <mc:Fallback xmlns="">
             <p:pic>
               <p:nvPicPr>
                 <p:cNvPr id="93" name="Ink 92">
@@ -9180,8 +11133,8 @@
           </mc:Fallback>
         </mc:AlternateContent>
       </p:grpSp>
-      <mc:AlternateContent xmlns:mc="http://schemas.openxmlformats.org/markup-compatibility/2006">
-        <mc:Choice xmlns:p14="http://schemas.microsoft.com/office/powerpoint/2010/main" Requires="p14">
+      <mc:AlternateContent xmlns:mc="http://schemas.openxmlformats.org/markup-compatibility/2006" xmlns:p14="http://schemas.microsoft.com/office/powerpoint/2010/main">
+        <mc:Choice Requires="p14">
           <p:contentPart p14:bwMode="auto" r:id="rId64">
             <p14:nvContentPartPr>
               <p14:cNvPr id="98" name="Ink 97">
@@ -9200,7 +11153,7 @@
             </p14:xfrm>
           </p:contentPart>
         </mc:Choice>
-        <mc:Fallback>
+        <mc:Fallback xmlns="">
           <p:pic>
             <p:nvPicPr>
               <p:cNvPr id="98" name="Ink 97">
@@ -9251,8 +11204,8 @@
             <a:chExt cx="527040" cy="393840"/>
           </a:xfrm>
         </p:grpSpPr>
-        <mc:AlternateContent xmlns:mc="http://schemas.openxmlformats.org/markup-compatibility/2006">
-          <mc:Choice xmlns:p14="http://schemas.microsoft.com/office/powerpoint/2010/main" Requires="p14">
+        <mc:AlternateContent xmlns:mc="http://schemas.openxmlformats.org/markup-compatibility/2006" xmlns:p14="http://schemas.microsoft.com/office/powerpoint/2010/main">
+          <mc:Choice Requires="p14">
             <p:contentPart p14:bwMode="auto" r:id="rId66">
               <p14:nvContentPartPr>
                 <p14:cNvPr id="96" name="Ink 95">
@@ -9271,7 +11224,7 @@
               </p14:xfrm>
             </p:contentPart>
           </mc:Choice>
-          <mc:Fallback>
+          <mc:Fallback xmlns="">
             <p:pic>
               <p:nvPicPr>
                 <p:cNvPr id="96" name="Ink 95">
@@ -9302,8 +11255,8 @@
             </p:pic>
           </mc:Fallback>
         </mc:AlternateContent>
-        <mc:AlternateContent xmlns:mc="http://schemas.openxmlformats.org/markup-compatibility/2006">
-          <mc:Choice xmlns:p14="http://schemas.microsoft.com/office/powerpoint/2010/main" Requires="p14">
+        <mc:AlternateContent xmlns:mc="http://schemas.openxmlformats.org/markup-compatibility/2006" xmlns:p14="http://schemas.microsoft.com/office/powerpoint/2010/main">
+          <mc:Choice Requires="p14">
             <p:contentPart p14:bwMode="auto" r:id="rId68">
               <p14:nvContentPartPr>
                 <p14:cNvPr id="97" name="Ink 96">
@@ -9322,7 +11275,7 @@
               </p14:xfrm>
             </p:contentPart>
           </mc:Choice>
-          <mc:Fallback>
+          <mc:Fallback xmlns="">
             <p:pic>
               <p:nvPicPr>
                 <p:cNvPr id="97" name="Ink 96">
@@ -9353,8 +11306,8 @@
             </p:pic>
           </mc:Fallback>
         </mc:AlternateContent>
-        <mc:AlternateContent xmlns:mc="http://schemas.openxmlformats.org/markup-compatibility/2006">
-          <mc:Choice xmlns:p14="http://schemas.microsoft.com/office/powerpoint/2010/main" Requires="p14">
+        <mc:AlternateContent xmlns:mc="http://schemas.openxmlformats.org/markup-compatibility/2006" xmlns:p14="http://schemas.microsoft.com/office/powerpoint/2010/main">
+          <mc:Choice Requires="p14">
             <p:contentPart p14:bwMode="auto" r:id="rId70">
               <p14:nvContentPartPr>
                 <p14:cNvPr id="100" name="Ink 99">
@@ -9373,7 +11326,7 @@
               </p14:xfrm>
             </p:contentPart>
           </mc:Choice>
-          <mc:Fallback>
+          <mc:Fallback xmlns="">
             <p:pic>
               <p:nvPicPr>
                 <p:cNvPr id="100" name="Ink 99">
@@ -9404,8 +11357,8 @@
             </p:pic>
           </mc:Fallback>
         </mc:AlternateContent>
-        <mc:AlternateContent xmlns:mc="http://schemas.openxmlformats.org/markup-compatibility/2006">
-          <mc:Choice xmlns:p14="http://schemas.microsoft.com/office/powerpoint/2010/main" Requires="p14">
+        <mc:AlternateContent xmlns:mc="http://schemas.openxmlformats.org/markup-compatibility/2006" xmlns:p14="http://schemas.microsoft.com/office/powerpoint/2010/main">
+          <mc:Choice Requires="p14">
             <p:contentPart p14:bwMode="auto" r:id="rId72">
               <p14:nvContentPartPr>
                 <p14:cNvPr id="101" name="Ink 100">
@@ -9424,7 +11377,7 @@
               </p14:xfrm>
             </p:contentPart>
           </mc:Choice>
-          <mc:Fallback>
+          <mc:Fallback xmlns="">
             <p:pic>
               <p:nvPicPr>
                 <p:cNvPr id="101" name="Ink 100">
@@ -9476,8 +11429,8 @@
             <a:chExt cx="158040" cy="111600"/>
           </a:xfrm>
         </p:grpSpPr>
-        <mc:AlternateContent xmlns:mc="http://schemas.openxmlformats.org/markup-compatibility/2006">
-          <mc:Choice xmlns:p14="http://schemas.microsoft.com/office/powerpoint/2010/main" Requires="p14">
+        <mc:AlternateContent xmlns:mc="http://schemas.openxmlformats.org/markup-compatibility/2006" xmlns:p14="http://schemas.microsoft.com/office/powerpoint/2010/main">
+          <mc:Choice Requires="p14">
             <p:contentPart p14:bwMode="auto" r:id="rId74">
               <p14:nvContentPartPr>
                 <p14:cNvPr id="103" name="Ink 102">
@@ -9496,7 +11449,7 @@
               </p14:xfrm>
             </p:contentPart>
           </mc:Choice>
-          <mc:Fallback>
+          <mc:Fallback xmlns="">
             <p:pic>
               <p:nvPicPr>
                 <p:cNvPr id="103" name="Ink 102">
@@ -9527,8 +11480,8 @@
             </p:pic>
           </mc:Fallback>
         </mc:AlternateContent>
-        <mc:AlternateContent xmlns:mc="http://schemas.openxmlformats.org/markup-compatibility/2006">
-          <mc:Choice xmlns:p14="http://schemas.microsoft.com/office/powerpoint/2010/main" Requires="p14">
+        <mc:AlternateContent xmlns:mc="http://schemas.openxmlformats.org/markup-compatibility/2006" xmlns:p14="http://schemas.microsoft.com/office/powerpoint/2010/main">
+          <mc:Choice Requires="p14">
             <p:contentPart p14:bwMode="auto" r:id="rId76">
               <p14:nvContentPartPr>
                 <p14:cNvPr id="104" name="Ink 103">
@@ -9547,7 +11500,7 @@
               </p14:xfrm>
             </p:contentPart>
           </mc:Choice>
-          <mc:Fallback>
+          <mc:Fallback xmlns="">
             <p:pic>
               <p:nvPicPr>
                 <p:cNvPr id="104" name="Ink 103">
@@ -9579,8 +11532,8 @@
           </mc:Fallback>
         </mc:AlternateContent>
       </p:grpSp>
-      <mc:AlternateContent xmlns:mc="http://schemas.openxmlformats.org/markup-compatibility/2006">
-        <mc:Choice xmlns:p14="http://schemas.microsoft.com/office/powerpoint/2010/main" Requires="p14">
+      <mc:AlternateContent xmlns:mc="http://schemas.openxmlformats.org/markup-compatibility/2006" xmlns:p14="http://schemas.microsoft.com/office/powerpoint/2010/main">
+        <mc:Choice Requires="p14">
           <p:contentPart p14:bwMode="auto" r:id="rId78">
             <p14:nvContentPartPr>
               <p14:cNvPr id="106" name="Ink 105">
@@ -9599,7 +11552,7 @@
             </p14:xfrm>
           </p:contentPart>
         </mc:Choice>
-        <mc:Fallback>
+        <mc:Fallback xmlns="">
           <p:pic>
             <p:nvPicPr>
               <p:cNvPr id="106" name="Ink 105">
@@ -9650,8 +11603,8 @@
             <a:chExt cx="2497320" cy="751320"/>
           </a:xfrm>
         </p:grpSpPr>
-        <mc:AlternateContent xmlns:mc="http://schemas.openxmlformats.org/markup-compatibility/2006">
-          <mc:Choice xmlns:p14="http://schemas.microsoft.com/office/powerpoint/2010/main" Requires="p14">
+        <mc:AlternateContent xmlns:mc="http://schemas.openxmlformats.org/markup-compatibility/2006" xmlns:p14="http://schemas.microsoft.com/office/powerpoint/2010/main">
+          <mc:Choice Requires="p14">
             <p:contentPart p14:bwMode="auto" r:id="rId80">
               <p14:nvContentPartPr>
                 <p14:cNvPr id="107" name="Ink 106">
@@ -9670,7 +11623,7 @@
               </p14:xfrm>
             </p:contentPart>
           </mc:Choice>
-          <mc:Fallback>
+          <mc:Fallback xmlns="">
             <p:pic>
               <p:nvPicPr>
                 <p:cNvPr id="107" name="Ink 106">
@@ -9701,8 +11654,8 @@
             </p:pic>
           </mc:Fallback>
         </mc:AlternateContent>
-        <mc:AlternateContent xmlns:mc="http://schemas.openxmlformats.org/markup-compatibility/2006">
-          <mc:Choice xmlns:p14="http://schemas.microsoft.com/office/powerpoint/2010/main" Requires="p14">
+        <mc:AlternateContent xmlns:mc="http://schemas.openxmlformats.org/markup-compatibility/2006" xmlns:p14="http://schemas.microsoft.com/office/powerpoint/2010/main">
+          <mc:Choice Requires="p14">
             <p:contentPart p14:bwMode="auto" r:id="rId82">
               <p14:nvContentPartPr>
                 <p14:cNvPr id="108" name="Ink 107">
@@ -9721,7 +11674,7 @@
               </p14:xfrm>
             </p:contentPart>
           </mc:Choice>
-          <mc:Fallback>
+          <mc:Fallback xmlns="">
             <p:pic>
               <p:nvPicPr>
                 <p:cNvPr id="108" name="Ink 107">
@@ -9752,8 +11705,8 @@
             </p:pic>
           </mc:Fallback>
         </mc:AlternateContent>
-        <mc:AlternateContent xmlns:mc="http://schemas.openxmlformats.org/markup-compatibility/2006">
-          <mc:Choice xmlns:p14="http://schemas.microsoft.com/office/powerpoint/2010/main" Requires="p14">
+        <mc:AlternateContent xmlns:mc="http://schemas.openxmlformats.org/markup-compatibility/2006" xmlns:p14="http://schemas.microsoft.com/office/powerpoint/2010/main">
+          <mc:Choice Requires="p14">
             <p:contentPart p14:bwMode="auto" r:id="rId84">
               <p14:nvContentPartPr>
                 <p14:cNvPr id="109" name="Ink 108">
@@ -9772,7 +11725,7 @@
               </p14:xfrm>
             </p:contentPart>
           </mc:Choice>
-          <mc:Fallback>
+          <mc:Fallback xmlns="">
             <p:pic>
               <p:nvPicPr>
                 <p:cNvPr id="109" name="Ink 108">
@@ -9803,8 +11756,8 @@
             </p:pic>
           </mc:Fallback>
         </mc:AlternateContent>
-        <mc:AlternateContent xmlns:mc="http://schemas.openxmlformats.org/markup-compatibility/2006">
-          <mc:Choice xmlns:p14="http://schemas.microsoft.com/office/powerpoint/2010/main" Requires="p14">
+        <mc:AlternateContent xmlns:mc="http://schemas.openxmlformats.org/markup-compatibility/2006" xmlns:p14="http://schemas.microsoft.com/office/powerpoint/2010/main">
+          <mc:Choice Requires="p14">
             <p:contentPart p14:bwMode="auto" r:id="rId86">
               <p14:nvContentPartPr>
                 <p14:cNvPr id="110" name="Ink 109">
@@ -9823,7 +11776,7 @@
               </p14:xfrm>
             </p:contentPart>
           </mc:Choice>
-          <mc:Fallback>
+          <mc:Fallback xmlns="">
             <p:pic>
               <p:nvPicPr>
                 <p:cNvPr id="110" name="Ink 109">
@@ -9854,8 +11807,8 @@
             </p:pic>
           </mc:Fallback>
         </mc:AlternateContent>
-        <mc:AlternateContent xmlns:mc="http://schemas.openxmlformats.org/markup-compatibility/2006">
-          <mc:Choice xmlns:p14="http://schemas.microsoft.com/office/powerpoint/2010/main" Requires="p14">
+        <mc:AlternateContent xmlns:mc="http://schemas.openxmlformats.org/markup-compatibility/2006" xmlns:p14="http://schemas.microsoft.com/office/powerpoint/2010/main">
+          <mc:Choice Requires="p14">
             <p:contentPart p14:bwMode="auto" r:id="rId88">
               <p14:nvContentPartPr>
                 <p14:cNvPr id="111" name="Ink 110">
@@ -9874,7 +11827,7 @@
               </p14:xfrm>
             </p:contentPart>
           </mc:Choice>
-          <mc:Fallback>
+          <mc:Fallback xmlns="">
             <p:pic>
               <p:nvPicPr>
                 <p:cNvPr id="111" name="Ink 110">
@@ -9905,8 +11858,8 @@
             </p:pic>
           </mc:Fallback>
         </mc:AlternateContent>
-        <mc:AlternateContent xmlns:mc="http://schemas.openxmlformats.org/markup-compatibility/2006">
-          <mc:Choice xmlns:p14="http://schemas.microsoft.com/office/powerpoint/2010/main" Requires="p14">
+        <mc:AlternateContent xmlns:mc="http://schemas.openxmlformats.org/markup-compatibility/2006" xmlns:p14="http://schemas.microsoft.com/office/powerpoint/2010/main">
+          <mc:Choice Requires="p14">
             <p:contentPart p14:bwMode="auto" r:id="rId90">
               <p14:nvContentPartPr>
                 <p14:cNvPr id="113" name="Ink 112">
@@ -9925,7 +11878,7 @@
               </p14:xfrm>
             </p:contentPart>
           </mc:Choice>
-          <mc:Fallback>
+          <mc:Fallback xmlns="">
             <p:pic>
               <p:nvPicPr>
                 <p:cNvPr id="113" name="Ink 112">
@@ -9956,8 +11909,8 @@
             </p:pic>
           </mc:Fallback>
         </mc:AlternateContent>
-        <mc:AlternateContent xmlns:mc="http://schemas.openxmlformats.org/markup-compatibility/2006">
-          <mc:Choice xmlns:p14="http://schemas.microsoft.com/office/powerpoint/2010/main" Requires="p14">
+        <mc:AlternateContent xmlns:mc="http://schemas.openxmlformats.org/markup-compatibility/2006" xmlns:p14="http://schemas.microsoft.com/office/powerpoint/2010/main">
+          <mc:Choice Requires="p14">
             <p:contentPart p14:bwMode="auto" r:id="rId92">
               <p14:nvContentPartPr>
                 <p14:cNvPr id="114" name="Ink 113">
@@ -9976,7 +11929,7 @@
               </p14:xfrm>
             </p:contentPart>
           </mc:Choice>
-          <mc:Fallback>
+          <mc:Fallback xmlns="">
             <p:pic>
               <p:nvPicPr>
                 <p:cNvPr id="114" name="Ink 113">
@@ -10007,8 +11960,8 @@
             </p:pic>
           </mc:Fallback>
         </mc:AlternateContent>
-        <mc:AlternateContent xmlns:mc="http://schemas.openxmlformats.org/markup-compatibility/2006">
-          <mc:Choice xmlns:p14="http://schemas.microsoft.com/office/powerpoint/2010/main" Requires="p14">
+        <mc:AlternateContent xmlns:mc="http://schemas.openxmlformats.org/markup-compatibility/2006" xmlns:p14="http://schemas.microsoft.com/office/powerpoint/2010/main">
+          <mc:Choice Requires="p14">
             <p:contentPart p14:bwMode="auto" r:id="rId94">
               <p14:nvContentPartPr>
                 <p14:cNvPr id="115" name="Ink 114">
@@ -10027,7 +11980,7 @@
               </p14:xfrm>
             </p:contentPart>
           </mc:Choice>
-          <mc:Fallback>
+          <mc:Fallback xmlns="">
             <p:pic>
               <p:nvPicPr>
                 <p:cNvPr id="115" name="Ink 114">
@@ -10079,8 +12032,8 @@
             <a:chExt cx="3167640" cy="995040"/>
           </a:xfrm>
         </p:grpSpPr>
-        <mc:AlternateContent xmlns:mc="http://schemas.openxmlformats.org/markup-compatibility/2006">
-          <mc:Choice xmlns:p14="http://schemas.microsoft.com/office/powerpoint/2010/main" Requires="p14">
+        <mc:AlternateContent xmlns:mc="http://schemas.openxmlformats.org/markup-compatibility/2006" xmlns:p14="http://schemas.microsoft.com/office/powerpoint/2010/main">
+          <mc:Choice Requires="p14">
             <p:contentPart p14:bwMode="auto" r:id="rId96">
               <p14:nvContentPartPr>
                 <p14:cNvPr id="117" name="Ink 116">
@@ -10099,7 +12052,7 @@
               </p14:xfrm>
             </p:contentPart>
           </mc:Choice>
-          <mc:Fallback>
+          <mc:Fallback xmlns="">
             <p:pic>
               <p:nvPicPr>
                 <p:cNvPr id="117" name="Ink 116">
@@ -10130,8 +12083,8 @@
             </p:pic>
           </mc:Fallback>
         </mc:AlternateContent>
-        <mc:AlternateContent xmlns:mc="http://schemas.openxmlformats.org/markup-compatibility/2006">
-          <mc:Choice xmlns:p14="http://schemas.microsoft.com/office/powerpoint/2010/main" Requires="p14">
+        <mc:AlternateContent xmlns:mc="http://schemas.openxmlformats.org/markup-compatibility/2006" xmlns:p14="http://schemas.microsoft.com/office/powerpoint/2010/main">
+          <mc:Choice Requires="p14">
             <p:contentPart p14:bwMode="auto" r:id="rId98">
               <p14:nvContentPartPr>
                 <p14:cNvPr id="118" name="Ink 117">
@@ -10150,7 +12103,7 @@
               </p14:xfrm>
             </p:contentPart>
           </mc:Choice>
-          <mc:Fallback>
+          <mc:Fallback xmlns="">
             <p:pic>
               <p:nvPicPr>
                 <p:cNvPr id="118" name="Ink 117">
@@ -10181,8 +12134,8 @@
             </p:pic>
           </mc:Fallback>
         </mc:AlternateContent>
-        <mc:AlternateContent xmlns:mc="http://schemas.openxmlformats.org/markup-compatibility/2006">
-          <mc:Choice xmlns:p14="http://schemas.microsoft.com/office/powerpoint/2010/main" Requires="p14">
+        <mc:AlternateContent xmlns:mc="http://schemas.openxmlformats.org/markup-compatibility/2006" xmlns:p14="http://schemas.microsoft.com/office/powerpoint/2010/main">
+          <mc:Choice Requires="p14">
             <p:contentPart p14:bwMode="auto" r:id="rId100">
               <p14:nvContentPartPr>
                 <p14:cNvPr id="119" name="Ink 118">
@@ -10201,7 +12154,7 @@
               </p14:xfrm>
             </p:contentPart>
           </mc:Choice>
-          <mc:Fallback>
+          <mc:Fallback xmlns="">
             <p:pic>
               <p:nvPicPr>
                 <p:cNvPr id="119" name="Ink 118">
@@ -10232,8 +12185,8 @@
             </p:pic>
           </mc:Fallback>
         </mc:AlternateContent>
-        <mc:AlternateContent xmlns:mc="http://schemas.openxmlformats.org/markup-compatibility/2006">
-          <mc:Choice xmlns:p14="http://schemas.microsoft.com/office/powerpoint/2010/main" Requires="p14">
+        <mc:AlternateContent xmlns:mc="http://schemas.openxmlformats.org/markup-compatibility/2006" xmlns:p14="http://schemas.microsoft.com/office/powerpoint/2010/main">
+          <mc:Choice Requires="p14">
             <p:contentPart p14:bwMode="auto" r:id="rId102">
               <p14:nvContentPartPr>
                 <p14:cNvPr id="120" name="Ink 119">
@@ -10252,7 +12205,7 @@
               </p14:xfrm>
             </p:contentPart>
           </mc:Choice>
-          <mc:Fallback>
+          <mc:Fallback xmlns="">
             <p:pic>
               <p:nvPicPr>
                 <p:cNvPr id="120" name="Ink 119">
@@ -10283,8 +12236,8 @@
             </p:pic>
           </mc:Fallback>
         </mc:AlternateContent>
-        <mc:AlternateContent xmlns:mc="http://schemas.openxmlformats.org/markup-compatibility/2006">
-          <mc:Choice xmlns:p14="http://schemas.microsoft.com/office/powerpoint/2010/main" Requires="p14">
+        <mc:AlternateContent xmlns:mc="http://schemas.openxmlformats.org/markup-compatibility/2006" xmlns:p14="http://schemas.microsoft.com/office/powerpoint/2010/main">
+          <mc:Choice Requires="p14">
             <p:contentPart p14:bwMode="auto" r:id="rId104">
               <p14:nvContentPartPr>
                 <p14:cNvPr id="121" name="Ink 120">
@@ -10303,7 +12256,7 @@
               </p14:xfrm>
             </p:contentPart>
           </mc:Choice>
-          <mc:Fallback>
+          <mc:Fallback xmlns="">
             <p:pic>
               <p:nvPicPr>
                 <p:cNvPr id="121" name="Ink 120">
@@ -10334,8 +12287,8 @@
             </p:pic>
           </mc:Fallback>
         </mc:AlternateContent>
-        <mc:AlternateContent xmlns:mc="http://schemas.openxmlformats.org/markup-compatibility/2006">
-          <mc:Choice xmlns:p14="http://schemas.microsoft.com/office/powerpoint/2010/main" Requires="p14">
+        <mc:AlternateContent xmlns:mc="http://schemas.openxmlformats.org/markup-compatibility/2006" xmlns:p14="http://schemas.microsoft.com/office/powerpoint/2010/main">
+          <mc:Choice Requires="p14">
             <p:contentPart p14:bwMode="auto" r:id="rId106">
               <p14:nvContentPartPr>
                 <p14:cNvPr id="122" name="Ink 121">
@@ -10354,7 +12307,7 @@
               </p14:xfrm>
             </p:contentPart>
           </mc:Choice>
-          <mc:Fallback>
+          <mc:Fallback xmlns="">
             <p:pic>
               <p:nvPicPr>
                 <p:cNvPr id="122" name="Ink 121">
@@ -10406,8 +12359,8 @@
             <a:chExt cx="2090880" cy="1376640"/>
           </a:xfrm>
         </p:grpSpPr>
-        <mc:AlternateContent xmlns:mc="http://schemas.openxmlformats.org/markup-compatibility/2006">
-          <mc:Choice xmlns:p14="http://schemas.microsoft.com/office/powerpoint/2010/main" Requires="p14">
+        <mc:AlternateContent xmlns:mc="http://schemas.openxmlformats.org/markup-compatibility/2006" xmlns:p14="http://schemas.microsoft.com/office/powerpoint/2010/main">
+          <mc:Choice Requires="p14">
             <p:contentPart p14:bwMode="auto" r:id="rId108">
               <p14:nvContentPartPr>
                 <p14:cNvPr id="123" name="Ink 122">
@@ -10426,7 +12379,7 @@
               </p14:xfrm>
             </p:contentPart>
           </mc:Choice>
-          <mc:Fallback>
+          <mc:Fallback xmlns="">
             <p:pic>
               <p:nvPicPr>
                 <p:cNvPr id="123" name="Ink 122">
@@ -10457,8 +12410,8 @@
             </p:pic>
           </mc:Fallback>
         </mc:AlternateContent>
-        <mc:AlternateContent xmlns:mc="http://schemas.openxmlformats.org/markup-compatibility/2006">
-          <mc:Choice xmlns:p14="http://schemas.microsoft.com/office/powerpoint/2010/main" Requires="p14">
+        <mc:AlternateContent xmlns:mc="http://schemas.openxmlformats.org/markup-compatibility/2006" xmlns:p14="http://schemas.microsoft.com/office/powerpoint/2010/main">
+          <mc:Choice Requires="p14">
             <p:contentPart p14:bwMode="auto" r:id="rId110">
               <p14:nvContentPartPr>
                 <p14:cNvPr id="124" name="Ink 123">
@@ -10477,7 +12430,7 @@
               </p14:xfrm>
             </p:contentPart>
           </mc:Choice>
-          <mc:Fallback>
+          <mc:Fallback xmlns="">
             <p:pic>
               <p:nvPicPr>
                 <p:cNvPr id="124" name="Ink 123">
@@ -10508,8 +12461,8 @@
             </p:pic>
           </mc:Fallback>
         </mc:AlternateContent>
-        <mc:AlternateContent xmlns:mc="http://schemas.openxmlformats.org/markup-compatibility/2006">
-          <mc:Choice xmlns:p14="http://schemas.microsoft.com/office/powerpoint/2010/main" Requires="p14">
+        <mc:AlternateContent xmlns:mc="http://schemas.openxmlformats.org/markup-compatibility/2006" xmlns:p14="http://schemas.microsoft.com/office/powerpoint/2010/main">
+          <mc:Choice Requires="p14">
             <p:contentPart p14:bwMode="auto" r:id="rId112">
               <p14:nvContentPartPr>
                 <p14:cNvPr id="125" name="Ink 124">
@@ -10528,7 +12481,7 @@
               </p14:xfrm>
             </p:contentPart>
           </mc:Choice>
-          <mc:Fallback>
+          <mc:Fallback xmlns="">
             <p:pic>
               <p:nvPicPr>
                 <p:cNvPr id="125" name="Ink 124">
@@ -10559,8 +12512,8 @@
             </p:pic>
           </mc:Fallback>
         </mc:AlternateContent>
-        <mc:AlternateContent xmlns:mc="http://schemas.openxmlformats.org/markup-compatibility/2006">
-          <mc:Choice xmlns:p14="http://schemas.microsoft.com/office/powerpoint/2010/main" Requires="p14">
+        <mc:AlternateContent xmlns:mc="http://schemas.openxmlformats.org/markup-compatibility/2006" xmlns:p14="http://schemas.microsoft.com/office/powerpoint/2010/main">
+          <mc:Choice Requires="p14">
             <p:contentPart p14:bwMode="auto" r:id="rId114">
               <p14:nvContentPartPr>
                 <p14:cNvPr id="126" name="Ink 125">
@@ -10579,7 +12532,7 @@
               </p14:xfrm>
             </p:contentPart>
           </mc:Choice>
-          <mc:Fallback>
+          <mc:Fallback xmlns="">
             <p:pic>
               <p:nvPicPr>
                 <p:cNvPr id="126" name="Ink 125">
@@ -10610,8 +12563,8 @@
             </p:pic>
           </mc:Fallback>
         </mc:AlternateContent>
-        <mc:AlternateContent xmlns:mc="http://schemas.openxmlformats.org/markup-compatibility/2006">
-          <mc:Choice xmlns:p14="http://schemas.microsoft.com/office/powerpoint/2010/main" Requires="p14">
+        <mc:AlternateContent xmlns:mc="http://schemas.openxmlformats.org/markup-compatibility/2006" xmlns:p14="http://schemas.microsoft.com/office/powerpoint/2010/main">
+          <mc:Choice Requires="p14">
             <p:contentPart p14:bwMode="auto" r:id="rId116">
               <p14:nvContentPartPr>
                 <p14:cNvPr id="127" name="Ink 126">
@@ -10630,7 +12583,7 @@
               </p14:xfrm>
             </p:contentPart>
           </mc:Choice>
-          <mc:Fallback>
+          <mc:Fallback xmlns="">
             <p:pic>
               <p:nvPicPr>
                 <p:cNvPr id="127" name="Ink 126">
@@ -10661,8 +12614,8 @@
             </p:pic>
           </mc:Fallback>
         </mc:AlternateContent>
-        <mc:AlternateContent xmlns:mc="http://schemas.openxmlformats.org/markup-compatibility/2006">
-          <mc:Choice xmlns:p14="http://schemas.microsoft.com/office/powerpoint/2010/main" Requires="p14">
+        <mc:AlternateContent xmlns:mc="http://schemas.openxmlformats.org/markup-compatibility/2006" xmlns:p14="http://schemas.microsoft.com/office/powerpoint/2010/main">
+          <mc:Choice Requires="p14">
             <p:contentPart p14:bwMode="auto" r:id="rId118">
               <p14:nvContentPartPr>
                 <p14:cNvPr id="128" name="Ink 127">
@@ -10681,7 +12634,7 @@
               </p14:xfrm>
             </p:contentPart>
           </mc:Choice>
-          <mc:Fallback>
+          <mc:Fallback xmlns="">
             <p:pic>
               <p:nvPicPr>
                 <p:cNvPr id="128" name="Ink 127">
@@ -10733,8 +12686,8 @@
             <a:chExt cx="2264400" cy="1595160"/>
           </a:xfrm>
         </p:grpSpPr>
-        <mc:AlternateContent xmlns:mc="http://schemas.openxmlformats.org/markup-compatibility/2006">
-          <mc:Choice xmlns:p14="http://schemas.microsoft.com/office/powerpoint/2010/main" Requires="p14">
+        <mc:AlternateContent xmlns:mc="http://schemas.openxmlformats.org/markup-compatibility/2006" xmlns:p14="http://schemas.microsoft.com/office/powerpoint/2010/main">
+          <mc:Choice Requires="p14">
             <p:contentPart p14:bwMode="auto" r:id="rId120">
               <p14:nvContentPartPr>
                 <p14:cNvPr id="129" name="Ink 128">
@@ -10753,7 +12706,7 @@
               </p14:xfrm>
             </p:contentPart>
           </mc:Choice>
-          <mc:Fallback>
+          <mc:Fallback xmlns="">
             <p:pic>
               <p:nvPicPr>
                 <p:cNvPr id="129" name="Ink 128">
@@ -10784,8 +12737,8 @@
             </p:pic>
           </mc:Fallback>
         </mc:AlternateContent>
-        <mc:AlternateContent xmlns:mc="http://schemas.openxmlformats.org/markup-compatibility/2006">
-          <mc:Choice xmlns:p14="http://schemas.microsoft.com/office/powerpoint/2010/main" Requires="p14">
+        <mc:AlternateContent xmlns:mc="http://schemas.openxmlformats.org/markup-compatibility/2006" xmlns:p14="http://schemas.microsoft.com/office/powerpoint/2010/main">
+          <mc:Choice Requires="p14">
             <p:contentPart p14:bwMode="auto" r:id="rId122">
               <p14:nvContentPartPr>
                 <p14:cNvPr id="130" name="Ink 129">
@@ -10804,7 +12757,7 @@
               </p14:xfrm>
             </p:contentPart>
           </mc:Choice>
-          <mc:Fallback>
+          <mc:Fallback xmlns="">
             <p:pic>
               <p:nvPicPr>
                 <p:cNvPr id="130" name="Ink 129">
@@ -10835,8 +12788,8 @@
             </p:pic>
           </mc:Fallback>
         </mc:AlternateContent>
-        <mc:AlternateContent xmlns:mc="http://schemas.openxmlformats.org/markup-compatibility/2006">
-          <mc:Choice xmlns:p14="http://schemas.microsoft.com/office/powerpoint/2010/main" Requires="p14">
+        <mc:AlternateContent xmlns:mc="http://schemas.openxmlformats.org/markup-compatibility/2006" xmlns:p14="http://schemas.microsoft.com/office/powerpoint/2010/main">
+          <mc:Choice Requires="p14">
             <p:contentPart p14:bwMode="auto" r:id="rId124">
               <p14:nvContentPartPr>
                 <p14:cNvPr id="131" name="Ink 130">
@@ -10855,7 +12808,7 @@
               </p14:xfrm>
             </p:contentPart>
           </mc:Choice>
-          <mc:Fallback>
+          <mc:Fallback xmlns="">
             <p:pic>
               <p:nvPicPr>
                 <p:cNvPr id="131" name="Ink 130">
@@ -10886,8 +12839,8 @@
             </p:pic>
           </mc:Fallback>
         </mc:AlternateContent>
-        <mc:AlternateContent xmlns:mc="http://schemas.openxmlformats.org/markup-compatibility/2006">
-          <mc:Choice xmlns:p14="http://schemas.microsoft.com/office/powerpoint/2010/main" Requires="p14">
+        <mc:AlternateContent xmlns:mc="http://schemas.openxmlformats.org/markup-compatibility/2006" xmlns:p14="http://schemas.microsoft.com/office/powerpoint/2010/main">
+          <mc:Choice Requires="p14">
             <p:contentPart p14:bwMode="auto" r:id="rId126">
               <p14:nvContentPartPr>
                 <p14:cNvPr id="132" name="Ink 131">
@@ -10906,7 +12859,7 @@
               </p14:xfrm>
             </p:contentPart>
           </mc:Choice>
-          <mc:Fallback>
+          <mc:Fallback xmlns="">
             <p:pic>
               <p:nvPicPr>
                 <p:cNvPr id="132" name="Ink 131">
@@ -10937,8 +12890,8 @@
             </p:pic>
           </mc:Fallback>
         </mc:AlternateContent>
-        <mc:AlternateContent xmlns:mc="http://schemas.openxmlformats.org/markup-compatibility/2006">
-          <mc:Choice xmlns:p14="http://schemas.microsoft.com/office/powerpoint/2010/main" Requires="p14">
+        <mc:AlternateContent xmlns:mc="http://schemas.openxmlformats.org/markup-compatibility/2006" xmlns:p14="http://schemas.microsoft.com/office/powerpoint/2010/main">
+          <mc:Choice Requires="p14">
             <p:contentPart p14:bwMode="auto" r:id="rId128">
               <p14:nvContentPartPr>
                 <p14:cNvPr id="133" name="Ink 132">
@@ -10957,7 +12910,7 @@
               </p14:xfrm>
             </p:contentPart>
           </mc:Choice>
-          <mc:Fallback>
+          <mc:Fallback xmlns="">
             <p:pic>
               <p:nvPicPr>
                 <p:cNvPr id="133" name="Ink 132">
@@ -10988,8 +12941,8 @@
             </p:pic>
           </mc:Fallback>
         </mc:AlternateContent>
-        <mc:AlternateContent xmlns:mc="http://schemas.openxmlformats.org/markup-compatibility/2006">
-          <mc:Choice xmlns:p14="http://schemas.microsoft.com/office/powerpoint/2010/main" Requires="p14">
+        <mc:AlternateContent xmlns:mc="http://schemas.openxmlformats.org/markup-compatibility/2006" xmlns:p14="http://schemas.microsoft.com/office/powerpoint/2010/main">
+          <mc:Choice Requires="p14">
             <p:contentPart p14:bwMode="auto" r:id="rId130">
               <p14:nvContentPartPr>
                 <p14:cNvPr id="134" name="Ink 133">
@@ -11008,7 +12961,7 @@
               </p14:xfrm>
             </p:contentPart>
           </mc:Choice>
-          <mc:Fallback>
+          <mc:Fallback xmlns="">
             <p:pic>
               <p:nvPicPr>
                 <p:cNvPr id="134" name="Ink 133">
@@ -11060,8 +13013,8 @@
             <a:chExt cx="501120" cy="717480"/>
           </a:xfrm>
         </p:grpSpPr>
-        <mc:AlternateContent xmlns:mc="http://schemas.openxmlformats.org/markup-compatibility/2006">
-          <mc:Choice xmlns:p14="http://schemas.microsoft.com/office/powerpoint/2010/main" Requires="p14">
+        <mc:AlternateContent xmlns:mc="http://schemas.openxmlformats.org/markup-compatibility/2006" xmlns:p14="http://schemas.microsoft.com/office/powerpoint/2010/main">
+          <mc:Choice Requires="p14">
             <p:contentPart p14:bwMode="auto" r:id="rId132">
               <p14:nvContentPartPr>
                 <p14:cNvPr id="138" name="Ink 137">
@@ -11080,7 +13033,7 @@
               </p14:xfrm>
             </p:contentPart>
           </mc:Choice>
-          <mc:Fallback>
+          <mc:Fallback xmlns="">
             <p:pic>
               <p:nvPicPr>
                 <p:cNvPr id="138" name="Ink 137">
@@ -11111,8 +13064,8 @@
             </p:pic>
           </mc:Fallback>
         </mc:AlternateContent>
-        <mc:AlternateContent xmlns:mc="http://schemas.openxmlformats.org/markup-compatibility/2006">
-          <mc:Choice xmlns:p14="http://schemas.microsoft.com/office/powerpoint/2010/main" Requires="p14">
+        <mc:AlternateContent xmlns:mc="http://schemas.openxmlformats.org/markup-compatibility/2006" xmlns:p14="http://schemas.microsoft.com/office/powerpoint/2010/main">
+          <mc:Choice Requires="p14">
             <p:contentPart p14:bwMode="auto" r:id="rId134">
               <p14:nvContentPartPr>
                 <p14:cNvPr id="139" name="Ink 138">
@@ -11131,7 +13084,7 @@
               </p14:xfrm>
             </p:contentPart>
           </mc:Choice>
-          <mc:Fallback>
+          <mc:Fallback xmlns="">
             <p:pic>
               <p:nvPicPr>
                 <p:cNvPr id="139" name="Ink 138">
@@ -11183,8 +13136,8 @@
             <a:chExt cx="342360" cy="353160"/>
           </a:xfrm>
         </p:grpSpPr>
-        <mc:AlternateContent xmlns:mc="http://schemas.openxmlformats.org/markup-compatibility/2006">
-          <mc:Choice xmlns:p14="http://schemas.microsoft.com/office/powerpoint/2010/main" Requires="p14">
+        <mc:AlternateContent xmlns:mc="http://schemas.openxmlformats.org/markup-compatibility/2006" xmlns:p14="http://schemas.microsoft.com/office/powerpoint/2010/main">
+          <mc:Choice Requires="p14">
             <p:contentPart p14:bwMode="auto" r:id="rId136">
               <p14:nvContentPartPr>
                 <p14:cNvPr id="140" name="Ink 139">
@@ -11203,7 +13156,7 @@
               </p14:xfrm>
             </p:contentPart>
           </mc:Choice>
-          <mc:Fallback>
+          <mc:Fallback xmlns="">
             <p:pic>
               <p:nvPicPr>
                 <p:cNvPr id="140" name="Ink 139">
@@ -11234,8 +13187,8 @@
             </p:pic>
           </mc:Fallback>
         </mc:AlternateContent>
-        <mc:AlternateContent xmlns:mc="http://schemas.openxmlformats.org/markup-compatibility/2006">
-          <mc:Choice xmlns:p14="http://schemas.microsoft.com/office/powerpoint/2010/main" Requires="p14">
+        <mc:AlternateContent xmlns:mc="http://schemas.openxmlformats.org/markup-compatibility/2006" xmlns:p14="http://schemas.microsoft.com/office/powerpoint/2010/main">
+          <mc:Choice Requires="p14">
             <p:contentPart p14:bwMode="auto" r:id="rId138">
               <p14:nvContentPartPr>
                 <p14:cNvPr id="141" name="Ink 140">
@@ -11254,7 +13207,7 @@
               </p14:xfrm>
             </p:contentPart>
           </mc:Choice>
-          <mc:Fallback>
+          <mc:Fallback xmlns="">
             <p:pic>
               <p:nvPicPr>
                 <p:cNvPr id="141" name="Ink 140">
@@ -11306,8 +13259,8 @@
             <a:chExt cx="566640" cy="634320"/>
           </a:xfrm>
         </p:grpSpPr>
-        <mc:AlternateContent xmlns:mc="http://schemas.openxmlformats.org/markup-compatibility/2006">
-          <mc:Choice xmlns:p14="http://schemas.microsoft.com/office/powerpoint/2010/main" Requires="p14">
+        <mc:AlternateContent xmlns:mc="http://schemas.openxmlformats.org/markup-compatibility/2006" xmlns:p14="http://schemas.microsoft.com/office/powerpoint/2010/main">
+          <mc:Choice Requires="p14">
             <p:contentPart p14:bwMode="auto" r:id="rId140">
               <p14:nvContentPartPr>
                 <p14:cNvPr id="142" name="Ink 141">
@@ -11326,7 +13279,7 @@
               </p14:xfrm>
             </p:contentPart>
           </mc:Choice>
-          <mc:Fallback>
+          <mc:Fallback xmlns="">
             <p:pic>
               <p:nvPicPr>
                 <p:cNvPr id="142" name="Ink 141">
@@ -11357,8 +13310,8 @@
             </p:pic>
           </mc:Fallback>
         </mc:AlternateContent>
-        <mc:AlternateContent xmlns:mc="http://schemas.openxmlformats.org/markup-compatibility/2006">
-          <mc:Choice xmlns:p14="http://schemas.microsoft.com/office/powerpoint/2010/main" Requires="p14">
+        <mc:AlternateContent xmlns:mc="http://schemas.openxmlformats.org/markup-compatibility/2006" xmlns:p14="http://schemas.microsoft.com/office/powerpoint/2010/main">
+          <mc:Choice Requires="p14">
             <p:contentPart p14:bwMode="auto" r:id="rId142">
               <p14:nvContentPartPr>
                 <p14:cNvPr id="143" name="Ink 142">
@@ -11377,7 +13330,7 @@
               </p14:xfrm>
             </p:contentPart>
           </mc:Choice>
-          <mc:Fallback>
+          <mc:Fallback xmlns="">
             <p:pic>
               <p:nvPicPr>
                 <p:cNvPr id="143" name="Ink 142">
@@ -11654,8 +13607,8 @@
           </a:p>
         </p:txBody>
       </p:sp>
-      <mc:AlternateContent xmlns:mc="http://schemas.openxmlformats.org/markup-compatibility/2006">
-        <mc:Choice xmlns:p14="http://schemas.microsoft.com/office/powerpoint/2010/main" Requires="p14">
+      <mc:AlternateContent xmlns:mc="http://schemas.openxmlformats.org/markup-compatibility/2006" xmlns:p14="http://schemas.microsoft.com/office/powerpoint/2010/main">
+        <mc:Choice Requires="p14">
           <p:contentPart p14:bwMode="auto" r:id="rId144">
             <p14:nvContentPartPr>
               <p14:cNvPr id="154" name="Ink 153">
@@ -11674,7 +13627,7 @@
             </p14:xfrm>
           </p:contentPart>
         </mc:Choice>
-        <mc:Fallback>
+        <mc:Fallback xmlns="">
           <p:pic>
             <p:nvPicPr>
               <p:cNvPr id="154" name="Ink 153">
@@ -11725,8 +13678,8 @@
             <a:chExt cx="1349280" cy="467280"/>
           </a:xfrm>
         </p:grpSpPr>
-        <mc:AlternateContent xmlns:mc="http://schemas.openxmlformats.org/markup-compatibility/2006">
-          <mc:Choice xmlns:p14="http://schemas.microsoft.com/office/powerpoint/2010/main" Requires="p14">
+        <mc:AlternateContent xmlns:mc="http://schemas.openxmlformats.org/markup-compatibility/2006" xmlns:p14="http://schemas.microsoft.com/office/powerpoint/2010/main">
+          <mc:Choice Requires="p14">
             <p:contentPart p14:bwMode="auto" r:id="rId146">
               <p14:nvContentPartPr>
                 <p14:cNvPr id="158" name="Ink 157">
@@ -11745,7 +13698,7 @@
               </p14:xfrm>
             </p:contentPart>
           </mc:Choice>
-          <mc:Fallback>
+          <mc:Fallback xmlns="">
             <p:pic>
               <p:nvPicPr>
                 <p:cNvPr id="158" name="Ink 157">
@@ -11776,8 +13729,8 @@
             </p:pic>
           </mc:Fallback>
         </mc:AlternateContent>
-        <mc:AlternateContent xmlns:mc="http://schemas.openxmlformats.org/markup-compatibility/2006">
-          <mc:Choice xmlns:p14="http://schemas.microsoft.com/office/powerpoint/2010/main" Requires="p14">
+        <mc:AlternateContent xmlns:mc="http://schemas.openxmlformats.org/markup-compatibility/2006" xmlns:p14="http://schemas.microsoft.com/office/powerpoint/2010/main">
+          <mc:Choice Requires="p14">
             <p:contentPart p14:bwMode="auto" r:id="rId148">
               <p14:nvContentPartPr>
                 <p14:cNvPr id="159" name="Ink 158">
@@ -11796,7 +13749,7 @@
               </p14:xfrm>
             </p:contentPart>
           </mc:Choice>
-          <mc:Fallback>
+          <mc:Fallback xmlns="">
             <p:pic>
               <p:nvPicPr>
                 <p:cNvPr id="159" name="Ink 158">
@@ -11827,8 +13780,8 @@
             </p:pic>
           </mc:Fallback>
         </mc:AlternateContent>
-        <mc:AlternateContent xmlns:mc="http://schemas.openxmlformats.org/markup-compatibility/2006">
-          <mc:Choice xmlns:p14="http://schemas.microsoft.com/office/powerpoint/2010/main" Requires="p14">
+        <mc:AlternateContent xmlns:mc="http://schemas.openxmlformats.org/markup-compatibility/2006" xmlns:p14="http://schemas.microsoft.com/office/powerpoint/2010/main">
+          <mc:Choice Requires="p14">
             <p:contentPart p14:bwMode="auto" r:id="rId150">
               <p14:nvContentPartPr>
                 <p14:cNvPr id="160" name="Ink 159">
@@ -11847,7 +13800,7 @@
               </p14:xfrm>
             </p:contentPart>
           </mc:Choice>
-          <mc:Fallback>
+          <mc:Fallback xmlns="">
             <p:pic>
               <p:nvPicPr>
                 <p:cNvPr id="160" name="Ink 159">
@@ -11878,8 +13831,8 @@
             </p:pic>
           </mc:Fallback>
         </mc:AlternateContent>
-        <mc:AlternateContent xmlns:mc="http://schemas.openxmlformats.org/markup-compatibility/2006">
-          <mc:Choice xmlns:p14="http://schemas.microsoft.com/office/powerpoint/2010/main" Requires="p14">
+        <mc:AlternateContent xmlns:mc="http://schemas.openxmlformats.org/markup-compatibility/2006" xmlns:p14="http://schemas.microsoft.com/office/powerpoint/2010/main">
+          <mc:Choice Requires="p14">
             <p:contentPart p14:bwMode="auto" r:id="rId152">
               <p14:nvContentPartPr>
                 <p14:cNvPr id="161" name="Ink 160">
@@ -11898,7 +13851,7 @@
               </p14:xfrm>
             </p:contentPart>
           </mc:Choice>
-          <mc:Fallback>
+          <mc:Fallback xmlns="">
             <p:pic>
               <p:nvPicPr>
                 <p:cNvPr id="161" name="Ink 160">
@@ -11929,8 +13882,8 @@
             </p:pic>
           </mc:Fallback>
         </mc:AlternateContent>
-        <mc:AlternateContent xmlns:mc="http://schemas.openxmlformats.org/markup-compatibility/2006">
-          <mc:Choice xmlns:p14="http://schemas.microsoft.com/office/powerpoint/2010/main" Requires="p14">
+        <mc:AlternateContent xmlns:mc="http://schemas.openxmlformats.org/markup-compatibility/2006" xmlns:p14="http://schemas.microsoft.com/office/powerpoint/2010/main">
+          <mc:Choice Requires="p14">
             <p:contentPart p14:bwMode="auto" r:id="rId154">
               <p14:nvContentPartPr>
                 <p14:cNvPr id="162" name="Ink 161">
@@ -11949,7 +13902,7 @@
               </p14:xfrm>
             </p:contentPart>
           </mc:Choice>
-          <mc:Fallback>
+          <mc:Fallback xmlns="">
             <p:pic>
               <p:nvPicPr>
                 <p:cNvPr id="162" name="Ink 161">
@@ -11980,8 +13933,8 @@
             </p:pic>
           </mc:Fallback>
         </mc:AlternateContent>
-        <mc:AlternateContent xmlns:mc="http://schemas.openxmlformats.org/markup-compatibility/2006">
-          <mc:Choice xmlns:p14="http://schemas.microsoft.com/office/powerpoint/2010/main" Requires="p14">
+        <mc:AlternateContent xmlns:mc="http://schemas.openxmlformats.org/markup-compatibility/2006" xmlns:p14="http://schemas.microsoft.com/office/powerpoint/2010/main">
+          <mc:Choice Requires="p14">
             <p:contentPart p14:bwMode="auto" r:id="rId156">
               <p14:nvContentPartPr>
                 <p14:cNvPr id="163" name="Ink 162">
@@ -12000,7 +13953,7 @@
               </p14:xfrm>
             </p:contentPart>
           </mc:Choice>
-          <mc:Fallback>
+          <mc:Fallback xmlns="">
             <p:pic>
               <p:nvPicPr>
                 <p:cNvPr id="163" name="Ink 162">
@@ -12032,8 +13985,8 @@
           </mc:Fallback>
         </mc:AlternateContent>
       </p:grpSp>
-      <mc:AlternateContent xmlns:mc="http://schemas.openxmlformats.org/markup-compatibility/2006">
-        <mc:Choice xmlns:p14="http://schemas.microsoft.com/office/powerpoint/2010/main" Requires="p14">
+      <mc:AlternateContent xmlns:mc="http://schemas.openxmlformats.org/markup-compatibility/2006" xmlns:p14="http://schemas.microsoft.com/office/powerpoint/2010/main">
+        <mc:Choice Requires="p14">
           <p:contentPart p14:bwMode="auto" r:id="rId158">
             <p14:nvContentPartPr>
               <p14:cNvPr id="164" name="Ink 163">
@@ -12052,7 +14005,7 @@
             </p14:xfrm>
           </p:contentPart>
         </mc:Choice>
-        <mc:Fallback>
+        <mc:Fallback xmlns="">
           <p:pic>
             <p:nvPicPr>
               <p:cNvPr id="164" name="Ink 163">
@@ -12083,8 +14036,8 @@
           </p:pic>
         </mc:Fallback>
       </mc:AlternateContent>
-      <mc:AlternateContent xmlns:mc="http://schemas.openxmlformats.org/markup-compatibility/2006">
-        <mc:Choice xmlns:p14="http://schemas.microsoft.com/office/powerpoint/2010/main" Requires="p14">
+      <mc:AlternateContent xmlns:mc="http://schemas.openxmlformats.org/markup-compatibility/2006" xmlns:p14="http://schemas.microsoft.com/office/powerpoint/2010/main">
+        <mc:Choice Requires="p14">
           <p:contentPart p14:bwMode="auto" r:id="rId160">
             <p14:nvContentPartPr>
               <p14:cNvPr id="165" name="Ink 164">
@@ -12103,7 +14056,7 @@
             </p14:xfrm>
           </p:contentPart>
         </mc:Choice>
-        <mc:Fallback>
+        <mc:Fallback xmlns="">
           <p:pic>
             <p:nvPicPr>
               <p:cNvPr id="165" name="Ink 164">
@@ -12154,8 +14107,8 @@
             <a:chExt cx="1072440" cy="385560"/>
           </a:xfrm>
         </p:grpSpPr>
-        <mc:AlternateContent xmlns:mc="http://schemas.openxmlformats.org/markup-compatibility/2006">
-          <mc:Choice xmlns:p14="http://schemas.microsoft.com/office/powerpoint/2010/main" Requires="p14">
+        <mc:AlternateContent xmlns:mc="http://schemas.openxmlformats.org/markup-compatibility/2006" xmlns:p14="http://schemas.microsoft.com/office/powerpoint/2010/main">
+          <mc:Choice Requires="p14">
             <p:contentPart p14:bwMode="auto" r:id="rId162">
               <p14:nvContentPartPr>
                 <p14:cNvPr id="166" name="Ink 165">
@@ -12174,7 +14127,7 @@
               </p14:xfrm>
             </p:contentPart>
           </mc:Choice>
-          <mc:Fallback>
+          <mc:Fallback xmlns="">
             <p:pic>
               <p:nvPicPr>
                 <p:cNvPr id="166" name="Ink 165">
@@ -12205,8 +14158,8 @@
             </p:pic>
           </mc:Fallback>
         </mc:AlternateContent>
-        <mc:AlternateContent xmlns:mc="http://schemas.openxmlformats.org/markup-compatibility/2006">
-          <mc:Choice xmlns:p14="http://schemas.microsoft.com/office/powerpoint/2010/main" Requires="p14">
+        <mc:AlternateContent xmlns:mc="http://schemas.openxmlformats.org/markup-compatibility/2006" xmlns:p14="http://schemas.microsoft.com/office/powerpoint/2010/main">
+          <mc:Choice Requires="p14">
             <p:contentPart p14:bwMode="auto" r:id="rId164">
               <p14:nvContentPartPr>
                 <p14:cNvPr id="167" name="Ink 166">
@@ -12225,7 +14178,7 @@
               </p14:xfrm>
             </p:contentPart>
           </mc:Choice>
-          <mc:Fallback>
+          <mc:Fallback xmlns="">
             <p:pic>
               <p:nvPicPr>
                 <p:cNvPr id="167" name="Ink 166">
@@ -12256,8 +14209,8 @@
             </p:pic>
           </mc:Fallback>
         </mc:AlternateContent>
-        <mc:AlternateContent xmlns:mc="http://schemas.openxmlformats.org/markup-compatibility/2006">
-          <mc:Choice xmlns:p14="http://schemas.microsoft.com/office/powerpoint/2010/main" Requires="p14">
+        <mc:AlternateContent xmlns:mc="http://schemas.openxmlformats.org/markup-compatibility/2006" xmlns:p14="http://schemas.microsoft.com/office/powerpoint/2010/main">
+          <mc:Choice Requires="p14">
             <p:contentPart p14:bwMode="auto" r:id="rId166">
               <p14:nvContentPartPr>
                 <p14:cNvPr id="168" name="Ink 167">
@@ -12276,7 +14229,7 @@
               </p14:xfrm>
             </p:contentPart>
           </mc:Choice>
-          <mc:Fallback>
+          <mc:Fallback xmlns="">
             <p:pic>
               <p:nvPicPr>
                 <p:cNvPr id="168" name="Ink 167">
@@ -12307,8 +14260,8 @@
             </p:pic>
           </mc:Fallback>
         </mc:AlternateContent>
-        <mc:AlternateContent xmlns:mc="http://schemas.openxmlformats.org/markup-compatibility/2006">
-          <mc:Choice xmlns:p14="http://schemas.microsoft.com/office/powerpoint/2010/main" Requires="p14">
+        <mc:AlternateContent xmlns:mc="http://schemas.openxmlformats.org/markup-compatibility/2006" xmlns:p14="http://schemas.microsoft.com/office/powerpoint/2010/main">
+          <mc:Choice Requires="p14">
             <p:contentPart p14:bwMode="auto" r:id="rId168">
               <p14:nvContentPartPr>
                 <p14:cNvPr id="169" name="Ink 168">
@@ -12327,7 +14280,7 @@
               </p14:xfrm>
             </p:contentPart>
           </mc:Choice>
-          <mc:Fallback>
+          <mc:Fallback xmlns="">
             <p:pic>
               <p:nvPicPr>
                 <p:cNvPr id="169" name="Ink 168">
@@ -12358,8 +14311,8 @@
             </p:pic>
           </mc:Fallback>
         </mc:AlternateContent>
-        <mc:AlternateContent xmlns:mc="http://schemas.openxmlformats.org/markup-compatibility/2006">
-          <mc:Choice xmlns:p14="http://schemas.microsoft.com/office/powerpoint/2010/main" Requires="p14">
+        <mc:AlternateContent xmlns:mc="http://schemas.openxmlformats.org/markup-compatibility/2006" xmlns:p14="http://schemas.microsoft.com/office/powerpoint/2010/main">
+          <mc:Choice Requires="p14">
             <p:contentPart p14:bwMode="auto" r:id="rId170">
               <p14:nvContentPartPr>
                 <p14:cNvPr id="170" name="Ink 169">
@@ -12378,7 +14331,7 @@
               </p14:xfrm>
             </p:contentPart>
           </mc:Choice>
-          <mc:Fallback>
+          <mc:Fallback xmlns="">
             <p:pic>
               <p:nvPicPr>
                 <p:cNvPr id="170" name="Ink 169">
@@ -12409,8 +14362,8 @@
             </p:pic>
           </mc:Fallback>
         </mc:AlternateContent>
-        <mc:AlternateContent xmlns:mc="http://schemas.openxmlformats.org/markup-compatibility/2006">
-          <mc:Choice xmlns:p14="http://schemas.microsoft.com/office/powerpoint/2010/main" Requires="p14">
+        <mc:AlternateContent xmlns:mc="http://schemas.openxmlformats.org/markup-compatibility/2006" xmlns:p14="http://schemas.microsoft.com/office/powerpoint/2010/main">
+          <mc:Choice Requires="p14">
             <p:contentPart p14:bwMode="auto" r:id="rId172">
               <p14:nvContentPartPr>
                 <p14:cNvPr id="171" name="Ink 170">
@@ -12429,7 +14382,7 @@
               </p14:xfrm>
             </p:contentPart>
           </mc:Choice>
-          <mc:Fallback>
+          <mc:Fallback xmlns="">
             <p:pic>
               <p:nvPicPr>
                 <p:cNvPr id="171" name="Ink 170">
@@ -12461,8 +14414,8 @@
           </mc:Fallback>
         </mc:AlternateContent>
       </p:grpSp>
-      <mc:AlternateContent xmlns:mc="http://schemas.openxmlformats.org/markup-compatibility/2006">
-        <mc:Choice xmlns:p14="http://schemas.microsoft.com/office/powerpoint/2010/main" Requires="p14">
+      <mc:AlternateContent xmlns:mc="http://schemas.openxmlformats.org/markup-compatibility/2006" xmlns:p14="http://schemas.microsoft.com/office/powerpoint/2010/main">
+        <mc:Choice Requires="p14">
           <p:contentPart p14:bwMode="auto" r:id="rId174">
             <p14:nvContentPartPr>
               <p14:cNvPr id="174" name="Ink 173">
@@ -12481,7 +14434,7 @@
             </p14:xfrm>
           </p:contentPart>
         </mc:Choice>
-        <mc:Fallback>
+        <mc:Fallback xmlns="">
           <p:pic>
             <p:nvPicPr>
               <p:cNvPr id="174" name="Ink 173">
@@ -12532,8 +14485,8 @@
             <a:chExt cx="7094520" cy="1959120"/>
           </a:xfrm>
         </p:grpSpPr>
-        <mc:AlternateContent xmlns:mc="http://schemas.openxmlformats.org/markup-compatibility/2006">
-          <mc:Choice xmlns:p14="http://schemas.microsoft.com/office/powerpoint/2010/main" Requires="p14">
+        <mc:AlternateContent xmlns:mc="http://schemas.openxmlformats.org/markup-compatibility/2006" xmlns:p14="http://schemas.microsoft.com/office/powerpoint/2010/main">
+          <mc:Choice Requires="p14">
             <p:contentPart p14:bwMode="auto" r:id="rId176">
               <p14:nvContentPartPr>
                 <p14:cNvPr id="175" name="Ink 174">
@@ -12552,7 +14505,7 @@
               </p14:xfrm>
             </p:contentPart>
           </mc:Choice>
-          <mc:Fallback>
+          <mc:Fallback xmlns="">
             <p:pic>
               <p:nvPicPr>
                 <p:cNvPr id="175" name="Ink 174">
@@ -12583,8 +14536,8 @@
             </p:pic>
           </mc:Fallback>
         </mc:AlternateContent>
-        <mc:AlternateContent xmlns:mc="http://schemas.openxmlformats.org/markup-compatibility/2006">
-          <mc:Choice xmlns:p14="http://schemas.microsoft.com/office/powerpoint/2010/main" Requires="p14">
+        <mc:AlternateContent xmlns:mc="http://schemas.openxmlformats.org/markup-compatibility/2006" xmlns:p14="http://schemas.microsoft.com/office/powerpoint/2010/main">
+          <mc:Choice Requires="p14">
             <p:contentPart p14:bwMode="auto" r:id="rId178">
               <p14:nvContentPartPr>
                 <p14:cNvPr id="176" name="Ink 175">
@@ -12603,7 +14556,7 @@
               </p14:xfrm>
             </p:contentPart>
           </mc:Choice>
-          <mc:Fallback>
+          <mc:Fallback xmlns="">
             <p:pic>
               <p:nvPicPr>
                 <p:cNvPr id="176" name="Ink 175">
@@ -12634,8 +14587,8 @@
             </p:pic>
           </mc:Fallback>
         </mc:AlternateContent>
-        <mc:AlternateContent xmlns:mc="http://schemas.openxmlformats.org/markup-compatibility/2006">
-          <mc:Choice xmlns:p14="http://schemas.microsoft.com/office/powerpoint/2010/main" Requires="p14">
+        <mc:AlternateContent xmlns:mc="http://schemas.openxmlformats.org/markup-compatibility/2006" xmlns:p14="http://schemas.microsoft.com/office/powerpoint/2010/main">
+          <mc:Choice Requires="p14">
             <p:contentPart p14:bwMode="auto" r:id="rId180">
               <p14:nvContentPartPr>
                 <p14:cNvPr id="178" name="Ink 177">
@@ -12654,7 +14607,7 @@
               </p14:xfrm>
             </p:contentPart>
           </mc:Choice>
-          <mc:Fallback>
+          <mc:Fallback xmlns="">
             <p:pic>
               <p:nvPicPr>
                 <p:cNvPr id="178" name="Ink 177">
@@ -12685,8 +14638,8 @@
             </p:pic>
           </mc:Fallback>
         </mc:AlternateContent>
-        <mc:AlternateContent xmlns:mc="http://schemas.openxmlformats.org/markup-compatibility/2006">
-          <mc:Choice xmlns:p14="http://schemas.microsoft.com/office/powerpoint/2010/main" Requires="p14">
+        <mc:AlternateContent xmlns:mc="http://schemas.openxmlformats.org/markup-compatibility/2006" xmlns:p14="http://schemas.microsoft.com/office/powerpoint/2010/main">
+          <mc:Choice Requires="p14">
             <p:contentPart p14:bwMode="auto" r:id="rId182">
               <p14:nvContentPartPr>
                 <p14:cNvPr id="179" name="Ink 178">
@@ -12705,7 +14658,7 @@
               </p14:xfrm>
             </p:contentPart>
           </mc:Choice>
-          <mc:Fallback>
+          <mc:Fallback xmlns="">
             <p:pic>
               <p:nvPicPr>
                 <p:cNvPr id="179" name="Ink 178">
@@ -12736,8 +14689,8 @@
             </p:pic>
           </mc:Fallback>
         </mc:AlternateContent>
-        <mc:AlternateContent xmlns:mc="http://schemas.openxmlformats.org/markup-compatibility/2006">
-          <mc:Choice xmlns:p14="http://schemas.microsoft.com/office/powerpoint/2010/main" Requires="p14">
+        <mc:AlternateContent xmlns:mc="http://schemas.openxmlformats.org/markup-compatibility/2006" xmlns:p14="http://schemas.microsoft.com/office/powerpoint/2010/main">
+          <mc:Choice Requires="p14">
             <p:contentPart p14:bwMode="auto" r:id="rId184">
               <p14:nvContentPartPr>
                 <p14:cNvPr id="180" name="Ink 179">
@@ -12756,7 +14709,7 @@
               </p14:xfrm>
             </p:contentPart>
           </mc:Choice>
-          <mc:Fallback>
+          <mc:Fallback xmlns="">
             <p:pic>
               <p:nvPicPr>
                 <p:cNvPr id="180" name="Ink 179">
@@ -12787,8 +14740,8 @@
             </p:pic>
           </mc:Fallback>
         </mc:AlternateContent>
-        <mc:AlternateContent xmlns:mc="http://schemas.openxmlformats.org/markup-compatibility/2006">
-          <mc:Choice xmlns:p14="http://schemas.microsoft.com/office/powerpoint/2010/main" Requires="p14">
+        <mc:AlternateContent xmlns:mc="http://schemas.openxmlformats.org/markup-compatibility/2006" xmlns:p14="http://schemas.microsoft.com/office/powerpoint/2010/main">
+          <mc:Choice Requires="p14">
             <p:contentPart p14:bwMode="auto" r:id="rId186">
               <p14:nvContentPartPr>
                 <p14:cNvPr id="181" name="Ink 180">
@@ -12807,7 +14760,7 @@
               </p14:xfrm>
             </p:contentPart>
           </mc:Choice>
-          <mc:Fallback>
+          <mc:Fallback xmlns="">
             <p:pic>
               <p:nvPicPr>
                 <p:cNvPr id="181" name="Ink 180">
@@ -12838,8 +14791,8 @@
             </p:pic>
           </mc:Fallback>
         </mc:AlternateContent>
-        <mc:AlternateContent xmlns:mc="http://schemas.openxmlformats.org/markup-compatibility/2006">
-          <mc:Choice xmlns:p14="http://schemas.microsoft.com/office/powerpoint/2010/main" Requires="p14">
+        <mc:AlternateContent xmlns:mc="http://schemas.openxmlformats.org/markup-compatibility/2006" xmlns:p14="http://schemas.microsoft.com/office/powerpoint/2010/main">
+          <mc:Choice Requires="p14">
             <p:contentPart p14:bwMode="auto" r:id="rId188">
               <p14:nvContentPartPr>
                 <p14:cNvPr id="182" name="Ink 181">
@@ -12858,7 +14811,7 @@
               </p14:xfrm>
             </p:contentPart>
           </mc:Choice>
-          <mc:Fallback>
+          <mc:Fallback xmlns="">
             <p:pic>
               <p:nvPicPr>
                 <p:cNvPr id="182" name="Ink 181">
@@ -12889,8 +14842,8 @@
             </p:pic>
           </mc:Fallback>
         </mc:AlternateContent>
-        <mc:AlternateContent xmlns:mc="http://schemas.openxmlformats.org/markup-compatibility/2006">
-          <mc:Choice xmlns:p14="http://schemas.microsoft.com/office/powerpoint/2010/main" Requires="p14">
+        <mc:AlternateContent xmlns:mc="http://schemas.openxmlformats.org/markup-compatibility/2006" xmlns:p14="http://schemas.microsoft.com/office/powerpoint/2010/main">
+          <mc:Choice Requires="p14">
             <p:contentPart p14:bwMode="auto" r:id="rId190">
               <p14:nvContentPartPr>
                 <p14:cNvPr id="183" name="Ink 182">
@@ -12909,7 +14862,7 @@
               </p14:xfrm>
             </p:contentPart>
           </mc:Choice>
-          <mc:Fallback>
+          <mc:Fallback xmlns="">
             <p:pic>
               <p:nvPicPr>
                 <p:cNvPr id="183" name="Ink 182">
@@ -12961,8 +14914,8 @@
             <a:chExt cx="1768680" cy="610200"/>
           </a:xfrm>
         </p:grpSpPr>
-        <mc:AlternateContent xmlns:mc="http://schemas.openxmlformats.org/markup-compatibility/2006">
-          <mc:Choice xmlns:p14="http://schemas.microsoft.com/office/powerpoint/2010/main" Requires="p14">
+        <mc:AlternateContent xmlns:mc="http://schemas.openxmlformats.org/markup-compatibility/2006" xmlns:p14="http://schemas.microsoft.com/office/powerpoint/2010/main">
+          <mc:Choice Requires="p14">
             <p:contentPart p14:bwMode="auto" r:id="rId192">
               <p14:nvContentPartPr>
                 <p14:cNvPr id="185" name="Ink 184">
@@ -12981,7 +14934,7 @@
               </p14:xfrm>
             </p:contentPart>
           </mc:Choice>
-          <mc:Fallback>
+          <mc:Fallback xmlns="">
             <p:pic>
               <p:nvPicPr>
                 <p:cNvPr id="185" name="Ink 184">
@@ -13012,8 +14965,8 @@
             </p:pic>
           </mc:Fallback>
         </mc:AlternateContent>
-        <mc:AlternateContent xmlns:mc="http://schemas.openxmlformats.org/markup-compatibility/2006">
-          <mc:Choice xmlns:p14="http://schemas.microsoft.com/office/powerpoint/2010/main" Requires="p14">
+        <mc:AlternateContent xmlns:mc="http://schemas.openxmlformats.org/markup-compatibility/2006" xmlns:p14="http://schemas.microsoft.com/office/powerpoint/2010/main">
+          <mc:Choice Requires="p14">
             <p:contentPart p14:bwMode="auto" r:id="rId194">
               <p14:nvContentPartPr>
                 <p14:cNvPr id="186" name="Ink 185">
@@ -13032,7 +14985,7 @@
               </p14:xfrm>
             </p:contentPart>
           </mc:Choice>
-          <mc:Fallback>
+          <mc:Fallback xmlns="">
             <p:pic>
               <p:nvPicPr>
                 <p:cNvPr id="186" name="Ink 185">
@@ -13063,8 +15016,8 @@
             </p:pic>
           </mc:Fallback>
         </mc:AlternateContent>
-        <mc:AlternateContent xmlns:mc="http://schemas.openxmlformats.org/markup-compatibility/2006">
-          <mc:Choice xmlns:p14="http://schemas.microsoft.com/office/powerpoint/2010/main" Requires="p14">
+        <mc:AlternateContent xmlns:mc="http://schemas.openxmlformats.org/markup-compatibility/2006" xmlns:p14="http://schemas.microsoft.com/office/powerpoint/2010/main">
+          <mc:Choice Requires="p14">
             <p:contentPart p14:bwMode="auto" r:id="rId196">
               <p14:nvContentPartPr>
                 <p14:cNvPr id="187" name="Ink 186">
@@ -13083,7 +15036,7 @@
               </p14:xfrm>
             </p:contentPart>
           </mc:Choice>
-          <mc:Fallback>
+          <mc:Fallback xmlns="">
             <p:pic>
               <p:nvPicPr>
                 <p:cNvPr id="187" name="Ink 186">
@@ -13114,8 +15067,8 @@
             </p:pic>
           </mc:Fallback>
         </mc:AlternateContent>
-        <mc:AlternateContent xmlns:mc="http://schemas.openxmlformats.org/markup-compatibility/2006">
-          <mc:Choice xmlns:p14="http://schemas.microsoft.com/office/powerpoint/2010/main" Requires="p14">
+        <mc:AlternateContent xmlns:mc="http://schemas.openxmlformats.org/markup-compatibility/2006" xmlns:p14="http://schemas.microsoft.com/office/powerpoint/2010/main">
+          <mc:Choice Requires="p14">
             <p:contentPart p14:bwMode="auto" r:id="rId198">
               <p14:nvContentPartPr>
                 <p14:cNvPr id="188" name="Ink 187">
@@ -13134,7 +15087,7 @@
               </p14:xfrm>
             </p:contentPart>
           </mc:Choice>
-          <mc:Fallback>
+          <mc:Fallback xmlns="">
             <p:pic>
               <p:nvPicPr>
                 <p:cNvPr id="188" name="Ink 187">
@@ -13165,8 +15118,8 @@
             </p:pic>
           </mc:Fallback>
         </mc:AlternateContent>
-        <mc:AlternateContent xmlns:mc="http://schemas.openxmlformats.org/markup-compatibility/2006">
-          <mc:Choice xmlns:p14="http://schemas.microsoft.com/office/powerpoint/2010/main" Requires="p14">
+        <mc:AlternateContent xmlns:mc="http://schemas.openxmlformats.org/markup-compatibility/2006" xmlns:p14="http://schemas.microsoft.com/office/powerpoint/2010/main">
+          <mc:Choice Requires="p14">
             <p:contentPart p14:bwMode="auto" r:id="rId200">
               <p14:nvContentPartPr>
                 <p14:cNvPr id="189" name="Ink 188">
@@ -13185,7 +15138,7 @@
               </p14:xfrm>
             </p:contentPart>
           </mc:Choice>
-          <mc:Fallback>
+          <mc:Fallback xmlns="">
             <p:pic>
               <p:nvPicPr>
                 <p:cNvPr id="189" name="Ink 188">
@@ -13216,8 +15169,8 @@
             </p:pic>
           </mc:Fallback>
         </mc:AlternateContent>
-        <mc:AlternateContent xmlns:mc="http://schemas.openxmlformats.org/markup-compatibility/2006">
-          <mc:Choice xmlns:p14="http://schemas.microsoft.com/office/powerpoint/2010/main" Requires="p14">
+        <mc:AlternateContent xmlns:mc="http://schemas.openxmlformats.org/markup-compatibility/2006" xmlns:p14="http://schemas.microsoft.com/office/powerpoint/2010/main">
+          <mc:Choice Requires="p14">
             <p:contentPart p14:bwMode="auto" r:id="rId202">
               <p14:nvContentPartPr>
                 <p14:cNvPr id="190" name="Ink 189">
@@ -13236,7 +15189,7 @@
               </p14:xfrm>
             </p:contentPart>
           </mc:Choice>
-          <mc:Fallback>
+          <mc:Fallback xmlns="">
             <p:pic>
               <p:nvPicPr>
                 <p:cNvPr id="190" name="Ink 189">
@@ -13267,8 +15220,8 @@
             </p:pic>
           </mc:Fallback>
         </mc:AlternateContent>
-        <mc:AlternateContent xmlns:mc="http://schemas.openxmlformats.org/markup-compatibility/2006">
-          <mc:Choice xmlns:p14="http://schemas.microsoft.com/office/powerpoint/2010/main" Requires="p14">
+        <mc:AlternateContent xmlns:mc="http://schemas.openxmlformats.org/markup-compatibility/2006" xmlns:p14="http://schemas.microsoft.com/office/powerpoint/2010/main">
+          <mc:Choice Requires="p14">
             <p:contentPart p14:bwMode="auto" r:id="rId204">
               <p14:nvContentPartPr>
                 <p14:cNvPr id="191" name="Ink 190">
@@ -13287,7 +15240,7 @@
               </p14:xfrm>
             </p:contentPart>
           </mc:Choice>
-          <mc:Fallback>
+          <mc:Fallback xmlns="">
             <p:pic>
               <p:nvPicPr>
                 <p:cNvPr id="191" name="Ink 190">
@@ -13339,8 +15292,8 @@
             <a:chExt cx="1577520" cy="821160"/>
           </a:xfrm>
         </p:grpSpPr>
-        <mc:AlternateContent xmlns:mc="http://schemas.openxmlformats.org/markup-compatibility/2006">
-          <mc:Choice xmlns:p14="http://schemas.microsoft.com/office/powerpoint/2010/main" Requires="p14">
+        <mc:AlternateContent xmlns:mc="http://schemas.openxmlformats.org/markup-compatibility/2006" xmlns:p14="http://schemas.microsoft.com/office/powerpoint/2010/main">
+          <mc:Choice Requires="p14">
             <p:contentPart p14:bwMode="auto" r:id="rId206">
               <p14:nvContentPartPr>
                 <p14:cNvPr id="192" name="Ink 191">
@@ -13359,7 +15312,7 @@
               </p14:xfrm>
             </p:contentPart>
           </mc:Choice>
-          <mc:Fallback>
+          <mc:Fallback xmlns="">
             <p:pic>
               <p:nvPicPr>
                 <p:cNvPr id="192" name="Ink 191">
@@ -13390,8 +15343,8 @@
             </p:pic>
           </mc:Fallback>
         </mc:AlternateContent>
-        <mc:AlternateContent xmlns:mc="http://schemas.openxmlformats.org/markup-compatibility/2006">
-          <mc:Choice xmlns:p14="http://schemas.microsoft.com/office/powerpoint/2010/main" Requires="p14">
+        <mc:AlternateContent xmlns:mc="http://schemas.openxmlformats.org/markup-compatibility/2006" xmlns:p14="http://schemas.microsoft.com/office/powerpoint/2010/main">
+          <mc:Choice Requires="p14">
             <p:contentPart p14:bwMode="auto" r:id="rId208">
               <p14:nvContentPartPr>
                 <p14:cNvPr id="193" name="Ink 192">
@@ -13410,7 +15363,7 @@
               </p14:xfrm>
             </p:contentPart>
           </mc:Choice>
-          <mc:Fallback>
+          <mc:Fallback xmlns="">
             <p:pic>
               <p:nvPicPr>
                 <p:cNvPr id="193" name="Ink 192">
@@ -13441,8 +15394,8 @@
             </p:pic>
           </mc:Fallback>
         </mc:AlternateContent>
-        <mc:AlternateContent xmlns:mc="http://schemas.openxmlformats.org/markup-compatibility/2006">
-          <mc:Choice xmlns:p14="http://schemas.microsoft.com/office/powerpoint/2010/main" Requires="p14">
+        <mc:AlternateContent xmlns:mc="http://schemas.openxmlformats.org/markup-compatibility/2006" xmlns:p14="http://schemas.microsoft.com/office/powerpoint/2010/main">
+          <mc:Choice Requires="p14">
             <p:contentPart p14:bwMode="auto" r:id="rId210">
               <p14:nvContentPartPr>
                 <p14:cNvPr id="194" name="Ink 193">
@@ -13461,7 +15414,7 @@
               </p14:xfrm>
             </p:contentPart>
           </mc:Choice>
-          <mc:Fallback>
+          <mc:Fallback xmlns="">
             <p:pic>
               <p:nvPicPr>
                 <p:cNvPr id="194" name="Ink 193">
@@ -13492,8 +15445,8 @@
             </p:pic>
           </mc:Fallback>
         </mc:AlternateContent>
-        <mc:AlternateContent xmlns:mc="http://schemas.openxmlformats.org/markup-compatibility/2006">
-          <mc:Choice xmlns:p14="http://schemas.microsoft.com/office/powerpoint/2010/main" Requires="p14">
+        <mc:AlternateContent xmlns:mc="http://schemas.openxmlformats.org/markup-compatibility/2006" xmlns:p14="http://schemas.microsoft.com/office/powerpoint/2010/main">
+          <mc:Choice Requires="p14">
             <p:contentPart p14:bwMode="auto" r:id="rId212">
               <p14:nvContentPartPr>
                 <p14:cNvPr id="195" name="Ink 194">
@@ -13512,7 +15465,7 @@
               </p14:xfrm>
             </p:contentPart>
           </mc:Choice>
-          <mc:Fallback>
+          <mc:Fallback xmlns="">
             <p:pic>
               <p:nvPicPr>
                 <p:cNvPr id="195" name="Ink 194">
@@ -13543,8 +15496,8 @@
             </p:pic>
           </mc:Fallback>
         </mc:AlternateContent>
-        <mc:AlternateContent xmlns:mc="http://schemas.openxmlformats.org/markup-compatibility/2006">
-          <mc:Choice xmlns:p14="http://schemas.microsoft.com/office/powerpoint/2010/main" Requires="p14">
+        <mc:AlternateContent xmlns:mc="http://schemas.openxmlformats.org/markup-compatibility/2006" xmlns:p14="http://schemas.microsoft.com/office/powerpoint/2010/main">
+          <mc:Choice Requires="p14">
             <p:contentPart p14:bwMode="auto" r:id="rId214">
               <p14:nvContentPartPr>
                 <p14:cNvPr id="196" name="Ink 195">
@@ -13563,7 +15516,7 @@
               </p14:xfrm>
             </p:contentPart>
           </mc:Choice>
-          <mc:Fallback>
+          <mc:Fallback xmlns="">
             <p:pic>
               <p:nvPicPr>
                 <p:cNvPr id="196" name="Ink 195">
@@ -13594,8 +15547,8 @@
             </p:pic>
           </mc:Fallback>
         </mc:AlternateContent>
-        <mc:AlternateContent xmlns:mc="http://schemas.openxmlformats.org/markup-compatibility/2006">
-          <mc:Choice xmlns:p14="http://schemas.microsoft.com/office/powerpoint/2010/main" Requires="p14">
+        <mc:AlternateContent xmlns:mc="http://schemas.openxmlformats.org/markup-compatibility/2006" xmlns:p14="http://schemas.microsoft.com/office/powerpoint/2010/main">
+          <mc:Choice Requires="p14">
             <p:contentPart p14:bwMode="auto" r:id="rId216">
               <p14:nvContentPartPr>
                 <p14:cNvPr id="197" name="Ink 196">
@@ -13614,7 +15567,7 @@
               </p14:xfrm>
             </p:contentPart>
           </mc:Choice>
-          <mc:Fallback>
+          <mc:Fallback xmlns="">
             <p:pic>
               <p:nvPicPr>
                 <p:cNvPr id="197" name="Ink 196">
@@ -13645,8 +15598,8 @@
             </p:pic>
           </mc:Fallback>
         </mc:AlternateContent>
-        <mc:AlternateContent xmlns:mc="http://schemas.openxmlformats.org/markup-compatibility/2006">
-          <mc:Choice xmlns:p14="http://schemas.microsoft.com/office/powerpoint/2010/main" Requires="p14">
+        <mc:AlternateContent xmlns:mc="http://schemas.openxmlformats.org/markup-compatibility/2006" xmlns:p14="http://schemas.microsoft.com/office/powerpoint/2010/main">
+          <mc:Choice Requires="p14">
             <p:contentPart p14:bwMode="auto" r:id="rId218">
               <p14:nvContentPartPr>
                 <p14:cNvPr id="198" name="Ink 197">
@@ -13665,7 +15618,7 @@
               </p14:xfrm>
             </p:contentPart>
           </mc:Choice>
-          <mc:Fallback>
+          <mc:Fallback xmlns="">
             <p:pic>
               <p:nvPicPr>
                 <p:cNvPr id="198" name="Ink 197">
@@ -13696,8 +15649,8 @@
             </p:pic>
           </mc:Fallback>
         </mc:AlternateContent>
-        <mc:AlternateContent xmlns:mc="http://schemas.openxmlformats.org/markup-compatibility/2006">
-          <mc:Choice xmlns:p14="http://schemas.microsoft.com/office/powerpoint/2010/main" Requires="p14">
+        <mc:AlternateContent xmlns:mc="http://schemas.openxmlformats.org/markup-compatibility/2006" xmlns:p14="http://schemas.microsoft.com/office/powerpoint/2010/main">
+          <mc:Choice Requires="p14">
             <p:contentPart p14:bwMode="auto" r:id="rId220">
               <p14:nvContentPartPr>
                 <p14:cNvPr id="199" name="Ink 198">
@@ -13716,7 +15669,7 @@
               </p14:xfrm>
             </p:contentPart>
           </mc:Choice>
-          <mc:Fallback>
+          <mc:Fallback xmlns="">
             <p:pic>
               <p:nvPicPr>
                 <p:cNvPr id="199" name="Ink 198">
@@ -13747,8 +15700,8 @@
             </p:pic>
           </mc:Fallback>
         </mc:AlternateContent>
-        <mc:AlternateContent xmlns:mc="http://schemas.openxmlformats.org/markup-compatibility/2006">
-          <mc:Choice xmlns:p14="http://schemas.microsoft.com/office/powerpoint/2010/main" Requires="p14">
+        <mc:AlternateContent xmlns:mc="http://schemas.openxmlformats.org/markup-compatibility/2006" xmlns:p14="http://schemas.microsoft.com/office/powerpoint/2010/main">
+          <mc:Choice Requires="p14">
             <p:contentPart p14:bwMode="auto" r:id="rId222">
               <p14:nvContentPartPr>
                 <p14:cNvPr id="200" name="Ink 199">
@@ -13767,7 +15720,7 @@
               </p14:xfrm>
             </p:contentPart>
           </mc:Choice>
-          <mc:Fallback>
+          <mc:Fallback xmlns="">
             <p:pic>
               <p:nvPicPr>
                 <p:cNvPr id="200" name="Ink 199">
@@ -13798,8 +15751,8 @@
             </p:pic>
           </mc:Fallback>
         </mc:AlternateContent>
-        <mc:AlternateContent xmlns:mc="http://schemas.openxmlformats.org/markup-compatibility/2006">
-          <mc:Choice xmlns:p14="http://schemas.microsoft.com/office/powerpoint/2010/main" Requires="p14">
+        <mc:AlternateContent xmlns:mc="http://schemas.openxmlformats.org/markup-compatibility/2006" xmlns:p14="http://schemas.microsoft.com/office/powerpoint/2010/main">
+          <mc:Choice Requires="p14">
             <p:contentPart p14:bwMode="auto" r:id="rId224">
               <p14:nvContentPartPr>
                 <p14:cNvPr id="201" name="Ink 200">
@@ -13818,7 +15771,7 @@
               </p14:xfrm>
             </p:contentPart>
           </mc:Choice>
-          <mc:Fallback>
+          <mc:Fallback xmlns="">
             <p:pic>
               <p:nvPicPr>
                 <p:cNvPr id="201" name="Ink 200">
@@ -13870,8 +15823,8 @@
             <a:chExt cx="3272400" cy="796680"/>
           </a:xfrm>
         </p:grpSpPr>
-        <mc:AlternateContent xmlns:mc="http://schemas.openxmlformats.org/markup-compatibility/2006">
-          <mc:Choice xmlns:p14="http://schemas.microsoft.com/office/powerpoint/2010/main" Requires="p14">
+        <mc:AlternateContent xmlns:mc="http://schemas.openxmlformats.org/markup-compatibility/2006" xmlns:p14="http://schemas.microsoft.com/office/powerpoint/2010/main">
+          <mc:Choice Requires="p14">
             <p:contentPart p14:bwMode="auto" r:id="rId226">
               <p14:nvContentPartPr>
                 <p14:cNvPr id="204" name="Ink 203">
@@ -13890,7 +15843,7 @@
               </p14:xfrm>
             </p:contentPart>
           </mc:Choice>
-          <mc:Fallback>
+          <mc:Fallback xmlns="">
             <p:pic>
               <p:nvPicPr>
                 <p:cNvPr id="204" name="Ink 203">
@@ -13921,8 +15874,8 @@
             </p:pic>
           </mc:Fallback>
         </mc:AlternateContent>
-        <mc:AlternateContent xmlns:mc="http://schemas.openxmlformats.org/markup-compatibility/2006">
-          <mc:Choice xmlns:p14="http://schemas.microsoft.com/office/powerpoint/2010/main" Requires="p14">
+        <mc:AlternateContent xmlns:mc="http://schemas.openxmlformats.org/markup-compatibility/2006" xmlns:p14="http://schemas.microsoft.com/office/powerpoint/2010/main">
+          <mc:Choice Requires="p14">
             <p:contentPart p14:bwMode="auto" r:id="rId228">
               <p14:nvContentPartPr>
                 <p14:cNvPr id="205" name="Ink 204">
@@ -13941,7 +15894,7 @@
               </p14:xfrm>
             </p:contentPart>
           </mc:Choice>
-          <mc:Fallback>
+          <mc:Fallback xmlns="">
             <p:pic>
               <p:nvPicPr>
                 <p:cNvPr id="205" name="Ink 204">
@@ -13972,8 +15925,8 @@
             </p:pic>
           </mc:Fallback>
         </mc:AlternateContent>
-        <mc:AlternateContent xmlns:mc="http://schemas.openxmlformats.org/markup-compatibility/2006">
-          <mc:Choice xmlns:p14="http://schemas.microsoft.com/office/powerpoint/2010/main" Requires="p14">
+        <mc:AlternateContent xmlns:mc="http://schemas.openxmlformats.org/markup-compatibility/2006" xmlns:p14="http://schemas.microsoft.com/office/powerpoint/2010/main">
+          <mc:Choice Requires="p14">
             <p:contentPart p14:bwMode="auto" r:id="rId230">
               <p14:nvContentPartPr>
                 <p14:cNvPr id="206" name="Ink 205">
@@ -13992,7 +15945,7 @@
               </p14:xfrm>
             </p:contentPart>
           </mc:Choice>
-          <mc:Fallback>
+          <mc:Fallback xmlns="">
             <p:pic>
               <p:nvPicPr>
                 <p:cNvPr id="206" name="Ink 205">
@@ -14023,8 +15976,8 @@
             </p:pic>
           </mc:Fallback>
         </mc:AlternateContent>
-        <mc:AlternateContent xmlns:mc="http://schemas.openxmlformats.org/markup-compatibility/2006">
-          <mc:Choice xmlns:p14="http://schemas.microsoft.com/office/powerpoint/2010/main" Requires="p14">
+        <mc:AlternateContent xmlns:mc="http://schemas.openxmlformats.org/markup-compatibility/2006" xmlns:p14="http://schemas.microsoft.com/office/powerpoint/2010/main">
+          <mc:Choice Requires="p14">
             <p:contentPart p14:bwMode="auto" r:id="rId232">
               <p14:nvContentPartPr>
                 <p14:cNvPr id="207" name="Ink 206">
@@ -14043,7 +15996,7 @@
               </p14:xfrm>
             </p:contentPart>
           </mc:Choice>
-          <mc:Fallback>
+          <mc:Fallback xmlns="">
             <p:pic>
               <p:nvPicPr>
                 <p:cNvPr id="207" name="Ink 206">
@@ -14074,8 +16027,8 @@
             </p:pic>
           </mc:Fallback>
         </mc:AlternateContent>
-        <mc:AlternateContent xmlns:mc="http://schemas.openxmlformats.org/markup-compatibility/2006">
-          <mc:Choice xmlns:p14="http://schemas.microsoft.com/office/powerpoint/2010/main" Requires="p14">
+        <mc:AlternateContent xmlns:mc="http://schemas.openxmlformats.org/markup-compatibility/2006" xmlns:p14="http://schemas.microsoft.com/office/powerpoint/2010/main">
+          <mc:Choice Requires="p14">
             <p:contentPart p14:bwMode="auto" r:id="rId234">
               <p14:nvContentPartPr>
                 <p14:cNvPr id="208" name="Ink 207">
@@ -14094,7 +16047,7 @@
               </p14:xfrm>
             </p:contentPart>
           </mc:Choice>
-          <mc:Fallback>
+          <mc:Fallback xmlns="">
             <p:pic>
               <p:nvPicPr>
                 <p:cNvPr id="208" name="Ink 207">
@@ -14125,8 +16078,8 @@
             </p:pic>
           </mc:Fallback>
         </mc:AlternateContent>
-        <mc:AlternateContent xmlns:mc="http://schemas.openxmlformats.org/markup-compatibility/2006">
-          <mc:Choice xmlns:p14="http://schemas.microsoft.com/office/powerpoint/2010/main" Requires="p14">
+        <mc:AlternateContent xmlns:mc="http://schemas.openxmlformats.org/markup-compatibility/2006" xmlns:p14="http://schemas.microsoft.com/office/powerpoint/2010/main">
+          <mc:Choice Requires="p14">
             <p:contentPart p14:bwMode="auto" r:id="rId236">
               <p14:nvContentPartPr>
                 <p14:cNvPr id="209" name="Ink 208">
@@ -14145,7 +16098,7 @@
               </p14:xfrm>
             </p:contentPart>
           </mc:Choice>
-          <mc:Fallback>
+          <mc:Fallback xmlns="">
             <p:pic>
               <p:nvPicPr>
                 <p:cNvPr id="209" name="Ink 208">
@@ -14176,8 +16129,8 @@
             </p:pic>
           </mc:Fallback>
         </mc:AlternateContent>
-        <mc:AlternateContent xmlns:mc="http://schemas.openxmlformats.org/markup-compatibility/2006">
-          <mc:Choice xmlns:p14="http://schemas.microsoft.com/office/powerpoint/2010/main" Requires="p14">
+        <mc:AlternateContent xmlns:mc="http://schemas.openxmlformats.org/markup-compatibility/2006" xmlns:p14="http://schemas.microsoft.com/office/powerpoint/2010/main">
+          <mc:Choice Requires="p14">
             <p:contentPart p14:bwMode="auto" r:id="rId238">
               <p14:nvContentPartPr>
                 <p14:cNvPr id="210" name="Ink 209">
@@ -14196,7 +16149,7 @@
               </p14:xfrm>
             </p:contentPart>
           </mc:Choice>
-          <mc:Fallback>
+          <mc:Fallback xmlns="">
             <p:pic>
               <p:nvPicPr>
                 <p:cNvPr id="210" name="Ink 209">
@@ -14227,8 +16180,8 @@
             </p:pic>
           </mc:Fallback>
         </mc:AlternateContent>
-        <mc:AlternateContent xmlns:mc="http://schemas.openxmlformats.org/markup-compatibility/2006">
-          <mc:Choice xmlns:p14="http://schemas.microsoft.com/office/powerpoint/2010/main" Requires="p14">
+        <mc:AlternateContent xmlns:mc="http://schemas.openxmlformats.org/markup-compatibility/2006" xmlns:p14="http://schemas.microsoft.com/office/powerpoint/2010/main">
+          <mc:Choice Requires="p14">
             <p:contentPart p14:bwMode="auto" r:id="rId240">
               <p14:nvContentPartPr>
                 <p14:cNvPr id="211" name="Ink 210">
@@ -14247,7 +16200,7 @@
               </p14:xfrm>
             </p:contentPart>
           </mc:Choice>
-          <mc:Fallback>
+          <mc:Fallback xmlns="">
             <p:pic>
               <p:nvPicPr>
                 <p:cNvPr id="211" name="Ink 210">
@@ -14278,8 +16231,8 @@
             </p:pic>
           </mc:Fallback>
         </mc:AlternateContent>
-        <mc:AlternateContent xmlns:mc="http://schemas.openxmlformats.org/markup-compatibility/2006">
-          <mc:Choice xmlns:p14="http://schemas.microsoft.com/office/powerpoint/2010/main" Requires="p14">
+        <mc:AlternateContent xmlns:mc="http://schemas.openxmlformats.org/markup-compatibility/2006" xmlns:p14="http://schemas.microsoft.com/office/powerpoint/2010/main">
+          <mc:Choice Requires="p14">
             <p:contentPart p14:bwMode="auto" r:id="rId242">
               <p14:nvContentPartPr>
                 <p14:cNvPr id="213" name="Ink 212">
@@ -14298,7 +16251,7 @@
               </p14:xfrm>
             </p:contentPart>
           </mc:Choice>
-          <mc:Fallback>
+          <mc:Fallback xmlns="">
             <p:pic>
               <p:nvPicPr>
                 <p:cNvPr id="213" name="Ink 212">
@@ -14329,8 +16282,8 @@
             </p:pic>
           </mc:Fallback>
         </mc:AlternateContent>
-        <mc:AlternateContent xmlns:mc="http://schemas.openxmlformats.org/markup-compatibility/2006">
-          <mc:Choice xmlns:p14="http://schemas.microsoft.com/office/powerpoint/2010/main" Requires="p14">
+        <mc:AlternateContent xmlns:mc="http://schemas.openxmlformats.org/markup-compatibility/2006" xmlns:p14="http://schemas.microsoft.com/office/powerpoint/2010/main">
+          <mc:Choice Requires="p14">
             <p:contentPart p14:bwMode="auto" r:id="rId244">
               <p14:nvContentPartPr>
                 <p14:cNvPr id="214" name="Ink 213">
@@ -14349,7 +16302,7 @@
               </p14:xfrm>
             </p:contentPart>
           </mc:Choice>
-          <mc:Fallback>
+          <mc:Fallback xmlns="">
             <p:pic>
               <p:nvPicPr>
                 <p:cNvPr id="214" name="Ink 213">
@@ -14380,8 +16333,8 @@
             </p:pic>
           </mc:Fallback>
         </mc:AlternateContent>
-        <mc:AlternateContent xmlns:mc="http://schemas.openxmlformats.org/markup-compatibility/2006">
-          <mc:Choice xmlns:p14="http://schemas.microsoft.com/office/powerpoint/2010/main" Requires="p14">
+        <mc:AlternateContent xmlns:mc="http://schemas.openxmlformats.org/markup-compatibility/2006" xmlns:p14="http://schemas.microsoft.com/office/powerpoint/2010/main">
+          <mc:Choice Requires="p14">
             <p:contentPart p14:bwMode="auto" r:id="rId246">
               <p14:nvContentPartPr>
                 <p14:cNvPr id="215" name="Ink 214">
@@ -14400,7 +16353,7 @@
               </p14:xfrm>
             </p:contentPart>
           </mc:Choice>
-          <mc:Fallback>
+          <mc:Fallback xmlns="">
             <p:pic>
               <p:nvPicPr>
                 <p:cNvPr id="215" name="Ink 214">
@@ -14431,8 +16384,8 @@
             </p:pic>
           </mc:Fallback>
         </mc:AlternateContent>
-        <mc:AlternateContent xmlns:mc="http://schemas.openxmlformats.org/markup-compatibility/2006">
-          <mc:Choice xmlns:p14="http://schemas.microsoft.com/office/powerpoint/2010/main" Requires="p14">
+        <mc:AlternateContent xmlns:mc="http://schemas.openxmlformats.org/markup-compatibility/2006" xmlns:p14="http://schemas.microsoft.com/office/powerpoint/2010/main">
+          <mc:Choice Requires="p14">
             <p:contentPart p14:bwMode="auto" r:id="rId247">
               <p14:nvContentPartPr>
                 <p14:cNvPr id="216" name="Ink 215">
@@ -14451,7 +16404,7 @@
               </p14:xfrm>
             </p:contentPart>
           </mc:Choice>
-          <mc:Fallback>
+          <mc:Fallback xmlns="">
             <p:pic>
               <p:nvPicPr>
                 <p:cNvPr id="216" name="Ink 215">
@@ -14482,8 +16435,8 @@
             </p:pic>
           </mc:Fallback>
         </mc:AlternateContent>
-        <mc:AlternateContent xmlns:mc="http://schemas.openxmlformats.org/markup-compatibility/2006">
-          <mc:Choice xmlns:p14="http://schemas.microsoft.com/office/powerpoint/2010/main" Requires="p14">
+        <mc:AlternateContent xmlns:mc="http://schemas.openxmlformats.org/markup-compatibility/2006" xmlns:p14="http://schemas.microsoft.com/office/powerpoint/2010/main">
+          <mc:Choice Requires="p14">
             <p:contentPart p14:bwMode="auto" r:id="rId249">
               <p14:nvContentPartPr>
                 <p14:cNvPr id="217" name="Ink 216">
@@ -14502,7 +16455,7 @@
               </p14:xfrm>
             </p:contentPart>
           </mc:Choice>
-          <mc:Fallback>
+          <mc:Fallback xmlns="">
             <p:pic>
               <p:nvPicPr>
                 <p:cNvPr id="217" name="Ink 216">
@@ -14533,8 +16486,8 @@
             </p:pic>
           </mc:Fallback>
         </mc:AlternateContent>
-        <mc:AlternateContent xmlns:mc="http://schemas.openxmlformats.org/markup-compatibility/2006">
-          <mc:Choice xmlns:p14="http://schemas.microsoft.com/office/powerpoint/2010/main" Requires="p14">
+        <mc:AlternateContent xmlns:mc="http://schemas.openxmlformats.org/markup-compatibility/2006" xmlns:p14="http://schemas.microsoft.com/office/powerpoint/2010/main">
+          <mc:Choice Requires="p14">
             <p:contentPart p14:bwMode="auto" r:id="rId251">
               <p14:nvContentPartPr>
                 <p14:cNvPr id="218" name="Ink 217">
@@ -14553,7 +16506,7 @@
               </p14:xfrm>
             </p:contentPart>
           </mc:Choice>
-          <mc:Fallback>
+          <mc:Fallback xmlns="">
             <p:pic>
               <p:nvPicPr>
                 <p:cNvPr id="218" name="Ink 217">
@@ -14584,8 +16537,8 @@
             </p:pic>
           </mc:Fallback>
         </mc:AlternateContent>
-        <mc:AlternateContent xmlns:mc="http://schemas.openxmlformats.org/markup-compatibility/2006">
-          <mc:Choice xmlns:p14="http://schemas.microsoft.com/office/powerpoint/2010/main" Requires="p14">
+        <mc:AlternateContent xmlns:mc="http://schemas.openxmlformats.org/markup-compatibility/2006" xmlns:p14="http://schemas.microsoft.com/office/powerpoint/2010/main">
+          <mc:Choice Requires="p14">
             <p:contentPart p14:bwMode="auto" r:id="rId253">
               <p14:nvContentPartPr>
                 <p14:cNvPr id="219" name="Ink 218">
@@ -14604,7 +16557,7 @@
               </p14:xfrm>
             </p:contentPart>
           </mc:Choice>
-          <mc:Fallback>
+          <mc:Fallback xmlns="">
             <p:pic>
               <p:nvPicPr>
                 <p:cNvPr id="219" name="Ink 218">
@@ -14635,8 +16588,8 @@
             </p:pic>
           </mc:Fallback>
         </mc:AlternateContent>
-        <mc:AlternateContent xmlns:mc="http://schemas.openxmlformats.org/markup-compatibility/2006">
-          <mc:Choice xmlns:p14="http://schemas.microsoft.com/office/powerpoint/2010/main" Requires="p14">
+        <mc:AlternateContent xmlns:mc="http://schemas.openxmlformats.org/markup-compatibility/2006" xmlns:p14="http://schemas.microsoft.com/office/powerpoint/2010/main">
+          <mc:Choice Requires="p14">
             <p:contentPart p14:bwMode="auto" r:id="rId255">
               <p14:nvContentPartPr>
                 <p14:cNvPr id="220" name="Ink 219">
@@ -14655,7 +16608,7 @@
               </p14:xfrm>
             </p:contentPart>
           </mc:Choice>
-          <mc:Fallback>
+          <mc:Fallback xmlns="">
             <p:pic>
               <p:nvPicPr>
                 <p:cNvPr id="220" name="Ink 219">
@@ -14686,8 +16639,8 @@
             </p:pic>
           </mc:Fallback>
         </mc:AlternateContent>
-        <mc:AlternateContent xmlns:mc="http://schemas.openxmlformats.org/markup-compatibility/2006">
-          <mc:Choice xmlns:p14="http://schemas.microsoft.com/office/powerpoint/2010/main" Requires="p14">
+        <mc:AlternateContent xmlns:mc="http://schemas.openxmlformats.org/markup-compatibility/2006" xmlns:p14="http://schemas.microsoft.com/office/powerpoint/2010/main">
+          <mc:Choice Requires="p14">
             <p:contentPart p14:bwMode="auto" r:id="rId257">
               <p14:nvContentPartPr>
                 <p14:cNvPr id="221" name="Ink 220">
@@ -14706,7 +16659,7 @@
               </p14:xfrm>
             </p:contentPart>
           </mc:Choice>
-          <mc:Fallback>
+          <mc:Fallback xmlns="">
             <p:pic>
               <p:nvPicPr>
                 <p:cNvPr id="221" name="Ink 220">
@@ -14737,8 +16690,8 @@
             </p:pic>
           </mc:Fallback>
         </mc:AlternateContent>
-        <mc:AlternateContent xmlns:mc="http://schemas.openxmlformats.org/markup-compatibility/2006">
-          <mc:Choice xmlns:p14="http://schemas.microsoft.com/office/powerpoint/2010/main" Requires="p14">
+        <mc:AlternateContent xmlns:mc="http://schemas.openxmlformats.org/markup-compatibility/2006" xmlns:p14="http://schemas.microsoft.com/office/powerpoint/2010/main">
+          <mc:Choice Requires="p14">
             <p:contentPart p14:bwMode="auto" r:id="rId259">
               <p14:nvContentPartPr>
                 <p14:cNvPr id="222" name="Ink 221">
@@ -14757,7 +16710,7 @@
               </p14:xfrm>
             </p:contentPart>
           </mc:Choice>
-          <mc:Fallback>
+          <mc:Fallback xmlns="">
             <p:pic>
               <p:nvPicPr>
                 <p:cNvPr id="222" name="Ink 221">
@@ -14788,8 +16741,8 @@
             </p:pic>
           </mc:Fallback>
         </mc:AlternateContent>
-        <mc:AlternateContent xmlns:mc="http://schemas.openxmlformats.org/markup-compatibility/2006">
-          <mc:Choice xmlns:p14="http://schemas.microsoft.com/office/powerpoint/2010/main" Requires="p14">
+        <mc:AlternateContent xmlns:mc="http://schemas.openxmlformats.org/markup-compatibility/2006" xmlns:p14="http://schemas.microsoft.com/office/powerpoint/2010/main">
+          <mc:Choice Requires="p14">
             <p:contentPart p14:bwMode="auto" r:id="rId261">
               <p14:nvContentPartPr>
                 <p14:cNvPr id="223" name="Ink 222">
@@ -14808,7 +16761,7 @@
               </p14:xfrm>
             </p:contentPart>
           </mc:Choice>
-          <mc:Fallback>
+          <mc:Fallback xmlns="">
             <p:pic>
               <p:nvPicPr>
                 <p:cNvPr id="223" name="Ink 222">
@@ -14839,8 +16792,8 @@
             </p:pic>
           </mc:Fallback>
         </mc:AlternateContent>
-        <mc:AlternateContent xmlns:mc="http://schemas.openxmlformats.org/markup-compatibility/2006">
-          <mc:Choice xmlns:p14="http://schemas.microsoft.com/office/powerpoint/2010/main" Requires="p14">
+        <mc:AlternateContent xmlns:mc="http://schemas.openxmlformats.org/markup-compatibility/2006" xmlns:p14="http://schemas.microsoft.com/office/powerpoint/2010/main">
+          <mc:Choice Requires="p14">
             <p:contentPart p14:bwMode="auto" r:id="rId263">
               <p14:nvContentPartPr>
                 <p14:cNvPr id="224" name="Ink 223">
@@ -14859,7 +16812,7 @@
               </p14:xfrm>
             </p:contentPart>
           </mc:Choice>
-          <mc:Fallback>
+          <mc:Fallback xmlns="">
             <p:pic>
               <p:nvPicPr>
                 <p:cNvPr id="224" name="Ink 223">
@@ -14890,8 +16843,8 @@
             </p:pic>
           </mc:Fallback>
         </mc:AlternateContent>
-        <mc:AlternateContent xmlns:mc="http://schemas.openxmlformats.org/markup-compatibility/2006">
-          <mc:Choice xmlns:p14="http://schemas.microsoft.com/office/powerpoint/2010/main" Requires="p14">
+        <mc:AlternateContent xmlns:mc="http://schemas.openxmlformats.org/markup-compatibility/2006" xmlns:p14="http://schemas.microsoft.com/office/powerpoint/2010/main">
+          <mc:Choice Requires="p14">
             <p:contentPart p14:bwMode="auto" r:id="rId265">
               <p14:nvContentPartPr>
                 <p14:cNvPr id="225" name="Ink 224">
@@ -14910,7 +16863,7 @@
               </p14:xfrm>
             </p:contentPart>
           </mc:Choice>
-          <mc:Fallback>
+          <mc:Fallback xmlns="">
             <p:pic>
               <p:nvPicPr>
                 <p:cNvPr id="225" name="Ink 224">
@@ -14941,8 +16894,8 @@
             </p:pic>
           </mc:Fallback>
         </mc:AlternateContent>
-        <mc:AlternateContent xmlns:mc="http://schemas.openxmlformats.org/markup-compatibility/2006">
-          <mc:Choice xmlns:p14="http://schemas.microsoft.com/office/powerpoint/2010/main" Requires="p14">
+        <mc:AlternateContent xmlns:mc="http://schemas.openxmlformats.org/markup-compatibility/2006" xmlns:p14="http://schemas.microsoft.com/office/powerpoint/2010/main">
+          <mc:Choice Requires="p14">
             <p:contentPart p14:bwMode="auto" r:id="rId267">
               <p14:nvContentPartPr>
                 <p14:cNvPr id="226" name="Ink 225">
@@ -14961,7 +16914,7 @@
               </p14:xfrm>
             </p:contentPart>
           </mc:Choice>
-          <mc:Fallback>
+          <mc:Fallback xmlns="">
             <p:pic>
               <p:nvPicPr>
                 <p:cNvPr id="226" name="Ink 225">
@@ -14992,8 +16945,8 @@
             </p:pic>
           </mc:Fallback>
         </mc:AlternateContent>
-        <mc:AlternateContent xmlns:mc="http://schemas.openxmlformats.org/markup-compatibility/2006">
-          <mc:Choice xmlns:p14="http://schemas.microsoft.com/office/powerpoint/2010/main" Requires="p14">
+        <mc:AlternateContent xmlns:mc="http://schemas.openxmlformats.org/markup-compatibility/2006" xmlns:p14="http://schemas.microsoft.com/office/powerpoint/2010/main">
+          <mc:Choice Requires="p14">
             <p:contentPart p14:bwMode="auto" r:id="rId269">
               <p14:nvContentPartPr>
                 <p14:cNvPr id="227" name="Ink 226">
@@ -15012,7 +16965,7 @@
               </p14:xfrm>
             </p:contentPart>
           </mc:Choice>
-          <mc:Fallback>
+          <mc:Fallback xmlns="">
             <p:pic>
               <p:nvPicPr>
                 <p:cNvPr id="227" name="Ink 226">
@@ -15043,8 +16996,8 @@
             </p:pic>
           </mc:Fallback>
         </mc:AlternateContent>
-        <mc:AlternateContent xmlns:mc="http://schemas.openxmlformats.org/markup-compatibility/2006">
-          <mc:Choice xmlns:p14="http://schemas.microsoft.com/office/powerpoint/2010/main" Requires="p14">
+        <mc:AlternateContent xmlns:mc="http://schemas.openxmlformats.org/markup-compatibility/2006" xmlns:p14="http://schemas.microsoft.com/office/powerpoint/2010/main">
+          <mc:Choice Requires="p14">
             <p:contentPart p14:bwMode="auto" r:id="rId271">
               <p14:nvContentPartPr>
                 <p14:cNvPr id="228" name="Ink 227">
@@ -15063,7 +17016,7 @@
               </p14:xfrm>
             </p:contentPart>
           </mc:Choice>
-          <mc:Fallback>
+          <mc:Fallback xmlns="">
             <p:pic>
               <p:nvPicPr>
                 <p:cNvPr id="228" name="Ink 227">
@@ -15094,8 +17047,8 @@
             </p:pic>
           </mc:Fallback>
         </mc:AlternateContent>
-        <mc:AlternateContent xmlns:mc="http://schemas.openxmlformats.org/markup-compatibility/2006">
-          <mc:Choice xmlns:p14="http://schemas.microsoft.com/office/powerpoint/2010/main" Requires="p14">
+        <mc:AlternateContent xmlns:mc="http://schemas.openxmlformats.org/markup-compatibility/2006" xmlns:p14="http://schemas.microsoft.com/office/powerpoint/2010/main">
+          <mc:Choice Requires="p14">
             <p:contentPart p14:bwMode="auto" r:id="rId273">
               <p14:nvContentPartPr>
                 <p14:cNvPr id="229" name="Ink 228">
@@ -15114,7 +17067,7 @@
               </p14:xfrm>
             </p:contentPart>
           </mc:Choice>
-          <mc:Fallback>
+          <mc:Fallback xmlns="">
             <p:pic>
               <p:nvPicPr>
                 <p:cNvPr id="229" name="Ink 228">
@@ -15145,8 +17098,8 @@
             </p:pic>
           </mc:Fallback>
         </mc:AlternateContent>
-        <mc:AlternateContent xmlns:mc="http://schemas.openxmlformats.org/markup-compatibility/2006">
-          <mc:Choice xmlns:p14="http://schemas.microsoft.com/office/powerpoint/2010/main" Requires="p14">
+        <mc:AlternateContent xmlns:mc="http://schemas.openxmlformats.org/markup-compatibility/2006" xmlns:p14="http://schemas.microsoft.com/office/powerpoint/2010/main">
+          <mc:Choice Requires="p14">
             <p:contentPart p14:bwMode="auto" r:id="rId275">
               <p14:nvContentPartPr>
                 <p14:cNvPr id="230" name="Ink 229">
@@ -15165,7 +17118,7 @@
               </p14:xfrm>
             </p:contentPart>
           </mc:Choice>
-          <mc:Fallback>
+          <mc:Fallback xmlns="">
             <p:pic>
               <p:nvPicPr>
                 <p:cNvPr id="230" name="Ink 229">
@@ -15196,8 +17149,8 @@
             </p:pic>
           </mc:Fallback>
         </mc:AlternateContent>
-        <mc:AlternateContent xmlns:mc="http://schemas.openxmlformats.org/markup-compatibility/2006">
-          <mc:Choice xmlns:p14="http://schemas.microsoft.com/office/powerpoint/2010/main" Requires="p14">
+        <mc:AlternateContent xmlns:mc="http://schemas.openxmlformats.org/markup-compatibility/2006" xmlns:p14="http://schemas.microsoft.com/office/powerpoint/2010/main">
+          <mc:Choice Requires="p14">
             <p:contentPart p14:bwMode="auto" r:id="rId277">
               <p14:nvContentPartPr>
                 <p14:cNvPr id="232" name="Ink 231">
@@ -15216,7 +17169,7 @@
               </p14:xfrm>
             </p:contentPart>
           </mc:Choice>
-          <mc:Fallback>
+          <mc:Fallback xmlns="">
             <p:pic>
               <p:nvPicPr>
                 <p:cNvPr id="232" name="Ink 231">
@@ -15247,8 +17200,8 @@
             </p:pic>
           </mc:Fallback>
         </mc:AlternateContent>
-        <mc:AlternateContent xmlns:mc="http://schemas.openxmlformats.org/markup-compatibility/2006">
-          <mc:Choice xmlns:p14="http://schemas.microsoft.com/office/powerpoint/2010/main" Requires="p14">
+        <mc:AlternateContent xmlns:mc="http://schemas.openxmlformats.org/markup-compatibility/2006" xmlns:p14="http://schemas.microsoft.com/office/powerpoint/2010/main">
+          <mc:Choice Requires="p14">
             <p:contentPart p14:bwMode="auto" r:id="rId279">
               <p14:nvContentPartPr>
                 <p14:cNvPr id="233" name="Ink 232">
@@ -15267,7 +17220,7 @@
               </p14:xfrm>
             </p:contentPart>
           </mc:Choice>
-          <mc:Fallback>
+          <mc:Fallback xmlns="">
             <p:pic>
               <p:nvPicPr>
                 <p:cNvPr id="233" name="Ink 232">
@@ -15303,6 +17256,4914 @@
     <p:extLst>
       <p:ext uri="{BB962C8B-B14F-4D97-AF65-F5344CB8AC3E}">
         <p14:creationId xmlns:p14="http://schemas.microsoft.com/office/powerpoint/2010/main" val="3029292345"/>
+      </p:ext>
+    </p:extLst>
+  </p:cSld>
+  <p:clrMapOvr>
+    <a:masterClrMapping/>
+  </p:clrMapOvr>
+</p:sld>
+</file>
+
+<file path=ppt/slides/slide2.xml><?xml version="1.0" encoding="utf-8"?>
+<p:sld xmlns:a="http://schemas.openxmlformats.org/drawingml/2006/main" xmlns:r="http://schemas.openxmlformats.org/officeDocument/2006/relationships" xmlns:p="http://schemas.openxmlformats.org/presentationml/2006/main">
+  <p:cSld>
+    <p:spTree>
+      <p:nvGrpSpPr>
+        <p:cNvPr id="1" name=""/>
+        <p:cNvGrpSpPr/>
+        <p:nvPr/>
+      </p:nvGrpSpPr>
+      <p:grpSpPr>
+        <a:xfrm>
+          <a:off x="0" y="0"/>
+          <a:ext cx="0" cy="0"/>
+          <a:chOff x="0" y="0"/>
+          <a:chExt cx="0" cy="0"/>
+        </a:xfrm>
+      </p:grpSpPr>
+      <p:sp>
+        <p:nvSpPr>
+          <p:cNvPr id="2" name="Rectangle 1">
+            <a:extLst>
+              <a:ext uri="{FF2B5EF4-FFF2-40B4-BE49-F238E27FC236}">
+                <a16:creationId xmlns:a16="http://schemas.microsoft.com/office/drawing/2014/main" id="{C8CCA6CB-90CC-2A95-A242-6DA37344BA42}"/>
+              </a:ext>
+            </a:extLst>
+          </p:cNvPr>
+          <p:cNvSpPr/>
+          <p:nvPr/>
+        </p:nvSpPr>
+        <p:spPr>
+          <a:xfrm>
+            <a:off x="137160" y="271689"/>
+            <a:ext cx="4562856" cy="2862072"/>
+          </a:xfrm>
+          <a:prstGeom prst="rect">
+            <a:avLst/>
+          </a:prstGeom>
+        </p:spPr>
+        <p:style>
+          <a:lnRef idx="2">
+            <a:schemeClr val="accent1">
+              <a:shade val="15000"/>
+            </a:schemeClr>
+          </a:lnRef>
+          <a:fillRef idx="1">
+            <a:schemeClr val="accent1"/>
+          </a:fillRef>
+          <a:effectRef idx="0">
+            <a:schemeClr val="accent1"/>
+          </a:effectRef>
+          <a:fontRef idx="minor">
+            <a:schemeClr val="lt1"/>
+          </a:fontRef>
+        </p:style>
+        <p:txBody>
+          <a:bodyPr rtlCol="0" anchor="ctr"/>
+          <a:lstStyle/>
+          <a:p>
+            <a:pPr algn="ctr"/>
+            <a:endParaRPr lang="en-US"/>
+          </a:p>
+        </p:txBody>
+      </p:sp>
+      <p:cxnSp>
+        <p:nvCxnSpPr>
+          <p:cNvPr id="4" name="Straight Connector 3">
+            <a:extLst>
+              <a:ext uri="{FF2B5EF4-FFF2-40B4-BE49-F238E27FC236}">
+                <a16:creationId xmlns:a16="http://schemas.microsoft.com/office/drawing/2014/main" id="{1F195CE1-5E0F-5BA1-AEC3-84F5500E5528}"/>
+              </a:ext>
+            </a:extLst>
+          </p:cNvPr>
+          <p:cNvCxnSpPr>
+            <a:cxnSpLocks/>
+          </p:cNvCxnSpPr>
+          <p:nvPr/>
+        </p:nvCxnSpPr>
+        <p:spPr>
+          <a:xfrm>
+            <a:off x="137160" y="655737"/>
+            <a:ext cx="4562856" cy="0"/>
+          </a:xfrm>
+          <a:prstGeom prst="line">
+            <a:avLst/>
+          </a:prstGeom>
+        </p:spPr>
+        <p:style>
+          <a:lnRef idx="2">
+            <a:schemeClr val="dk1"/>
+          </a:lnRef>
+          <a:fillRef idx="0">
+            <a:schemeClr val="dk1"/>
+          </a:fillRef>
+          <a:effectRef idx="1">
+            <a:schemeClr val="dk1"/>
+          </a:effectRef>
+          <a:fontRef idx="minor">
+            <a:schemeClr val="tx1"/>
+          </a:fontRef>
+        </p:style>
+      </p:cxnSp>
+      <p:pic>
+        <p:nvPicPr>
+          <p:cNvPr id="1026" name="Picture 2" descr="Message Icon Vector Art, Icons, and Graphics for Free Download">
+            <a:extLst>
+              <a:ext uri="{FF2B5EF4-FFF2-40B4-BE49-F238E27FC236}">
+                <a16:creationId xmlns:a16="http://schemas.microsoft.com/office/drawing/2014/main" id="{2138B013-DCBE-4BB8-6298-EEE87AE8E447}"/>
+              </a:ext>
+            </a:extLst>
+          </p:cNvPr>
+          <p:cNvPicPr>
+            <a:picLocks noChangeAspect="1" noChangeArrowheads="1"/>
+          </p:cNvPicPr>
+          <p:nvPr/>
+        </p:nvPicPr>
+        <p:blipFill>
+          <a:blip r:embed="rId2">
+            <a:extLst>
+              <a:ext uri="{28A0092B-C50C-407E-A947-70E740481C1C}">
+                <a14:useLocalDpi xmlns:a14="http://schemas.microsoft.com/office/drawing/2010/main" val="0"/>
+              </a:ext>
+            </a:extLst>
+          </a:blip>
+          <a:srcRect/>
+          <a:stretch>
+            <a:fillRect/>
+          </a:stretch>
+        </p:blipFill>
+        <p:spPr bwMode="auto">
+          <a:xfrm>
+            <a:off x="4081653" y="282548"/>
+            <a:ext cx="362331" cy="362331"/>
+          </a:xfrm>
+          <a:prstGeom prst="rect">
+            <a:avLst/>
+          </a:prstGeom>
+          <a:noFill/>
+          <a:extLst>
+            <a:ext uri="{909E8E84-426E-40DD-AFC4-6F175D3DCCD1}">
+              <a14:hiddenFill xmlns:a14="http://schemas.microsoft.com/office/drawing/2010/main">
+                <a:solidFill>
+                  <a:srgbClr val="FFFFFF"/>
+                </a:solidFill>
+              </a14:hiddenFill>
+            </a:ext>
+          </a:extLst>
+        </p:spPr>
+      </p:pic>
+      <p:sp>
+        <p:nvSpPr>
+          <p:cNvPr id="7" name="Oval 6">
+            <a:extLst>
+              <a:ext uri="{FF2B5EF4-FFF2-40B4-BE49-F238E27FC236}">
+                <a16:creationId xmlns:a16="http://schemas.microsoft.com/office/drawing/2014/main" id="{B0B0A7F6-2F9C-B53B-D090-12CA2637F871}"/>
+              </a:ext>
+            </a:extLst>
+          </p:cNvPr>
+          <p:cNvSpPr/>
+          <p:nvPr/>
+        </p:nvSpPr>
+        <p:spPr>
+          <a:xfrm>
+            <a:off x="4352544" y="194825"/>
+            <a:ext cx="219456" cy="228598"/>
+          </a:xfrm>
+          <a:prstGeom prst="ellipse">
+            <a:avLst/>
+          </a:prstGeom>
+          <a:solidFill>
+            <a:srgbClr val="FF0000"/>
+          </a:solidFill>
+        </p:spPr>
+        <p:style>
+          <a:lnRef idx="2">
+            <a:schemeClr val="accent1">
+              <a:shade val="15000"/>
+            </a:schemeClr>
+          </a:lnRef>
+          <a:fillRef idx="1">
+            <a:schemeClr val="accent1"/>
+          </a:fillRef>
+          <a:effectRef idx="0">
+            <a:schemeClr val="accent1"/>
+          </a:effectRef>
+          <a:fontRef idx="minor">
+            <a:schemeClr val="lt1"/>
+          </a:fontRef>
+        </p:style>
+        <p:txBody>
+          <a:bodyPr rtlCol="0" anchor="ctr"/>
+          <a:lstStyle/>
+          <a:p>
+            <a:pPr algn="ctr"/>
+            <a:r>
+              <a:rPr lang="en-US" dirty="0"/>
+              <a:t>1</a:t>
+            </a:r>
+          </a:p>
+        </p:txBody>
+      </p:sp>
+      <p:sp>
+        <p:nvSpPr>
+          <p:cNvPr id="8" name="Rectangle 7">
+            <a:extLst>
+              <a:ext uri="{FF2B5EF4-FFF2-40B4-BE49-F238E27FC236}">
+                <a16:creationId xmlns:a16="http://schemas.microsoft.com/office/drawing/2014/main" id="{1AC6C192-061D-9BF1-4929-442F70A6CE6B}"/>
+              </a:ext>
+            </a:extLst>
+          </p:cNvPr>
+          <p:cNvSpPr/>
+          <p:nvPr/>
+        </p:nvSpPr>
+        <p:spPr>
+          <a:xfrm>
+            <a:off x="4824984" y="271689"/>
+            <a:ext cx="4562856" cy="2862072"/>
+          </a:xfrm>
+          <a:prstGeom prst="rect">
+            <a:avLst/>
+          </a:prstGeom>
+        </p:spPr>
+        <p:style>
+          <a:lnRef idx="2">
+            <a:schemeClr val="accent1">
+              <a:shade val="15000"/>
+            </a:schemeClr>
+          </a:lnRef>
+          <a:fillRef idx="1">
+            <a:schemeClr val="accent1"/>
+          </a:fillRef>
+          <a:effectRef idx="0">
+            <a:schemeClr val="accent1"/>
+          </a:effectRef>
+          <a:fontRef idx="minor">
+            <a:schemeClr val="lt1"/>
+          </a:fontRef>
+        </p:style>
+        <p:txBody>
+          <a:bodyPr rtlCol="0" anchor="ctr"/>
+          <a:lstStyle/>
+          <a:p>
+            <a:pPr algn="ctr"/>
+            <a:endParaRPr lang="en-US"/>
+          </a:p>
+        </p:txBody>
+      </p:sp>
+      <p:cxnSp>
+        <p:nvCxnSpPr>
+          <p:cNvPr id="10" name="Straight Connector 9">
+            <a:extLst>
+              <a:ext uri="{FF2B5EF4-FFF2-40B4-BE49-F238E27FC236}">
+                <a16:creationId xmlns:a16="http://schemas.microsoft.com/office/drawing/2014/main" id="{A1C5D4A6-5A63-7B9F-583C-D61572F089CD}"/>
+              </a:ext>
+            </a:extLst>
+          </p:cNvPr>
+          <p:cNvCxnSpPr>
+            <a:cxnSpLocks/>
+          </p:cNvCxnSpPr>
+          <p:nvPr/>
+        </p:nvCxnSpPr>
+        <p:spPr>
+          <a:xfrm>
+            <a:off x="4824984" y="612684"/>
+            <a:ext cx="4562856" cy="0"/>
+          </a:xfrm>
+          <a:prstGeom prst="line">
+            <a:avLst/>
+          </a:prstGeom>
+        </p:spPr>
+        <p:style>
+          <a:lnRef idx="2">
+            <a:schemeClr val="dk1"/>
+          </a:lnRef>
+          <a:fillRef idx="0">
+            <a:schemeClr val="dk1"/>
+          </a:fillRef>
+          <a:effectRef idx="1">
+            <a:schemeClr val="dk1"/>
+          </a:effectRef>
+          <a:fontRef idx="minor">
+            <a:schemeClr val="tx1"/>
+          </a:fontRef>
+        </p:style>
+      </p:cxnSp>
+      <p:sp>
+        <p:nvSpPr>
+          <p:cNvPr id="12" name="TextBox 11">
+            <a:extLst>
+              <a:ext uri="{FF2B5EF4-FFF2-40B4-BE49-F238E27FC236}">
+                <a16:creationId xmlns:a16="http://schemas.microsoft.com/office/drawing/2014/main" id="{F634BB1E-B9D2-7AC0-547F-C0CF06B620FD}"/>
+              </a:ext>
+            </a:extLst>
+          </p:cNvPr>
+          <p:cNvSpPr txBox="1"/>
+          <p:nvPr/>
+        </p:nvSpPr>
+        <p:spPr>
+          <a:xfrm>
+            <a:off x="411480" y="3666744"/>
+            <a:ext cx="10055352" cy="369332"/>
+          </a:xfrm>
+          <a:prstGeom prst="rect">
+            <a:avLst/>
+          </a:prstGeom>
+          <a:noFill/>
+        </p:spPr>
+        <p:txBody>
+          <a:bodyPr wrap="square" rtlCol="0">
+            <a:spAutoFit/>
+          </a:bodyPr>
+          <a:lstStyle/>
+          <a:p>
+            <a:r>
+              <a:rPr lang="en-US" dirty="0"/>
+              <a:t>When a msg is read -&gt; change status of the database to read</a:t>
+            </a:r>
+          </a:p>
+        </p:txBody>
+      </p:sp>
+      <p:sp>
+        <p:nvSpPr>
+          <p:cNvPr id="13" name="TextBox 12">
+            <a:extLst>
+              <a:ext uri="{FF2B5EF4-FFF2-40B4-BE49-F238E27FC236}">
+                <a16:creationId xmlns:a16="http://schemas.microsoft.com/office/drawing/2014/main" id="{09586D95-5FC5-520D-6F4A-8A6205EA3879}"/>
+              </a:ext>
+            </a:extLst>
+          </p:cNvPr>
+          <p:cNvSpPr txBox="1"/>
+          <p:nvPr/>
+        </p:nvSpPr>
+        <p:spPr>
+          <a:xfrm>
+            <a:off x="411480" y="4277987"/>
+            <a:ext cx="5440680" cy="2308324"/>
+          </a:xfrm>
+          <a:prstGeom prst="rect">
+            <a:avLst/>
+          </a:prstGeom>
+          <a:noFill/>
+        </p:spPr>
+        <p:txBody>
+          <a:bodyPr wrap="square" rtlCol="0">
+            <a:spAutoFit/>
+          </a:bodyPr>
+          <a:lstStyle/>
+          <a:p>
+            <a:r>
+              <a:rPr lang="en-US" dirty="0"/>
+              <a:t>What is needed in database – messages</a:t>
+            </a:r>
+          </a:p>
+          <a:p>
+            <a:r>
+              <a:rPr lang="en-US" dirty="0"/>
+              <a:t>1. </a:t>
+            </a:r>
+            <a:r>
+              <a:rPr lang="en-US" dirty="0" err="1"/>
+              <a:t>Uuid</a:t>
+            </a:r>
+            <a:r>
+              <a:rPr lang="en-US" dirty="0"/>
+              <a:t> (each one for a message)</a:t>
+            </a:r>
+          </a:p>
+          <a:p>
+            <a:r>
+              <a:rPr lang="en-US" dirty="0"/>
+              <a:t>2. </a:t>
+            </a:r>
+            <a:r>
+              <a:rPr lang="en-US" dirty="0" err="1"/>
+              <a:t>order_id</a:t>
+            </a:r>
+            <a:r>
+              <a:rPr lang="en-US" dirty="0"/>
+              <a:t> (as the message </a:t>
+            </a:r>
+            <a:r>
+              <a:rPr lang="en-US" dirty="0" err="1"/>
+              <a:t>roomid</a:t>
+            </a:r>
+            <a:r>
+              <a:rPr lang="en-US" dirty="0"/>
+              <a:t>)</a:t>
+            </a:r>
+          </a:p>
+          <a:p>
+            <a:r>
+              <a:rPr lang="en-US" dirty="0"/>
+              <a:t>3. </a:t>
+            </a:r>
+            <a:r>
+              <a:rPr lang="en-US" dirty="0" err="1"/>
+              <a:t>sender_id</a:t>
+            </a:r>
+            <a:r>
+              <a:rPr lang="en-US" dirty="0"/>
+              <a:t> </a:t>
+            </a:r>
+          </a:p>
+          <a:p>
+            <a:r>
+              <a:rPr lang="en-US" dirty="0"/>
+              <a:t>4. </a:t>
+            </a:r>
+            <a:r>
+              <a:rPr lang="en-US" dirty="0" err="1"/>
+              <a:t>receiver_id</a:t>
+            </a:r>
+            <a:endParaRPr lang="en-US" dirty="0"/>
+          </a:p>
+          <a:p>
+            <a:r>
+              <a:rPr lang="en-US" dirty="0"/>
+              <a:t>5. Message</a:t>
+            </a:r>
+          </a:p>
+          <a:p>
+            <a:r>
+              <a:rPr lang="en-US" dirty="0"/>
+              <a:t>6. Status -&gt; read / unread (only need to check for the seller)</a:t>
+            </a:r>
+          </a:p>
+        </p:txBody>
+      </p:sp>
+      <p:sp>
+        <p:nvSpPr>
+          <p:cNvPr id="14" name="TextBox 13">
+            <a:extLst>
+              <a:ext uri="{FF2B5EF4-FFF2-40B4-BE49-F238E27FC236}">
+                <a16:creationId xmlns:a16="http://schemas.microsoft.com/office/drawing/2014/main" id="{FF56F78A-97B3-1D1F-2B3A-49619B4869E6}"/>
+              </a:ext>
+            </a:extLst>
+          </p:cNvPr>
+          <p:cNvSpPr txBox="1"/>
+          <p:nvPr/>
+        </p:nvSpPr>
+        <p:spPr>
+          <a:xfrm>
+            <a:off x="5783580" y="3133761"/>
+            <a:ext cx="2645664" cy="369332"/>
+          </a:xfrm>
+          <a:prstGeom prst="rect">
+            <a:avLst/>
+          </a:prstGeom>
+          <a:noFill/>
+        </p:spPr>
+        <p:txBody>
+          <a:bodyPr wrap="square" rtlCol="0">
+            <a:spAutoFit/>
+          </a:bodyPr>
+          <a:lstStyle/>
+          <a:p>
+            <a:r>
+              <a:rPr lang="en-US" dirty="0"/>
+              <a:t>Setup protected route</a:t>
+            </a:r>
+          </a:p>
+        </p:txBody>
+      </p:sp>
+      <p:sp>
+        <p:nvSpPr>
+          <p:cNvPr id="15" name="TextBox 14">
+            <a:extLst>
+              <a:ext uri="{FF2B5EF4-FFF2-40B4-BE49-F238E27FC236}">
+                <a16:creationId xmlns:a16="http://schemas.microsoft.com/office/drawing/2014/main" id="{7E763DD7-9F85-C62C-511C-6B4E0989EF21}"/>
+              </a:ext>
+            </a:extLst>
+          </p:cNvPr>
+          <p:cNvSpPr txBox="1"/>
+          <p:nvPr/>
+        </p:nvSpPr>
+        <p:spPr>
+          <a:xfrm>
+            <a:off x="6214872" y="4277986"/>
+            <a:ext cx="5440680" cy="1754326"/>
+          </a:xfrm>
+          <a:prstGeom prst="rect">
+            <a:avLst/>
+          </a:prstGeom>
+          <a:noFill/>
+        </p:spPr>
+        <p:txBody>
+          <a:bodyPr wrap="square" rtlCol="0">
+            <a:spAutoFit/>
+          </a:bodyPr>
+          <a:lstStyle/>
+          <a:p>
+            <a:r>
+              <a:rPr lang="en-US" dirty="0"/>
+              <a:t>Policy</a:t>
+            </a:r>
+          </a:p>
+          <a:p>
+            <a:pPr marL="285750" indent="-285750">
+              <a:buFont typeface="Wingdings" panose="05000000000000000000" pitchFamily="2" charset="2"/>
+              <a:buChar char="à"/>
+            </a:pPr>
+            <a:r>
+              <a:rPr lang="en-US" dirty="0">
+                <a:sym typeface="Wingdings" panose="05000000000000000000" pitchFamily="2" charset="2"/>
+              </a:rPr>
+              <a:t>Only </a:t>
+            </a:r>
+            <a:r>
+              <a:rPr lang="en-US" dirty="0" err="1">
+                <a:sym typeface="Wingdings" panose="05000000000000000000" pitchFamily="2" charset="2"/>
+              </a:rPr>
+              <a:t>sender_id</a:t>
+            </a:r>
+            <a:r>
+              <a:rPr lang="en-US" dirty="0">
+                <a:sym typeface="Wingdings" panose="05000000000000000000" pitchFamily="2" charset="2"/>
+              </a:rPr>
+              <a:t> and </a:t>
+            </a:r>
+            <a:r>
+              <a:rPr lang="en-US" dirty="0" err="1">
+                <a:sym typeface="Wingdings" panose="05000000000000000000" pitchFamily="2" charset="2"/>
+              </a:rPr>
+              <a:t>receiver_id</a:t>
+            </a:r>
+            <a:r>
+              <a:rPr lang="en-US" dirty="0">
+                <a:sym typeface="Wingdings" panose="05000000000000000000" pitchFamily="2" charset="2"/>
+              </a:rPr>
+              <a:t> can read the message</a:t>
+            </a:r>
+          </a:p>
+          <a:p>
+            <a:pPr marL="285750" indent="-285750">
+              <a:buFont typeface="Wingdings" panose="05000000000000000000" pitchFamily="2" charset="2"/>
+              <a:buChar char="à"/>
+            </a:pPr>
+            <a:r>
+              <a:rPr lang="en-US" dirty="0" err="1">
+                <a:sym typeface="Wingdings" panose="05000000000000000000" pitchFamily="2" charset="2"/>
+              </a:rPr>
+              <a:t>Sender_id</a:t>
+            </a:r>
+            <a:r>
+              <a:rPr lang="en-US" dirty="0">
+                <a:sym typeface="Wingdings" panose="05000000000000000000" pitchFamily="2" charset="2"/>
+              </a:rPr>
+              <a:t> and </a:t>
+            </a:r>
+            <a:r>
+              <a:rPr lang="en-US" dirty="0" err="1">
+                <a:sym typeface="Wingdings" panose="05000000000000000000" pitchFamily="2" charset="2"/>
+              </a:rPr>
+              <a:t>receiver_id</a:t>
+            </a:r>
+            <a:r>
+              <a:rPr lang="en-US" dirty="0">
+                <a:sym typeface="Wingdings" panose="05000000000000000000" pitchFamily="2" charset="2"/>
+              </a:rPr>
+              <a:t> must be existing acc</a:t>
+            </a:r>
+          </a:p>
+          <a:p>
+            <a:pPr marL="285750" indent="-285750">
+              <a:buFont typeface="Wingdings" panose="05000000000000000000" pitchFamily="2" charset="2"/>
+              <a:buChar char="à"/>
+            </a:pPr>
+            <a:r>
+              <a:rPr lang="en-US" dirty="0">
+                <a:sym typeface="Wingdings" panose="05000000000000000000" pitchFamily="2" charset="2"/>
+              </a:rPr>
+              <a:t>They must also be one of the seller / buyer of the order (select 1 from orders…)</a:t>
+            </a:r>
+            <a:endParaRPr lang="en-US" dirty="0"/>
+          </a:p>
+        </p:txBody>
+      </p:sp>
+      <p:sp>
+        <p:nvSpPr>
+          <p:cNvPr id="16" name="Rectangle: Rounded Corners 15">
+            <a:extLst>
+              <a:ext uri="{FF2B5EF4-FFF2-40B4-BE49-F238E27FC236}">
+                <a16:creationId xmlns:a16="http://schemas.microsoft.com/office/drawing/2014/main" id="{3AB49F27-0202-E08F-4086-9BC83BC75E87}"/>
+              </a:ext>
+            </a:extLst>
+          </p:cNvPr>
+          <p:cNvSpPr/>
+          <p:nvPr/>
+        </p:nvSpPr>
+        <p:spPr>
+          <a:xfrm>
+            <a:off x="9720072" y="1690699"/>
+            <a:ext cx="2215896" cy="658368"/>
+          </a:xfrm>
+          <a:prstGeom prst="roundRect">
+            <a:avLst/>
+          </a:prstGeom>
+        </p:spPr>
+        <p:style>
+          <a:lnRef idx="2">
+            <a:schemeClr val="accent1">
+              <a:shade val="15000"/>
+            </a:schemeClr>
+          </a:lnRef>
+          <a:fillRef idx="1">
+            <a:schemeClr val="accent1"/>
+          </a:fillRef>
+          <a:effectRef idx="0">
+            <a:schemeClr val="accent1"/>
+          </a:effectRef>
+          <a:fontRef idx="minor">
+            <a:schemeClr val="lt1"/>
+          </a:fontRef>
+        </p:style>
+        <p:txBody>
+          <a:bodyPr rtlCol="0" anchor="ctr"/>
+          <a:lstStyle/>
+          <a:p>
+            <a:pPr algn="ctr"/>
+            <a:r>
+              <a:rPr lang="en-US" dirty="0"/>
+              <a:t>paddles</a:t>
+            </a:r>
+          </a:p>
+        </p:txBody>
+      </p:sp>
+      <p:pic>
+        <p:nvPicPr>
+          <p:cNvPr id="17" name="Picture 2" descr="Message Icon Vector Art, Icons, and Graphics for Free Download">
+            <a:extLst>
+              <a:ext uri="{FF2B5EF4-FFF2-40B4-BE49-F238E27FC236}">
+                <a16:creationId xmlns:a16="http://schemas.microsoft.com/office/drawing/2014/main" id="{0AD35763-E0B7-EB4D-71CC-B2355CBC8FA2}"/>
+              </a:ext>
+            </a:extLst>
+          </p:cNvPr>
+          <p:cNvPicPr>
+            <a:picLocks noChangeAspect="1" noChangeArrowheads="1"/>
+          </p:cNvPicPr>
+          <p:nvPr/>
+        </p:nvPicPr>
+        <p:blipFill>
+          <a:blip r:embed="rId2">
+            <a:extLst>
+              <a:ext uri="{28A0092B-C50C-407E-A947-70E740481C1C}">
+                <a14:useLocalDpi xmlns:a14="http://schemas.microsoft.com/office/drawing/2010/main" val="0"/>
+              </a:ext>
+            </a:extLst>
+          </a:blip>
+          <a:srcRect/>
+          <a:stretch>
+            <a:fillRect/>
+          </a:stretch>
+        </p:blipFill>
+        <p:spPr bwMode="auto">
+          <a:xfrm>
+            <a:off x="11474386" y="1702725"/>
+            <a:ext cx="362331" cy="362331"/>
+          </a:xfrm>
+          <a:prstGeom prst="rect">
+            <a:avLst/>
+          </a:prstGeom>
+          <a:noFill/>
+          <a:extLst>
+            <a:ext uri="{909E8E84-426E-40DD-AFC4-6F175D3DCCD1}">
+              <a14:hiddenFill xmlns:a14="http://schemas.microsoft.com/office/drawing/2010/main">
+                <a:solidFill>
+                  <a:srgbClr val="FFFFFF"/>
+                </a:solidFill>
+              </a14:hiddenFill>
+            </a:ext>
+          </a:extLst>
+        </p:spPr>
+      </p:pic>
+      <p:sp>
+        <p:nvSpPr>
+          <p:cNvPr id="18" name="TextBox 17">
+            <a:extLst>
+              <a:ext uri="{FF2B5EF4-FFF2-40B4-BE49-F238E27FC236}">
+                <a16:creationId xmlns:a16="http://schemas.microsoft.com/office/drawing/2014/main" id="{E2B7999C-C711-B1B2-062A-3C397B7B3683}"/>
+              </a:ext>
+            </a:extLst>
+          </p:cNvPr>
+          <p:cNvSpPr txBox="1"/>
+          <p:nvPr/>
+        </p:nvSpPr>
+        <p:spPr>
+          <a:xfrm>
+            <a:off x="9992487" y="2349067"/>
+            <a:ext cx="1844230" cy="646331"/>
+          </a:xfrm>
+          <a:prstGeom prst="rect">
+            <a:avLst/>
+          </a:prstGeom>
+          <a:noFill/>
+        </p:spPr>
+        <p:txBody>
+          <a:bodyPr wrap="square" rtlCol="0">
+            <a:spAutoFit/>
+          </a:bodyPr>
+          <a:lstStyle/>
+          <a:p>
+            <a:r>
+              <a:rPr lang="en-US" dirty="0"/>
+              <a:t>For accessing chatroom</a:t>
+            </a:r>
+          </a:p>
+        </p:txBody>
+      </p:sp>
+      <p:cxnSp>
+        <p:nvCxnSpPr>
+          <p:cNvPr id="20" name="Straight Connector 19">
+            <a:extLst>
+              <a:ext uri="{FF2B5EF4-FFF2-40B4-BE49-F238E27FC236}">
+                <a16:creationId xmlns:a16="http://schemas.microsoft.com/office/drawing/2014/main" id="{99AEF00F-75C9-9646-1F03-3FC40A44938A}"/>
+              </a:ext>
+            </a:extLst>
+          </p:cNvPr>
+          <p:cNvCxnSpPr/>
+          <p:nvPr/>
+        </p:nvCxnSpPr>
+        <p:spPr>
+          <a:xfrm>
+            <a:off x="5824728" y="788568"/>
+            <a:ext cx="0" cy="2130552"/>
+          </a:xfrm>
+          <a:prstGeom prst="line">
+            <a:avLst/>
+          </a:prstGeom>
+        </p:spPr>
+        <p:style>
+          <a:lnRef idx="2">
+            <a:schemeClr val="accent2"/>
+          </a:lnRef>
+          <a:fillRef idx="0">
+            <a:schemeClr val="accent2"/>
+          </a:fillRef>
+          <a:effectRef idx="1">
+            <a:schemeClr val="accent2"/>
+          </a:effectRef>
+          <a:fontRef idx="minor">
+            <a:schemeClr val="tx1"/>
+          </a:fontRef>
+        </p:style>
+      </p:cxnSp>
+      <p:sp>
+        <p:nvSpPr>
+          <p:cNvPr id="21" name="TextBox 20">
+            <a:extLst>
+              <a:ext uri="{FF2B5EF4-FFF2-40B4-BE49-F238E27FC236}">
+                <a16:creationId xmlns:a16="http://schemas.microsoft.com/office/drawing/2014/main" id="{C778C5B3-9902-8AF7-F0DD-BBFC07DF862B}"/>
+              </a:ext>
+            </a:extLst>
+          </p:cNvPr>
+          <p:cNvSpPr txBox="1"/>
+          <p:nvPr/>
+        </p:nvSpPr>
+        <p:spPr>
+          <a:xfrm>
+            <a:off x="4920998" y="776198"/>
+            <a:ext cx="807716" cy="646331"/>
+          </a:xfrm>
+          <a:prstGeom prst="rect">
+            <a:avLst/>
+          </a:prstGeom>
+          <a:noFill/>
+        </p:spPr>
+        <p:txBody>
+          <a:bodyPr wrap="square" rtlCol="0">
+            <a:spAutoFit/>
+          </a:bodyPr>
+          <a:lstStyle/>
+          <a:p>
+            <a:r>
+              <a:rPr lang="en-US" dirty="0"/>
+              <a:t>chatroom1</a:t>
+            </a:r>
+          </a:p>
+        </p:txBody>
+      </p:sp>
+      <p:sp>
+        <p:nvSpPr>
+          <p:cNvPr id="22" name="TextBox 21">
+            <a:extLst>
+              <a:ext uri="{FF2B5EF4-FFF2-40B4-BE49-F238E27FC236}">
+                <a16:creationId xmlns:a16="http://schemas.microsoft.com/office/drawing/2014/main" id="{34929D54-5CC7-7FAD-6C54-01D7E6D0E9CF}"/>
+              </a:ext>
+            </a:extLst>
+          </p:cNvPr>
+          <p:cNvSpPr txBox="1"/>
+          <p:nvPr/>
+        </p:nvSpPr>
+        <p:spPr>
+          <a:xfrm>
+            <a:off x="4920998" y="1418725"/>
+            <a:ext cx="807716" cy="646331"/>
+          </a:xfrm>
+          <a:prstGeom prst="rect">
+            <a:avLst/>
+          </a:prstGeom>
+          <a:noFill/>
+        </p:spPr>
+        <p:txBody>
+          <a:bodyPr wrap="square" rtlCol="0">
+            <a:spAutoFit/>
+          </a:bodyPr>
+          <a:lstStyle/>
+          <a:p>
+            <a:r>
+              <a:rPr lang="en-US" dirty="0"/>
+              <a:t>chatroom2</a:t>
+            </a:r>
+          </a:p>
+        </p:txBody>
+      </p:sp>
+      <p:sp>
+        <p:nvSpPr>
+          <p:cNvPr id="23" name="Rectangle: Rounded Corners 22">
+            <a:extLst>
+              <a:ext uri="{FF2B5EF4-FFF2-40B4-BE49-F238E27FC236}">
+                <a16:creationId xmlns:a16="http://schemas.microsoft.com/office/drawing/2014/main" id="{28506163-5E2C-4921-04BD-FBBE9EC304E0}"/>
+              </a:ext>
+            </a:extLst>
+          </p:cNvPr>
+          <p:cNvSpPr/>
+          <p:nvPr/>
+        </p:nvSpPr>
+        <p:spPr>
+          <a:xfrm>
+            <a:off x="6096000" y="868680"/>
+            <a:ext cx="2938270" cy="2023167"/>
+          </a:xfrm>
+          <a:prstGeom prst="roundRect">
+            <a:avLst/>
+          </a:prstGeom>
+        </p:spPr>
+        <p:style>
+          <a:lnRef idx="2">
+            <a:schemeClr val="accent3">
+              <a:shade val="15000"/>
+            </a:schemeClr>
+          </a:lnRef>
+          <a:fillRef idx="1">
+            <a:schemeClr val="accent3"/>
+          </a:fillRef>
+          <a:effectRef idx="0">
+            <a:schemeClr val="accent3"/>
+          </a:effectRef>
+          <a:fontRef idx="minor">
+            <a:schemeClr val="lt1"/>
+          </a:fontRef>
+        </p:style>
+        <p:txBody>
+          <a:bodyPr rtlCol="0" anchor="ctr"/>
+          <a:lstStyle/>
+          <a:p>
+            <a:pPr algn="ctr"/>
+            <a:endParaRPr lang="en-US"/>
+          </a:p>
+        </p:txBody>
+      </p:sp>
+      <p:sp>
+        <p:nvSpPr>
+          <p:cNvPr id="24" name="Rectangle: Rounded Corners 23">
+            <a:extLst>
+              <a:ext uri="{FF2B5EF4-FFF2-40B4-BE49-F238E27FC236}">
+                <a16:creationId xmlns:a16="http://schemas.microsoft.com/office/drawing/2014/main" id="{EC956BD0-FE15-529A-C6DB-6DA32B91891B}"/>
+              </a:ext>
+            </a:extLst>
+          </p:cNvPr>
+          <p:cNvSpPr/>
+          <p:nvPr/>
+        </p:nvSpPr>
+        <p:spPr>
+          <a:xfrm>
+            <a:off x="6281928" y="1124712"/>
+            <a:ext cx="1289304" cy="411480"/>
+          </a:xfrm>
+          <a:prstGeom prst="roundRect">
+            <a:avLst/>
+          </a:prstGeom>
+        </p:spPr>
+        <p:style>
+          <a:lnRef idx="2">
+            <a:schemeClr val="accent1">
+              <a:shade val="15000"/>
+            </a:schemeClr>
+          </a:lnRef>
+          <a:fillRef idx="1">
+            <a:schemeClr val="accent1"/>
+          </a:fillRef>
+          <a:effectRef idx="0">
+            <a:schemeClr val="accent1"/>
+          </a:effectRef>
+          <a:fontRef idx="minor">
+            <a:schemeClr val="lt1"/>
+          </a:fontRef>
+        </p:style>
+        <p:txBody>
+          <a:bodyPr rtlCol="0" anchor="ctr"/>
+          <a:lstStyle/>
+          <a:p>
+            <a:pPr algn="ctr"/>
+            <a:endParaRPr lang="en-US"/>
+          </a:p>
+        </p:txBody>
+      </p:sp>
+      <p:sp>
+        <p:nvSpPr>
+          <p:cNvPr id="25" name="Rectangle: Rounded Corners 24">
+            <a:extLst>
+              <a:ext uri="{FF2B5EF4-FFF2-40B4-BE49-F238E27FC236}">
+                <a16:creationId xmlns:a16="http://schemas.microsoft.com/office/drawing/2014/main" id="{B85EC9D0-C6FF-255E-A369-3CF76A310284}"/>
+              </a:ext>
+            </a:extLst>
+          </p:cNvPr>
+          <p:cNvSpPr/>
+          <p:nvPr/>
+        </p:nvSpPr>
+        <p:spPr>
+          <a:xfrm>
+            <a:off x="7553611" y="1653576"/>
+            <a:ext cx="1289304" cy="411480"/>
+          </a:xfrm>
+          <a:prstGeom prst="roundRect">
+            <a:avLst/>
+          </a:prstGeom>
+        </p:spPr>
+        <p:style>
+          <a:lnRef idx="2">
+            <a:schemeClr val="dk1">
+              <a:shade val="15000"/>
+            </a:schemeClr>
+          </a:lnRef>
+          <a:fillRef idx="1">
+            <a:schemeClr val="dk1"/>
+          </a:fillRef>
+          <a:effectRef idx="0">
+            <a:schemeClr val="dk1"/>
+          </a:effectRef>
+          <a:fontRef idx="minor">
+            <a:schemeClr val="lt1"/>
+          </a:fontRef>
+        </p:style>
+        <p:txBody>
+          <a:bodyPr rtlCol="0" anchor="ctr"/>
+          <a:lstStyle/>
+          <a:p>
+            <a:pPr algn="ctr"/>
+            <a:endParaRPr lang="en-US"/>
+          </a:p>
+        </p:txBody>
+      </p:sp>
+      <p:sp>
+        <p:nvSpPr>
+          <p:cNvPr id="26" name="Rectangle: Rounded Corners 25">
+            <a:extLst>
+              <a:ext uri="{FF2B5EF4-FFF2-40B4-BE49-F238E27FC236}">
+                <a16:creationId xmlns:a16="http://schemas.microsoft.com/office/drawing/2014/main" id="{2BB60CA9-B258-43CA-6078-BBF18F5F01CD}"/>
+              </a:ext>
+            </a:extLst>
+          </p:cNvPr>
+          <p:cNvSpPr/>
+          <p:nvPr/>
+        </p:nvSpPr>
+        <p:spPr>
+          <a:xfrm>
+            <a:off x="6281928" y="2337426"/>
+            <a:ext cx="2147316" cy="411480"/>
+          </a:xfrm>
+          <a:prstGeom prst="roundRect">
+            <a:avLst/>
+          </a:prstGeom>
+        </p:spPr>
+        <p:style>
+          <a:lnRef idx="2">
+            <a:schemeClr val="accent2">
+              <a:shade val="15000"/>
+            </a:schemeClr>
+          </a:lnRef>
+          <a:fillRef idx="1">
+            <a:schemeClr val="accent2"/>
+          </a:fillRef>
+          <a:effectRef idx="0">
+            <a:schemeClr val="accent2"/>
+          </a:effectRef>
+          <a:fontRef idx="minor">
+            <a:schemeClr val="lt1"/>
+          </a:fontRef>
+        </p:style>
+        <p:txBody>
+          <a:bodyPr rtlCol="0" anchor="ctr"/>
+          <a:lstStyle/>
+          <a:p>
+            <a:pPr algn="ctr"/>
+            <a:endParaRPr lang="en-US"/>
+          </a:p>
+        </p:txBody>
+      </p:sp>
+      <p:sp>
+        <p:nvSpPr>
+          <p:cNvPr id="27" name="Rectangle: Rounded Corners 26">
+            <a:extLst>
+              <a:ext uri="{FF2B5EF4-FFF2-40B4-BE49-F238E27FC236}">
+                <a16:creationId xmlns:a16="http://schemas.microsoft.com/office/drawing/2014/main" id="{36B4BEDA-B8F2-FF07-BFAB-B93F388F5A03}"/>
+              </a:ext>
+            </a:extLst>
+          </p:cNvPr>
+          <p:cNvSpPr/>
+          <p:nvPr/>
+        </p:nvSpPr>
+        <p:spPr>
+          <a:xfrm>
+            <a:off x="8513064" y="2356453"/>
+            <a:ext cx="422148" cy="411480"/>
+          </a:xfrm>
+          <a:prstGeom prst="roundRect">
+            <a:avLst/>
+          </a:prstGeom>
+        </p:spPr>
+        <p:style>
+          <a:lnRef idx="2">
+            <a:schemeClr val="accent2">
+              <a:shade val="15000"/>
+            </a:schemeClr>
+          </a:lnRef>
+          <a:fillRef idx="1">
+            <a:schemeClr val="accent2"/>
+          </a:fillRef>
+          <a:effectRef idx="0">
+            <a:schemeClr val="accent2"/>
+          </a:effectRef>
+          <a:fontRef idx="minor">
+            <a:schemeClr val="lt1"/>
+          </a:fontRef>
+        </p:style>
+        <p:txBody>
+          <a:bodyPr rtlCol="0" anchor="ctr"/>
+          <a:lstStyle/>
+          <a:p>
+            <a:pPr algn="ctr"/>
+            <a:r>
+              <a:rPr lang="en-US" dirty="0"/>
+              <a:t>&gt;</a:t>
+            </a:r>
+          </a:p>
+        </p:txBody>
+      </p:sp>
+      <p:cxnSp>
+        <p:nvCxnSpPr>
+          <p:cNvPr id="29" name="Straight Connector 28">
+            <a:extLst>
+              <a:ext uri="{FF2B5EF4-FFF2-40B4-BE49-F238E27FC236}">
+                <a16:creationId xmlns:a16="http://schemas.microsoft.com/office/drawing/2014/main" id="{E6C4C910-E260-E43A-8B08-17D20D64011A}"/>
+              </a:ext>
+            </a:extLst>
+          </p:cNvPr>
+          <p:cNvCxnSpPr/>
+          <p:nvPr/>
+        </p:nvCxnSpPr>
+        <p:spPr>
+          <a:xfrm>
+            <a:off x="8935212" y="1124712"/>
+            <a:ext cx="0" cy="1212714"/>
+          </a:xfrm>
+          <a:prstGeom prst="line">
+            <a:avLst/>
+          </a:prstGeom>
+        </p:spPr>
+        <p:style>
+          <a:lnRef idx="2">
+            <a:schemeClr val="accent5"/>
+          </a:lnRef>
+          <a:fillRef idx="0">
+            <a:schemeClr val="accent5"/>
+          </a:fillRef>
+          <a:effectRef idx="1">
+            <a:schemeClr val="accent5"/>
+          </a:effectRef>
+          <a:fontRef idx="minor">
+            <a:schemeClr val="tx1"/>
+          </a:fontRef>
+        </p:style>
+      </p:cxnSp>
+      <p:grpSp>
+        <p:nvGrpSpPr>
+          <p:cNvPr id="52" name="Group 51">
+            <a:extLst>
+              <a:ext uri="{FF2B5EF4-FFF2-40B4-BE49-F238E27FC236}">
+                <a16:creationId xmlns:a16="http://schemas.microsoft.com/office/drawing/2014/main" id="{BBD06509-8E8F-C082-ECAC-8FA4B3BB1951}"/>
+              </a:ext>
+            </a:extLst>
+          </p:cNvPr>
+          <p:cNvGrpSpPr/>
+          <p:nvPr/>
+        </p:nvGrpSpPr>
+        <p:grpSpPr>
+          <a:xfrm>
+            <a:off x="10039824" y="2855376"/>
+            <a:ext cx="1735200" cy="493920"/>
+            <a:chOff x="10039824" y="2855376"/>
+            <a:chExt cx="1735200" cy="493920"/>
+          </a:xfrm>
+        </p:grpSpPr>
+        <mc:AlternateContent xmlns:mc="http://schemas.openxmlformats.org/markup-compatibility/2006">
+          <mc:Choice xmlns:p14="http://schemas.microsoft.com/office/powerpoint/2010/main" Requires="p14">
+            <p:contentPart p14:bwMode="auto" r:id="rId3">
+              <p14:nvContentPartPr>
+                <p14:cNvPr id="42" name="Ink 41">
+                  <a:extLst>
+                    <a:ext uri="{FF2B5EF4-FFF2-40B4-BE49-F238E27FC236}">
+                      <a16:creationId xmlns:a16="http://schemas.microsoft.com/office/drawing/2014/main" id="{972902D7-A296-E0D7-B895-A118B53043DA}"/>
+                    </a:ext>
+                  </a:extLst>
+                </p14:cNvPr>
+                <p14:cNvContentPartPr/>
+                <p14:nvPr/>
+              </p14:nvContentPartPr>
+              <p14:xfrm>
+                <a:off x="10039824" y="2855376"/>
+                <a:ext cx="1208160" cy="155520"/>
+              </p14:xfrm>
+            </p:contentPart>
+          </mc:Choice>
+          <mc:Fallback>
+            <p:pic>
+              <p:nvPicPr>
+                <p:cNvPr id="42" name="Ink 41">
+                  <a:extLst>
+                    <a:ext uri="{FF2B5EF4-FFF2-40B4-BE49-F238E27FC236}">
+                      <a16:creationId xmlns:a16="http://schemas.microsoft.com/office/drawing/2014/main" id="{972902D7-A296-E0D7-B895-A118B53043DA}"/>
+                    </a:ext>
+                  </a:extLst>
+                </p:cNvPr>
+                <p:cNvPicPr/>
+                <p:nvPr/>
+              </p:nvPicPr>
+              <p:blipFill>
+                <a:blip r:embed="rId4"/>
+                <a:stretch>
+                  <a:fillRect/>
+                </a:stretch>
+              </p:blipFill>
+              <p:spPr>
+                <a:xfrm>
+                  <a:off x="10022184" y="2837376"/>
+                  <a:ext cx="1243800" cy="191160"/>
+                </a:xfrm>
+                <a:prstGeom prst="rect">
+                  <a:avLst/>
+                </a:prstGeom>
+              </p:spPr>
+            </p:pic>
+          </mc:Fallback>
+        </mc:AlternateContent>
+        <mc:AlternateContent xmlns:mc="http://schemas.openxmlformats.org/markup-compatibility/2006">
+          <mc:Choice xmlns:p14="http://schemas.microsoft.com/office/powerpoint/2010/main" Requires="p14">
+            <p:contentPart p14:bwMode="auto" r:id="rId5">
+              <p14:nvContentPartPr>
+                <p14:cNvPr id="43" name="Ink 42">
+                  <a:extLst>
+                    <a:ext uri="{FF2B5EF4-FFF2-40B4-BE49-F238E27FC236}">
+                      <a16:creationId xmlns:a16="http://schemas.microsoft.com/office/drawing/2014/main" id="{2E433182-21E7-EA8C-70D3-715D6FF5A6DD}"/>
+                    </a:ext>
+                  </a:extLst>
+                </p14:cNvPr>
+                <p14:cNvContentPartPr/>
+                <p14:nvPr/>
+              </p14:nvContentPartPr>
+              <p14:xfrm>
+                <a:off x="10350864" y="3218256"/>
+                <a:ext cx="360" cy="360"/>
+              </p14:xfrm>
+            </p:contentPart>
+          </mc:Choice>
+          <mc:Fallback>
+            <p:pic>
+              <p:nvPicPr>
+                <p:cNvPr id="43" name="Ink 42">
+                  <a:extLst>
+                    <a:ext uri="{FF2B5EF4-FFF2-40B4-BE49-F238E27FC236}">
+                      <a16:creationId xmlns:a16="http://schemas.microsoft.com/office/drawing/2014/main" id="{2E433182-21E7-EA8C-70D3-715D6FF5A6DD}"/>
+                    </a:ext>
+                  </a:extLst>
+                </p:cNvPr>
+                <p:cNvPicPr/>
+                <p:nvPr/>
+              </p:nvPicPr>
+              <p:blipFill>
+                <a:blip r:embed="rId6"/>
+                <a:stretch>
+                  <a:fillRect/>
+                </a:stretch>
+              </p:blipFill>
+              <p:spPr>
+                <a:xfrm>
+                  <a:off x="10333224" y="3200616"/>
+                  <a:ext cx="36000" cy="36000"/>
+                </a:xfrm>
+                <a:prstGeom prst="rect">
+                  <a:avLst/>
+                </a:prstGeom>
+              </p:spPr>
+            </p:pic>
+          </mc:Fallback>
+        </mc:AlternateContent>
+        <mc:AlternateContent xmlns:mc="http://schemas.openxmlformats.org/markup-compatibility/2006">
+          <mc:Choice xmlns:p14="http://schemas.microsoft.com/office/powerpoint/2010/main" Requires="p14">
+            <p:contentPart p14:bwMode="auto" r:id="rId7">
+              <p14:nvContentPartPr>
+                <p14:cNvPr id="44" name="Ink 43">
+                  <a:extLst>
+                    <a:ext uri="{FF2B5EF4-FFF2-40B4-BE49-F238E27FC236}">
+                      <a16:creationId xmlns:a16="http://schemas.microsoft.com/office/drawing/2014/main" id="{B53FDE3D-AE55-23EE-88B3-D7B12964CB5D}"/>
+                    </a:ext>
+                  </a:extLst>
+                </p14:cNvPr>
+                <p14:cNvContentPartPr/>
+                <p14:nvPr/>
+              </p14:nvContentPartPr>
+              <p14:xfrm>
+                <a:off x="10343664" y="3300696"/>
+                <a:ext cx="7560" cy="43560"/>
+              </p14:xfrm>
+            </p:contentPart>
+          </mc:Choice>
+          <mc:Fallback>
+            <p:pic>
+              <p:nvPicPr>
+                <p:cNvPr id="44" name="Ink 43">
+                  <a:extLst>
+                    <a:ext uri="{FF2B5EF4-FFF2-40B4-BE49-F238E27FC236}">
+                      <a16:creationId xmlns:a16="http://schemas.microsoft.com/office/drawing/2014/main" id="{B53FDE3D-AE55-23EE-88B3-D7B12964CB5D}"/>
+                    </a:ext>
+                  </a:extLst>
+                </p:cNvPr>
+                <p:cNvPicPr/>
+                <p:nvPr/>
+              </p:nvPicPr>
+              <p:blipFill>
+                <a:blip r:embed="rId8"/>
+                <a:stretch>
+                  <a:fillRect/>
+                </a:stretch>
+              </p:blipFill>
+              <p:spPr>
+                <a:xfrm>
+                  <a:off x="10325664" y="3282696"/>
+                  <a:ext cx="43200" cy="79200"/>
+                </a:xfrm>
+                <a:prstGeom prst="rect">
+                  <a:avLst/>
+                </a:prstGeom>
+              </p:spPr>
+            </p:pic>
+          </mc:Fallback>
+        </mc:AlternateContent>
+        <mc:AlternateContent xmlns:mc="http://schemas.openxmlformats.org/markup-compatibility/2006">
+          <mc:Choice xmlns:p14="http://schemas.microsoft.com/office/powerpoint/2010/main" Requires="p14">
+            <p:contentPart p14:bwMode="auto" r:id="rId9">
+              <p14:nvContentPartPr>
+                <p14:cNvPr id="45" name="Ink 44">
+                  <a:extLst>
+                    <a:ext uri="{FF2B5EF4-FFF2-40B4-BE49-F238E27FC236}">
+                      <a16:creationId xmlns:a16="http://schemas.microsoft.com/office/drawing/2014/main" id="{81D23542-CEC3-E798-D6E3-FC2374FDA8B2}"/>
+                    </a:ext>
+                  </a:extLst>
+                </p14:cNvPr>
+                <p14:cNvContentPartPr/>
+                <p14:nvPr/>
+              </p14:nvContentPartPr>
+              <p14:xfrm>
+                <a:off x="10405584" y="3254976"/>
+                <a:ext cx="95760" cy="94320"/>
+              </p14:xfrm>
+            </p:contentPart>
+          </mc:Choice>
+          <mc:Fallback>
+            <p:pic>
+              <p:nvPicPr>
+                <p:cNvPr id="45" name="Ink 44">
+                  <a:extLst>
+                    <a:ext uri="{FF2B5EF4-FFF2-40B4-BE49-F238E27FC236}">
+                      <a16:creationId xmlns:a16="http://schemas.microsoft.com/office/drawing/2014/main" id="{81D23542-CEC3-E798-D6E3-FC2374FDA8B2}"/>
+                    </a:ext>
+                  </a:extLst>
+                </p:cNvPr>
+                <p:cNvPicPr/>
+                <p:nvPr/>
+              </p:nvPicPr>
+              <p:blipFill>
+                <a:blip r:embed="rId10"/>
+                <a:stretch>
+                  <a:fillRect/>
+                </a:stretch>
+              </p:blipFill>
+              <p:spPr>
+                <a:xfrm>
+                  <a:off x="10387944" y="3237336"/>
+                  <a:ext cx="131400" cy="129960"/>
+                </a:xfrm>
+                <a:prstGeom prst="rect">
+                  <a:avLst/>
+                </a:prstGeom>
+              </p:spPr>
+            </p:pic>
+          </mc:Fallback>
+        </mc:AlternateContent>
+        <mc:AlternateContent xmlns:mc="http://schemas.openxmlformats.org/markup-compatibility/2006">
+          <mc:Choice xmlns:p14="http://schemas.microsoft.com/office/powerpoint/2010/main" Requires="p14">
+            <p:contentPart p14:bwMode="auto" r:id="rId11">
+              <p14:nvContentPartPr>
+                <p14:cNvPr id="46" name="Ink 45">
+                  <a:extLst>
+                    <a:ext uri="{FF2B5EF4-FFF2-40B4-BE49-F238E27FC236}">
+                      <a16:creationId xmlns:a16="http://schemas.microsoft.com/office/drawing/2014/main" id="{F4F45179-8D55-8394-C184-A86B536FB653}"/>
+                    </a:ext>
+                  </a:extLst>
+                </p14:cNvPr>
+                <p14:cNvContentPartPr/>
+                <p14:nvPr/>
+              </p14:nvContentPartPr>
+              <p14:xfrm>
+                <a:off x="10784664" y="3217896"/>
+                <a:ext cx="107280" cy="84600"/>
+              </p14:xfrm>
+            </p:contentPart>
+          </mc:Choice>
+          <mc:Fallback>
+            <p:pic>
+              <p:nvPicPr>
+                <p:cNvPr id="46" name="Ink 45">
+                  <a:extLst>
+                    <a:ext uri="{FF2B5EF4-FFF2-40B4-BE49-F238E27FC236}">
+                      <a16:creationId xmlns:a16="http://schemas.microsoft.com/office/drawing/2014/main" id="{F4F45179-8D55-8394-C184-A86B536FB653}"/>
+                    </a:ext>
+                  </a:extLst>
+                </p:cNvPr>
+                <p:cNvPicPr/>
+                <p:nvPr/>
+              </p:nvPicPr>
+              <p:blipFill>
+                <a:blip r:embed="rId12"/>
+                <a:stretch>
+                  <a:fillRect/>
+                </a:stretch>
+              </p:blipFill>
+              <p:spPr>
+                <a:xfrm>
+                  <a:off x="10767024" y="3199896"/>
+                  <a:ext cx="142920" cy="120240"/>
+                </a:xfrm>
+                <a:prstGeom prst="rect">
+                  <a:avLst/>
+                </a:prstGeom>
+              </p:spPr>
+            </p:pic>
+          </mc:Fallback>
+        </mc:AlternateContent>
+        <mc:AlternateContent xmlns:mc="http://schemas.openxmlformats.org/markup-compatibility/2006">
+          <mc:Choice xmlns:p14="http://schemas.microsoft.com/office/powerpoint/2010/main" Requires="p14">
+            <p:contentPart p14:bwMode="auto" r:id="rId13">
+              <p14:nvContentPartPr>
+                <p14:cNvPr id="47" name="Ink 46">
+                  <a:extLst>
+                    <a:ext uri="{FF2B5EF4-FFF2-40B4-BE49-F238E27FC236}">
+                      <a16:creationId xmlns:a16="http://schemas.microsoft.com/office/drawing/2014/main" id="{C499DE1D-34BA-2DAF-E6E8-E988D978EB83}"/>
+                    </a:ext>
+                  </a:extLst>
+                </p14:cNvPr>
+                <p14:cNvContentPartPr/>
+                <p14:nvPr/>
+              </p14:nvContentPartPr>
+              <p14:xfrm>
+                <a:off x="10963224" y="3197736"/>
+                <a:ext cx="118800" cy="78480"/>
+              </p14:xfrm>
+            </p:contentPart>
+          </mc:Choice>
+          <mc:Fallback>
+            <p:pic>
+              <p:nvPicPr>
+                <p:cNvPr id="47" name="Ink 46">
+                  <a:extLst>
+                    <a:ext uri="{FF2B5EF4-FFF2-40B4-BE49-F238E27FC236}">
+                      <a16:creationId xmlns:a16="http://schemas.microsoft.com/office/drawing/2014/main" id="{C499DE1D-34BA-2DAF-E6E8-E988D978EB83}"/>
+                    </a:ext>
+                  </a:extLst>
+                </p:cNvPr>
+                <p:cNvPicPr/>
+                <p:nvPr/>
+              </p:nvPicPr>
+              <p:blipFill>
+                <a:blip r:embed="rId14"/>
+                <a:stretch>
+                  <a:fillRect/>
+                </a:stretch>
+              </p:blipFill>
+              <p:spPr>
+                <a:xfrm>
+                  <a:off x="10945224" y="3180096"/>
+                  <a:ext cx="154440" cy="114120"/>
+                </a:xfrm>
+                <a:prstGeom prst="rect">
+                  <a:avLst/>
+                </a:prstGeom>
+              </p:spPr>
+            </p:pic>
+          </mc:Fallback>
+        </mc:AlternateContent>
+        <mc:AlternateContent xmlns:mc="http://schemas.openxmlformats.org/markup-compatibility/2006">
+          <mc:Choice xmlns:p14="http://schemas.microsoft.com/office/powerpoint/2010/main" Requires="p14">
+            <p:contentPart p14:bwMode="auto" r:id="rId15">
+              <p14:nvContentPartPr>
+                <p14:cNvPr id="48" name="Ink 47">
+                  <a:extLst>
+                    <a:ext uri="{FF2B5EF4-FFF2-40B4-BE49-F238E27FC236}">
+                      <a16:creationId xmlns:a16="http://schemas.microsoft.com/office/drawing/2014/main" id="{17FE9354-CEE9-E340-D35A-94DAAFE317A4}"/>
+                    </a:ext>
+                  </a:extLst>
+                </p14:cNvPr>
+                <p14:cNvContentPartPr/>
+                <p14:nvPr/>
+              </p14:nvContentPartPr>
+              <p14:xfrm>
+                <a:off x="11190744" y="3090456"/>
+                <a:ext cx="138960" cy="175680"/>
+              </p14:xfrm>
+            </p:contentPart>
+          </mc:Choice>
+          <mc:Fallback>
+            <p:pic>
+              <p:nvPicPr>
+                <p:cNvPr id="48" name="Ink 47">
+                  <a:extLst>
+                    <a:ext uri="{FF2B5EF4-FFF2-40B4-BE49-F238E27FC236}">
+                      <a16:creationId xmlns:a16="http://schemas.microsoft.com/office/drawing/2014/main" id="{17FE9354-CEE9-E340-D35A-94DAAFE317A4}"/>
+                    </a:ext>
+                  </a:extLst>
+                </p:cNvPr>
+                <p:cNvPicPr/>
+                <p:nvPr/>
+              </p:nvPicPr>
+              <p:blipFill>
+                <a:blip r:embed="rId16"/>
+                <a:stretch>
+                  <a:fillRect/>
+                </a:stretch>
+              </p:blipFill>
+              <p:spPr>
+                <a:xfrm>
+                  <a:off x="11173104" y="3072816"/>
+                  <a:ext cx="174600" cy="211320"/>
+                </a:xfrm>
+                <a:prstGeom prst="rect">
+                  <a:avLst/>
+                </a:prstGeom>
+              </p:spPr>
+            </p:pic>
+          </mc:Fallback>
+        </mc:AlternateContent>
+        <mc:AlternateContent xmlns:mc="http://schemas.openxmlformats.org/markup-compatibility/2006">
+          <mc:Choice xmlns:p14="http://schemas.microsoft.com/office/powerpoint/2010/main" Requires="p14">
+            <p:contentPart p14:bwMode="auto" r:id="rId17">
+              <p14:nvContentPartPr>
+                <p14:cNvPr id="49" name="Ink 48">
+                  <a:extLst>
+                    <a:ext uri="{FF2B5EF4-FFF2-40B4-BE49-F238E27FC236}">
+                      <a16:creationId xmlns:a16="http://schemas.microsoft.com/office/drawing/2014/main" id="{49553D14-1625-43E0-B9CF-03BFD560C02B}"/>
+                    </a:ext>
+                  </a:extLst>
+                </p14:cNvPr>
+                <p14:cNvContentPartPr/>
+                <p14:nvPr/>
+              </p14:nvContentPartPr>
+              <p14:xfrm>
+                <a:off x="11365344" y="3181536"/>
+                <a:ext cx="124200" cy="122400"/>
+              </p14:xfrm>
+            </p:contentPart>
+          </mc:Choice>
+          <mc:Fallback>
+            <p:pic>
+              <p:nvPicPr>
+                <p:cNvPr id="49" name="Ink 48">
+                  <a:extLst>
+                    <a:ext uri="{FF2B5EF4-FFF2-40B4-BE49-F238E27FC236}">
+                      <a16:creationId xmlns:a16="http://schemas.microsoft.com/office/drawing/2014/main" id="{49553D14-1625-43E0-B9CF-03BFD560C02B}"/>
+                    </a:ext>
+                  </a:extLst>
+                </p:cNvPr>
+                <p:cNvPicPr/>
+                <p:nvPr/>
+              </p:nvPicPr>
+              <p:blipFill>
+                <a:blip r:embed="rId18"/>
+                <a:stretch>
+                  <a:fillRect/>
+                </a:stretch>
+              </p:blipFill>
+              <p:spPr>
+                <a:xfrm>
+                  <a:off x="11347344" y="3163536"/>
+                  <a:ext cx="159840" cy="158040"/>
+                </a:xfrm>
+                <a:prstGeom prst="rect">
+                  <a:avLst/>
+                </a:prstGeom>
+              </p:spPr>
+            </p:pic>
+          </mc:Fallback>
+        </mc:AlternateContent>
+        <mc:AlternateContent xmlns:mc="http://schemas.openxmlformats.org/markup-compatibility/2006">
+          <mc:Choice xmlns:p14="http://schemas.microsoft.com/office/powerpoint/2010/main" Requires="p14">
+            <p:contentPart p14:bwMode="auto" r:id="rId19">
+              <p14:nvContentPartPr>
+                <p14:cNvPr id="50" name="Ink 49">
+                  <a:extLst>
+                    <a:ext uri="{FF2B5EF4-FFF2-40B4-BE49-F238E27FC236}">
+                      <a16:creationId xmlns:a16="http://schemas.microsoft.com/office/drawing/2014/main" id="{CEF7F645-37B8-CB1F-3BB9-B3158DC5F2A3}"/>
+                    </a:ext>
+                  </a:extLst>
+                </p14:cNvPr>
+                <p14:cNvContentPartPr/>
+                <p14:nvPr/>
+              </p14:nvContentPartPr>
+              <p14:xfrm>
+                <a:off x="11520864" y="3188376"/>
+                <a:ext cx="91080" cy="78120"/>
+              </p14:xfrm>
+            </p:contentPart>
+          </mc:Choice>
+          <mc:Fallback>
+            <p:pic>
+              <p:nvPicPr>
+                <p:cNvPr id="50" name="Ink 49">
+                  <a:extLst>
+                    <a:ext uri="{FF2B5EF4-FFF2-40B4-BE49-F238E27FC236}">
+                      <a16:creationId xmlns:a16="http://schemas.microsoft.com/office/drawing/2014/main" id="{CEF7F645-37B8-CB1F-3BB9-B3158DC5F2A3}"/>
+                    </a:ext>
+                  </a:extLst>
+                </p:cNvPr>
+                <p:cNvPicPr/>
+                <p:nvPr/>
+              </p:nvPicPr>
+              <p:blipFill>
+                <a:blip r:embed="rId20"/>
+                <a:stretch>
+                  <a:fillRect/>
+                </a:stretch>
+              </p:blipFill>
+              <p:spPr>
+                <a:xfrm>
+                  <a:off x="11502864" y="3170736"/>
+                  <a:ext cx="126720" cy="113760"/>
+                </a:xfrm>
+                <a:prstGeom prst="rect">
+                  <a:avLst/>
+                </a:prstGeom>
+              </p:spPr>
+            </p:pic>
+          </mc:Fallback>
+        </mc:AlternateContent>
+        <mc:AlternateContent xmlns:mc="http://schemas.openxmlformats.org/markup-compatibility/2006">
+          <mc:Choice xmlns:p14="http://schemas.microsoft.com/office/powerpoint/2010/main" Requires="p14">
+            <p:contentPart p14:bwMode="auto" r:id="rId21">
+              <p14:nvContentPartPr>
+                <p14:cNvPr id="51" name="Ink 50">
+                  <a:extLst>
+                    <a:ext uri="{FF2B5EF4-FFF2-40B4-BE49-F238E27FC236}">
+                      <a16:creationId xmlns:a16="http://schemas.microsoft.com/office/drawing/2014/main" id="{542B2D51-C180-F0AD-6B16-6820CFAEC325}"/>
+                    </a:ext>
+                  </a:extLst>
+                </p14:cNvPr>
+                <p14:cNvContentPartPr/>
+                <p14:nvPr/>
+              </p14:nvContentPartPr>
+              <p14:xfrm>
+                <a:off x="11658024" y="3190896"/>
+                <a:ext cx="117000" cy="151200"/>
+              </p14:xfrm>
+            </p:contentPart>
+          </mc:Choice>
+          <mc:Fallback>
+            <p:pic>
+              <p:nvPicPr>
+                <p:cNvPr id="51" name="Ink 50">
+                  <a:extLst>
+                    <a:ext uri="{FF2B5EF4-FFF2-40B4-BE49-F238E27FC236}">
+                      <a16:creationId xmlns:a16="http://schemas.microsoft.com/office/drawing/2014/main" id="{542B2D51-C180-F0AD-6B16-6820CFAEC325}"/>
+                    </a:ext>
+                  </a:extLst>
+                </p:cNvPr>
+                <p:cNvPicPr/>
+                <p:nvPr/>
+              </p:nvPicPr>
+              <p:blipFill>
+                <a:blip r:embed="rId22"/>
+                <a:stretch>
+                  <a:fillRect/>
+                </a:stretch>
+              </p:blipFill>
+              <p:spPr>
+                <a:xfrm>
+                  <a:off x="11640384" y="3172896"/>
+                  <a:ext cx="152640" cy="186840"/>
+                </a:xfrm>
+                <a:prstGeom prst="rect">
+                  <a:avLst/>
+                </a:prstGeom>
+              </p:spPr>
+            </p:pic>
+          </mc:Fallback>
+        </mc:AlternateContent>
+      </p:grpSp>
+      <p:grpSp>
+        <p:nvGrpSpPr>
+          <p:cNvPr id="60" name="Group 59">
+            <a:extLst>
+              <a:ext uri="{FF2B5EF4-FFF2-40B4-BE49-F238E27FC236}">
+                <a16:creationId xmlns:a16="http://schemas.microsoft.com/office/drawing/2014/main" id="{B124B152-2943-EDB1-15A3-4562DA3B2C5E}"/>
+              </a:ext>
+            </a:extLst>
+          </p:cNvPr>
+          <p:cNvGrpSpPr/>
+          <p:nvPr/>
+        </p:nvGrpSpPr>
+        <p:grpSpPr>
+          <a:xfrm>
+            <a:off x="10457064" y="3529296"/>
+            <a:ext cx="1611720" cy="237960"/>
+            <a:chOff x="10457064" y="3529296"/>
+            <a:chExt cx="1611720" cy="237960"/>
+          </a:xfrm>
+        </p:grpSpPr>
+        <mc:AlternateContent xmlns:mc="http://schemas.openxmlformats.org/markup-compatibility/2006">
+          <mc:Choice xmlns:p14="http://schemas.microsoft.com/office/powerpoint/2010/main" Requires="p14">
+            <p:contentPart p14:bwMode="auto" r:id="rId23">
+              <p14:nvContentPartPr>
+                <p14:cNvPr id="54" name="Ink 53">
+                  <a:extLst>
+                    <a:ext uri="{FF2B5EF4-FFF2-40B4-BE49-F238E27FC236}">
+                      <a16:creationId xmlns:a16="http://schemas.microsoft.com/office/drawing/2014/main" id="{F6DC7CCD-B6A9-E31B-1D1E-2DCE3C740891}"/>
+                    </a:ext>
+                  </a:extLst>
+                </p14:cNvPr>
+                <p14:cNvContentPartPr/>
+                <p14:nvPr/>
+              </p14:nvContentPartPr>
+              <p14:xfrm>
+                <a:off x="10457064" y="3566016"/>
+                <a:ext cx="232560" cy="156600"/>
+              </p14:xfrm>
+            </p:contentPart>
+          </mc:Choice>
+          <mc:Fallback>
+            <p:pic>
+              <p:nvPicPr>
+                <p:cNvPr id="54" name="Ink 53">
+                  <a:extLst>
+                    <a:ext uri="{FF2B5EF4-FFF2-40B4-BE49-F238E27FC236}">
+                      <a16:creationId xmlns:a16="http://schemas.microsoft.com/office/drawing/2014/main" id="{F6DC7CCD-B6A9-E31B-1D1E-2DCE3C740891}"/>
+                    </a:ext>
+                  </a:extLst>
+                </p:cNvPr>
+                <p:cNvPicPr/>
+                <p:nvPr/>
+              </p:nvPicPr>
+              <p:blipFill>
+                <a:blip r:embed="rId24"/>
+                <a:stretch>
+                  <a:fillRect/>
+                </a:stretch>
+              </p:blipFill>
+              <p:spPr>
+                <a:xfrm>
+                  <a:off x="10439424" y="3548376"/>
+                  <a:ext cx="268200" cy="192240"/>
+                </a:xfrm>
+                <a:prstGeom prst="rect">
+                  <a:avLst/>
+                </a:prstGeom>
+              </p:spPr>
+            </p:pic>
+          </mc:Fallback>
+        </mc:AlternateContent>
+        <mc:AlternateContent xmlns:mc="http://schemas.openxmlformats.org/markup-compatibility/2006">
+          <mc:Choice xmlns:p14="http://schemas.microsoft.com/office/powerpoint/2010/main" Requires="p14">
+            <p:contentPart p14:bwMode="auto" r:id="rId25">
+              <p14:nvContentPartPr>
+                <p14:cNvPr id="55" name="Ink 54">
+                  <a:extLst>
+                    <a:ext uri="{FF2B5EF4-FFF2-40B4-BE49-F238E27FC236}">
+                      <a16:creationId xmlns:a16="http://schemas.microsoft.com/office/drawing/2014/main" id="{C61352CB-01EE-1E1B-30D3-8EF77869F065}"/>
+                    </a:ext>
+                  </a:extLst>
+                </p14:cNvPr>
+                <p14:cNvContentPartPr/>
+                <p14:nvPr/>
+              </p14:nvContentPartPr>
+              <p14:xfrm>
+                <a:off x="10917504" y="3566016"/>
+                <a:ext cx="149760" cy="192600"/>
+              </p14:xfrm>
+            </p:contentPart>
+          </mc:Choice>
+          <mc:Fallback>
+            <p:pic>
+              <p:nvPicPr>
+                <p:cNvPr id="55" name="Ink 54">
+                  <a:extLst>
+                    <a:ext uri="{FF2B5EF4-FFF2-40B4-BE49-F238E27FC236}">
+                      <a16:creationId xmlns:a16="http://schemas.microsoft.com/office/drawing/2014/main" id="{C61352CB-01EE-1E1B-30D3-8EF77869F065}"/>
+                    </a:ext>
+                  </a:extLst>
+                </p:cNvPr>
+                <p:cNvPicPr/>
+                <p:nvPr/>
+              </p:nvPicPr>
+              <p:blipFill>
+                <a:blip r:embed="rId26"/>
+                <a:stretch>
+                  <a:fillRect/>
+                </a:stretch>
+              </p:blipFill>
+              <p:spPr>
+                <a:xfrm>
+                  <a:off x="10899864" y="3548376"/>
+                  <a:ext cx="185400" cy="228240"/>
+                </a:xfrm>
+                <a:prstGeom prst="rect">
+                  <a:avLst/>
+                </a:prstGeom>
+              </p:spPr>
+            </p:pic>
+          </mc:Fallback>
+        </mc:AlternateContent>
+        <mc:AlternateContent xmlns:mc="http://schemas.openxmlformats.org/markup-compatibility/2006">
+          <mc:Choice xmlns:p14="http://schemas.microsoft.com/office/powerpoint/2010/main" Requires="p14">
+            <p:contentPart p14:bwMode="auto" r:id="rId27">
+              <p14:nvContentPartPr>
+                <p14:cNvPr id="56" name="Ink 55">
+                  <a:extLst>
+                    <a:ext uri="{FF2B5EF4-FFF2-40B4-BE49-F238E27FC236}">
+                      <a16:creationId xmlns:a16="http://schemas.microsoft.com/office/drawing/2014/main" id="{9E6B6AA2-6D21-CD38-1738-3DF6A905F15C}"/>
+                    </a:ext>
+                  </a:extLst>
+                </p14:cNvPr>
+                <p14:cNvContentPartPr/>
+                <p14:nvPr/>
+              </p14:nvContentPartPr>
+              <p14:xfrm>
+                <a:off x="11190384" y="3622896"/>
+                <a:ext cx="191520" cy="144360"/>
+              </p14:xfrm>
+            </p:contentPart>
+          </mc:Choice>
+          <mc:Fallback>
+            <p:pic>
+              <p:nvPicPr>
+                <p:cNvPr id="56" name="Ink 55">
+                  <a:extLst>
+                    <a:ext uri="{FF2B5EF4-FFF2-40B4-BE49-F238E27FC236}">
+                      <a16:creationId xmlns:a16="http://schemas.microsoft.com/office/drawing/2014/main" id="{9E6B6AA2-6D21-CD38-1738-3DF6A905F15C}"/>
+                    </a:ext>
+                  </a:extLst>
+                </p:cNvPr>
+                <p:cNvPicPr/>
+                <p:nvPr/>
+              </p:nvPicPr>
+              <p:blipFill>
+                <a:blip r:embed="rId28"/>
+                <a:stretch>
+                  <a:fillRect/>
+                </a:stretch>
+              </p:blipFill>
+              <p:spPr>
+                <a:xfrm>
+                  <a:off x="11172384" y="3604896"/>
+                  <a:ext cx="227160" cy="180000"/>
+                </a:xfrm>
+                <a:prstGeom prst="rect">
+                  <a:avLst/>
+                </a:prstGeom>
+              </p:spPr>
+            </p:pic>
+          </mc:Fallback>
+        </mc:AlternateContent>
+        <mc:AlternateContent xmlns:mc="http://schemas.openxmlformats.org/markup-compatibility/2006">
+          <mc:Choice xmlns:p14="http://schemas.microsoft.com/office/powerpoint/2010/main" Requires="p14">
+            <p:contentPart p14:bwMode="auto" r:id="rId29">
+              <p14:nvContentPartPr>
+                <p14:cNvPr id="57" name="Ink 56">
+                  <a:extLst>
+                    <a:ext uri="{FF2B5EF4-FFF2-40B4-BE49-F238E27FC236}">
+                      <a16:creationId xmlns:a16="http://schemas.microsoft.com/office/drawing/2014/main" id="{FBD8EFC2-A7AC-AB66-3B25-31AF403D6D71}"/>
+                    </a:ext>
+                  </a:extLst>
+                </p14:cNvPr>
+                <p14:cNvContentPartPr/>
+                <p14:nvPr/>
+              </p14:nvContentPartPr>
+              <p14:xfrm>
+                <a:off x="11429784" y="3529296"/>
+                <a:ext cx="34920" cy="237960"/>
+              </p14:xfrm>
+            </p:contentPart>
+          </mc:Choice>
+          <mc:Fallback>
+            <p:pic>
+              <p:nvPicPr>
+                <p:cNvPr id="57" name="Ink 56">
+                  <a:extLst>
+                    <a:ext uri="{FF2B5EF4-FFF2-40B4-BE49-F238E27FC236}">
+                      <a16:creationId xmlns:a16="http://schemas.microsoft.com/office/drawing/2014/main" id="{FBD8EFC2-A7AC-AB66-3B25-31AF403D6D71}"/>
+                    </a:ext>
+                  </a:extLst>
+                </p:cNvPr>
+                <p:cNvPicPr/>
+                <p:nvPr/>
+              </p:nvPicPr>
+              <p:blipFill>
+                <a:blip r:embed="rId30"/>
+                <a:stretch>
+                  <a:fillRect/>
+                </a:stretch>
+              </p:blipFill>
+              <p:spPr>
+                <a:xfrm>
+                  <a:off x="11412144" y="3511656"/>
+                  <a:ext cx="70560" cy="273600"/>
+                </a:xfrm>
+                <a:prstGeom prst="rect">
+                  <a:avLst/>
+                </a:prstGeom>
+              </p:spPr>
+            </p:pic>
+          </mc:Fallback>
+        </mc:AlternateContent>
+        <mc:AlternateContent xmlns:mc="http://schemas.openxmlformats.org/markup-compatibility/2006">
+          <mc:Choice xmlns:p14="http://schemas.microsoft.com/office/powerpoint/2010/main" Requires="p14">
+            <p:contentPart p14:bwMode="auto" r:id="rId31">
+              <p14:nvContentPartPr>
+                <p14:cNvPr id="58" name="Ink 57">
+                  <a:extLst>
+                    <a:ext uri="{FF2B5EF4-FFF2-40B4-BE49-F238E27FC236}">
+                      <a16:creationId xmlns:a16="http://schemas.microsoft.com/office/drawing/2014/main" id="{1CEB870B-0504-8A43-07AD-C932734B2526}"/>
+                    </a:ext>
+                  </a:extLst>
+                </p14:cNvPr>
+                <p14:cNvContentPartPr/>
+                <p14:nvPr/>
+              </p14:nvContentPartPr>
+              <p14:xfrm>
+                <a:off x="11637864" y="3588336"/>
+                <a:ext cx="214920" cy="163080"/>
+              </p14:xfrm>
+            </p:contentPart>
+          </mc:Choice>
+          <mc:Fallback>
+            <p:pic>
+              <p:nvPicPr>
+                <p:cNvPr id="58" name="Ink 57">
+                  <a:extLst>
+                    <a:ext uri="{FF2B5EF4-FFF2-40B4-BE49-F238E27FC236}">
+                      <a16:creationId xmlns:a16="http://schemas.microsoft.com/office/drawing/2014/main" id="{1CEB870B-0504-8A43-07AD-C932734B2526}"/>
+                    </a:ext>
+                  </a:extLst>
+                </p:cNvPr>
+                <p:cNvPicPr/>
+                <p:nvPr/>
+              </p:nvPicPr>
+              <p:blipFill>
+                <a:blip r:embed="rId32"/>
+                <a:stretch>
+                  <a:fillRect/>
+                </a:stretch>
+              </p:blipFill>
+              <p:spPr>
+                <a:xfrm>
+                  <a:off x="11620224" y="3570336"/>
+                  <a:ext cx="250560" cy="198720"/>
+                </a:xfrm>
+                <a:prstGeom prst="rect">
+                  <a:avLst/>
+                </a:prstGeom>
+              </p:spPr>
+            </p:pic>
+          </mc:Fallback>
+        </mc:AlternateContent>
+        <mc:AlternateContent xmlns:mc="http://schemas.openxmlformats.org/markup-compatibility/2006">
+          <mc:Choice xmlns:p14="http://schemas.microsoft.com/office/powerpoint/2010/main" Requires="p14">
+            <p:contentPart p14:bwMode="auto" r:id="rId33">
+              <p14:nvContentPartPr>
+                <p14:cNvPr id="59" name="Ink 58">
+                  <a:extLst>
+                    <a:ext uri="{FF2B5EF4-FFF2-40B4-BE49-F238E27FC236}">
+                      <a16:creationId xmlns:a16="http://schemas.microsoft.com/office/drawing/2014/main" id="{6278A792-9D75-7881-7925-2FBEEE3D000E}"/>
+                    </a:ext>
+                  </a:extLst>
+                </p14:cNvPr>
+                <p14:cNvContentPartPr/>
+                <p14:nvPr/>
+              </p14:nvContentPartPr>
+              <p14:xfrm>
+                <a:off x="11940624" y="3538656"/>
+                <a:ext cx="128160" cy="175320"/>
+              </p14:xfrm>
+            </p:contentPart>
+          </mc:Choice>
+          <mc:Fallback>
+            <p:pic>
+              <p:nvPicPr>
+                <p:cNvPr id="59" name="Ink 58">
+                  <a:extLst>
+                    <a:ext uri="{FF2B5EF4-FFF2-40B4-BE49-F238E27FC236}">
+                      <a16:creationId xmlns:a16="http://schemas.microsoft.com/office/drawing/2014/main" id="{6278A792-9D75-7881-7925-2FBEEE3D000E}"/>
+                    </a:ext>
+                  </a:extLst>
+                </p:cNvPr>
+                <p:cNvPicPr/>
+                <p:nvPr/>
+              </p:nvPicPr>
+              <p:blipFill>
+                <a:blip r:embed="rId34"/>
+                <a:stretch>
+                  <a:fillRect/>
+                </a:stretch>
+              </p:blipFill>
+              <p:spPr>
+                <a:xfrm>
+                  <a:off x="11922984" y="3521016"/>
+                  <a:ext cx="163800" cy="210960"/>
+                </a:xfrm>
+                <a:prstGeom prst="rect">
+                  <a:avLst/>
+                </a:prstGeom>
+              </p:spPr>
+            </p:pic>
+          </mc:Fallback>
+        </mc:AlternateContent>
+      </p:grpSp>
+      <p:cxnSp>
+        <p:nvCxnSpPr>
+          <p:cNvPr id="61" name="Straight Connector 60">
+            <a:extLst>
+              <a:ext uri="{FF2B5EF4-FFF2-40B4-BE49-F238E27FC236}">
+                <a16:creationId xmlns:a16="http://schemas.microsoft.com/office/drawing/2014/main" id="{DE7ECE66-1F71-64FD-8717-8E07325533A4}"/>
+              </a:ext>
+            </a:extLst>
+          </p:cNvPr>
+          <p:cNvCxnSpPr/>
+          <p:nvPr/>
+        </p:nvCxnSpPr>
+        <p:spPr>
+          <a:xfrm>
+            <a:off x="5727190" y="982656"/>
+            <a:ext cx="0" cy="1212714"/>
+          </a:xfrm>
+          <a:prstGeom prst="line">
+            <a:avLst/>
+          </a:prstGeom>
+        </p:spPr>
+        <p:style>
+          <a:lnRef idx="2">
+            <a:schemeClr val="accent5"/>
+          </a:lnRef>
+          <a:fillRef idx="0">
+            <a:schemeClr val="accent5"/>
+          </a:fillRef>
+          <a:effectRef idx="1">
+            <a:schemeClr val="accent5"/>
+          </a:effectRef>
+          <a:fontRef idx="minor">
+            <a:schemeClr val="tx1"/>
+          </a:fontRef>
+        </p:style>
+      </p:cxnSp>
+      <p:grpSp>
+        <p:nvGrpSpPr>
+          <p:cNvPr id="1024" name="Group 1023">
+            <a:extLst>
+              <a:ext uri="{FF2B5EF4-FFF2-40B4-BE49-F238E27FC236}">
+                <a16:creationId xmlns:a16="http://schemas.microsoft.com/office/drawing/2014/main" id="{E314C41B-47AE-79E0-9CDE-AA635654C9D1}"/>
+              </a:ext>
+            </a:extLst>
+          </p:cNvPr>
+          <p:cNvGrpSpPr/>
+          <p:nvPr/>
+        </p:nvGrpSpPr>
+        <p:grpSpPr>
+          <a:xfrm>
+            <a:off x="5760504" y="639936"/>
+            <a:ext cx="5976360" cy="795960"/>
+            <a:chOff x="5760504" y="639936"/>
+            <a:chExt cx="5976360" cy="795960"/>
+          </a:xfrm>
+        </p:grpSpPr>
+        <mc:AlternateContent xmlns:mc="http://schemas.openxmlformats.org/markup-compatibility/2006">
+          <mc:Choice xmlns:p14="http://schemas.microsoft.com/office/powerpoint/2010/main" Requires="p14">
+            <p:contentPart p14:bwMode="auto" r:id="rId35">
+              <p14:nvContentPartPr>
+                <p14:cNvPr id="30" name="Ink 29">
+                  <a:extLst>
+                    <a:ext uri="{FF2B5EF4-FFF2-40B4-BE49-F238E27FC236}">
+                      <a16:creationId xmlns:a16="http://schemas.microsoft.com/office/drawing/2014/main" id="{5FF17030-EF3D-BAB2-E37F-61160AF9602A}"/>
+                    </a:ext>
+                  </a:extLst>
+                </p14:cNvPr>
+                <p14:cNvContentPartPr/>
+                <p14:nvPr/>
+              </p14:nvContentPartPr>
+              <p14:xfrm>
+                <a:off x="8979264" y="1169856"/>
+                <a:ext cx="902160" cy="266040"/>
+              </p14:xfrm>
+            </p:contentPart>
+          </mc:Choice>
+          <mc:Fallback>
+            <p:pic>
+              <p:nvPicPr>
+                <p:cNvPr id="30" name="Ink 29">
+                  <a:extLst>
+                    <a:ext uri="{FF2B5EF4-FFF2-40B4-BE49-F238E27FC236}">
+                      <a16:creationId xmlns:a16="http://schemas.microsoft.com/office/drawing/2014/main" id="{5FF17030-EF3D-BAB2-E37F-61160AF9602A}"/>
+                    </a:ext>
+                  </a:extLst>
+                </p:cNvPr>
+                <p:cNvPicPr/>
+                <p:nvPr/>
+              </p:nvPicPr>
+              <p:blipFill>
+                <a:blip r:embed="rId36"/>
+                <a:stretch>
+                  <a:fillRect/>
+                </a:stretch>
+              </p:blipFill>
+              <p:spPr>
+                <a:xfrm>
+                  <a:off x="8961264" y="1152216"/>
+                  <a:ext cx="937800" cy="301680"/>
+                </a:xfrm>
+                <a:prstGeom prst="rect">
+                  <a:avLst/>
+                </a:prstGeom>
+              </p:spPr>
+            </p:pic>
+          </mc:Fallback>
+        </mc:AlternateContent>
+        <mc:AlternateContent xmlns:mc="http://schemas.openxmlformats.org/markup-compatibility/2006">
+          <mc:Choice xmlns:p14="http://schemas.microsoft.com/office/powerpoint/2010/main" Requires="p14">
+            <p:contentPart p14:bwMode="auto" r:id="rId37">
+              <p14:nvContentPartPr>
+                <p14:cNvPr id="31" name="Ink 30">
+                  <a:extLst>
+                    <a:ext uri="{FF2B5EF4-FFF2-40B4-BE49-F238E27FC236}">
+                      <a16:creationId xmlns:a16="http://schemas.microsoft.com/office/drawing/2014/main" id="{A859B7AA-46B2-61E9-C41B-BC981740DC71}"/>
+                    </a:ext>
+                  </a:extLst>
+                </p14:cNvPr>
+                <p14:cNvContentPartPr/>
+                <p14:nvPr/>
+              </p14:nvContentPartPr>
+              <p14:xfrm>
+                <a:off x="9774864" y="1051416"/>
+                <a:ext cx="202680" cy="250920"/>
+              </p14:xfrm>
+            </p:contentPart>
+          </mc:Choice>
+          <mc:Fallback>
+            <p:pic>
+              <p:nvPicPr>
+                <p:cNvPr id="31" name="Ink 30">
+                  <a:extLst>
+                    <a:ext uri="{FF2B5EF4-FFF2-40B4-BE49-F238E27FC236}">
+                      <a16:creationId xmlns:a16="http://schemas.microsoft.com/office/drawing/2014/main" id="{A859B7AA-46B2-61E9-C41B-BC981740DC71}"/>
+                    </a:ext>
+                  </a:extLst>
+                </p:cNvPr>
+                <p:cNvPicPr/>
+                <p:nvPr/>
+              </p:nvPicPr>
+              <p:blipFill>
+                <a:blip r:embed="rId38"/>
+                <a:stretch>
+                  <a:fillRect/>
+                </a:stretch>
+              </p:blipFill>
+              <p:spPr>
+                <a:xfrm>
+                  <a:off x="9756864" y="1033776"/>
+                  <a:ext cx="238320" cy="286560"/>
+                </a:xfrm>
+                <a:prstGeom prst="rect">
+                  <a:avLst/>
+                </a:prstGeom>
+              </p:spPr>
+            </p:pic>
+          </mc:Fallback>
+        </mc:AlternateContent>
+        <mc:AlternateContent xmlns:mc="http://schemas.openxmlformats.org/markup-compatibility/2006">
+          <mc:Choice xmlns:p14="http://schemas.microsoft.com/office/powerpoint/2010/main" Requires="p14">
+            <p:contentPart p14:bwMode="auto" r:id="rId39">
+              <p14:nvContentPartPr>
+                <p14:cNvPr id="32" name="Ink 31">
+                  <a:extLst>
+                    <a:ext uri="{FF2B5EF4-FFF2-40B4-BE49-F238E27FC236}">
+                      <a16:creationId xmlns:a16="http://schemas.microsoft.com/office/drawing/2014/main" id="{AF8CABD6-0B45-1EE9-45F2-8AF65B372A6A}"/>
+                    </a:ext>
+                  </a:extLst>
+                </p14:cNvPr>
+                <p14:cNvContentPartPr/>
+                <p14:nvPr/>
+              </p14:nvContentPartPr>
+              <p14:xfrm>
+                <a:off x="10072224" y="895536"/>
+                <a:ext cx="196560" cy="158040"/>
+              </p14:xfrm>
+            </p:contentPart>
+          </mc:Choice>
+          <mc:Fallback>
+            <p:pic>
+              <p:nvPicPr>
+                <p:cNvPr id="32" name="Ink 31">
+                  <a:extLst>
+                    <a:ext uri="{FF2B5EF4-FFF2-40B4-BE49-F238E27FC236}">
+                      <a16:creationId xmlns:a16="http://schemas.microsoft.com/office/drawing/2014/main" id="{AF8CABD6-0B45-1EE9-45F2-8AF65B372A6A}"/>
+                    </a:ext>
+                  </a:extLst>
+                </p:cNvPr>
+                <p:cNvPicPr/>
+                <p:nvPr/>
+              </p:nvPicPr>
+              <p:blipFill>
+                <a:blip r:embed="rId40"/>
+                <a:stretch>
+                  <a:fillRect/>
+                </a:stretch>
+              </p:blipFill>
+              <p:spPr>
+                <a:xfrm>
+                  <a:off x="10054584" y="877896"/>
+                  <a:ext cx="232200" cy="193680"/>
+                </a:xfrm>
+                <a:prstGeom prst="rect">
+                  <a:avLst/>
+                </a:prstGeom>
+              </p:spPr>
+            </p:pic>
+          </mc:Fallback>
+        </mc:AlternateContent>
+        <mc:AlternateContent xmlns:mc="http://schemas.openxmlformats.org/markup-compatibility/2006">
+          <mc:Choice xmlns:p14="http://schemas.microsoft.com/office/powerpoint/2010/main" Requires="p14">
+            <p:contentPart p14:bwMode="auto" r:id="rId41">
+              <p14:nvContentPartPr>
+                <p14:cNvPr id="33" name="Ink 32">
+                  <a:extLst>
+                    <a:ext uri="{FF2B5EF4-FFF2-40B4-BE49-F238E27FC236}">
+                      <a16:creationId xmlns:a16="http://schemas.microsoft.com/office/drawing/2014/main" id="{7214B8E6-DD12-ED4C-1096-0790B1FB008B}"/>
+                    </a:ext>
+                  </a:extLst>
+                </p14:cNvPr>
+                <p14:cNvContentPartPr/>
+                <p14:nvPr/>
+              </p14:nvContentPartPr>
+              <p14:xfrm>
+                <a:off x="10247544" y="924336"/>
+                <a:ext cx="164160" cy="182880"/>
+              </p14:xfrm>
+            </p:contentPart>
+          </mc:Choice>
+          <mc:Fallback>
+            <p:pic>
+              <p:nvPicPr>
+                <p:cNvPr id="33" name="Ink 32">
+                  <a:extLst>
+                    <a:ext uri="{FF2B5EF4-FFF2-40B4-BE49-F238E27FC236}">
+                      <a16:creationId xmlns:a16="http://schemas.microsoft.com/office/drawing/2014/main" id="{7214B8E6-DD12-ED4C-1096-0790B1FB008B}"/>
+                    </a:ext>
+                  </a:extLst>
+                </p:cNvPr>
+                <p:cNvPicPr/>
+                <p:nvPr/>
+              </p:nvPicPr>
+              <p:blipFill>
+                <a:blip r:embed="rId42"/>
+                <a:stretch>
+                  <a:fillRect/>
+                </a:stretch>
+              </p:blipFill>
+              <p:spPr>
+                <a:xfrm>
+                  <a:off x="10229544" y="906336"/>
+                  <a:ext cx="199800" cy="218520"/>
+                </a:xfrm>
+                <a:prstGeom prst="rect">
+                  <a:avLst/>
+                </a:prstGeom>
+              </p:spPr>
+            </p:pic>
+          </mc:Fallback>
+        </mc:AlternateContent>
+        <mc:AlternateContent xmlns:mc="http://schemas.openxmlformats.org/markup-compatibility/2006">
+          <mc:Choice xmlns:p14="http://schemas.microsoft.com/office/powerpoint/2010/main" Requires="p14">
+            <p:contentPart p14:bwMode="auto" r:id="rId43">
+              <p14:nvContentPartPr>
+                <p14:cNvPr id="34" name="Ink 33">
+                  <a:extLst>
+                    <a:ext uri="{FF2B5EF4-FFF2-40B4-BE49-F238E27FC236}">
+                      <a16:creationId xmlns:a16="http://schemas.microsoft.com/office/drawing/2014/main" id="{B13EF67E-9F95-881F-EA61-C11D10A2B187}"/>
+                    </a:ext>
+                  </a:extLst>
+                </p14:cNvPr>
+                <p14:cNvContentPartPr/>
+                <p14:nvPr/>
+              </p14:nvContentPartPr>
+              <p14:xfrm>
+                <a:off x="10441944" y="1003896"/>
+                <a:ext cx="72720" cy="75600"/>
+              </p14:xfrm>
+            </p:contentPart>
+          </mc:Choice>
+          <mc:Fallback>
+            <p:pic>
+              <p:nvPicPr>
+                <p:cNvPr id="34" name="Ink 33">
+                  <a:extLst>
+                    <a:ext uri="{FF2B5EF4-FFF2-40B4-BE49-F238E27FC236}">
+                      <a16:creationId xmlns:a16="http://schemas.microsoft.com/office/drawing/2014/main" id="{B13EF67E-9F95-881F-EA61-C11D10A2B187}"/>
+                    </a:ext>
+                  </a:extLst>
+                </p:cNvPr>
+                <p:cNvPicPr/>
+                <p:nvPr/>
+              </p:nvPicPr>
+              <p:blipFill>
+                <a:blip r:embed="rId44"/>
+                <a:stretch>
+                  <a:fillRect/>
+                </a:stretch>
+              </p:blipFill>
+              <p:spPr>
+                <a:xfrm>
+                  <a:off x="10423944" y="986256"/>
+                  <a:ext cx="108360" cy="111240"/>
+                </a:xfrm>
+                <a:prstGeom prst="rect">
+                  <a:avLst/>
+                </a:prstGeom>
+              </p:spPr>
+            </p:pic>
+          </mc:Fallback>
+        </mc:AlternateContent>
+        <mc:AlternateContent xmlns:mc="http://schemas.openxmlformats.org/markup-compatibility/2006">
+          <mc:Choice xmlns:p14="http://schemas.microsoft.com/office/powerpoint/2010/main" Requires="p14">
+            <p:contentPart p14:bwMode="auto" r:id="rId45">
+              <p14:nvContentPartPr>
+                <p14:cNvPr id="36" name="Ink 35">
+                  <a:extLst>
+                    <a:ext uri="{FF2B5EF4-FFF2-40B4-BE49-F238E27FC236}">
+                      <a16:creationId xmlns:a16="http://schemas.microsoft.com/office/drawing/2014/main" id="{F0F228A0-B64E-AF22-2CBE-2837C008E5C0}"/>
+                    </a:ext>
+                  </a:extLst>
+                </p14:cNvPr>
+                <p14:cNvContentPartPr/>
+                <p14:nvPr/>
+              </p14:nvContentPartPr>
+              <p14:xfrm>
+                <a:off x="10554264" y="987336"/>
+                <a:ext cx="63720" cy="94680"/>
+              </p14:xfrm>
+            </p:contentPart>
+          </mc:Choice>
+          <mc:Fallback>
+            <p:pic>
+              <p:nvPicPr>
+                <p:cNvPr id="36" name="Ink 35">
+                  <a:extLst>
+                    <a:ext uri="{FF2B5EF4-FFF2-40B4-BE49-F238E27FC236}">
+                      <a16:creationId xmlns:a16="http://schemas.microsoft.com/office/drawing/2014/main" id="{F0F228A0-B64E-AF22-2CBE-2837C008E5C0}"/>
+                    </a:ext>
+                  </a:extLst>
+                </p:cNvPr>
+                <p:cNvPicPr/>
+                <p:nvPr/>
+              </p:nvPicPr>
+              <p:blipFill>
+                <a:blip r:embed="rId46"/>
+                <a:stretch>
+                  <a:fillRect/>
+                </a:stretch>
+              </p:blipFill>
+              <p:spPr>
+                <a:xfrm>
+                  <a:off x="10536264" y="969336"/>
+                  <a:ext cx="99360" cy="130320"/>
+                </a:xfrm>
+                <a:prstGeom prst="rect">
+                  <a:avLst/>
+                </a:prstGeom>
+              </p:spPr>
+            </p:pic>
+          </mc:Fallback>
+        </mc:AlternateContent>
+        <mc:AlternateContent xmlns:mc="http://schemas.openxmlformats.org/markup-compatibility/2006">
+          <mc:Choice xmlns:p14="http://schemas.microsoft.com/office/powerpoint/2010/main" Requires="p14">
+            <p:contentPart p14:bwMode="auto" r:id="rId47">
+              <p14:nvContentPartPr>
+                <p14:cNvPr id="37" name="Ink 36">
+                  <a:extLst>
+                    <a:ext uri="{FF2B5EF4-FFF2-40B4-BE49-F238E27FC236}">
+                      <a16:creationId xmlns:a16="http://schemas.microsoft.com/office/drawing/2014/main" id="{632EDBD3-2BED-ECFD-218B-EDAE17C70D33}"/>
+                    </a:ext>
+                  </a:extLst>
+                </p14:cNvPr>
+                <p14:cNvContentPartPr/>
+                <p14:nvPr/>
+              </p14:nvContentPartPr>
+              <p14:xfrm>
+                <a:off x="10689264" y="914256"/>
+                <a:ext cx="12960" cy="144720"/>
+              </p14:xfrm>
+            </p:contentPart>
+          </mc:Choice>
+          <mc:Fallback>
+            <p:pic>
+              <p:nvPicPr>
+                <p:cNvPr id="37" name="Ink 36">
+                  <a:extLst>
+                    <a:ext uri="{FF2B5EF4-FFF2-40B4-BE49-F238E27FC236}">
+                      <a16:creationId xmlns:a16="http://schemas.microsoft.com/office/drawing/2014/main" id="{632EDBD3-2BED-ECFD-218B-EDAE17C70D33}"/>
+                    </a:ext>
+                  </a:extLst>
+                </p:cNvPr>
+                <p:cNvPicPr/>
+                <p:nvPr/>
+              </p:nvPicPr>
+              <p:blipFill>
+                <a:blip r:embed="rId48"/>
+                <a:stretch>
+                  <a:fillRect/>
+                </a:stretch>
+              </p:blipFill>
+              <p:spPr>
+                <a:xfrm>
+                  <a:off x="10671264" y="896616"/>
+                  <a:ext cx="48600" cy="180360"/>
+                </a:xfrm>
+                <a:prstGeom prst="rect">
+                  <a:avLst/>
+                </a:prstGeom>
+              </p:spPr>
+            </p:pic>
+          </mc:Fallback>
+        </mc:AlternateContent>
+        <mc:AlternateContent xmlns:mc="http://schemas.openxmlformats.org/markup-compatibility/2006">
+          <mc:Choice xmlns:p14="http://schemas.microsoft.com/office/powerpoint/2010/main" Requires="p14">
+            <p:contentPart p14:bwMode="auto" r:id="rId49">
+              <p14:nvContentPartPr>
+                <p14:cNvPr id="38" name="Ink 37">
+                  <a:extLst>
+                    <a:ext uri="{FF2B5EF4-FFF2-40B4-BE49-F238E27FC236}">
+                      <a16:creationId xmlns:a16="http://schemas.microsoft.com/office/drawing/2014/main" id="{5AA7DB88-5E8E-6D82-9CC1-272D31A5DA34}"/>
+                    </a:ext>
+                  </a:extLst>
+                </p14:cNvPr>
+                <p14:cNvContentPartPr/>
+                <p14:nvPr/>
+              </p14:nvContentPartPr>
+              <p14:xfrm>
+                <a:off x="10744344" y="895896"/>
+                <a:ext cx="58320" cy="173520"/>
+              </p14:xfrm>
+            </p:contentPart>
+          </mc:Choice>
+          <mc:Fallback>
+            <p:pic>
+              <p:nvPicPr>
+                <p:cNvPr id="38" name="Ink 37">
+                  <a:extLst>
+                    <a:ext uri="{FF2B5EF4-FFF2-40B4-BE49-F238E27FC236}">
+                      <a16:creationId xmlns:a16="http://schemas.microsoft.com/office/drawing/2014/main" id="{5AA7DB88-5E8E-6D82-9CC1-272D31A5DA34}"/>
+                    </a:ext>
+                  </a:extLst>
+                </p:cNvPr>
+                <p:cNvPicPr/>
+                <p:nvPr/>
+              </p:nvPicPr>
+              <p:blipFill>
+                <a:blip r:embed="rId50"/>
+                <a:stretch>
+                  <a:fillRect/>
+                </a:stretch>
+              </p:blipFill>
+              <p:spPr>
+                <a:xfrm>
+                  <a:off x="10726344" y="878256"/>
+                  <a:ext cx="93960" cy="209160"/>
+                </a:xfrm>
+                <a:prstGeom prst="rect">
+                  <a:avLst/>
+                </a:prstGeom>
+              </p:spPr>
+            </p:pic>
+          </mc:Fallback>
+        </mc:AlternateContent>
+        <mc:AlternateContent xmlns:mc="http://schemas.openxmlformats.org/markup-compatibility/2006">
+          <mc:Choice xmlns:p14="http://schemas.microsoft.com/office/powerpoint/2010/main" Requires="p14">
+            <p:contentPart p14:bwMode="auto" r:id="rId51">
+              <p14:nvContentPartPr>
+                <p14:cNvPr id="39" name="Ink 38">
+                  <a:extLst>
+                    <a:ext uri="{FF2B5EF4-FFF2-40B4-BE49-F238E27FC236}">
+                      <a16:creationId xmlns:a16="http://schemas.microsoft.com/office/drawing/2014/main" id="{F8A24744-82E0-13CF-70ED-51268EF852B2}"/>
+                    </a:ext>
+                  </a:extLst>
+                </p14:cNvPr>
+                <p14:cNvContentPartPr/>
+                <p14:nvPr/>
+              </p14:nvContentPartPr>
+              <p14:xfrm>
+                <a:off x="10990944" y="832176"/>
+                <a:ext cx="176400" cy="185040"/>
+              </p14:xfrm>
+            </p:contentPart>
+          </mc:Choice>
+          <mc:Fallback>
+            <p:pic>
+              <p:nvPicPr>
+                <p:cNvPr id="39" name="Ink 38">
+                  <a:extLst>
+                    <a:ext uri="{FF2B5EF4-FFF2-40B4-BE49-F238E27FC236}">
+                      <a16:creationId xmlns:a16="http://schemas.microsoft.com/office/drawing/2014/main" id="{F8A24744-82E0-13CF-70ED-51268EF852B2}"/>
+                    </a:ext>
+                  </a:extLst>
+                </p:cNvPr>
+                <p:cNvPicPr/>
+                <p:nvPr/>
+              </p:nvPicPr>
+              <p:blipFill>
+                <a:blip r:embed="rId52"/>
+                <a:stretch>
+                  <a:fillRect/>
+                </a:stretch>
+              </p:blipFill>
+              <p:spPr>
+                <a:xfrm>
+                  <a:off x="10972944" y="814176"/>
+                  <a:ext cx="212040" cy="220680"/>
+                </a:xfrm>
+                <a:prstGeom prst="rect">
+                  <a:avLst/>
+                </a:prstGeom>
+              </p:spPr>
+            </p:pic>
+          </mc:Fallback>
+        </mc:AlternateContent>
+        <mc:AlternateContent xmlns:mc="http://schemas.openxmlformats.org/markup-compatibility/2006">
+          <mc:Choice xmlns:p14="http://schemas.microsoft.com/office/powerpoint/2010/main" Requires="p14">
+            <p:contentPart p14:bwMode="auto" r:id="rId53">
+              <p14:nvContentPartPr>
+                <p14:cNvPr id="40" name="Ink 39">
+                  <a:extLst>
+                    <a:ext uri="{FF2B5EF4-FFF2-40B4-BE49-F238E27FC236}">
+                      <a16:creationId xmlns:a16="http://schemas.microsoft.com/office/drawing/2014/main" id="{F5E63708-59B6-C305-1737-67344CB57845}"/>
+                    </a:ext>
+                  </a:extLst>
+                </p14:cNvPr>
+                <p14:cNvContentPartPr/>
+                <p14:nvPr/>
+              </p14:nvContentPartPr>
+              <p14:xfrm>
+                <a:off x="11181384" y="932616"/>
+                <a:ext cx="160920" cy="82440"/>
+              </p14:xfrm>
+            </p:contentPart>
+          </mc:Choice>
+          <mc:Fallback>
+            <p:pic>
+              <p:nvPicPr>
+                <p:cNvPr id="40" name="Ink 39">
+                  <a:extLst>
+                    <a:ext uri="{FF2B5EF4-FFF2-40B4-BE49-F238E27FC236}">
+                      <a16:creationId xmlns:a16="http://schemas.microsoft.com/office/drawing/2014/main" id="{F5E63708-59B6-C305-1737-67344CB57845}"/>
+                    </a:ext>
+                  </a:extLst>
+                </p:cNvPr>
+                <p:cNvPicPr/>
+                <p:nvPr/>
+              </p:nvPicPr>
+              <p:blipFill>
+                <a:blip r:embed="rId54"/>
+                <a:stretch>
+                  <a:fillRect/>
+                </a:stretch>
+              </p:blipFill>
+              <p:spPr>
+                <a:xfrm>
+                  <a:off x="11163744" y="914616"/>
+                  <a:ext cx="196560" cy="118080"/>
+                </a:xfrm>
+                <a:prstGeom prst="rect">
+                  <a:avLst/>
+                </a:prstGeom>
+              </p:spPr>
+            </p:pic>
+          </mc:Fallback>
+        </mc:AlternateContent>
+        <mc:AlternateContent xmlns:mc="http://schemas.openxmlformats.org/markup-compatibility/2006">
+          <mc:Choice xmlns:p14="http://schemas.microsoft.com/office/powerpoint/2010/main" Requires="p14">
+            <p:contentPart p14:bwMode="auto" r:id="rId55">
+              <p14:nvContentPartPr>
+                <p14:cNvPr id="41" name="Ink 40">
+                  <a:extLst>
+                    <a:ext uri="{FF2B5EF4-FFF2-40B4-BE49-F238E27FC236}">
+                      <a16:creationId xmlns:a16="http://schemas.microsoft.com/office/drawing/2014/main" id="{1846C35C-EF13-38F2-85A2-12106DEF66C6}"/>
+                    </a:ext>
+                  </a:extLst>
+                </p14:cNvPr>
+                <p14:cNvContentPartPr/>
+                <p14:nvPr/>
+              </p14:nvContentPartPr>
+              <p14:xfrm>
+                <a:off x="11437704" y="930816"/>
+                <a:ext cx="299160" cy="63360"/>
+              </p14:xfrm>
+            </p:contentPart>
+          </mc:Choice>
+          <mc:Fallback>
+            <p:pic>
+              <p:nvPicPr>
+                <p:cNvPr id="41" name="Ink 40">
+                  <a:extLst>
+                    <a:ext uri="{FF2B5EF4-FFF2-40B4-BE49-F238E27FC236}">
+                      <a16:creationId xmlns:a16="http://schemas.microsoft.com/office/drawing/2014/main" id="{1846C35C-EF13-38F2-85A2-12106DEF66C6}"/>
+                    </a:ext>
+                  </a:extLst>
+                </p:cNvPr>
+                <p:cNvPicPr/>
+                <p:nvPr/>
+              </p:nvPicPr>
+              <p:blipFill>
+                <a:blip r:embed="rId56"/>
+                <a:stretch>
+                  <a:fillRect/>
+                </a:stretch>
+              </p:blipFill>
+              <p:spPr>
+                <a:xfrm>
+                  <a:off x="11420064" y="912816"/>
+                  <a:ext cx="334800" cy="99000"/>
+                </a:xfrm>
+                <a:prstGeom prst="rect">
+                  <a:avLst/>
+                </a:prstGeom>
+              </p:spPr>
+            </p:pic>
+          </mc:Fallback>
+        </mc:AlternateContent>
+        <mc:AlternateContent xmlns:mc="http://schemas.openxmlformats.org/markup-compatibility/2006">
+          <mc:Choice xmlns:p14="http://schemas.microsoft.com/office/powerpoint/2010/main" Requires="p14">
+            <p:contentPart p14:bwMode="auto" r:id="rId57">
+              <p14:nvContentPartPr>
+                <p14:cNvPr id="62" name="Ink 61">
+                  <a:extLst>
+                    <a:ext uri="{FF2B5EF4-FFF2-40B4-BE49-F238E27FC236}">
+                      <a16:creationId xmlns:a16="http://schemas.microsoft.com/office/drawing/2014/main" id="{E394A126-2F88-E78E-97C1-CD64C4EBAC93}"/>
+                    </a:ext>
+                  </a:extLst>
+                </p14:cNvPr>
+                <p14:cNvContentPartPr/>
+                <p14:nvPr/>
+              </p14:nvContentPartPr>
+              <p14:xfrm>
+                <a:off x="5760504" y="695016"/>
+                <a:ext cx="4366080" cy="439200"/>
+              </p14:xfrm>
+            </p:contentPart>
+          </mc:Choice>
+          <mc:Fallback>
+            <p:pic>
+              <p:nvPicPr>
+                <p:cNvPr id="62" name="Ink 61">
+                  <a:extLst>
+                    <a:ext uri="{FF2B5EF4-FFF2-40B4-BE49-F238E27FC236}">
+                      <a16:creationId xmlns:a16="http://schemas.microsoft.com/office/drawing/2014/main" id="{E394A126-2F88-E78E-97C1-CD64C4EBAC93}"/>
+                    </a:ext>
+                  </a:extLst>
+                </p:cNvPr>
+                <p:cNvPicPr/>
+                <p:nvPr/>
+              </p:nvPicPr>
+              <p:blipFill>
+                <a:blip r:embed="rId58"/>
+                <a:stretch>
+                  <a:fillRect/>
+                </a:stretch>
+              </p:blipFill>
+              <p:spPr>
+                <a:xfrm>
+                  <a:off x="5742864" y="677016"/>
+                  <a:ext cx="4401720" cy="474840"/>
+                </a:xfrm>
+                <a:prstGeom prst="rect">
+                  <a:avLst/>
+                </a:prstGeom>
+              </p:spPr>
+            </p:pic>
+          </mc:Fallback>
+        </mc:AlternateContent>
+        <mc:AlternateContent xmlns:mc="http://schemas.openxmlformats.org/markup-compatibility/2006">
+          <mc:Choice xmlns:p14="http://schemas.microsoft.com/office/powerpoint/2010/main" Requires="p14">
+            <p:contentPart p14:bwMode="auto" r:id="rId59">
+              <p14:nvContentPartPr>
+                <p14:cNvPr id="63" name="Ink 62">
+                  <a:extLst>
+                    <a:ext uri="{FF2B5EF4-FFF2-40B4-BE49-F238E27FC236}">
+                      <a16:creationId xmlns:a16="http://schemas.microsoft.com/office/drawing/2014/main" id="{AF17E435-519F-F499-7C2A-6262E3B248AD}"/>
+                    </a:ext>
+                  </a:extLst>
+                </p14:cNvPr>
+                <p14:cNvContentPartPr/>
+                <p14:nvPr/>
+              </p14:nvContentPartPr>
+              <p14:xfrm>
+                <a:off x="9976104" y="639936"/>
+                <a:ext cx="271080" cy="239400"/>
+              </p14:xfrm>
+            </p:contentPart>
+          </mc:Choice>
+          <mc:Fallback>
+            <p:pic>
+              <p:nvPicPr>
+                <p:cNvPr id="63" name="Ink 62">
+                  <a:extLst>
+                    <a:ext uri="{FF2B5EF4-FFF2-40B4-BE49-F238E27FC236}">
+                      <a16:creationId xmlns:a16="http://schemas.microsoft.com/office/drawing/2014/main" id="{AF17E435-519F-F499-7C2A-6262E3B248AD}"/>
+                    </a:ext>
+                  </a:extLst>
+                </p:cNvPr>
+                <p:cNvPicPr/>
+                <p:nvPr/>
+              </p:nvPicPr>
+              <p:blipFill>
+                <a:blip r:embed="rId60"/>
+                <a:stretch>
+                  <a:fillRect/>
+                </a:stretch>
+              </p:blipFill>
+              <p:spPr>
+                <a:xfrm>
+                  <a:off x="9958104" y="621936"/>
+                  <a:ext cx="306720" cy="275040"/>
+                </a:xfrm>
+                <a:prstGeom prst="rect">
+                  <a:avLst/>
+                </a:prstGeom>
+              </p:spPr>
+            </p:pic>
+          </mc:Fallback>
+        </mc:AlternateContent>
+      </p:grpSp>
+      <p:grpSp>
+        <p:nvGrpSpPr>
+          <p:cNvPr id="1034" name="Group 1033">
+            <a:extLst>
+              <a:ext uri="{FF2B5EF4-FFF2-40B4-BE49-F238E27FC236}">
+                <a16:creationId xmlns:a16="http://schemas.microsoft.com/office/drawing/2014/main" id="{A14A7857-C546-C0C9-DDA6-EC576B60D937}"/>
+              </a:ext>
+            </a:extLst>
+          </p:cNvPr>
+          <p:cNvGrpSpPr/>
+          <p:nvPr/>
+        </p:nvGrpSpPr>
+        <p:grpSpPr>
+          <a:xfrm>
+            <a:off x="446184" y="70776"/>
+            <a:ext cx="341280" cy="360360"/>
+            <a:chOff x="446184" y="70776"/>
+            <a:chExt cx="341280" cy="360360"/>
+          </a:xfrm>
+        </p:grpSpPr>
+        <mc:AlternateContent xmlns:mc="http://schemas.openxmlformats.org/markup-compatibility/2006">
+          <mc:Choice xmlns:p14="http://schemas.microsoft.com/office/powerpoint/2010/main" Requires="p14">
+            <p:contentPart p14:bwMode="auto" r:id="rId61">
+              <p14:nvContentPartPr>
+                <p14:cNvPr id="1025" name="Ink 1024">
+                  <a:extLst>
+                    <a:ext uri="{FF2B5EF4-FFF2-40B4-BE49-F238E27FC236}">
+                      <a16:creationId xmlns:a16="http://schemas.microsoft.com/office/drawing/2014/main" id="{345071D8-B21D-75B8-5B71-252D5FDE6EBF}"/>
+                    </a:ext>
+                  </a:extLst>
+                </p14:cNvPr>
+                <p14:cNvContentPartPr/>
+                <p14:nvPr/>
+              </p14:nvContentPartPr>
+              <p14:xfrm>
+                <a:off x="612504" y="164376"/>
+                <a:ext cx="18720" cy="165240"/>
+              </p14:xfrm>
+            </p:contentPart>
+          </mc:Choice>
+          <mc:Fallback>
+            <p:pic>
+              <p:nvPicPr>
+                <p:cNvPr id="1025" name="Ink 1024">
+                  <a:extLst>
+                    <a:ext uri="{FF2B5EF4-FFF2-40B4-BE49-F238E27FC236}">
+                      <a16:creationId xmlns:a16="http://schemas.microsoft.com/office/drawing/2014/main" id="{345071D8-B21D-75B8-5B71-252D5FDE6EBF}"/>
+                    </a:ext>
+                  </a:extLst>
+                </p:cNvPr>
+                <p:cNvPicPr/>
+                <p:nvPr/>
+              </p:nvPicPr>
+              <p:blipFill>
+                <a:blip r:embed="rId62"/>
+                <a:stretch>
+                  <a:fillRect/>
+                </a:stretch>
+              </p:blipFill>
+              <p:spPr>
+                <a:xfrm>
+                  <a:off x="606384" y="158256"/>
+                  <a:ext cx="30960" cy="177480"/>
+                </a:xfrm>
+                <a:prstGeom prst="rect">
+                  <a:avLst/>
+                </a:prstGeom>
+              </p:spPr>
+            </p:pic>
+          </mc:Fallback>
+        </mc:AlternateContent>
+        <mc:AlternateContent xmlns:mc="http://schemas.openxmlformats.org/markup-compatibility/2006">
+          <mc:Choice xmlns:p14="http://schemas.microsoft.com/office/powerpoint/2010/main" Requires="p14">
+            <p:contentPart p14:bwMode="auto" r:id="rId63">
+              <p14:nvContentPartPr>
+                <p14:cNvPr id="1027" name="Ink 1026">
+                  <a:extLst>
+                    <a:ext uri="{FF2B5EF4-FFF2-40B4-BE49-F238E27FC236}">
+                      <a16:creationId xmlns:a16="http://schemas.microsoft.com/office/drawing/2014/main" id="{56F46FFB-E2B6-A864-3CE3-3C2676F86BB6}"/>
+                    </a:ext>
+                  </a:extLst>
+                </p14:cNvPr>
+                <p14:cNvContentPartPr/>
+                <p14:nvPr/>
+              </p14:nvContentPartPr>
+              <p14:xfrm>
+                <a:off x="446184" y="70776"/>
+                <a:ext cx="341280" cy="360360"/>
+              </p14:xfrm>
+            </p:contentPart>
+          </mc:Choice>
+          <mc:Fallback>
+            <p:pic>
+              <p:nvPicPr>
+                <p:cNvPr id="1027" name="Ink 1026">
+                  <a:extLst>
+                    <a:ext uri="{FF2B5EF4-FFF2-40B4-BE49-F238E27FC236}">
+                      <a16:creationId xmlns:a16="http://schemas.microsoft.com/office/drawing/2014/main" id="{56F46FFB-E2B6-A864-3CE3-3C2676F86BB6}"/>
+                    </a:ext>
+                  </a:extLst>
+                </p:cNvPr>
+                <p:cNvPicPr/>
+                <p:nvPr/>
+              </p:nvPicPr>
+              <p:blipFill>
+                <a:blip r:embed="rId64"/>
+                <a:stretch>
+                  <a:fillRect/>
+                </a:stretch>
+              </p:blipFill>
+              <p:spPr>
+                <a:xfrm>
+                  <a:off x="440064" y="64656"/>
+                  <a:ext cx="353520" cy="372600"/>
+                </a:xfrm>
+                <a:prstGeom prst="rect">
+                  <a:avLst/>
+                </a:prstGeom>
+              </p:spPr>
+            </p:pic>
+          </mc:Fallback>
+        </mc:AlternateContent>
+      </p:grpSp>
+      <p:grpSp>
+        <p:nvGrpSpPr>
+          <p:cNvPr id="1073" name="Group 1072">
+            <a:extLst>
+              <a:ext uri="{FF2B5EF4-FFF2-40B4-BE49-F238E27FC236}">
+                <a16:creationId xmlns:a16="http://schemas.microsoft.com/office/drawing/2014/main" id="{A5BD5A39-7E41-4FED-B725-8DC84BC934FB}"/>
+              </a:ext>
+            </a:extLst>
+          </p:cNvPr>
+          <p:cNvGrpSpPr/>
+          <p:nvPr/>
+        </p:nvGrpSpPr>
+        <p:grpSpPr>
+          <a:xfrm>
+            <a:off x="374904" y="756936"/>
+            <a:ext cx="5459040" cy="2863440"/>
+            <a:chOff x="374904" y="756936"/>
+            <a:chExt cx="5459040" cy="2863440"/>
+          </a:xfrm>
+        </p:grpSpPr>
+        <mc:AlternateContent xmlns:mc="http://schemas.openxmlformats.org/markup-compatibility/2006">
+          <mc:Choice xmlns:p14="http://schemas.microsoft.com/office/powerpoint/2010/main" Requires="p14">
+            <p:contentPart p14:bwMode="auto" r:id="rId65">
+              <p14:nvContentPartPr>
+                <p14:cNvPr id="1028" name="Ink 1027">
+                  <a:extLst>
+                    <a:ext uri="{FF2B5EF4-FFF2-40B4-BE49-F238E27FC236}">
+                      <a16:creationId xmlns:a16="http://schemas.microsoft.com/office/drawing/2014/main" id="{357DA39B-D0BF-19BB-2E0D-23530D9CEEEB}"/>
+                    </a:ext>
+                  </a:extLst>
+                </p14:cNvPr>
+                <p14:cNvContentPartPr/>
+                <p14:nvPr/>
+              </p14:nvContentPartPr>
+              <p14:xfrm>
+                <a:off x="4205304" y="832176"/>
+                <a:ext cx="431640" cy="495720"/>
+              </p14:xfrm>
+            </p:contentPart>
+          </mc:Choice>
+          <mc:Fallback>
+            <p:pic>
+              <p:nvPicPr>
+                <p:cNvPr id="1028" name="Ink 1027">
+                  <a:extLst>
+                    <a:ext uri="{FF2B5EF4-FFF2-40B4-BE49-F238E27FC236}">
+                      <a16:creationId xmlns:a16="http://schemas.microsoft.com/office/drawing/2014/main" id="{357DA39B-D0BF-19BB-2E0D-23530D9CEEEB}"/>
+                    </a:ext>
+                  </a:extLst>
+                </p:cNvPr>
+                <p:cNvPicPr/>
+                <p:nvPr/>
+              </p:nvPicPr>
+              <p:blipFill>
+                <a:blip r:embed="rId66"/>
+                <a:stretch>
+                  <a:fillRect/>
+                </a:stretch>
+              </p:blipFill>
+              <p:spPr>
+                <a:xfrm>
+                  <a:off x="4199184" y="826056"/>
+                  <a:ext cx="443880" cy="507960"/>
+                </a:xfrm>
+                <a:prstGeom prst="rect">
+                  <a:avLst/>
+                </a:prstGeom>
+              </p:spPr>
+            </p:pic>
+          </mc:Fallback>
+        </mc:AlternateContent>
+        <mc:AlternateContent xmlns:mc="http://schemas.openxmlformats.org/markup-compatibility/2006">
+          <mc:Choice xmlns:p14="http://schemas.microsoft.com/office/powerpoint/2010/main" Requires="p14">
+            <p:contentPart p14:bwMode="auto" r:id="rId67">
+              <p14:nvContentPartPr>
+                <p14:cNvPr id="1029" name="Ink 1028">
+                  <a:extLst>
+                    <a:ext uri="{FF2B5EF4-FFF2-40B4-BE49-F238E27FC236}">
+                      <a16:creationId xmlns:a16="http://schemas.microsoft.com/office/drawing/2014/main" id="{04D01A5B-93C9-4556-2728-DDFF36DDDC7F}"/>
+                    </a:ext>
+                  </a:extLst>
+                </p14:cNvPr>
+                <p14:cNvContentPartPr/>
+                <p14:nvPr/>
+              </p14:nvContentPartPr>
+              <p14:xfrm>
+                <a:off x="4568904" y="1215936"/>
+                <a:ext cx="84960" cy="162000"/>
+              </p14:xfrm>
+            </p:contentPart>
+          </mc:Choice>
+          <mc:Fallback>
+            <p:pic>
+              <p:nvPicPr>
+                <p:cNvPr id="1029" name="Ink 1028">
+                  <a:extLst>
+                    <a:ext uri="{FF2B5EF4-FFF2-40B4-BE49-F238E27FC236}">
+                      <a16:creationId xmlns:a16="http://schemas.microsoft.com/office/drawing/2014/main" id="{04D01A5B-93C9-4556-2728-DDFF36DDDC7F}"/>
+                    </a:ext>
+                  </a:extLst>
+                </p:cNvPr>
+                <p:cNvPicPr/>
+                <p:nvPr/>
+              </p:nvPicPr>
+              <p:blipFill>
+                <a:blip r:embed="rId68"/>
+                <a:stretch>
+                  <a:fillRect/>
+                </a:stretch>
+              </p:blipFill>
+              <p:spPr>
+                <a:xfrm>
+                  <a:off x="4562784" y="1209816"/>
+                  <a:ext cx="97200" cy="174240"/>
+                </a:xfrm>
+                <a:prstGeom prst="rect">
+                  <a:avLst/>
+                </a:prstGeom>
+              </p:spPr>
+            </p:pic>
+          </mc:Fallback>
+        </mc:AlternateContent>
+        <mc:AlternateContent xmlns:mc="http://schemas.openxmlformats.org/markup-compatibility/2006">
+          <mc:Choice xmlns:p14="http://schemas.microsoft.com/office/powerpoint/2010/main" Requires="p14">
+            <p:contentPart p14:bwMode="auto" r:id="rId69">
+              <p14:nvContentPartPr>
+                <p14:cNvPr id="1030" name="Ink 1029">
+                  <a:extLst>
+                    <a:ext uri="{FF2B5EF4-FFF2-40B4-BE49-F238E27FC236}">
+                      <a16:creationId xmlns:a16="http://schemas.microsoft.com/office/drawing/2014/main" id="{BE55DC2B-5E53-13C0-DE16-415FB33EEB87}"/>
+                    </a:ext>
+                  </a:extLst>
+                </p14:cNvPr>
+                <p14:cNvContentPartPr/>
+                <p14:nvPr/>
+              </p14:nvContentPartPr>
+              <p14:xfrm>
+                <a:off x="4835304" y="756936"/>
+                <a:ext cx="816840" cy="1366920"/>
+              </p14:xfrm>
+            </p:contentPart>
+          </mc:Choice>
+          <mc:Fallback>
+            <p:pic>
+              <p:nvPicPr>
+                <p:cNvPr id="1030" name="Ink 1029">
+                  <a:extLst>
+                    <a:ext uri="{FF2B5EF4-FFF2-40B4-BE49-F238E27FC236}">
+                      <a16:creationId xmlns:a16="http://schemas.microsoft.com/office/drawing/2014/main" id="{BE55DC2B-5E53-13C0-DE16-415FB33EEB87}"/>
+                    </a:ext>
+                  </a:extLst>
+                </p:cNvPr>
+                <p:cNvPicPr/>
+                <p:nvPr/>
+              </p:nvPicPr>
+              <p:blipFill>
+                <a:blip r:embed="rId70"/>
+                <a:stretch>
+                  <a:fillRect/>
+                </a:stretch>
+              </p:blipFill>
+              <p:spPr>
+                <a:xfrm>
+                  <a:off x="4829184" y="750816"/>
+                  <a:ext cx="829080" cy="1379160"/>
+                </a:xfrm>
+                <a:prstGeom prst="rect">
+                  <a:avLst/>
+                </a:prstGeom>
+              </p:spPr>
+            </p:pic>
+          </mc:Fallback>
+        </mc:AlternateContent>
+        <mc:AlternateContent xmlns:mc="http://schemas.openxmlformats.org/markup-compatibility/2006">
+          <mc:Choice xmlns:p14="http://schemas.microsoft.com/office/powerpoint/2010/main" Requires="p14">
+            <p:contentPart p14:bwMode="auto" r:id="rId71">
+              <p14:nvContentPartPr>
+                <p14:cNvPr id="1031" name="Ink 1030">
+                  <a:extLst>
+                    <a:ext uri="{FF2B5EF4-FFF2-40B4-BE49-F238E27FC236}">
+                      <a16:creationId xmlns:a16="http://schemas.microsoft.com/office/drawing/2014/main" id="{CB972051-45EE-2AA7-F298-DAFC36B3C453}"/>
+                    </a:ext>
+                  </a:extLst>
+                </p14:cNvPr>
+                <p14:cNvContentPartPr/>
+                <p14:nvPr/>
+              </p14:nvContentPartPr>
+              <p14:xfrm>
+                <a:off x="4806144" y="2397096"/>
+                <a:ext cx="144000" cy="128520"/>
+              </p14:xfrm>
+            </p:contentPart>
+          </mc:Choice>
+          <mc:Fallback>
+            <p:pic>
+              <p:nvPicPr>
+                <p:cNvPr id="1031" name="Ink 1030">
+                  <a:extLst>
+                    <a:ext uri="{FF2B5EF4-FFF2-40B4-BE49-F238E27FC236}">
+                      <a16:creationId xmlns:a16="http://schemas.microsoft.com/office/drawing/2014/main" id="{CB972051-45EE-2AA7-F298-DAFC36B3C453}"/>
+                    </a:ext>
+                  </a:extLst>
+                </p:cNvPr>
+                <p:cNvPicPr/>
+                <p:nvPr/>
+              </p:nvPicPr>
+              <p:blipFill>
+                <a:blip r:embed="rId72"/>
+                <a:stretch>
+                  <a:fillRect/>
+                </a:stretch>
+              </p:blipFill>
+              <p:spPr>
+                <a:xfrm>
+                  <a:off x="4800024" y="2390976"/>
+                  <a:ext cx="156240" cy="140760"/>
+                </a:xfrm>
+                <a:prstGeom prst="rect">
+                  <a:avLst/>
+                </a:prstGeom>
+              </p:spPr>
+            </p:pic>
+          </mc:Fallback>
+        </mc:AlternateContent>
+        <mc:AlternateContent xmlns:mc="http://schemas.openxmlformats.org/markup-compatibility/2006">
+          <mc:Choice xmlns:p14="http://schemas.microsoft.com/office/powerpoint/2010/main" Requires="p14">
+            <p:contentPart p14:bwMode="auto" r:id="rId73">
+              <p14:nvContentPartPr>
+                <p14:cNvPr id="1032" name="Ink 1031">
+                  <a:extLst>
+                    <a:ext uri="{FF2B5EF4-FFF2-40B4-BE49-F238E27FC236}">
+                      <a16:creationId xmlns:a16="http://schemas.microsoft.com/office/drawing/2014/main" id="{E0B4A722-B31F-E202-6CAE-6A538D7FA38A}"/>
+                    </a:ext>
+                  </a:extLst>
+                </p14:cNvPr>
+                <p14:cNvContentPartPr/>
+                <p14:nvPr/>
+              </p14:nvContentPartPr>
+              <p14:xfrm>
+                <a:off x="4679784" y="2312496"/>
+                <a:ext cx="378360" cy="349200"/>
+              </p14:xfrm>
+            </p:contentPart>
+          </mc:Choice>
+          <mc:Fallback>
+            <p:pic>
+              <p:nvPicPr>
+                <p:cNvPr id="1032" name="Ink 1031">
+                  <a:extLst>
+                    <a:ext uri="{FF2B5EF4-FFF2-40B4-BE49-F238E27FC236}">
+                      <a16:creationId xmlns:a16="http://schemas.microsoft.com/office/drawing/2014/main" id="{E0B4A722-B31F-E202-6CAE-6A538D7FA38A}"/>
+                    </a:ext>
+                  </a:extLst>
+                </p:cNvPr>
+                <p:cNvPicPr/>
+                <p:nvPr/>
+              </p:nvPicPr>
+              <p:blipFill>
+                <a:blip r:embed="rId74"/>
+                <a:stretch>
+                  <a:fillRect/>
+                </a:stretch>
+              </p:blipFill>
+              <p:spPr>
+                <a:xfrm>
+                  <a:off x="4673664" y="2306376"/>
+                  <a:ext cx="390600" cy="361440"/>
+                </a:xfrm>
+                <a:prstGeom prst="rect">
+                  <a:avLst/>
+                </a:prstGeom>
+              </p:spPr>
+            </p:pic>
+          </mc:Fallback>
+        </mc:AlternateContent>
+        <mc:AlternateContent xmlns:mc="http://schemas.openxmlformats.org/markup-compatibility/2006">
+          <mc:Choice xmlns:p14="http://schemas.microsoft.com/office/powerpoint/2010/main" Requires="p14">
+            <p:contentPart p14:bwMode="auto" r:id="rId75">
+              <p14:nvContentPartPr>
+                <p14:cNvPr id="1037" name="Ink 1036">
+                  <a:extLst>
+                    <a:ext uri="{FF2B5EF4-FFF2-40B4-BE49-F238E27FC236}">
+                      <a16:creationId xmlns:a16="http://schemas.microsoft.com/office/drawing/2014/main" id="{471621AC-3625-4B18-AEB3-F2F5ADD4CC32}"/>
+                    </a:ext>
+                  </a:extLst>
+                </p14:cNvPr>
+                <p14:cNvContentPartPr/>
+                <p14:nvPr/>
+              </p14:nvContentPartPr>
+              <p14:xfrm>
+                <a:off x="1279944" y="2623896"/>
+                <a:ext cx="218880" cy="343080"/>
+              </p14:xfrm>
+            </p:contentPart>
+          </mc:Choice>
+          <mc:Fallback>
+            <p:pic>
+              <p:nvPicPr>
+                <p:cNvPr id="1037" name="Ink 1036">
+                  <a:extLst>
+                    <a:ext uri="{FF2B5EF4-FFF2-40B4-BE49-F238E27FC236}">
+                      <a16:creationId xmlns:a16="http://schemas.microsoft.com/office/drawing/2014/main" id="{471621AC-3625-4B18-AEB3-F2F5ADD4CC32}"/>
+                    </a:ext>
+                  </a:extLst>
+                </p:cNvPr>
+                <p:cNvPicPr/>
+                <p:nvPr/>
+              </p:nvPicPr>
+              <p:blipFill>
+                <a:blip r:embed="rId76"/>
+                <a:stretch>
+                  <a:fillRect/>
+                </a:stretch>
+              </p:blipFill>
+              <p:spPr>
+                <a:xfrm>
+                  <a:off x="1273824" y="2617776"/>
+                  <a:ext cx="231120" cy="355320"/>
+                </a:xfrm>
+                <a:prstGeom prst="rect">
+                  <a:avLst/>
+                </a:prstGeom>
+              </p:spPr>
+            </p:pic>
+          </mc:Fallback>
+        </mc:AlternateContent>
+        <mc:AlternateContent xmlns:mc="http://schemas.openxmlformats.org/markup-compatibility/2006">
+          <mc:Choice xmlns:p14="http://schemas.microsoft.com/office/powerpoint/2010/main" Requires="p14">
+            <p:contentPart p14:bwMode="auto" r:id="rId77">
+              <p14:nvContentPartPr>
+                <p14:cNvPr id="1038" name="Ink 1037">
+                  <a:extLst>
+                    <a:ext uri="{FF2B5EF4-FFF2-40B4-BE49-F238E27FC236}">
+                      <a16:creationId xmlns:a16="http://schemas.microsoft.com/office/drawing/2014/main" id="{6ADC05CF-0233-DA91-9722-2E9EAF911F2C}"/>
+                    </a:ext>
+                  </a:extLst>
+                </p14:cNvPr>
+                <p14:cNvContentPartPr/>
+                <p14:nvPr/>
+              </p14:nvContentPartPr>
+              <p14:xfrm>
+                <a:off x="1417104" y="2852856"/>
+                <a:ext cx="164520" cy="93600"/>
+              </p14:xfrm>
+            </p:contentPart>
+          </mc:Choice>
+          <mc:Fallback>
+            <p:pic>
+              <p:nvPicPr>
+                <p:cNvPr id="1038" name="Ink 1037">
+                  <a:extLst>
+                    <a:ext uri="{FF2B5EF4-FFF2-40B4-BE49-F238E27FC236}">
+                      <a16:creationId xmlns:a16="http://schemas.microsoft.com/office/drawing/2014/main" id="{6ADC05CF-0233-DA91-9722-2E9EAF911F2C}"/>
+                    </a:ext>
+                  </a:extLst>
+                </p:cNvPr>
+                <p:cNvPicPr/>
+                <p:nvPr/>
+              </p:nvPicPr>
+              <p:blipFill>
+                <a:blip r:embed="rId78"/>
+                <a:stretch>
+                  <a:fillRect/>
+                </a:stretch>
+              </p:blipFill>
+              <p:spPr>
+                <a:xfrm>
+                  <a:off x="1410984" y="2846736"/>
+                  <a:ext cx="176760" cy="105840"/>
+                </a:xfrm>
+                <a:prstGeom prst="rect">
+                  <a:avLst/>
+                </a:prstGeom>
+              </p:spPr>
+            </p:pic>
+          </mc:Fallback>
+        </mc:AlternateContent>
+        <mc:AlternateContent xmlns:mc="http://schemas.openxmlformats.org/markup-compatibility/2006">
+          <mc:Choice xmlns:p14="http://schemas.microsoft.com/office/powerpoint/2010/main" Requires="p14">
+            <p:contentPart p14:bwMode="auto" r:id="rId79">
+              <p14:nvContentPartPr>
+                <p14:cNvPr id="1039" name="Ink 1038">
+                  <a:extLst>
+                    <a:ext uri="{FF2B5EF4-FFF2-40B4-BE49-F238E27FC236}">
+                      <a16:creationId xmlns:a16="http://schemas.microsoft.com/office/drawing/2014/main" id="{F8F68E0A-A8DE-4ECC-C342-520D8286B7F9}"/>
+                    </a:ext>
+                  </a:extLst>
+                </p14:cNvPr>
+                <p14:cNvContentPartPr/>
+                <p14:nvPr/>
+              </p14:nvContentPartPr>
+              <p14:xfrm>
+                <a:off x="1597824" y="2786976"/>
+                <a:ext cx="204840" cy="186840"/>
+              </p14:xfrm>
+            </p:contentPart>
+          </mc:Choice>
+          <mc:Fallback>
+            <p:pic>
+              <p:nvPicPr>
+                <p:cNvPr id="1039" name="Ink 1038">
+                  <a:extLst>
+                    <a:ext uri="{FF2B5EF4-FFF2-40B4-BE49-F238E27FC236}">
+                      <a16:creationId xmlns:a16="http://schemas.microsoft.com/office/drawing/2014/main" id="{F8F68E0A-A8DE-4ECC-C342-520D8286B7F9}"/>
+                    </a:ext>
+                  </a:extLst>
+                </p:cNvPr>
+                <p:cNvPicPr/>
+                <p:nvPr/>
+              </p:nvPicPr>
+              <p:blipFill>
+                <a:blip r:embed="rId80"/>
+                <a:stretch>
+                  <a:fillRect/>
+                </a:stretch>
+              </p:blipFill>
+              <p:spPr>
+                <a:xfrm>
+                  <a:off x="1591704" y="2780856"/>
+                  <a:ext cx="217080" cy="199080"/>
+                </a:xfrm>
+                <a:prstGeom prst="rect">
+                  <a:avLst/>
+                </a:prstGeom>
+              </p:spPr>
+            </p:pic>
+          </mc:Fallback>
+        </mc:AlternateContent>
+        <mc:AlternateContent xmlns:mc="http://schemas.openxmlformats.org/markup-compatibility/2006">
+          <mc:Choice xmlns:p14="http://schemas.microsoft.com/office/powerpoint/2010/main" Requires="p14">
+            <p:contentPart p14:bwMode="auto" r:id="rId81">
+              <p14:nvContentPartPr>
+                <p14:cNvPr id="1040" name="Ink 1039">
+                  <a:extLst>
+                    <a:ext uri="{FF2B5EF4-FFF2-40B4-BE49-F238E27FC236}">
+                      <a16:creationId xmlns:a16="http://schemas.microsoft.com/office/drawing/2014/main" id="{98E8ECED-763B-D004-C197-34A7BB3E68F3}"/>
+                    </a:ext>
+                  </a:extLst>
+                </p14:cNvPr>
+                <p14:cNvContentPartPr/>
+                <p14:nvPr/>
+              </p14:nvContentPartPr>
+              <p14:xfrm>
+                <a:off x="1773504" y="2806776"/>
+                <a:ext cx="344880" cy="147600"/>
+              </p14:xfrm>
+            </p:contentPart>
+          </mc:Choice>
+          <mc:Fallback>
+            <p:pic>
+              <p:nvPicPr>
+                <p:cNvPr id="1040" name="Ink 1039">
+                  <a:extLst>
+                    <a:ext uri="{FF2B5EF4-FFF2-40B4-BE49-F238E27FC236}">
+                      <a16:creationId xmlns:a16="http://schemas.microsoft.com/office/drawing/2014/main" id="{98E8ECED-763B-D004-C197-34A7BB3E68F3}"/>
+                    </a:ext>
+                  </a:extLst>
+                </p:cNvPr>
+                <p:cNvPicPr/>
+                <p:nvPr/>
+              </p:nvPicPr>
+              <p:blipFill>
+                <a:blip r:embed="rId82"/>
+                <a:stretch>
+                  <a:fillRect/>
+                </a:stretch>
+              </p:blipFill>
+              <p:spPr>
+                <a:xfrm>
+                  <a:off x="1767384" y="2800656"/>
+                  <a:ext cx="357120" cy="159840"/>
+                </a:xfrm>
+                <a:prstGeom prst="rect">
+                  <a:avLst/>
+                </a:prstGeom>
+              </p:spPr>
+            </p:pic>
+          </mc:Fallback>
+        </mc:AlternateContent>
+        <mc:AlternateContent xmlns:mc="http://schemas.openxmlformats.org/markup-compatibility/2006">
+          <mc:Choice xmlns:p14="http://schemas.microsoft.com/office/powerpoint/2010/main" Requires="p14">
+            <p:contentPart p14:bwMode="auto" r:id="rId83">
+              <p14:nvContentPartPr>
+                <p14:cNvPr id="1041" name="Ink 1040">
+                  <a:extLst>
+                    <a:ext uri="{FF2B5EF4-FFF2-40B4-BE49-F238E27FC236}">
+                      <a16:creationId xmlns:a16="http://schemas.microsoft.com/office/drawing/2014/main" id="{366458C5-9668-7366-0A65-998AE4E04058}"/>
+                    </a:ext>
+                  </a:extLst>
+                </p14:cNvPr>
+                <p14:cNvContentPartPr/>
+                <p14:nvPr/>
+              </p14:nvContentPartPr>
+              <p14:xfrm>
+                <a:off x="2065824" y="2688336"/>
+                <a:ext cx="232560" cy="257040"/>
+              </p14:xfrm>
+            </p:contentPart>
+          </mc:Choice>
+          <mc:Fallback>
+            <p:pic>
+              <p:nvPicPr>
+                <p:cNvPr id="1041" name="Ink 1040">
+                  <a:extLst>
+                    <a:ext uri="{FF2B5EF4-FFF2-40B4-BE49-F238E27FC236}">
+                      <a16:creationId xmlns:a16="http://schemas.microsoft.com/office/drawing/2014/main" id="{366458C5-9668-7366-0A65-998AE4E04058}"/>
+                    </a:ext>
+                  </a:extLst>
+                </p:cNvPr>
+                <p:cNvPicPr/>
+                <p:nvPr/>
+              </p:nvPicPr>
+              <p:blipFill>
+                <a:blip r:embed="rId84"/>
+                <a:stretch>
+                  <a:fillRect/>
+                </a:stretch>
+              </p:blipFill>
+              <p:spPr>
+                <a:xfrm>
+                  <a:off x="2059704" y="2682216"/>
+                  <a:ext cx="244800" cy="269280"/>
+                </a:xfrm>
+                <a:prstGeom prst="rect">
+                  <a:avLst/>
+                </a:prstGeom>
+              </p:spPr>
+            </p:pic>
+          </mc:Fallback>
+        </mc:AlternateContent>
+        <mc:AlternateContent xmlns:mc="http://schemas.openxmlformats.org/markup-compatibility/2006">
+          <mc:Choice xmlns:p14="http://schemas.microsoft.com/office/powerpoint/2010/main" Requires="p14">
+            <p:contentPart p14:bwMode="auto" r:id="rId85">
+              <p14:nvContentPartPr>
+                <p14:cNvPr id="1042" name="Ink 1041">
+                  <a:extLst>
+                    <a:ext uri="{FF2B5EF4-FFF2-40B4-BE49-F238E27FC236}">
+                      <a16:creationId xmlns:a16="http://schemas.microsoft.com/office/drawing/2014/main" id="{3DC3FA77-D9B9-A1B6-2723-D03A613877AD}"/>
+                    </a:ext>
+                  </a:extLst>
+                </p14:cNvPr>
+                <p14:cNvContentPartPr/>
+                <p14:nvPr/>
+              </p14:nvContentPartPr>
+              <p14:xfrm>
+                <a:off x="1589184" y="2980656"/>
+                <a:ext cx="164160" cy="202680"/>
+              </p14:xfrm>
+            </p:contentPart>
+          </mc:Choice>
+          <mc:Fallback>
+            <p:pic>
+              <p:nvPicPr>
+                <p:cNvPr id="1042" name="Ink 1041">
+                  <a:extLst>
+                    <a:ext uri="{FF2B5EF4-FFF2-40B4-BE49-F238E27FC236}">
+                      <a16:creationId xmlns:a16="http://schemas.microsoft.com/office/drawing/2014/main" id="{3DC3FA77-D9B9-A1B6-2723-D03A613877AD}"/>
+                    </a:ext>
+                  </a:extLst>
+                </p:cNvPr>
+                <p:cNvPicPr/>
+                <p:nvPr/>
+              </p:nvPicPr>
+              <p:blipFill>
+                <a:blip r:embed="rId86"/>
+                <a:stretch>
+                  <a:fillRect/>
+                </a:stretch>
+              </p:blipFill>
+              <p:spPr>
+                <a:xfrm>
+                  <a:off x="1583064" y="2974536"/>
+                  <a:ext cx="176400" cy="214920"/>
+                </a:xfrm>
+                <a:prstGeom prst="rect">
+                  <a:avLst/>
+                </a:prstGeom>
+              </p:spPr>
+            </p:pic>
+          </mc:Fallback>
+        </mc:AlternateContent>
+        <mc:AlternateContent xmlns:mc="http://schemas.openxmlformats.org/markup-compatibility/2006">
+          <mc:Choice xmlns:p14="http://schemas.microsoft.com/office/powerpoint/2010/main" Requires="p14">
+            <p:contentPart p14:bwMode="auto" r:id="rId87">
+              <p14:nvContentPartPr>
+                <p14:cNvPr id="1043" name="Ink 1042">
+                  <a:extLst>
+                    <a:ext uri="{FF2B5EF4-FFF2-40B4-BE49-F238E27FC236}">
+                      <a16:creationId xmlns:a16="http://schemas.microsoft.com/office/drawing/2014/main" id="{77F6B5CE-CB4B-D89B-D481-2636DDF19F59}"/>
+                    </a:ext>
+                  </a:extLst>
+                </p14:cNvPr>
+                <p14:cNvContentPartPr/>
+                <p14:nvPr/>
+              </p14:nvContentPartPr>
+              <p14:xfrm>
+                <a:off x="1831464" y="3117816"/>
+                <a:ext cx="88560" cy="75600"/>
+              </p14:xfrm>
+            </p:contentPart>
+          </mc:Choice>
+          <mc:Fallback>
+            <p:pic>
+              <p:nvPicPr>
+                <p:cNvPr id="1043" name="Ink 1042">
+                  <a:extLst>
+                    <a:ext uri="{FF2B5EF4-FFF2-40B4-BE49-F238E27FC236}">
+                      <a16:creationId xmlns:a16="http://schemas.microsoft.com/office/drawing/2014/main" id="{77F6B5CE-CB4B-D89B-D481-2636DDF19F59}"/>
+                    </a:ext>
+                  </a:extLst>
+                </p:cNvPr>
+                <p:cNvPicPr/>
+                <p:nvPr/>
+              </p:nvPicPr>
+              <p:blipFill>
+                <a:blip r:embed="rId88"/>
+                <a:stretch>
+                  <a:fillRect/>
+                </a:stretch>
+              </p:blipFill>
+              <p:spPr>
+                <a:xfrm>
+                  <a:off x="1825344" y="3111696"/>
+                  <a:ext cx="100800" cy="87840"/>
+                </a:xfrm>
+                <a:prstGeom prst="rect">
+                  <a:avLst/>
+                </a:prstGeom>
+              </p:spPr>
+            </p:pic>
+          </mc:Fallback>
+        </mc:AlternateContent>
+        <mc:AlternateContent xmlns:mc="http://schemas.openxmlformats.org/markup-compatibility/2006">
+          <mc:Choice xmlns:p14="http://schemas.microsoft.com/office/powerpoint/2010/main" Requires="p14">
+            <p:contentPart p14:bwMode="auto" r:id="rId89">
+              <p14:nvContentPartPr>
+                <p14:cNvPr id="1044" name="Ink 1043">
+                  <a:extLst>
+                    <a:ext uri="{FF2B5EF4-FFF2-40B4-BE49-F238E27FC236}">
+                      <a16:creationId xmlns:a16="http://schemas.microsoft.com/office/drawing/2014/main" id="{093715A9-B633-CF7D-C51F-2EE4928BA27D}"/>
+                    </a:ext>
+                  </a:extLst>
+                </p14:cNvPr>
+                <p14:cNvContentPartPr/>
+                <p14:nvPr/>
+              </p14:nvContentPartPr>
+              <p14:xfrm>
+                <a:off x="2105064" y="3135816"/>
+                <a:ext cx="525240" cy="180360"/>
+              </p14:xfrm>
+            </p:contentPart>
+          </mc:Choice>
+          <mc:Fallback>
+            <p:pic>
+              <p:nvPicPr>
+                <p:cNvPr id="1044" name="Ink 1043">
+                  <a:extLst>
+                    <a:ext uri="{FF2B5EF4-FFF2-40B4-BE49-F238E27FC236}">
+                      <a16:creationId xmlns:a16="http://schemas.microsoft.com/office/drawing/2014/main" id="{093715A9-B633-CF7D-C51F-2EE4928BA27D}"/>
+                    </a:ext>
+                  </a:extLst>
+                </p:cNvPr>
+                <p:cNvPicPr/>
+                <p:nvPr/>
+              </p:nvPicPr>
+              <p:blipFill>
+                <a:blip r:embed="rId90"/>
+                <a:stretch>
+                  <a:fillRect/>
+                </a:stretch>
+              </p:blipFill>
+              <p:spPr>
+                <a:xfrm>
+                  <a:off x="2098944" y="3129696"/>
+                  <a:ext cx="537480" cy="192600"/>
+                </a:xfrm>
+                <a:prstGeom prst="rect">
+                  <a:avLst/>
+                </a:prstGeom>
+              </p:spPr>
+            </p:pic>
+          </mc:Fallback>
+        </mc:AlternateContent>
+        <mc:AlternateContent xmlns:mc="http://schemas.openxmlformats.org/markup-compatibility/2006">
+          <mc:Choice xmlns:p14="http://schemas.microsoft.com/office/powerpoint/2010/main" Requires="p14">
+            <p:contentPart p14:bwMode="auto" r:id="rId91">
+              <p14:nvContentPartPr>
+                <p14:cNvPr id="1047" name="Ink 1046">
+                  <a:extLst>
+                    <a:ext uri="{FF2B5EF4-FFF2-40B4-BE49-F238E27FC236}">
+                      <a16:creationId xmlns:a16="http://schemas.microsoft.com/office/drawing/2014/main" id="{CB30D904-DC73-2831-DA0A-1342285085AE}"/>
+                    </a:ext>
+                  </a:extLst>
+                </p14:cNvPr>
+                <p14:cNvContentPartPr/>
+                <p14:nvPr/>
+              </p14:nvContentPartPr>
+              <p14:xfrm>
+                <a:off x="5367384" y="2505456"/>
+                <a:ext cx="385920" cy="774360"/>
+              </p14:xfrm>
+            </p:contentPart>
+          </mc:Choice>
+          <mc:Fallback>
+            <p:pic>
+              <p:nvPicPr>
+                <p:cNvPr id="1047" name="Ink 1046">
+                  <a:extLst>
+                    <a:ext uri="{FF2B5EF4-FFF2-40B4-BE49-F238E27FC236}">
+                      <a16:creationId xmlns:a16="http://schemas.microsoft.com/office/drawing/2014/main" id="{CB30D904-DC73-2831-DA0A-1342285085AE}"/>
+                    </a:ext>
+                  </a:extLst>
+                </p:cNvPr>
+                <p:cNvPicPr/>
+                <p:nvPr/>
+              </p:nvPicPr>
+              <p:blipFill>
+                <a:blip r:embed="rId92"/>
+                <a:stretch>
+                  <a:fillRect/>
+                </a:stretch>
+              </p:blipFill>
+              <p:spPr>
+                <a:xfrm>
+                  <a:off x="5361264" y="2499336"/>
+                  <a:ext cx="398160" cy="786600"/>
+                </a:xfrm>
+                <a:prstGeom prst="rect">
+                  <a:avLst/>
+                </a:prstGeom>
+              </p:spPr>
+            </p:pic>
+          </mc:Fallback>
+        </mc:AlternateContent>
+        <mc:AlternateContent xmlns:mc="http://schemas.openxmlformats.org/markup-compatibility/2006">
+          <mc:Choice xmlns:p14="http://schemas.microsoft.com/office/powerpoint/2010/main" Requires="p14">
+            <p:contentPart p14:bwMode="auto" r:id="rId93">
+              <p14:nvContentPartPr>
+                <p14:cNvPr id="1048" name="Ink 1047">
+                  <a:extLst>
+                    <a:ext uri="{FF2B5EF4-FFF2-40B4-BE49-F238E27FC236}">
+                      <a16:creationId xmlns:a16="http://schemas.microsoft.com/office/drawing/2014/main" id="{8E4FAC05-62B5-FE90-63C2-13665F865BE3}"/>
+                    </a:ext>
+                  </a:extLst>
+                </p14:cNvPr>
+                <p14:cNvContentPartPr/>
+                <p14:nvPr/>
+              </p14:nvContentPartPr>
+              <p14:xfrm>
+                <a:off x="5680584" y="3163896"/>
+                <a:ext cx="123840" cy="186120"/>
+              </p14:xfrm>
+            </p:contentPart>
+          </mc:Choice>
+          <mc:Fallback>
+            <p:pic>
+              <p:nvPicPr>
+                <p:cNvPr id="1048" name="Ink 1047">
+                  <a:extLst>
+                    <a:ext uri="{FF2B5EF4-FFF2-40B4-BE49-F238E27FC236}">
+                      <a16:creationId xmlns:a16="http://schemas.microsoft.com/office/drawing/2014/main" id="{8E4FAC05-62B5-FE90-63C2-13665F865BE3}"/>
+                    </a:ext>
+                  </a:extLst>
+                </p:cNvPr>
+                <p:cNvPicPr/>
+                <p:nvPr/>
+              </p:nvPicPr>
+              <p:blipFill>
+                <a:blip r:embed="rId94"/>
+                <a:stretch>
+                  <a:fillRect/>
+                </a:stretch>
+              </p:blipFill>
+              <p:spPr>
+                <a:xfrm>
+                  <a:off x="5674464" y="3157776"/>
+                  <a:ext cx="136080" cy="198360"/>
+                </a:xfrm>
+                <a:prstGeom prst="rect">
+                  <a:avLst/>
+                </a:prstGeom>
+              </p:spPr>
+            </p:pic>
+          </mc:Fallback>
+        </mc:AlternateContent>
+        <mc:AlternateContent xmlns:mc="http://schemas.openxmlformats.org/markup-compatibility/2006">
+          <mc:Choice xmlns:p14="http://schemas.microsoft.com/office/powerpoint/2010/main" Requires="p14">
+            <p:contentPart p14:bwMode="auto" r:id="rId95">
+              <p14:nvContentPartPr>
+                <p14:cNvPr id="1049" name="Ink 1048">
+                  <a:extLst>
+                    <a:ext uri="{FF2B5EF4-FFF2-40B4-BE49-F238E27FC236}">
+                      <a16:creationId xmlns:a16="http://schemas.microsoft.com/office/drawing/2014/main" id="{BB3C2ECA-70D7-D0A1-66EA-35409919B3C1}"/>
+                    </a:ext>
+                  </a:extLst>
+                </p14:cNvPr>
+                <p14:cNvContentPartPr/>
+                <p14:nvPr/>
+              </p14:nvContentPartPr>
+              <p14:xfrm>
+                <a:off x="2724624" y="2870856"/>
+                <a:ext cx="3109320" cy="722160"/>
+              </p14:xfrm>
+            </p:contentPart>
+          </mc:Choice>
+          <mc:Fallback>
+            <p:pic>
+              <p:nvPicPr>
+                <p:cNvPr id="1049" name="Ink 1048">
+                  <a:extLst>
+                    <a:ext uri="{FF2B5EF4-FFF2-40B4-BE49-F238E27FC236}">
+                      <a16:creationId xmlns:a16="http://schemas.microsoft.com/office/drawing/2014/main" id="{BB3C2ECA-70D7-D0A1-66EA-35409919B3C1}"/>
+                    </a:ext>
+                  </a:extLst>
+                </p:cNvPr>
+                <p:cNvPicPr/>
+                <p:nvPr/>
+              </p:nvPicPr>
+              <p:blipFill>
+                <a:blip r:embed="rId96"/>
+                <a:stretch>
+                  <a:fillRect/>
+                </a:stretch>
+              </p:blipFill>
+              <p:spPr>
+                <a:xfrm>
+                  <a:off x="2718504" y="2864736"/>
+                  <a:ext cx="3121560" cy="734400"/>
+                </a:xfrm>
+                <a:prstGeom prst="rect">
+                  <a:avLst/>
+                </a:prstGeom>
+              </p:spPr>
+            </p:pic>
+          </mc:Fallback>
+        </mc:AlternateContent>
+        <mc:AlternateContent xmlns:mc="http://schemas.openxmlformats.org/markup-compatibility/2006">
+          <mc:Choice xmlns:p14="http://schemas.microsoft.com/office/powerpoint/2010/main" Requires="p14">
+            <p:contentPart p14:bwMode="auto" r:id="rId97">
+              <p14:nvContentPartPr>
+                <p14:cNvPr id="1050" name="Ink 1049">
+                  <a:extLst>
+                    <a:ext uri="{FF2B5EF4-FFF2-40B4-BE49-F238E27FC236}">
+                      <a16:creationId xmlns:a16="http://schemas.microsoft.com/office/drawing/2014/main" id="{9D69599E-EF22-3818-D3EF-76B6D07585E9}"/>
+                    </a:ext>
+                  </a:extLst>
+                </p14:cNvPr>
+                <p14:cNvContentPartPr/>
+                <p14:nvPr/>
+              </p14:nvContentPartPr>
+              <p14:xfrm>
+                <a:off x="2665224" y="2797776"/>
+                <a:ext cx="348480" cy="263520"/>
+              </p14:xfrm>
+            </p:contentPart>
+          </mc:Choice>
+          <mc:Fallback>
+            <p:pic>
+              <p:nvPicPr>
+                <p:cNvPr id="1050" name="Ink 1049">
+                  <a:extLst>
+                    <a:ext uri="{FF2B5EF4-FFF2-40B4-BE49-F238E27FC236}">
+                      <a16:creationId xmlns:a16="http://schemas.microsoft.com/office/drawing/2014/main" id="{9D69599E-EF22-3818-D3EF-76B6D07585E9}"/>
+                    </a:ext>
+                  </a:extLst>
+                </p:cNvPr>
+                <p:cNvPicPr/>
+                <p:nvPr/>
+              </p:nvPicPr>
+              <p:blipFill>
+                <a:blip r:embed="rId98"/>
+                <a:stretch>
+                  <a:fillRect/>
+                </a:stretch>
+              </p:blipFill>
+              <p:spPr>
+                <a:xfrm>
+                  <a:off x="2659104" y="2791656"/>
+                  <a:ext cx="360720" cy="275760"/>
+                </a:xfrm>
+                <a:prstGeom prst="rect">
+                  <a:avLst/>
+                </a:prstGeom>
+              </p:spPr>
+            </p:pic>
+          </mc:Fallback>
+        </mc:AlternateContent>
+        <mc:AlternateContent xmlns:mc="http://schemas.openxmlformats.org/markup-compatibility/2006">
+          <mc:Choice xmlns:p14="http://schemas.microsoft.com/office/powerpoint/2010/main" Requires="p14">
+            <p:contentPart p14:bwMode="auto" r:id="rId99">
+              <p14:nvContentPartPr>
+                <p14:cNvPr id="1052" name="Ink 1051">
+                  <a:extLst>
+                    <a:ext uri="{FF2B5EF4-FFF2-40B4-BE49-F238E27FC236}">
+                      <a16:creationId xmlns:a16="http://schemas.microsoft.com/office/drawing/2014/main" id="{48046E5E-71DC-7762-A220-FF2533986D4B}"/>
+                    </a:ext>
+                  </a:extLst>
+                </p14:cNvPr>
+                <p14:cNvContentPartPr/>
+                <p14:nvPr/>
+              </p14:nvContentPartPr>
+              <p14:xfrm>
+                <a:off x="876384" y="2448576"/>
+                <a:ext cx="275760" cy="441000"/>
+              </p14:xfrm>
+            </p:contentPart>
+          </mc:Choice>
+          <mc:Fallback>
+            <p:pic>
+              <p:nvPicPr>
+                <p:cNvPr id="1052" name="Ink 1051">
+                  <a:extLst>
+                    <a:ext uri="{FF2B5EF4-FFF2-40B4-BE49-F238E27FC236}">
+                      <a16:creationId xmlns:a16="http://schemas.microsoft.com/office/drawing/2014/main" id="{48046E5E-71DC-7762-A220-FF2533986D4B}"/>
+                    </a:ext>
+                  </a:extLst>
+                </p:cNvPr>
+                <p:cNvPicPr/>
+                <p:nvPr/>
+              </p:nvPicPr>
+              <p:blipFill>
+                <a:blip r:embed="rId100"/>
+                <a:stretch>
+                  <a:fillRect/>
+                </a:stretch>
+              </p:blipFill>
+              <p:spPr>
+                <a:xfrm>
+                  <a:off x="870264" y="2442456"/>
+                  <a:ext cx="288000" cy="453240"/>
+                </a:xfrm>
+                <a:prstGeom prst="rect">
+                  <a:avLst/>
+                </a:prstGeom>
+              </p:spPr>
+            </p:pic>
+          </mc:Fallback>
+        </mc:AlternateContent>
+        <mc:AlternateContent xmlns:mc="http://schemas.openxmlformats.org/markup-compatibility/2006">
+          <mc:Choice xmlns:p14="http://schemas.microsoft.com/office/powerpoint/2010/main" Requires="p14">
+            <p:contentPart p14:bwMode="auto" r:id="rId101">
+              <p14:nvContentPartPr>
+                <p14:cNvPr id="1053" name="Ink 1052">
+                  <a:extLst>
+                    <a:ext uri="{FF2B5EF4-FFF2-40B4-BE49-F238E27FC236}">
+                      <a16:creationId xmlns:a16="http://schemas.microsoft.com/office/drawing/2014/main" id="{970476AB-C252-F6DE-996A-E1E166EA93E7}"/>
+                    </a:ext>
+                  </a:extLst>
+                </p14:cNvPr>
+                <p14:cNvContentPartPr/>
+                <p14:nvPr/>
+              </p14:nvContentPartPr>
+              <p14:xfrm>
+                <a:off x="909144" y="1961136"/>
+                <a:ext cx="203400" cy="151560"/>
+              </p14:xfrm>
+            </p:contentPart>
+          </mc:Choice>
+          <mc:Fallback>
+            <p:pic>
+              <p:nvPicPr>
+                <p:cNvPr id="1053" name="Ink 1052">
+                  <a:extLst>
+                    <a:ext uri="{FF2B5EF4-FFF2-40B4-BE49-F238E27FC236}">
+                      <a16:creationId xmlns:a16="http://schemas.microsoft.com/office/drawing/2014/main" id="{970476AB-C252-F6DE-996A-E1E166EA93E7}"/>
+                    </a:ext>
+                  </a:extLst>
+                </p:cNvPr>
+                <p:cNvPicPr/>
+                <p:nvPr/>
+              </p:nvPicPr>
+              <p:blipFill>
+                <a:blip r:embed="rId102"/>
+                <a:stretch>
+                  <a:fillRect/>
+                </a:stretch>
+              </p:blipFill>
+              <p:spPr>
+                <a:xfrm>
+                  <a:off x="903024" y="1955016"/>
+                  <a:ext cx="215640" cy="163800"/>
+                </a:xfrm>
+                <a:prstGeom prst="rect">
+                  <a:avLst/>
+                </a:prstGeom>
+              </p:spPr>
+            </p:pic>
+          </mc:Fallback>
+        </mc:AlternateContent>
+        <mc:AlternateContent xmlns:mc="http://schemas.openxmlformats.org/markup-compatibility/2006">
+          <mc:Choice xmlns:p14="http://schemas.microsoft.com/office/powerpoint/2010/main" Requires="p14">
+            <p:contentPart p14:bwMode="auto" r:id="rId103">
+              <p14:nvContentPartPr>
+                <p14:cNvPr id="1054" name="Ink 1053">
+                  <a:extLst>
+                    <a:ext uri="{FF2B5EF4-FFF2-40B4-BE49-F238E27FC236}">
+                      <a16:creationId xmlns:a16="http://schemas.microsoft.com/office/drawing/2014/main" id="{B5715870-733B-C348-1183-10C18CD65049}"/>
+                    </a:ext>
+                  </a:extLst>
+                </p14:cNvPr>
+                <p14:cNvContentPartPr/>
+                <p14:nvPr/>
+              </p14:nvContentPartPr>
+              <p14:xfrm>
+                <a:off x="1051344" y="1996056"/>
+                <a:ext cx="177840" cy="118440"/>
+              </p14:xfrm>
+            </p:contentPart>
+          </mc:Choice>
+          <mc:Fallback>
+            <p:pic>
+              <p:nvPicPr>
+                <p:cNvPr id="1054" name="Ink 1053">
+                  <a:extLst>
+                    <a:ext uri="{FF2B5EF4-FFF2-40B4-BE49-F238E27FC236}">
+                      <a16:creationId xmlns:a16="http://schemas.microsoft.com/office/drawing/2014/main" id="{B5715870-733B-C348-1183-10C18CD65049}"/>
+                    </a:ext>
+                  </a:extLst>
+                </p:cNvPr>
+                <p:cNvPicPr/>
+                <p:nvPr/>
+              </p:nvPicPr>
+              <p:blipFill>
+                <a:blip r:embed="rId104"/>
+                <a:stretch>
+                  <a:fillRect/>
+                </a:stretch>
+              </p:blipFill>
+              <p:spPr>
+                <a:xfrm>
+                  <a:off x="1045224" y="1989936"/>
+                  <a:ext cx="190080" cy="130680"/>
+                </a:xfrm>
+                <a:prstGeom prst="rect">
+                  <a:avLst/>
+                </a:prstGeom>
+              </p:spPr>
+            </p:pic>
+          </mc:Fallback>
+        </mc:AlternateContent>
+        <mc:AlternateContent xmlns:mc="http://schemas.openxmlformats.org/markup-compatibility/2006">
+          <mc:Choice xmlns:p14="http://schemas.microsoft.com/office/powerpoint/2010/main" Requires="p14">
+            <p:contentPart p14:bwMode="auto" r:id="rId105">
+              <p14:nvContentPartPr>
+                <p14:cNvPr id="1055" name="Ink 1054">
+                  <a:extLst>
+                    <a:ext uri="{FF2B5EF4-FFF2-40B4-BE49-F238E27FC236}">
+                      <a16:creationId xmlns:a16="http://schemas.microsoft.com/office/drawing/2014/main" id="{ABDD4491-8CF0-4A4C-402E-BA621231A52D}"/>
+                    </a:ext>
+                  </a:extLst>
+                </p14:cNvPr>
+                <p14:cNvContentPartPr/>
+                <p14:nvPr/>
+              </p14:nvContentPartPr>
+              <p14:xfrm>
+                <a:off x="1215864" y="1954296"/>
+                <a:ext cx="175680" cy="30240"/>
+              </p14:xfrm>
+            </p:contentPart>
+          </mc:Choice>
+          <mc:Fallback>
+            <p:pic>
+              <p:nvPicPr>
+                <p:cNvPr id="1055" name="Ink 1054">
+                  <a:extLst>
+                    <a:ext uri="{FF2B5EF4-FFF2-40B4-BE49-F238E27FC236}">
+                      <a16:creationId xmlns:a16="http://schemas.microsoft.com/office/drawing/2014/main" id="{ABDD4491-8CF0-4A4C-402E-BA621231A52D}"/>
+                    </a:ext>
+                  </a:extLst>
+                </p:cNvPr>
+                <p:cNvPicPr/>
+                <p:nvPr/>
+              </p:nvPicPr>
+              <p:blipFill>
+                <a:blip r:embed="rId106"/>
+                <a:stretch>
+                  <a:fillRect/>
+                </a:stretch>
+              </p:blipFill>
+              <p:spPr>
+                <a:xfrm>
+                  <a:off x="1209744" y="1948176"/>
+                  <a:ext cx="187920" cy="42480"/>
+                </a:xfrm>
+                <a:prstGeom prst="rect">
+                  <a:avLst/>
+                </a:prstGeom>
+              </p:spPr>
+            </p:pic>
+          </mc:Fallback>
+        </mc:AlternateContent>
+        <mc:AlternateContent xmlns:mc="http://schemas.openxmlformats.org/markup-compatibility/2006">
+          <mc:Choice xmlns:p14="http://schemas.microsoft.com/office/powerpoint/2010/main" Requires="p14">
+            <p:contentPart p14:bwMode="auto" r:id="rId107">
+              <p14:nvContentPartPr>
+                <p14:cNvPr id="1056" name="Ink 1055">
+                  <a:extLst>
+                    <a:ext uri="{FF2B5EF4-FFF2-40B4-BE49-F238E27FC236}">
+                      <a16:creationId xmlns:a16="http://schemas.microsoft.com/office/drawing/2014/main" id="{85DF98F3-4E76-C7A9-4160-14AC94E92983}"/>
+                    </a:ext>
+                  </a:extLst>
+                </p14:cNvPr>
+                <p14:cNvContentPartPr/>
+                <p14:nvPr/>
+              </p14:nvContentPartPr>
+              <p14:xfrm>
+                <a:off x="1362384" y="1965456"/>
+                <a:ext cx="36720" cy="115920"/>
+              </p14:xfrm>
+            </p:contentPart>
+          </mc:Choice>
+          <mc:Fallback>
+            <p:pic>
+              <p:nvPicPr>
+                <p:cNvPr id="1056" name="Ink 1055">
+                  <a:extLst>
+                    <a:ext uri="{FF2B5EF4-FFF2-40B4-BE49-F238E27FC236}">
+                      <a16:creationId xmlns:a16="http://schemas.microsoft.com/office/drawing/2014/main" id="{85DF98F3-4E76-C7A9-4160-14AC94E92983}"/>
+                    </a:ext>
+                  </a:extLst>
+                </p:cNvPr>
+                <p:cNvPicPr/>
+                <p:nvPr/>
+              </p:nvPicPr>
+              <p:blipFill>
+                <a:blip r:embed="rId108"/>
+                <a:stretch>
+                  <a:fillRect/>
+                </a:stretch>
+              </p:blipFill>
+              <p:spPr>
+                <a:xfrm>
+                  <a:off x="1356264" y="1959336"/>
+                  <a:ext cx="48960" cy="128160"/>
+                </a:xfrm>
+                <a:prstGeom prst="rect">
+                  <a:avLst/>
+                </a:prstGeom>
+              </p:spPr>
+            </p:pic>
+          </mc:Fallback>
+        </mc:AlternateContent>
+        <mc:AlternateContent xmlns:mc="http://schemas.openxmlformats.org/markup-compatibility/2006">
+          <mc:Choice xmlns:p14="http://schemas.microsoft.com/office/powerpoint/2010/main" Requires="p14">
+            <p:contentPart p14:bwMode="auto" r:id="rId109">
+              <p14:nvContentPartPr>
+                <p14:cNvPr id="1057" name="Ink 1056">
+                  <a:extLst>
+                    <a:ext uri="{FF2B5EF4-FFF2-40B4-BE49-F238E27FC236}">
+                      <a16:creationId xmlns:a16="http://schemas.microsoft.com/office/drawing/2014/main" id="{9E0F1013-82F0-252A-05EF-1ED562C2ECB7}"/>
+                    </a:ext>
+                  </a:extLst>
+                </p14:cNvPr>
+                <p14:cNvContentPartPr/>
+                <p14:nvPr/>
+              </p14:nvContentPartPr>
+              <p14:xfrm>
+                <a:off x="1544904" y="2004696"/>
+                <a:ext cx="241920" cy="94320"/>
+              </p14:xfrm>
+            </p:contentPart>
+          </mc:Choice>
+          <mc:Fallback>
+            <p:pic>
+              <p:nvPicPr>
+                <p:cNvPr id="1057" name="Ink 1056">
+                  <a:extLst>
+                    <a:ext uri="{FF2B5EF4-FFF2-40B4-BE49-F238E27FC236}">
+                      <a16:creationId xmlns:a16="http://schemas.microsoft.com/office/drawing/2014/main" id="{9E0F1013-82F0-252A-05EF-1ED562C2ECB7}"/>
+                    </a:ext>
+                  </a:extLst>
+                </p:cNvPr>
+                <p:cNvPicPr/>
+                <p:nvPr/>
+              </p:nvPicPr>
+              <p:blipFill>
+                <a:blip r:embed="rId110"/>
+                <a:stretch>
+                  <a:fillRect/>
+                </a:stretch>
+              </p:blipFill>
+              <p:spPr>
+                <a:xfrm>
+                  <a:off x="1538784" y="1998576"/>
+                  <a:ext cx="254160" cy="106560"/>
+                </a:xfrm>
+                <a:prstGeom prst="rect">
+                  <a:avLst/>
+                </a:prstGeom>
+              </p:spPr>
+            </p:pic>
+          </mc:Fallback>
+        </mc:AlternateContent>
+        <mc:AlternateContent xmlns:mc="http://schemas.openxmlformats.org/markup-compatibility/2006">
+          <mc:Choice xmlns:p14="http://schemas.microsoft.com/office/powerpoint/2010/main" Requires="p14">
+            <p:contentPart p14:bwMode="auto" r:id="rId111">
+              <p14:nvContentPartPr>
+                <p14:cNvPr id="1058" name="Ink 1057">
+                  <a:extLst>
+                    <a:ext uri="{FF2B5EF4-FFF2-40B4-BE49-F238E27FC236}">
+                      <a16:creationId xmlns:a16="http://schemas.microsoft.com/office/drawing/2014/main" id="{33C5A5DA-90BB-5AC8-8889-E4718B9BD757}"/>
+                    </a:ext>
+                  </a:extLst>
+                </p14:cNvPr>
+                <p14:cNvContentPartPr/>
+                <p14:nvPr/>
+              </p14:nvContentPartPr>
+              <p14:xfrm>
+                <a:off x="1899504" y="1965456"/>
+                <a:ext cx="77040" cy="135000"/>
+              </p14:xfrm>
+            </p:contentPart>
+          </mc:Choice>
+          <mc:Fallback>
+            <p:pic>
+              <p:nvPicPr>
+                <p:cNvPr id="1058" name="Ink 1057">
+                  <a:extLst>
+                    <a:ext uri="{FF2B5EF4-FFF2-40B4-BE49-F238E27FC236}">
+                      <a16:creationId xmlns:a16="http://schemas.microsoft.com/office/drawing/2014/main" id="{33C5A5DA-90BB-5AC8-8889-E4718B9BD757}"/>
+                    </a:ext>
+                  </a:extLst>
+                </p:cNvPr>
+                <p:cNvPicPr/>
+                <p:nvPr/>
+              </p:nvPicPr>
+              <p:blipFill>
+                <a:blip r:embed="rId112"/>
+                <a:stretch>
+                  <a:fillRect/>
+                </a:stretch>
+              </p:blipFill>
+              <p:spPr>
+                <a:xfrm>
+                  <a:off x="1893384" y="1959336"/>
+                  <a:ext cx="89280" cy="147240"/>
+                </a:xfrm>
+                <a:prstGeom prst="rect">
+                  <a:avLst/>
+                </a:prstGeom>
+              </p:spPr>
+            </p:pic>
+          </mc:Fallback>
+        </mc:AlternateContent>
+        <mc:AlternateContent xmlns:mc="http://schemas.openxmlformats.org/markup-compatibility/2006">
+          <mc:Choice xmlns:p14="http://schemas.microsoft.com/office/powerpoint/2010/main" Requires="p14">
+            <p:contentPart p14:bwMode="auto" r:id="rId113">
+              <p14:nvContentPartPr>
+                <p14:cNvPr id="1059" name="Ink 1058">
+                  <a:extLst>
+                    <a:ext uri="{FF2B5EF4-FFF2-40B4-BE49-F238E27FC236}">
+                      <a16:creationId xmlns:a16="http://schemas.microsoft.com/office/drawing/2014/main" id="{260F420A-3AC3-C88A-90F9-FE2C87E8954D}"/>
+                    </a:ext>
+                  </a:extLst>
+                </p14:cNvPr>
+                <p14:cNvContentPartPr/>
+                <p14:nvPr/>
+              </p14:nvContentPartPr>
+              <p14:xfrm>
+                <a:off x="1859184" y="1982376"/>
+                <a:ext cx="363240" cy="370080"/>
+              </p14:xfrm>
+            </p:contentPart>
+          </mc:Choice>
+          <mc:Fallback>
+            <p:pic>
+              <p:nvPicPr>
+                <p:cNvPr id="1059" name="Ink 1058">
+                  <a:extLst>
+                    <a:ext uri="{FF2B5EF4-FFF2-40B4-BE49-F238E27FC236}">
+                      <a16:creationId xmlns:a16="http://schemas.microsoft.com/office/drawing/2014/main" id="{260F420A-3AC3-C88A-90F9-FE2C87E8954D}"/>
+                    </a:ext>
+                  </a:extLst>
+                </p:cNvPr>
+                <p:cNvPicPr/>
+                <p:nvPr/>
+              </p:nvPicPr>
+              <p:blipFill>
+                <a:blip r:embed="rId114"/>
+                <a:stretch>
+                  <a:fillRect/>
+                </a:stretch>
+              </p:blipFill>
+              <p:spPr>
+                <a:xfrm>
+                  <a:off x="1853064" y="1976256"/>
+                  <a:ext cx="375480" cy="382320"/>
+                </a:xfrm>
+                <a:prstGeom prst="rect">
+                  <a:avLst/>
+                </a:prstGeom>
+              </p:spPr>
+            </p:pic>
+          </mc:Fallback>
+        </mc:AlternateContent>
+        <mc:AlternateContent xmlns:mc="http://schemas.openxmlformats.org/markup-compatibility/2006">
+          <mc:Choice xmlns:p14="http://schemas.microsoft.com/office/powerpoint/2010/main" Requires="p14">
+            <p:contentPart p14:bwMode="auto" r:id="rId115">
+              <p14:nvContentPartPr>
+                <p14:cNvPr id="1061" name="Ink 1060">
+                  <a:extLst>
+                    <a:ext uri="{FF2B5EF4-FFF2-40B4-BE49-F238E27FC236}">
+                      <a16:creationId xmlns:a16="http://schemas.microsoft.com/office/drawing/2014/main" id="{EDC754B8-EDA1-E495-A621-1BBE605984E1}"/>
+                    </a:ext>
+                  </a:extLst>
+                </p14:cNvPr>
+                <p14:cNvContentPartPr/>
+                <p14:nvPr/>
+              </p14:nvContentPartPr>
+              <p14:xfrm>
+                <a:off x="2487024" y="2027376"/>
+                <a:ext cx="81360" cy="83520"/>
+              </p14:xfrm>
+            </p:contentPart>
+          </mc:Choice>
+          <mc:Fallback>
+            <p:pic>
+              <p:nvPicPr>
+                <p:cNvPr id="1061" name="Ink 1060">
+                  <a:extLst>
+                    <a:ext uri="{FF2B5EF4-FFF2-40B4-BE49-F238E27FC236}">
+                      <a16:creationId xmlns:a16="http://schemas.microsoft.com/office/drawing/2014/main" id="{EDC754B8-EDA1-E495-A621-1BBE605984E1}"/>
+                    </a:ext>
+                  </a:extLst>
+                </p:cNvPr>
+                <p:cNvPicPr/>
+                <p:nvPr/>
+              </p:nvPicPr>
+              <p:blipFill>
+                <a:blip r:embed="rId116"/>
+                <a:stretch>
+                  <a:fillRect/>
+                </a:stretch>
+              </p:blipFill>
+              <p:spPr>
+                <a:xfrm>
+                  <a:off x="2480904" y="2021256"/>
+                  <a:ext cx="93600" cy="95760"/>
+                </a:xfrm>
+                <a:prstGeom prst="rect">
+                  <a:avLst/>
+                </a:prstGeom>
+              </p:spPr>
+            </p:pic>
+          </mc:Fallback>
+        </mc:AlternateContent>
+        <mc:AlternateContent xmlns:mc="http://schemas.openxmlformats.org/markup-compatibility/2006">
+          <mc:Choice xmlns:p14="http://schemas.microsoft.com/office/powerpoint/2010/main" Requires="p14">
+            <p:contentPart p14:bwMode="auto" r:id="rId117">
+              <p14:nvContentPartPr>
+                <p14:cNvPr id="1062" name="Ink 1061">
+                  <a:extLst>
+                    <a:ext uri="{FF2B5EF4-FFF2-40B4-BE49-F238E27FC236}">
+                      <a16:creationId xmlns:a16="http://schemas.microsoft.com/office/drawing/2014/main" id="{7CC89FD2-C57A-EF23-10B0-9F62772EBEF3}"/>
+                    </a:ext>
+                  </a:extLst>
+                </p14:cNvPr>
+                <p14:cNvContentPartPr/>
+                <p14:nvPr/>
+              </p14:nvContentPartPr>
+              <p14:xfrm>
+                <a:off x="2615184" y="2001816"/>
+                <a:ext cx="134640" cy="129600"/>
+              </p14:xfrm>
+            </p:contentPart>
+          </mc:Choice>
+          <mc:Fallback>
+            <p:pic>
+              <p:nvPicPr>
+                <p:cNvPr id="1062" name="Ink 1061">
+                  <a:extLst>
+                    <a:ext uri="{FF2B5EF4-FFF2-40B4-BE49-F238E27FC236}">
+                      <a16:creationId xmlns:a16="http://schemas.microsoft.com/office/drawing/2014/main" id="{7CC89FD2-C57A-EF23-10B0-9F62772EBEF3}"/>
+                    </a:ext>
+                  </a:extLst>
+                </p:cNvPr>
+                <p:cNvPicPr/>
+                <p:nvPr/>
+              </p:nvPicPr>
+              <p:blipFill>
+                <a:blip r:embed="rId118"/>
+                <a:stretch>
+                  <a:fillRect/>
+                </a:stretch>
+              </p:blipFill>
+              <p:spPr>
+                <a:xfrm>
+                  <a:off x="2609064" y="1995696"/>
+                  <a:ext cx="146880" cy="141840"/>
+                </a:xfrm>
+                <a:prstGeom prst="rect">
+                  <a:avLst/>
+                </a:prstGeom>
+              </p:spPr>
+            </p:pic>
+          </mc:Fallback>
+        </mc:AlternateContent>
+        <mc:AlternateContent xmlns:mc="http://schemas.openxmlformats.org/markup-compatibility/2006">
+          <mc:Choice xmlns:p14="http://schemas.microsoft.com/office/powerpoint/2010/main" Requires="p14">
+            <p:contentPart p14:bwMode="auto" r:id="rId119">
+              <p14:nvContentPartPr>
+                <p14:cNvPr id="1063" name="Ink 1062">
+                  <a:extLst>
+                    <a:ext uri="{FF2B5EF4-FFF2-40B4-BE49-F238E27FC236}">
+                      <a16:creationId xmlns:a16="http://schemas.microsoft.com/office/drawing/2014/main" id="{78ABB77D-61C9-38B4-F95E-05B6AC73085B}"/>
+                    </a:ext>
+                  </a:extLst>
+                </p14:cNvPr>
+                <p14:cNvContentPartPr/>
+                <p14:nvPr/>
+              </p14:nvContentPartPr>
+              <p14:xfrm>
+                <a:off x="2804904" y="1993176"/>
+                <a:ext cx="162720" cy="118080"/>
+              </p14:xfrm>
+            </p:contentPart>
+          </mc:Choice>
+          <mc:Fallback>
+            <p:pic>
+              <p:nvPicPr>
+                <p:cNvPr id="1063" name="Ink 1062">
+                  <a:extLst>
+                    <a:ext uri="{FF2B5EF4-FFF2-40B4-BE49-F238E27FC236}">
+                      <a16:creationId xmlns:a16="http://schemas.microsoft.com/office/drawing/2014/main" id="{78ABB77D-61C9-38B4-F95E-05B6AC73085B}"/>
+                    </a:ext>
+                  </a:extLst>
+                </p:cNvPr>
+                <p:cNvPicPr/>
+                <p:nvPr/>
+              </p:nvPicPr>
+              <p:blipFill>
+                <a:blip r:embed="rId120"/>
+                <a:stretch>
+                  <a:fillRect/>
+                </a:stretch>
+              </p:blipFill>
+              <p:spPr>
+                <a:xfrm>
+                  <a:off x="2798784" y="1987056"/>
+                  <a:ext cx="174960" cy="130320"/>
+                </a:xfrm>
+                <a:prstGeom prst="rect">
+                  <a:avLst/>
+                </a:prstGeom>
+              </p:spPr>
+            </p:pic>
+          </mc:Fallback>
+        </mc:AlternateContent>
+        <mc:AlternateContent xmlns:mc="http://schemas.openxmlformats.org/markup-compatibility/2006">
+          <mc:Choice xmlns:p14="http://schemas.microsoft.com/office/powerpoint/2010/main" Requires="p14">
+            <p:contentPart p14:bwMode="auto" r:id="rId121">
+              <p14:nvContentPartPr>
+                <p14:cNvPr id="1064" name="Ink 1063">
+                  <a:extLst>
+                    <a:ext uri="{FF2B5EF4-FFF2-40B4-BE49-F238E27FC236}">
+                      <a16:creationId xmlns:a16="http://schemas.microsoft.com/office/drawing/2014/main" id="{4BB30434-13C3-ABC8-27E0-95CA741F03EE}"/>
+                    </a:ext>
+                  </a:extLst>
+                </p14:cNvPr>
+                <p14:cNvContentPartPr/>
+                <p14:nvPr/>
+              </p14:nvContentPartPr>
+              <p14:xfrm>
+                <a:off x="3045024" y="1892736"/>
+                <a:ext cx="11160" cy="222120"/>
+              </p14:xfrm>
+            </p:contentPart>
+          </mc:Choice>
+          <mc:Fallback>
+            <p:pic>
+              <p:nvPicPr>
+                <p:cNvPr id="1064" name="Ink 1063">
+                  <a:extLst>
+                    <a:ext uri="{FF2B5EF4-FFF2-40B4-BE49-F238E27FC236}">
+                      <a16:creationId xmlns:a16="http://schemas.microsoft.com/office/drawing/2014/main" id="{4BB30434-13C3-ABC8-27E0-95CA741F03EE}"/>
+                    </a:ext>
+                  </a:extLst>
+                </p:cNvPr>
+                <p:cNvPicPr/>
+                <p:nvPr/>
+              </p:nvPicPr>
+              <p:blipFill>
+                <a:blip r:embed="rId122"/>
+                <a:stretch>
+                  <a:fillRect/>
+                </a:stretch>
+              </p:blipFill>
+              <p:spPr>
+                <a:xfrm>
+                  <a:off x="3038904" y="1886616"/>
+                  <a:ext cx="23400" cy="234360"/>
+                </a:xfrm>
+                <a:prstGeom prst="rect">
+                  <a:avLst/>
+                </a:prstGeom>
+              </p:spPr>
+            </p:pic>
+          </mc:Fallback>
+        </mc:AlternateContent>
+        <mc:AlternateContent xmlns:mc="http://schemas.openxmlformats.org/markup-compatibility/2006">
+          <mc:Choice xmlns:p14="http://schemas.microsoft.com/office/powerpoint/2010/main" Requires="p14">
+            <p:contentPart p14:bwMode="auto" r:id="rId123">
+              <p14:nvContentPartPr>
+                <p14:cNvPr id="1065" name="Ink 1064">
+                  <a:extLst>
+                    <a:ext uri="{FF2B5EF4-FFF2-40B4-BE49-F238E27FC236}">
+                      <a16:creationId xmlns:a16="http://schemas.microsoft.com/office/drawing/2014/main" id="{6B70F8B4-F388-C10D-23ED-092FA09F59C1}"/>
+                    </a:ext>
+                  </a:extLst>
+                </p14:cNvPr>
+                <p14:cNvContentPartPr/>
+                <p14:nvPr/>
+              </p14:nvContentPartPr>
+              <p14:xfrm>
+                <a:off x="3136104" y="1974816"/>
+                <a:ext cx="52920" cy="360"/>
+              </p14:xfrm>
+            </p:contentPart>
+          </mc:Choice>
+          <mc:Fallback>
+            <p:pic>
+              <p:nvPicPr>
+                <p:cNvPr id="1065" name="Ink 1064">
+                  <a:extLst>
+                    <a:ext uri="{FF2B5EF4-FFF2-40B4-BE49-F238E27FC236}">
+                      <a16:creationId xmlns:a16="http://schemas.microsoft.com/office/drawing/2014/main" id="{6B70F8B4-F388-C10D-23ED-092FA09F59C1}"/>
+                    </a:ext>
+                  </a:extLst>
+                </p:cNvPr>
+                <p:cNvPicPr/>
+                <p:nvPr/>
+              </p:nvPicPr>
+              <p:blipFill>
+                <a:blip r:embed="rId124"/>
+                <a:stretch>
+                  <a:fillRect/>
+                </a:stretch>
+              </p:blipFill>
+              <p:spPr>
+                <a:xfrm>
+                  <a:off x="3129984" y="1968696"/>
+                  <a:ext cx="65160" cy="12600"/>
+                </a:xfrm>
+                <a:prstGeom prst="rect">
+                  <a:avLst/>
+                </a:prstGeom>
+              </p:spPr>
+            </p:pic>
+          </mc:Fallback>
+        </mc:AlternateContent>
+        <mc:AlternateContent xmlns:mc="http://schemas.openxmlformats.org/markup-compatibility/2006">
+          <mc:Choice xmlns:p14="http://schemas.microsoft.com/office/powerpoint/2010/main" Requires="p14">
+            <p:contentPart p14:bwMode="auto" r:id="rId125">
+              <p14:nvContentPartPr>
+                <p14:cNvPr id="1066" name="Ink 1065">
+                  <a:extLst>
+                    <a:ext uri="{FF2B5EF4-FFF2-40B4-BE49-F238E27FC236}">
+                      <a16:creationId xmlns:a16="http://schemas.microsoft.com/office/drawing/2014/main" id="{4652D138-417F-8298-E324-929E3501DB0B}"/>
+                    </a:ext>
+                  </a:extLst>
+                </p14:cNvPr>
+                <p14:cNvContentPartPr/>
+                <p14:nvPr/>
+              </p14:nvContentPartPr>
+              <p14:xfrm>
+                <a:off x="3182544" y="1911096"/>
+                <a:ext cx="17640" cy="150840"/>
+              </p14:xfrm>
+            </p:contentPart>
+          </mc:Choice>
+          <mc:Fallback>
+            <p:pic>
+              <p:nvPicPr>
+                <p:cNvPr id="1066" name="Ink 1065">
+                  <a:extLst>
+                    <a:ext uri="{FF2B5EF4-FFF2-40B4-BE49-F238E27FC236}">
+                      <a16:creationId xmlns:a16="http://schemas.microsoft.com/office/drawing/2014/main" id="{4652D138-417F-8298-E324-929E3501DB0B}"/>
+                    </a:ext>
+                  </a:extLst>
+                </p:cNvPr>
+                <p:cNvPicPr/>
+                <p:nvPr/>
+              </p:nvPicPr>
+              <p:blipFill>
+                <a:blip r:embed="rId126"/>
+                <a:stretch>
+                  <a:fillRect/>
+                </a:stretch>
+              </p:blipFill>
+              <p:spPr>
+                <a:xfrm>
+                  <a:off x="3176424" y="1904976"/>
+                  <a:ext cx="29880" cy="163080"/>
+                </a:xfrm>
+                <a:prstGeom prst="rect">
+                  <a:avLst/>
+                </a:prstGeom>
+              </p:spPr>
+            </p:pic>
+          </mc:Fallback>
+        </mc:AlternateContent>
+        <mc:AlternateContent xmlns:mc="http://schemas.openxmlformats.org/markup-compatibility/2006">
+          <mc:Choice xmlns:p14="http://schemas.microsoft.com/office/powerpoint/2010/main" Requires="p14">
+            <p:contentPart p14:bwMode="auto" r:id="rId127">
+              <p14:nvContentPartPr>
+                <p14:cNvPr id="1067" name="Ink 1066">
+                  <a:extLst>
+                    <a:ext uri="{FF2B5EF4-FFF2-40B4-BE49-F238E27FC236}">
+                      <a16:creationId xmlns:a16="http://schemas.microsoft.com/office/drawing/2014/main" id="{62065D0E-6944-D1BD-1FE9-49D9A6BD526C}"/>
+                    </a:ext>
+                  </a:extLst>
+                </p14:cNvPr>
+                <p14:cNvContentPartPr/>
+                <p14:nvPr/>
+              </p14:nvContentPartPr>
+              <p14:xfrm>
+                <a:off x="3254904" y="1929456"/>
+                <a:ext cx="360" cy="360"/>
+              </p14:xfrm>
+            </p:contentPart>
+          </mc:Choice>
+          <mc:Fallback>
+            <p:pic>
+              <p:nvPicPr>
+                <p:cNvPr id="1067" name="Ink 1066">
+                  <a:extLst>
+                    <a:ext uri="{FF2B5EF4-FFF2-40B4-BE49-F238E27FC236}">
+                      <a16:creationId xmlns:a16="http://schemas.microsoft.com/office/drawing/2014/main" id="{62065D0E-6944-D1BD-1FE9-49D9A6BD526C}"/>
+                    </a:ext>
+                  </a:extLst>
+                </p:cNvPr>
+                <p:cNvPicPr/>
+                <p:nvPr/>
+              </p:nvPicPr>
+              <p:blipFill>
+                <a:blip r:embed="rId128"/>
+                <a:stretch>
+                  <a:fillRect/>
+                </a:stretch>
+              </p:blipFill>
+              <p:spPr>
+                <a:xfrm>
+                  <a:off x="3248784" y="1923336"/>
+                  <a:ext cx="12600" cy="12600"/>
+                </a:xfrm>
+                <a:prstGeom prst="rect">
+                  <a:avLst/>
+                </a:prstGeom>
+              </p:spPr>
+            </p:pic>
+          </mc:Fallback>
+        </mc:AlternateContent>
+        <mc:AlternateContent xmlns:mc="http://schemas.openxmlformats.org/markup-compatibility/2006">
+          <mc:Choice xmlns:p14="http://schemas.microsoft.com/office/powerpoint/2010/main" Requires="p14">
+            <p:contentPart p14:bwMode="auto" r:id="rId129">
+              <p14:nvContentPartPr>
+                <p14:cNvPr id="1068" name="Ink 1067">
+                  <a:extLst>
+                    <a:ext uri="{FF2B5EF4-FFF2-40B4-BE49-F238E27FC236}">
+                      <a16:creationId xmlns:a16="http://schemas.microsoft.com/office/drawing/2014/main" id="{DA06C750-64BA-F296-3CAF-5CD8959BF1B2}"/>
+                    </a:ext>
+                  </a:extLst>
+                </p14:cNvPr>
+                <p14:cNvContentPartPr/>
+                <p14:nvPr/>
+              </p14:nvContentPartPr>
+              <p14:xfrm>
+                <a:off x="3264264" y="1956816"/>
+                <a:ext cx="360" cy="100080"/>
+              </p14:xfrm>
+            </p:contentPart>
+          </mc:Choice>
+          <mc:Fallback>
+            <p:pic>
+              <p:nvPicPr>
+                <p:cNvPr id="1068" name="Ink 1067">
+                  <a:extLst>
+                    <a:ext uri="{FF2B5EF4-FFF2-40B4-BE49-F238E27FC236}">
+                      <a16:creationId xmlns:a16="http://schemas.microsoft.com/office/drawing/2014/main" id="{DA06C750-64BA-F296-3CAF-5CD8959BF1B2}"/>
+                    </a:ext>
+                  </a:extLst>
+                </p:cNvPr>
+                <p:cNvPicPr/>
+                <p:nvPr/>
+              </p:nvPicPr>
+              <p:blipFill>
+                <a:blip r:embed="rId130"/>
+                <a:stretch>
+                  <a:fillRect/>
+                </a:stretch>
+              </p:blipFill>
+              <p:spPr>
+                <a:xfrm>
+                  <a:off x="3258144" y="1950696"/>
+                  <a:ext cx="12600" cy="112320"/>
+                </a:xfrm>
+                <a:prstGeom prst="rect">
+                  <a:avLst/>
+                </a:prstGeom>
+              </p:spPr>
+            </p:pic>
+          </mc:Fallback>
+        </mc:AlternateContent>
+        <mc:AlternateContent xmlns:mc="http://schemas.openxmlformats.org/markup-compatibility/2006">
+          <mc:Choice xmlns:p14="http://schemas.microsoft.com/office/powerpoint/2010/main" Requires="p14">
+            <p:contentPart p14:bwMode="auto" r:id="rId131">
+              <p14:nvContentPartPr>
+                <p14:cNvPr id="1069" name="Ink 1068">
+                  <a:extLst>
+                    <a:ext uri="{FF2B5EF4-FFF2-40B4-BE49-F238E27FC236}">
+                      <a16:creationId xmlns:a16="http://schemas.microsoft.com/office/drawing/2014/main" id="{F0C44B03-25AD-070A-62A5-BF8C44FF375B}"/>
+                    </a:ext>
+                  </a:extLst>
+                </p14:cNvPr>
+                <p14:cNvContentPartPr/>
+                <p14:nvPr/>
+              </p14:nvContentPartPr>
+              <p14:xfrm>
+                <a:off x="3336984" y="1969056"/>
+                <a:ext cx="111240" cy="62640"/>
+              </p14:xfrm>
+            </p:contentPart>
+          </mc:Choice>
+          <mc:Fallback>
+            <p:pic>
+              <p:nvPicPr>
+                <p:cNvPr id="1069" name="Ink 1068">
+                  <a:extLst>
+                    <a:ext uri="{FF2B5EF4-FFF2-40B4-BE49-F238E27FC236}">
+                      <a16:creationId xmlns:a16="http://schemas.microsoft.com/office/drawing/2014/main" id="{F0C44B03-25AD-070A-62A5-BF8C44FF375B}"/>
+                    </a:ext>
+                  </a:extLst>
+                </p:cNvPr>
+                <p:cNvPicPr/>
+                <p:nvPr/>
+              </p:nvPicPr>
+              <p:blipFill>
+                <a:blip r:embed="rId132"/>
+                <a:stretch>
+                  <a:fillRect/>
+                </a:stretch>
+              </p:blipFill>
+              <p:spPr>
+                <a:xfrm>
+                  <a:off x="3330864" y="1962936"/>
+                  <a:ext cx="123480" cy="74880"/>
+                </a:xfrm>
+                <a:prstGeom prst="rect">
+                  <a:avLst/>
+                </a:prstGeom>
+              </p:spPr>
+            </p:pic>
+          </mc:Fallback>
+        </mc:AlternateContent>
+        <mc:AlternateContent xmlns:mc="http://schemas.openxmlformats.org/markup-compatibility/2006">
+          <mc:Choice xmlns:p14="http://schemas.microsoft.com/office/powerpoint/2010/main" Requires="p14">
+            <p:contentPart p14:bwMode="auto" r:id="rId133">
+              <p14:nvContentPartPr>
+                <p14:cNvPr id="1070" name="Ink 1069">
+                  <a:extLst>
+                    <a:ext uri="{FF2B5EF4-FFF2-40B4-BE49-F238E27FC236}">
+                      <a16:creationId xmlns:a16="http://schemas.microsoft.com/office/drawing/2014/main" id="{0B365794-D0F5-170D-A603-B354296DE8F5}"/>
+                    </a:ext>
+                  </a:extLst>
+                </p14:cNvPr>
+                <p14:cNvContentPartPr/>
+                <p14:nvPr/>
+              </p14:nvContentPartPr>
+              <p14:xfrm>
+                <a:off x="3492864" y="1945296"/>
+                <a:ext cx="172440" cy="259200"/>
+              </p14:xfrm>
+            </p:contentPart>
+          </mc:Choice>
+          <mc:Fallback>
+            <p:pic>
+              <p:nvPicPr>
+                <p:cNvPr id="1070" name="Ink 1069">
+                  <a:extLst>
+                    <a:ext uri="{FF2B5EF4-FFF2-40B4-BE49-F238E27FC236}">
+                      <a16:creationId xmlns:a16="http://schemas.microsoft.com/office/drawing/2014/main" id="{0B365794-D0F5-170D-A603-B354296DE8F5}"/>
+                    </a:ext>
+                  </a:extLst>
+                </p:cNvPr>
+                <p:cNvPicPr/>
+                <p:nvPr/>
+              </p:nvPicPr>
+              <p:blipFill>
+                <a:blip r:embed="rId134"/>
+                <a:stretch>
+                  <a:fillRect/>
+                </a:stretch>
+              </p:blipFill>
+              <p:spPr>
+                <a:xfrm>
+                  <a:off x="3486744" y="1939176"/>
+                  <a:ext cx="184680" cy="271440"/>
+                </a:xfrm>
+                <a:prstGeom prst="rect">
+                  <a:avLst/>
+                </a:prstGeom>
+              </p:spPr>
+            </p:pic>
+          </mc:Fallback>
+        </mc:AlternateContent>
+        <mc:AlternateContent xmlns:mc="http://schemas.openxmlformats.org/markup-compatibility/2006">
+          <mc:Choice xmlns:p14="http://schemas.microsoft.com/office/powerpoint/2010/main" Requires="p14">
+            <p:contentPart p14:bwMode="auto" r:id="rId135">
+              <p14:nvContentPartPr>
+                <p14:cNvPr id="1071" name="Ink 1070">
+                  <a:extLst>
+                    <a:ext uri="{FF2B5EF4-FFF2-40B4-BE49-F238E27FC236}">
+                      <a16:creationId xmlns:a16="http://schemas.microsoft.com/office/drawing/2014/main" id="{BDBEBE99-D8B3-3BF2-20DF-DCBBC299A775}"/>
+                    </a:ext>
+                  </a:extLst>
+                </p14:cNvPr>
+                <p14:cNvContentPartPr/>
+                <p14:nvPr/>
+              </p14:nvContentPartPr>
+              <p14:xfrm>
+                <a:off x="410544" y="2018736"/>
+                <a:ext cx="513000" cy="1462680"/>
+              </p14:xfrm>
+            </p:contentPart>
+          </mc:Choice>
+          <mc:Fallback>
+            <p:pic>
+              <p:nvPicPr>
+                <p:cNvPr id="1071" name="Ink 1070">
+                  <a:extLst>
+                    <a:ext uri="{FF2B5EF4-FFF2-40B4-BE49-F238E27FC236}">
+                      <a16:creationId xmlns:a16="http://schemas.microsoft.com/office/drawing/2014/main" id="{BDBEBE99-D8B3-3BF2-20DF-DCBBC299A775}"/>
+                    </a:ext>
+                  </a:extLst>
+                </p:cNvPr>
+                <p:cNvPicPr/>
+                <p:nvPr/>
+              </p:nvPicPr>
+              <p:blipFill>
+                <a:blip r:embed="rId136"/>
+                <a:stretch>
+                  <a:fillRect/>
+                </a:stretch>
+              </p:blipFill>
+              <p:spPr>
+                <a:xfrm>
+                  <a:off x="404424" y="2012616"/>
+                  <a:ext cx="525240" cy="1474920"/>
+                </a:xfrm>
+                <a:prstGeom prst="rect">
+                  <a:avLst/>
+                </a:prstGeom>
+              </p:spPr>
+            </p:pic>
+          </mc:Fallback>
+        </mc:AlternateContent>
+        <mc:AlternateContent xmlns:mc="http://schemas.openxmlformats.org/markup-compatibility/2006">
+          <mc:Choice xmlns:p14="http://schemas.microsoft.com/office/powerpoint/2010/main" Requires="p14">
+            <p:contentPart p14:bwMode="auto" r:id="rId137">
+              <p14:nvContentPartPr>
+                <p14:cNvPr id="1072" name="Ink 1071">
+                  <a:extLst>
+                    <a:ext uri="{FF2B5EF4-FFF2-40B4-BE49-F238E27FC236}">
+                      <a16:creationId xmlns:a16="http://schemas.microsoft.com/office/drawing/2014/main" id="{005942A7-8D9D-3692-5BEA-1A76376325A7}"/>
+                    </a:ext>
+                  </a:extLst>
+                </p14:cNvPr>
+                <p14:cNvContentPartPr/>
+                <p14:nvPr/>
+              </p14:nvContentPartPr>
+              <p14:xfrm>
+                <a:off x="374904" y="3437856"/>
+                <a:ext cx="236160" cy="182520"/>
+              </p14:xfrm>
+            </p:contentPart>
+          </mc:Choice>
+          <mc:Fallback>
+            <p:pic>
+              <p:nvPicPr>
+                <p:cNvPr id="1072" name="Ink 1071">
+                  <a:extLst>
+                    <a:ext uri="{FF2B5EF4-FFF2-40B4-BE49-F238E27FC236}">
+                      <a16:creationId xmlns:a16="http://schemas.microsoft.com/office/drawing/2014/main" id="{005942A7-8D9D-3692-5BEA-1A76376325A7}"/>
+                    </a:ext>
+                  </a:extLst>
+                </p:cNvPr>
+                <p:cNvPicPr/>
+                <p:nvPr/>
+              </p:nvPicPr>
+              <p:blipFill>
+                <a:blip r:embed="rId138"/>
+                <a:stretch>
+                  <a:fillRect/>
+                </a:stretch>
+              </p:blipFill>
+              <p:spPr>
+                <a:xfrm>
+                  <a:off x="368784" y="3431736"/>
+                  <a:ext cx="248400" cy="194760"/>
+                </a:xfrm>
+                <a:prstGeom prst="rect">
+                  <a:avLst/>
+                </a:prstGeom>
+              </p:spPr>
+            </p:pic>
+          </mc:Fallback>
+        </mc:AlternateContent>
+      </p:grpSp>
+      <mc:AlternateContent xmlns:mc="http://schemas.openxmlformats.org/markup-compatibility/2006">
+        <mc:Choice xmlns:p14="http://schemas.microsoft.com/office/powerpoint/2010/main" Requires="p14">
+          <p:contentPart p14:bwMode="auto" r:id="rId139">
+            <p14:nvContentPartPr>
+              <p14:cNvPr id="1074" name="Ink 1073">
+                <a:extLst>
+                  <a:ext uri="{FF2B5EF4-FFF2-40B4-BE49-F238E27FC236}">
+                    <a16:creationId xmlns:a16="http://schemas.microsoft.com/office/drawing/2014/main" id="{FC52FD52-8AD2-DBA9-A5DB-8935B32D1193}"/>
+                  </a:ext>
+                </a:extLst>
+              </p14:cNvPr>
+              <p14:cNvContentPartPr/>
+              <p14:nvPr/>
+            </p14:nvContentPartPr>
+            <p14:xfrm>
+              <a:off x="8684784" y="3036816"/>
+              <a:ext cx="1181880" cy="1526400"/>
+            </p14:xfrm>
+          </p:contentPart>
+        </mc:Choice>
+        <mc:Fallback>
+          <p:pic>
+            <p:nvPicPr>
+              <p:cNvPr id="1074" name="Ink 1073">
+                <a:extLst>
+                  <a:ext uri="{FF2B5EF4-FFF2-40B4-BE49-F238E27FC236}">
+                    <a16:creationId xmlns:a16="http://schemas.microsoft.com/office/drawing/2014/main" id="{FC52FD52-8AD2-DBA9-A5DB-8935B32D1193}"/>
+                  </a:ext>
+                </a:extLst>
+              </p:cNvPr>
+              <p:cNvPicPr/>
+              <p:nvPr/>
+            </p:nvPicPr>
+            <p:blipFill>
+              <a:blip r:embed="rId140"/>
+              <a:stretch>
+                <a:fillRect/>
+              </a:stretch>
+            </p:blipFill>
+            <p:spPr>
+              <a:xfrm>
+                <a:off x="8678664" y="3030696"/>
+                <a:ext cx="1194120" cy="1538640"/>
+              </a:xfrm>
+              <a:prstGeom prst="rect">
+                <a:avLst/>
+              </a:prstGeom>
+            </p:spPr>
+          </p:pic>
+        </mc:Fallback>
+      </mc:AlternateContent>
+      <p:grpSp>
+        <p:nvGrpSpPr>
+          <p:cNvPr id="1077" name="Group 1076">
+            <a:extLst>
+              <a:ext uri="{FF2B5EF4-FFF2-40B4-BE49-F238E27FC236}">
+                <a16:creationId xmlns:a16="http://schemas.microsoft.com/office/drawing/2014/main" id="{E932536A-BEC6-7079-3423-397E1D69A37F}"/>
+              </a:ext>
+            </a:extLst>
+          </p:cNvPr>
+          <p:cNvGrpSpPr/>
+          <p:nvPr/>
+        </p:nvGrpSpPr>
+        <p:grpSpPr>
+          <a:xfrm>
+            <a:off x="9271944" y="2020536"/>
+            <a:ext cx="401040" cy="220680"/>
+            <a:chOff x="9271944" y="2020536"/>
+            <a:chExt cx="401040" cy="220680"/>
+          </a:xfrm>
+        </p:grpSpPr>
+        <mc:AlternateContent xmlns:mc="http://schemas.openxmlformats.org/markup-compatibility/2006">
+          <mc:Choice xmlns:p14="http://schemas.microsoft.com/office/powerpoint/2010/main" Requires="p14">
+            <p:contentPart p14:bwMode="auto" r:id="rId141">
+              <p14:nvContentPartPr>
+                <p14:cNvPr id="1075" name="Ink 1074">
+                  <a:extLst>
+                    <a:ext uri="{FF2B5EF4-FFF2-40B4-BE49-F238E27FC236}">
+                      <a16:creationId xmlns:a16="http://schemas.microsoft.com/office/drawing/2014/main" id="{DBD769B6-947B-B09C-F123-27A22CCF6E69}"/>
+                    </a:ext>
+                  </a:extLst>
+                </p14:cNvPr>
+                <p14:cNvContentPartPr/>
+                <p14:nvPr/>
+              </p14:nvContentPartPr>
+              <p14:xfrm>
+                <a:off x="9271944" y="2055456"/>
+                <a:ext cx="362520" cy="54720"/>
+              </p14:xfrm>
+            </p:contentPart>
+          </mc:Choice>
+          <mc:Fallback>
+            <p:pic>
+              <p:nvPicPr>
+                <p:cNvPr id="1075" name="Ink 1074">
+                  <a:extLst>
+                    <a:ext uri="{FF2B5EF4-FFF2-40B4-BE49-F238E27FC236}">
+                      <a16:creationId xmlns:a16="http://schemas.microsoft.com/office/drawing/2014/main" id="{DBD769B6-947B-B09C-F123-27A22CCF6E69}"/>
+                    </a:ext>
+                  </a:extLst>
+                </p:cNvPr>
+                <p:cNvPicPr/>
+                <p:nvPr/>
+              </p:nvPicPr>
+              <p:blipFill>
+                <a:blip r:embed="rId142"/>
+                <a:stretch>
+                  <a:fillRect/>
+                </a:stretch>
+              </p:blipFill>
+              <p:spPr>
+                <a:xfrm>
+                  <a:off x="9265824" y="2049336"/>
+                  <a:ext cx="374760" cy="66960"/>
+                </a:xfrm>
+                <a:prstGeom prst="rect">
+                  <a:avLst/>
+                </a:prstGeom>
+              </p:spPr>
+            </p:pic>
+          </mc:Fallback>
+        </mc:AlternateContent>
+        <mc:AlternateContent xmlns:mc="http://schemas.openxmlformats.org/markup-compatibility/2006">
+          <mc:Choice xmlns:p14="http://schemas.microsoft.com/office/powerpoint/2010/main" Requires="p14">
+            <p:contentPart p14:bwMode="auto" r:id="rId143">
+              <p14:nvContentPartPr>
+                <p14:cNvPr id="1076" name="Ink 1075">
+                  <a:extLst>
+                    <a:ext uri="{FF2B5EF4-FFF2-40B4-BE49-F238E27FC236}">
+                      <a16:creationId xmlns:a16="http://schemas.microsoft.com/office/drawing/2014/main" id="{A4D4B2F7-58AA-EA58-EEE1-726030BB0F03}"/>
+                    </a:ext>
+                  </a:extLst>
+                </p14:cNvPr>
+                <p14:cNvContentPartPr/>
+                <p14:nvPr/>
+              </p14:nvContentPartPr>
+              <p14:xfrm>
+                <a:off x="9579744" y="2020536"/>
+                <a:ext cx="93240" cy="220680"/>
+              </p14:xfrm>
+            </p:contentPart>
+          </mc:Choice>
+          <mc:Fallback>
+            <p:pic>
+              <p:nvPicPr>
+                <p:cNvPr id="1076" name="Ink 1075">
+                  <a:extLst>
+                    <a:ext uri="{FF2B5EF4-FFF2-40B4-BE49-F238E27FC236}">
+                      <a16:creationId xmlns:a16="http://schemas.microsoft.com/office/drawing/2014/main" id="{A4D4B2F7-58AA-EA58-EEE1-726030BB0F03}"/>
+                    </a:ext>
+                  </a:extLst>
+                </p:cNvPr>
+                <p:cNvPicPr/>
+                <p:nvPr/>
+              </p:nvPicPr>
+              <p:blipFill>
+                <a:blip r:embed="rId144"/>
+                <a:stretch>
+                  <a:fillRect/>
+                </a:stretch>
+              </p:blipFill>
+              <p:spPr>
+                <a:xfrm>
+                  <a:off x="9573624" y="2014416"/>
+                  <a:ext cx="105480" cy="232920"/>
+                </a:xfrm>
+                <a:prstGeom prst="rect">
+                  <a:avLst/>
+                </a:prstGeom>
+              </p:spPr>
+            </p:pic>
+          </mc:Fallback>
+        </mc:AlternateContent>
+      </p:grpSp>
+    </p:spTree>
+    <p:extLst>
+      <p:ext uri="{BB962C8B-B14F-4D97-AF65-F5344CB8AC3E}">
+        <p14:creationId xmlns:p14="http://schemas.microsoft.com/office/powerpoint/2010/main" val="1169838016"/>
+      </p:ext>
+    </p:extLst>
+  </p:cSld>
+  <p:clrMapOvr>
+    <a:masterClrMapping/>
+  </p:clrMapOvr>
+</p:sld>
+</file>
+
+<file path=ppt/slides/slide3.xml><?xml version="1.0" encoding="utf-8"?>
+<p:sld xmlns:a="http://schemas.openxmlformats.org/drawingml/2006/main" xmlns:r="http://schemas.openxmlformats.org/officeDocument/2006/relationships" xmlns:p="http://schemas.openxmlformats.org/presentationml/2006/main">
+  <p:cSld>
+    <p:spTree>
+      <p:nvGrpSpPr>
+        <p:cNvPr id="1" name=""/>
+        <p:cNvGrpSpPr/>
+        <p:nvPr/>
+      </p:nvGrpSpPr>
+      <p:grpSpPr>
+        <a:xfrm>
+          <a:off x="0" y="0"/>
+          <a:ext cx="0" cy="0"/>
+          <a:chOff x="0" y="0"/>
+          <a:chExt cx="0" cy="0"/>
+        </a:xfrm>
+      </p:grpSpPr>
+    </p:spTree>
+    <p:extLst>
+      <p:ext uri="{BB962C8B-B14F-4D97-AF65-F5344CB8AC3E}">
+        <p14:creationId xmlns:p14="http://schemas.microsoft.com/office/powerpoint/2010/main" val="2843360344"/>
       </p:ext>
     </p:extLst>
   </p:cSld>

--- a/draft.pptx
+++ b/draft.pptx
@@ -6058,7 +6058,7 @@
           <a:p>
             <a:fld id="{7313C947-0C62-40F7-BC48-6B3EDD12B3DE}" type="datetimeFigureOut">
               <a:rPr lang="en-US" smtClean="0"/>
-              <a:t>09-Feb-26</a:t>
+              <a:t>10-Feb-26</a:t>
             </a:fld>
             <a:endParaRPr lang="en-US"/>
           </a:p>
@@ -6256,7 +6256,7 @@
           <a:p>
             <a:fld id="{7313C947-0C62-40F7-BC48-6B3EDD12B3DE}" type="datetimeFigureOut">
               <a:rPr lang="en-US" smtClean="0"/>
-              <a:t>09-Feb-26</a:t>
+              <a:t>10-Feb-26</a:t>
             </a:fld>
             <a:endParaRPr lang="en-US"/>
           </a:p>
@@ -6464,7 +6464,7 @@
           <a:p>
             <a:fld id="{7313C947-0C62-40F7-BC48-6B3EDD12B3DE}" type="datetimeFigureOut">
               <a:rPr lang="en-US" smtClean="0"/>
-              <a:t>09-Feb-26</a:t>
+              <a:t>10-Feb-26</a:t>
             </a:fld>
             <a:endParaRPr lang="en-US"/>
           </a:p>
@@ -6662,7 +6662,7 @@
           <a:p>
             <a:fld id="{7313C947-0C62-40F7-BC48-6B3EDD12B3DE}" type="datetimeFigureOut">
               <a:rPr lang="en-US" smtClean="0"/>
-              <a:t>09-Feb-26</a:t>
+              <a:t>10-Feb-26</a:t>
             </a:fld>
             <a:endParaRPr lang="en-US"/>
           </a:p>
@@ -6937,7 +6937,7 @@
           <a:p>
             <a:fld id="{7313C947-0C62-40F7-BC48-6B3EDD12B3DE}" type="datetimeFigureOut">
               <a:rPr lang="en-US" smtClean="0"/>
-              <a:t>09-Feb-26</a:t>
+              <a:t>10-Feb-26</a:t>
             </a:fld>
             <a:endParaRPr lang="en-US"/>
           </a:p>
@@ -7202,7 +7202,7 @@
           <a:p>
             <a:fld id="{7313C947-0C62-40F7-BC48-6B3EDD12B3DE}" type="datetimeFigureOut">
               <a:rPr lang="en-US" smtClean="0"/>
-              <a:t>09-Feb-26</a:t>
+              <a:t>10-Feb-26</a:t>
             </a:fld>
             <a:endParaRPr lang="en-US"/>
           </a:p>
@@ -7614,7 +7614,7 @@
           <a:p>
             <a:fld id="{7313C947-0C62-40F7-BC48-6B3EDD12B3DE}" type="datetimeFigureOut">
               <a:rPr lang="en-US" smtClean="0"/>
-              <a:t>09-Feb-26</a:t>
+              <a:t>10-Feb-26</a:t>
             </a:fld>
             <a:endParaRPr lang="en-US"/>
           </a:p>
@@ -7755,7 +7755,7 @@
           <a:p>
             <a:fld id="{7313C947-0C62-40F7-BC48-6B3EDD12B3DE}" type="datetimeFigureOut">
               <a:rPr lang="en-US" smtClean="0"/>
-              <a:t>09-Feb-26</a:t>
+              <a:t>10-Feb-26</a:t>
             </a:fld>
             <a:endParaRPr lang="en-US"/>
           </a:p>
@@ -7868,7 +7868,7 @@
           <a:p>
             <a:fld id="{7313C947-0C62-40F7-BC48-6B3EDD12B3DE}" type="datetimeFigureOut">
               <a:rPr lang="en-US" smtClean="0"/>
-              <a:t>09-Feb-26</a:t>
+              <a:t>10-Feb-26</a:t>
             </a:fld>
             <a:endParaRPr lang="en-US"/>
           </a:p>
@@ -8179,7 +8179,7 @@
           <a:p>
             <a:fld id="{7313C947-0C62-40F7-BC48-6B3EDD12B3DE}" type="datetimeFigureOut">
               <a:rPr lang="en-US" smtClean="0"/>
-              <a:t>09-Feb-26</a:t>
+              <a:t>10-Feb-26</a:t>
             </a:fld>
             <a:endParaRPr lang="en-US"/>
           </a:p>
@@ -8467,7 +8467,7 @@
           <a:p>
             <a:fld id="{7313C947-0C62-40F7-BC48-6B3EDD12B3DE}" type="datetimeFigureOut">
               <a:rPr lang="en-US" smtClean="0"/>
-              <a:t>09-Feb-26</a:t>
+              <a:t>10-Feb-26</a:t>
             </a:fld>
             <a:endParaRPr lang="en-US"/>
           </a:p>
@@ -8708,7 +8708,7 @@
           <a:p>
             <a:fld id="{7313C947-0C62-40F7-BC48-6B3EDD12B3DE}" type="datetimeFigureOut">
               <a:rPr lang="en-US" smtClean="0"/>
-              <a:t>09-Feb-26</a:t>
+              <a:t>10-Feb-26</a:t>
             </a:fld>
             <a:endParaRPr lang="en-US"/>
           </a:p>
@@ -18367,8 +18367,8 @@
             <a:chExt cx="1735200" cy="493920"/>
           </a:xfrm>
         </p:grpSpPr>
-        <mc:AlternateContent xmlns:mc="http://schemas.openxmlformats.org/markup-compatibility/2006">
-          <mc:Choice xmlns:p14="http://schemas.microsoft.com/office/powerpoint/2010/main" Requires="p14">
+        <mc:AlternateContent xmlns:mc="http://schemas.openxmlformats.org/markup-compatibility/2006" xmlns:p14="http://schemas.microsoft.com/office/powerpoint/2010/main">
+          <mc:Choice Requires="p14">
             <p:contentPart p14:bwMode="auto" r:id="rId3">
               <p14:nvContentPartPr>
                 <p14:cNvPr id="42" name="Ink 41">
@@ -18387,7 +18387,7 @@
               </p14:xfrm>
             </p:contentPart>
           </mc:Choice>
-          <mc:Fallback>
+          <mc:Fallback xmlns="">
             <p:pic>
               <p:nvPicPr>
                 <p:cNvPr id="42" name="Ink 41">
@@ -18418,8 +18418,8 @@
             </p:pic>
           </mc:Fallback>
         </mc:AlternateContent>
-        <mc:AlternateContent xmlns:mc="http://schemas.openxmlformats.org/markup-compatibility/2006">
-          <mc:Choice xmlns:p14="http://schemas.microsoft.com/office/powerpoint/2010/main" Requires="p14">
+        <mc:AlternateContent xmlns:mc="http://schemas.openxmlformats.org/markup-compatibility/2006" xmlns:p14="http://schemas.microsoft.com/office/powerpoint/2010/main">
+          <mc:Choice Requires="p14">
             <p:contentPart p14:bwMode="auto" r:id="rId5">
               <p14:nvContentPartPr>
                 <p14:cNvPr id="43" name="Ink 42">
@@ -18438,7 +18438,7 @@
               </p14:xfrm>
             </p:contentPart>
           </mc:Choice>
-          <mc:Fallback>
+          <mc:Fallback xmlns="">
             <p:pic>
               <p:nvPicPr>
                 <p:cNvPr id="43" name="Ink 42">
@@ -18469,8 +18469,8 @@
             </p:pic>
           </mc:Fallback>
         </mc:AlternateContent>
-        <mc:AlternateContent xmlns:mc="http://schemas.openxmlformats.org/markup-compatibility/2006">
-          <mc:Choice xmlns:p14="http://schemas.microsoft.com/office/powerpoint/2010/main" Requires="p14">
+        <mc:AlternateContent xmlns:mc="http://schemas.openxmlformats.org/markup-compatibility/2006" xmlns:p14="http://schemas.microsoft.com/office/powerpoint/2010/main">
+          <mc:Choice Requires="p14">
             <p:contentPart p14:bwMode="auto" r:id="rId7">
               <p14:nvContentPartPr>
                 <p14:cNvPr id="44" name="Ink 43">
@@ -18489,7 +18489,7 @@
               </p14:xfrm>
             </p:contentPart>
           </mc:Choice>
-          <mc:Fallback>
+          <mc:Fallback xmlns="">
             <p:pic>
               <p:nvPicPr>
                 <p:cNvPr id="44" name="Ink 43">
@@ -18520,8 +18520,8 @@
             </p:pic>
           </mc:Fallback>
         </mc:AlternateContent>
-        <mc:AlternateContent xmlns:mc="http://schemas.openxmlformats.org/markup-compatibility/2006">
-          <mc:Choice xmlns:p14="http://schemas.microsoft.com/office/powerpoint/2010/main" Requires="p14">
+        <mc:AlternateContent xmlns:mc="http://schemas.openxmlformats.org/markup-compatibility/2006" xmlns:p14="http://schemas.microsoft.com/office/powerpoint/2010/main">
+          <mc:Choice Requires="p14">
             <p:contentPart p14:bwMode="auto" r:id="rId9">
               <p14:nvContentPartPr>
                 <p14:cNvPr id="45" name="Ink 44">
@@ -18540,7 +18540,7 @@
               </p14:xfrm>
             </p:contentPart>
           </mc:Choice>
-          <mc:Fallback>
+          <mc:Fallback xmlns="">
             <p:pic>
               <p:nvPicPr>
                 <p:cNvPr id="45" name="Ink 44">
@@ -18571,8 +18571,8 @@
             </p:pic>
           </mc:Fallback>
         </mc:AlternateContent>
-        <mc:AlternateContent xmlns:mc="http://schemas.openxmlformats.org/markup-compatibility/2006">
-          <mc:Choice xmlns:p14="http://schemas.microsoft.com/office/powerpoint/2010/main" Requires="p14">
+        <mc:AlternateContent xmlns:mc="http://schemas.openxmlformats.org/markup-compatibility/2006" xmlns:p14="http://schemas.microsoft.com/office/powerpoint/2010/main">
+          <mc:Choice Requires="p14">
             <p:contentPart p14:bwMode="auto" r:id="rId11">
               <p14:nvContentPartPr>
                 <p14:cNvPr id="46" name="Ink 45">
@@ -18591,7 +18591,7 @@
               </p14:xfrm>
             </p:contentPart>
           </mc:Choice>
-          <mc:Fallback>
+          <mc:Fallback xmlns="">
             <p:pic>
               <p:nvPicPr>
                 <p:cNvPr id="46" name="Ink 45">
@@ -18622,8 +18622,8 @@
             </p:pic>
           </mc:Fallback>
         </mc:AlternateContent>
-        <mc:AlternateContent xmlns:mc="http://schemas.openxmlformats.org/markup-compatibility/2006">
-          <mc:Choice xmlns:p14="http://schemas.microsoft.com/office/powerpoint/2010/main" Requires="p14">
+        <mc:AlternateContent xmlns:mc="http://schemas.openxmlformats.org/markup-compatibility/2006" xmlns:p14="http://schemas.microsoft.com/office/powerpoint/2010/main">
+          <mc:Choice Requires="p14">
             <p:contentPart p14:bwMode="auto" r:id="rId13">
               <p14:nvContentPartPr>
                 <p14:cNvPr id="47" name="Ink 46">
@@ -18642,7 +18642,7 @@
               </p14:xfrm>
             </p:contentPart>
           </mc:Choice>
-          <mc:Fallback>
+          <mc:Fallback xmlns="">
             <p:pic>
               <p:nvPicPr>
                 <p:cNvPr id="47" name="Ink 46">
@@ -18673,8 +18673,8 @@
             </p:pic>
           </mc:Fallback>
         </mc:AlternateContent>
-        <mc:AlternateContent xmlns:mc="http://schemas.openxmlformats.org/markup-compatibility/2006">
-          <mc:Choice xmlns:p14="http://schemas.microsoft.com/office/powerpoint/2010/main" Requires="p14">
+        <mc:AlternateContent xmlns:mc="http://schemas.openxmlformats.org/markup-compatibility/2006" xmlns:p14="http://schemas.microsoft.com/office/powerpoint/2010/main">
+          <mc:Choice Requires="p14">
             <p:contentPart p14:bwMode="auto" r:id="rId15">
               <p14:nvContentPartPr>
                 <p14:cNvPr id="48" name="Ink 47">
@@ -18693,7 +18693,7 @@
               </p14:xfrm>
             </p:contentPart>
           </mc:Choice>
-          <mc:Fallback>
+          <mc:Fallback xmlns="">
             <p:pic>
               <p:nvPicPr>
                 <p:cNvPr id="48" name="Ink 47">
@@ -18724,8 +18724,8 @@
             </p:pic>
           </mc:Fallback>
         </mc:AlternateContent>
-        <mc:AlternateContent xmlns:mc="http://schemas.openxmlformats.org/markup-compatibility/2006">
-          <mc:Choice xmlns:p14="http://schemas.microsoft.com/office/powerpoint/2010/main" Requires="p14">
+        <mc:AlternateContent xmlns:mc="http://schemas.openxmlformats.org/markup-compatibility/2006" xmlns:p14="http://schemas.microsoft.com/office/powerpoint/2010/main">
+          <mc:Choice Requires="p14">
             <p:contentPart p14:bwMode="auto" r:id="rId17">
               <p14:nvContentPartPr>
                 <p14:cNvPr id="49" name="Ink 48">
@@ -18744,7 +18744,7 @@
               </p14:xfrm>
             </p:contentPart>
           </mc:Choice>
-          <mc:Fallback>
+          <mc:Fallback xmlns="">
             <p:pic>
               <p:nvPicPr>
                 <p:cNvPr id="49" name="Ink 48">
@@ -18775,8 +18775,8 @@
             </p:pic>
           </mc:Fallback>
         </mc:AlternateContent>
-        <mc:AlternateContent xmlns:mc="http://schemas.openxmlformats.org/markup-compatibility/2006">
-          <mc:Choice xmlns:p14="http://schemas.microsoft.com/office/powerpoint/2010/main" Requires="p14">
+        <mc:AlternateContent xmlns:mc="http://schemas.openxmlformats.org/markup-compatibility/2006" xmlns:p14="http://schemas.microsoft.com/office/powerpoint/2010/main">
+          <mc:Choice Requires="p14">
             <p:contentPart p14:bwMode="auto" r:id="rId19">
               <p14:nvContentPartPr>
                 <p14:cNvPr id="50" name="Ink 49">
@@ -18795,7 +18795,7 @@
               </p14:xfrm>
             </p:contentPart>
           </mc:Choice>
-          <mc:Fallback>
+          <mc:Fallback xmlns="">
             <p:pic>
               <p:nvPicPr>
                 <p:cNvPr id="50" name="Ink 49">
@@ -18826,8 +18826,8 @@
             </p:pic>
           </mc:Fallback>
         </mc:AlternateContent>
-        <mc:AlternateContent xmlns:mc="http://schemas.openxmlformats.org/markup-compatibility/2006">
-          <mc:Choice xmlns:p14="http://schemas.microsoft.com/office/powerpoint/2010/main" Requires="p14">
+        <mc:AlternateContent xmlns:mc="http://schemas.openxmlformats.org/markup-compatibility/2006" xmlns:p14="http://schemas.microsoft.com/office/powerpoint/2010/main">
+          <mc:Choice Requires="p14">
             <p:contentPart p14:bwMode="auto" r:id="rId21">
               <p14:nvContentPartPr>
                 <p14:cNvPr id="51" name="Ink 50">
@@ -18846,7 +18846,7 @@
               </p14:xfrm>
             </p:contentPart>
           </mc:Choice>
-          <mc:Fallback>
+          <mc:Fallback xmlns="">
             <p:pic>
               <p:nvPicPr>
                 <p:cNvPr id="51" name="Ink 50">
@@ -18898,8 +18898,8 @@
             <a:chExt cx="1611720" cy="237960"/>
           </a:xfrm>
         </p:grpSpPr>
-        <mc:AlternateContent xmlns:mc="http://schemas.openxmlformats.org/markup-compatibility/2006">
-          <mc:Choice xmlns:p14="http://schemas.microsoft.com/office/powerpoint/2010/main" Requires="p14">
+        <mc:AlternateContent xmlns:mc="http://schemas.openxmlformats.org/markup-compatibility/2006" xmlns:p14="http://schemas.microsoft.com/office/powerpoint/2010/main">
+          <mc:Choice Requires="p14">
             <p:contentPart p14:bwMode="auto" r:id="rId23">
               <p14:nvContentPartPr>
                 <p14:cNvPr id="54" name="Ink 53">
@@ -18918,7 +18918,7 @@
               </p14:xfrm>
             </p:contentPart>
           </mc:Choice>
-          <mc:Fallback>
+          <mc:Fallback xmlns="">
             <p:pic>
               <p:nvPicPr>
                 <p:cNvPr id="54" name="Ink 53">
@@ -18949,8 +18949,8 @@
             </p:pic>
           </mc:Fallback>
         </mc:AlternateContent>
-        <mc:AlternateContent xmlns:mc="http://schemas.openxmlformats.org/markup-compatibility/2006">
-          <mc:Choice xmlns:p14="http://schemas.microsoft.com/office/powerpoint/2010/main" Requires="p14">
+        <mc:AlternateContent xmlns:mc="http://schemas.openxmlformats.org/markup-compatibility/2006" xmlns:p14="http://schemas.microsoft.com/office/powerpoint/2010/main">
+          <mc:Choice Requires="p14">
             <p:contentPart p14:bwMode="auto" r:id="rId25">
               <p14:nvContentPartPr>
                 <p14:cNvPr id="55" name="Ink 54">
@@ -18969,7 +18969,7 @@
               </p14:xfrm>
             </p:contentPart>
           </mc:Choice>
-          <mc:Fallback>
+          <mc:Fallback xmlns="">
             <p:pic>
               <p:nvPicPr>
                 <p:cNvPr id="55" name="Ink 54">
@@ -19000,8 +19000,8 @@
             </p:pic>
           </mc:Fallback>
         </mc:AlternateContent>
-        <mc:AlternateContent xmlns:mc="http://schemas.openxmlformats.org/markup-compatibility/2006">
-          <mc:Choice xmlns:p14="http://schemas.microsoft.com/office/powerpoint/2010/main" Requires="p14">
+        <mc:AlternateContent xmlns:mc="http://schemas.openxmlformats.org/markup-compatibility/2006" xmlns:p14="http://schemas.microsoft.com/office/powerpoint/2010/main">
+          <mc:Choice Requires="p14">
             <p:contentPart p14:bwMode="auto" r:id="rId27">
               <p14:nvContentPartPr>
                 <p14:cNvPr id="56" name="Ink 55">
@@ -19020,7 +19020,7 @@
               </p14:xfrm>
             </p:contentPart>
           </mc:Choice>
-          <mc:Fallback>
+          <mc:Fallback xmlns="">
             <p:pic>
               <p:nvPicPr>
                 <p:cNvPr id="56" name="Ink 55">
@@ -19051,8 +19051,8 @@
             </p:pic>
           </mc:Fallback>
         </mc:AlternateContent>
-        <mc:AlternateContent xmlns:mc="http://schemas.openxmlformats.org/markup-compatibility/2006">
-          <mc:Choice xmlns:p14="http://schemas.microsoft.com/office/powerpoint/2010/main" Requires="p14">
+        <mc:AlternateContent xmlns:mc="http://schemas.openxmlformats.org/markup-compatibility/2006" xmlns:p14="http://schemas.microsoft.com/office/powerpoint/2010/main">
+          <mc:Choice Requires="p14">
             <p:contentPart p14:bwMode="auto" r:id="rId29">
               <p14:nvContentPartPr>
                 <p14:cNvPr id="57" name="Ink 56">
@@ -19071,7 +19071,7 @@
               </p14:xfrm>
             </p:contentPart>
           </mc:Choice>
-          <mc:Fallback>
+          <mc:Fallback xmlns="">
             <p:pic>
               <p:nvPicPr>
                 <p:cNvPr id="57" name="Ink 56">
@@ -19102,8 +19102,8 @@
             </p:pic>
           </mc:Fallback>
         </mc:AlternateContent>
-        <mc:AlternateContent xmlns:mc="http://schemas.openxmlformats.org/markup-compatibility/2006">
-          <mc:Choice xmlns:p14="http://schemas.microsoft.com/office/powerpoint/2010/main" Requires="p14">
+        <mc:AlternateContent xmlns:mc="http://schemas.openxmlformats.org/markup-compatibility/2006" xmlns:p14="http://schemas.microsoft.com/office/powerpoint/2010/main">
+          <mc:Choice Requires="p14">
             <p:contentPart p14:bwMode="auto" r:id="rId31">
               <p14:nvContentPartPr>
                 <p14:cNvPr id="58" name="Ink 57">
@@ -19122,7 +19122,7 @@
               </p14:xfrm>
             </p:contentPart>
           </mc:Choice>
-          <mc:Fallback>
+          <mc:Fallback xmlns="">
             <p:pic>
               <p:nvPicPr>
                 <p:cNvPr id="58" name="Ink 57">
@@ -19153,8 +19153,8 @@
             </p:pic>
           </mc:Fallback>
         </mc:AlternateContent>
-        <mc:AlternateContent xmlns:mc="http://schemas.openxmlformats.org/markup-compatibility/2006">
-          <mc:Choice xmlns:p14="http://schemas.microsoft.com/office/powerpoint/2010/main" Requires="p14">
+        <mc:AlternateContent xmlns:mc="http://schemas.openxmlformats.org/markup-compatibility/2006" xmlns:p14="http://schemas.microsoft.com/office/powerpoint/2010/main">
+          <mc:Choice Requires="p14">
             <p:contentPart p14:bwMode="auto" r:id="rId33">
               <p14:nvContentPartPr>
                 <p14:cNvPr id="59" name="Ink 58">
@@ -19173,7 +19173,7 @@
               </p14:xfrm>
             </p:contentPart>
           </mc:Choice>
-          <mc:Fallback>
+          <mc:Fallback xmlns="">
             <p:pic>
               <p:nvPicPr>
                 <p:cNvPr id="59" name="Ink 58">
@@ -19261,8 +19261,8 @@
             <a:chExt cx="5976360" cy="795960"/>
           </a:xfrm>
         </p:grpSpPr>
-        <mc:AlternateContent xmlns:mc="http://schemas.openxmlformats.org/markup-compatibility/2006">
-          <mc:Choice xmlns:p14="http://schemas.microsoft.com/office/powerpoint/2010/main" Requires="p14">
+        <mc:AlternateContent xmlns:mc="http://schemas.openxmlformats.org/markup-compatibility/2006" xmlns:p14="http://schemas.microsoft.com/office/powerpoint/2010/main">
+          <mc:Choice Requires="p14">
             <p:contentPart p14:bwMode="auto" r:id="rId35">
               <p14:nvContentPartPr>
                 <p14:cNvPr id="30" name="Ink 29">
@@ -19281,7 +19281,7 @@
               </p14:xfrm>
             </p:contentPart>
           </mc:Choice>
-          <mc:Fallback>
+          <mc:Fallback xmlns="">
             <p:pic>
               <p:nvPicPr>
                 <p:cNvPr id="30" name="Ink 29">
@@ -19312,8 +19312,8 @@
             </p:pic>
           </mc:Fallback>
         </mc:AlternateContent>
-        <mc:AlternateContent xmlns:mc="http://schemas.openxmlformats.org/markup-compatibility/2006">
-          <mc:Choice xmlns:p14="http://schemas.microsoft.com/office/powerpoint/2010/main" Requires="p14">
+        <mc:AlternateContent xmlns:mc="http://schemas.openxmlformats.org/markup-compatibility/2006" xmlns:p14="http://schemas.microsoft.com/office/powerpoint/2010/main">
+          <mc:Choice Requires="p14">
             <p:contentPart p14:bwMode="auto" r:id="rId37">
               <p14:nvContentPartPr>
                 <p14:cNvPr id="31" name="Ink 30">
@@ -19332,7 +19332,7 @@
               </p14:xfrm>
             </p:contentPart>
           </mc:Choice>
-          <mc:Fallback>
+          <mc:Fallback xmlns="">
             <p:pic>
               <p:nvPicPr>
                 <p:cNvPr id="31" name="Ink 30">
@@ -19363,8 +19363,8 @@
             </p:pic>
           </mc:Fallback>
         </mc:AlternateContent>
-        <mc:AlternateContent xmlns:mc="http://schemas.openxmlformats.org/markup-compatibility/2006">
-          <mc:Choice xmlns:p14="http://schemas.microsoft.com/office/powerpoint/2010/main" Requires="p14">
+        <mc:AlternateContent xmlns:mc="http://schemas.openxmlformats.org/markup-compatibility/2006" xmlns:p14="http://schemas.microsoft.com/office/powerpoint/2010/main">
+          <mc:Choice Requires="p14">
             <p:contentPart p14:bwMode="auto" r:id="rId39">
               <p14:nvContentPartPr>
                 <p14:cNvPr id="32" name="Ink 31">
@@ -19383,7 +19383,7 @@
               </p14:xfrm>
             </p:contentPart>
           </mc:Choice>
-          <mc:Fallback>
+          <mc:Fallback xmlns="">
             <p:pic>
               <p:nvPicPr>
                 <p:cNvPr id="32" name="Ink 31">
@@ -19414,8 +19414,8 @@
             </p:pic>
           </mc:Fallback>
         </mc:AlternateContent>
-        <mc:AlternateContent xmlns:mc="http://schemas.openxmlformats.org/markup-compatibility/2006">
-          <mc:Choice xmlns:p14="http://schemas.microsoft.com/office/powerpoint/2010/main" Requires="p14">
+        <mc:AlternateContent xmlns:mc="http://schemas.openxmlformats.org/markup-compatibility/2006" xmlns:p14="http://schemas.microsoft.com/office/powerpoint/2010/main">
+          <mc:Choice Requires="p14">
             <p:contentPart p14:bwMode="auto" r:id="rId41">
               <p14:nvContentPartPr>
                 <p14:cNvPr id="33" name="Ink 32">
@@ -19434,7 +19434,7 @@
               </p14:xfrm>
             </p:contentPart>
           </mc:Choice>
-          <mc:Fallback>
+          <mc:Fallback xmlns="">
             <p:pic>
               <p:nvPicPr>
                 <p:cNvPr id="33" name="Ink 32">
@@ -19465,8 +19465,8 @@
             </p:pic>
           </mc:Fallback>
         </mc:AlternateContent>
-        <mc:AlternateContent xmlns:mc="http://schemas.openxmlformats.org/markup-compatibility/2006">
-          <mc:Choice xmlns:p14="http://schemas.microsoft.com/office/powerpoint/2010/main" Requires="p14">
+        <mc:AlternateContent xmlns:mc="http://schemas.openxmlformats.org/markup-compatibility/2006" xmlns:p14="http://schemas.microsoft.com/office/powerpoint/2010/main">
+          <mc:Choice Requires="p14">
             <p:contentPart p14:bwMode="auto" r:id="rId43">
               <p14:nvContentPartPr>
                 <p14:cNvPr id="34" name="Ink 33">
@@ -19485,7 +19485,7 @@
               </p14:xfrm>
             </p:contentPart>
           </mc:Choice>
-          <mc:Fallback>
+          <mc:Fallback xmlns="">
             <p:pic>
               <p:nvPicPr>
                 <p:cNvPr id="34" name="Ink 33">
@@ -19516,8 +19516,8 @@
             </p:pic>
           </mc:Fallback>
         </mc:AlternateContent>
-        <mc:AlternateContent xmlns:mc="http://schemas.openxmlformats.org/markup-compatibility/2006">
-          <mc:Choice xmlns:p14="http://schemas.microsoft.com/office/powerpoint/2010/main" Requires="p14">
+        <mc:AlternateContent xmlns:mc="http://schemas.openxmlformats.org/markup-compatibility/2006" xmlns:p14="http://schemas.microsoft.com/office/powerpoint/2010/main">
+          <mc:Choice Requires="p14">
             <p:contentPart p14:bwMode="auto" r:id="rId45">
               <p14:nvContentPartPr>
                 <p14:cNvPr id="36" name="Ink 35">
@@ -19536,7 +19536,7 @@
               </p14:xfrm>
             </p:contentPart>
           </mc:Choice>
-          <mc:Fallback>
+          <mc:Fallback xmlns="">
             <p:pic>
               <p:nvPicPr>
                 <p:cNvPr id="36" name="Ink 35">
@@ -19567,8 +19567,8 @@
             </p:pic>
           </mc:Fallback>
         </mc:AlternateContent>
-        <mc:AlternateContent xmlns:mc="http://schemas.openxmlformats.org/markup-compatibility/2006">
-          <mc:Choice xmlns:p14="http://schemas.microsoft.com/office/powerpoint/2010/main" Requires="p14">
+        <mc:AlternateContent xmlns:mc="http://schemas.openxmlformats.org/markup-compatibility/2006" xmlns:p14="http://schemas.microsoft.com/office/powerpoint/2010/main">
+          <mc:Choice Requires="p14">
             <p:contentPart p14:bwMode="auto" r:id="rId47">
               <p14:nvContentPartPr>
                 <p14:cNvPr id="37" name="Ink 36">
@@ -19587,7 +19587,7 @@
               </p14:xfrm>
             </p:contentPart>
           </mc:Choice>
-          <mc:Fallback>
+          <mc:Fallback xmlns="">
             <p:pic>
               <p:nvPicPr>
                 <p:cNvPr id="37" name="Ink 36">
@@ -19618,8 +19618,8 @@
             </p:pic>
           </mc:Fallback>
         </mc:AlternateContent>
-        <mc:AlternateContent xmlns:mc="http://schemas.openxmlformats.org/markup-compatibility/2006">
-          <mc:Choice xmlns:p14="http://schemas.microsoft.com/office/powerpoint/2010/main" Requires="p14">
+        <mc:AlternateContent xmlns:mc="http://schemas.openxmlformats.org/markup-compatibility/2006" xmlns:p14="http://schemas.microsoft.com/office/powerpoint/2010/main">
+          <mc:Choice Requires="p14">
             <p:contentPart p14:bwMode="auto" r:id="rId49">
               <p14:nvContentPartPr>
                 <p14:cNvPr id="38" name="Ink 37">
@@ -19638,7 +19638,7 @@
               </p14:xfrm>
             </p:contentPart>
           </mc:Choice>
-          <mc:Fallback>
+          <mc:Fallback xmlns="">
             <p:pic>
               <p:nvPicPr>
                 <p:cNvPr id="38" name="Ink 37">
@@ -19669,8 +19669,8 @@
             </p:pic>
           </mc:Fallback>
         </mc:AlternateContent>
-        <mc:AlternateContent xmlns:mc="http://schemas.openxmlformats.org/markup-compatibility/2006">
-          <mc:Choice xmlns:p14="http://schemas.microsoft.com/office/powerpoint/2010/main" Requires="p14">
+        <mc:AlternateContent xmlns:mc="http://schemas.openxmlformats.org/markup-compatibility/2006" xmlns:p14="http://schemas.microsoft.com/office/powerpoint/2010/main">
+          <mc:Choice Requires="p14">
             <p:contentPart p14:bwMode="auto" r:id="rId51">
               <p14:nvContentPartPr>
                 <p14:cNvPr id="39" name="Ink 38">
@@ -19689,7 +19689,7 @@
               </p14:xfrm>
             </p:contentPart>
           </mc:Choice>
-          <mc:Fallback>
+          <mc:Fallback xmlns="">
             <p:pic>
               <p:nvPicPr>
                 <p:cNvPr id="39" name="Ink 38">
@@ -19720,8 +19720,8 @@
             </p:pic>
           </mc:Fallback>
         </mc:AlternateContent>
-        <mc:AlternateContent xmlns:mc="http://schemas.openxmlformats.org/markup-compatibility/2006">
-          <mc:Choice xmlns:p14="http://schemas.microsoft.com/office/powerpoint/2010/main" Requires="p14">
+        <mc:AlternateContent xmlns:mc="http://schemas.openxmlformats.org/markup-compatibility/2006" xmlns:p14="http://schemas.microsoft.com/office/powerpoint/2010/main">
+          <mc:Choice Requires="p14">
             <p:contentPart p14:bwMode="auto" r:id="rId53">
               <p14:nvContentPartPr>
                 <p14:cNvPr id="40" name="Ink 39">
@@ -19740,7 +19740,7 @@
               </p14:xfrm>
             </p:contentPart>
           </mc:Choice>
-          <mc:Fallback>
+          <mc:Fallback xmlns="">
             <p:pic>
               <p:nvPicPr>
                 <p:cNvPr id="40" name="Ink 39">
@@ -19771,8 +19771,8 @@
             </p:pic>
           </mc:Fallback>
         </mc:AlternateContent>
-        <mc:AlternateContent xmlns:mc="http://schemas.openxmlformats.org/markup-compatibility/2006">
-          <mc:Choice xmlns:p14="http://schemas.microsoft.com/office/powerpoint/2010/main" Requires="p14">
+        <mc:AlternateContent xmlns:mc="http://schemas.openxmlformats.org/markup-compatibility/2006" xmlns:p14="http://schemas.microsoft.com/office/powerpoint/2010/main">
+          <mc:Choice Requires="p14">
             <p:contentPart p14:bwMode="auto" r:id="rId55">
               <p14:nvContentPartPr>
                 <p14:cNvPr id="41" name="Ink 40">
@@ -19791,7 +19791,7 @@
               </p14:xfrm>
             </p:contentPart>
           </mc:Choice>
-          <mc:Fallback>
+          <mc:Fallback xmlns="">
             <p:pic>
               <p:nvPicPr>
                 <p:cNvPr id="41" name="Ink 40">
@@ -19822,8 +19822,8 @@
             </p:pic>
           </mc:Fallback>
         </mc:AlternateContent>
-        <mc:AlternateContent xmlns:mc="http://schemas.openxmlformats.org/markup-compatibility/2006">
-          <mc:Choice xmlns:p14="http://schemas.microsoft.com/office/powerpoint/2010/main" Requires="p14">
+        <mc:AlternateContent xmlns:mc="http://schemas.openxmlformats.org/markup-compatibility/2006" xmlns:p14="http://schemas.microsoft.com/office/powerpoint/2010/main">
+          <mc:Choice Requires="p14">
             <p:contentPart p14:bwMode="auto" r:id="rId57">
               <p14:nvContentPartPr>
                 <p14:cNvPr id="62" name="Ink 61">
@@ -19842,7 +19842,7 @@
               </p14:xfrm>
             </p:contentPart>
           </mc:Choice>
-          <mc:Fallback>
+          <mc:Fallback xmlns="">
             <p:pic>
               <p:nvPicPr>
                 <p:cNvPr id="62" name="Ink 61">
@@ -19873,8 +19873,8 @@
             </p:pic>
           </mc:Fallback>
         </mc:AlternateContent>
-        <mc:AlternateContent xmlns:mc="http://schemas.openxmlformats.org/markup-compatibility/2006">
-          <mc:Choice xmlns:p14="http://schemas.microsoft.com/office/powerpoint/2010/main" Requires="p14">
+        <mc:AlternateContent xmlns:mc="http://schemas.openxmlformats.org/markup-compatibility/2006" xmlns:p14="http://schemas.microsoft.com/office/powerpoint/2010/main">
+          <mc:Choice Requires="p14">
             <p:contentPart p14:bwMode="auto" r:id="rId59">
               <p14:nvContentPartPr>
                 <p14:cNvPr id="63" name="Ink 62">
@@ -19893,7 +19893,7 @@
               </p14:xfrm>
             </p:contentPart>
           </mc:Choice>
-          <mc:Fallback>
+          <mc:Fallback xmlns="">
             <p:pic>
               <p:nvPicPr>
                 <p:cNvPr id="63" name="Ink 62">
@@ -19945,8 +19945,8 @@
             <a:chExt cx="341280" cy="360360"/>
           </a:xfrm>
         </p:grpSpPr>
-        <mc:AlternateContent xmlns:mc="http://schemas.openxmlformats.org/markup-compatibility/2006">
-          <mc:Choice xmlns:p14="http://schemas.microsoft.com/office/powerpoint/2010/main" Requires="p14">
+        <mc:AlternateContent xmlns:mc="http://schemas.openxmlformats.org/markup-compatibility/2006" xmlns:p14="http://schemas.microsoft.com/office/powerpoint/2010/main">
+          <mc:Choice Requires="p14">
             <p:contentPart p14:bwMode="auto" r:id="rId61">
               <p14:nvContentPartPr>
                 <p14:cNvPr id="1025" name="Ink 1024">
@@ -19965,7 +19965,7 @@
               </p14:xfrm>
             </p:contentPart>
           </mc:Choice>
-          <mc:Fallback>
+          <mc:Fallback xmlns="">
             <p:pic>
               <p:nvPicPr>
                 <p:cNvPr id="1025" name="Ink 1024">
@@ -19996,8 +19996,8 @@
             </p:pic>
           </mc:Fallback>
         </mc:AlternateContent>
-        <mc:AlternateContent xmlns:mc="http://schemas.openxmlformats.org/markup-compatibility/2006">
-          <mc:Choice xmlns:p14="http://schemas.microsoft.com/office/powerpoint/2010/main" Requires="p14">
+        <mc:AlternateContent xmlns:mc="http://schemas.openxmlformats.org/markup-compatibility/2006" xmlns:p14="http://schemas.microsoft.com/office/powerpoint/2010/main">
+          <mc:Choice Requires="p14">
             <p:contentPart p14:bwMode="auto" r:id="rId63">
               <p14:nvContentPartPr>
                 <p14:cNvPr id="1027" name="Ink 1026">
@@ -20016,7 +20016,7 @@
               </p14:xfrm>
             </p:contentPart>
           </mc:Choice>
-          <mc:Fallback>
+          <mc:Fallback xmlns="">
             <p:pic>
               <p:nvPicPr>
                 <p:cNvPr id="1027" name="Ink 1026">
@@ -20068,8 +20068,8 @@
             <a:chExt cx="5459040" cy="2863440"/>
           </a:xfrm>
         </p:grpSpPr>
-        <mc:AlternateContent xmlns:mc="http://schemas.openxmlformats.org/markup-compatibility/2006">
-          <mc:Choice xmlns:p14="http://schemas.microsoft.com/office/powerpoint/2010/main" Requires="p14">
+        <mc:AlternateContent xmlns:mc="http://schemas.openxmlformats.org/markup-compatibility/2006" xmlns:p14="http://schemas.microsoft.com/office/powerpoint/2010/main">
+          <mc:Choice Requires="p14">
             <p:contentPart p14:bwMode="auto" r:id="rId65">
               <p14:nvContentPartPr>
                 <p14:cNvPr id="1028" name="Ink 1027">
@@ -20088,7 +20088,7 @@
               </p14:xfrm>
             </p:contentPart>
           </mc:Choice>
-          <mc:Fallback>
+          <mc:Fallback xmlns="">
             <p:pic>
               <p:nvPicPr>
                 <p:cNvPr id="1028" name="Ink 1027">
@@ -20119,8 +20119,8 @@
             </p:pic>
           </mc:Fallback>
         </mc:AlternateContent>
-        <mc:AlternateContent xmlns:mc="http://schemas.openxmlformats.org/markup-compatibility/2006">
-          <mc:Choice xmlns:p14="http://schemas.microsoft.com/office/powerpoint/2010/main" Requires="p14">
+        <mc:AlternateContent xmlns:mc="http://schemas.openxmlformats.org/markup-compatibility/2006" xmlns:p14="http://schemas.microsoft.com/office/powerpoint/2010/main">
+          <mc:Choice Requires="p14">
             <p:contentPart p14:bwMode="auto" r:id="rId67">
               <p14:nvContentPartPr>
                 <p14:cNvPr id="1029" name="Ink 1028">
@@ -20139,7 +20139,7 @@
               </p14:xfrm>
             </p:contentPart>
           </mc:Choice>
-          <mc:Fallback>
+          <mc:Fallback xmlns="">
             <p:pic>
               <p:nvPicPr>
                 <p:cNvPr id="1029" name="Ink 1028">
@@ -20170,8 +20170,8 @@
             </p:pic>
           </mc:Fallback>
         </mc:AlternateContent>
-        <mc:AlternateContent xmlns:mc="http://schemas.openxmlformats.org/markup-compatibility/2006">
-          <mc:Choice xmlns:p14="http://schemas.microsoft.com/office/powerpoint/2010/main" Requires="p14">
+        <mc:AlternateContent xmlns:mc="http://schemas.openxmlformats.org/markup-compatibility/2006" xmlns:p14="http://schemas.microsoft.com/office/powerpoint/2010/main">
+          <mc:Choice Requires="p14">
             <p:contentPart p14:bwMode="auto" r:id="rId69">
               <p14:nvContentPartPr>
                 <p14:cNvPr id="1030" name="Ink 1029">
@@ -20190,7 +20190,7 @@
               </p14:xfrm>
             </p:contentPart>
           </mc:Choice>
-          <mc:Fallback>
+          <mc:Fallback xmlns="">
             <p:pic>
               <p:nvPicPr>
                 <p:cNvPr id="1030" name="Ink 1029">
@@ -20221,8 +20221,8 @@
             </p:pic>
           </mc:Fallback>
         </mc:AlternateContent>
-        <mc:AlternateContent xmlns:mc="http://schemas.openxmlformats.org/markup-compatibility/2006">
-          <mc:Choice xmlns:p14="http://schemas.microsoft.com/office/powerpoint/2010/main" Requires="p14">
+        <mc:AlternateContent xmlns:mc="http://schemas.openxmlformats.org/markup-compatibility/2006" xmlns:p14="http://schemas.microsoft.com/office/powerpoint/2010/main">
+          <mc:Choice Requires="p14">
             <p:contentPart p14:bwMode="auto" r:id="rId71">
               <p14:nvContentPartPr>
                 <p14:cNvPr id="1031" name="Ink 1030">
@@ -20241,7 +20241,7 @@
               </p14:xfrm>
             </p:contentPart>
           </mc:Choice>
-          <mc:Fallback>
+          <mc:Fallback xmlns="">
             <p:pic>
               <p:nvPicPr>
                 <p:cNvPr id="1031" name="Ink 1030">
@@ -20272,8 +20272,8 @@
             </p:pic>
           </mc:Fallback>
         </mc:AlternateContent>
-        <mc:AlternateContent xmlns:mc="http://schemas.openxmlformats.org/markup-compatibility/2006">
-          <mc:Choice xmlns:p14="http://schemas.microsoft.com/office/powerpoint/2010/main" Requires="p14">
+        <mc:AlternateContent xmlns:mc="http://schemas.openxmlformats.org/markup-compatibility/2006" xmlns:p14="http://schemas.microsoft.com/office/powerpoint/2010/main">
+          <mc:Choice Requires="p14">
             <p:contentPart p14:bwMode="auto" r:id="rId73">
               <p14:nvContentPartPr>
                 <p14:cNvPr id="1032" name="Ink 1031">
@@ -20292,7 +20292,7 @@
               </p14:xfrm>
             </p:contentPart>
           </mc:Choice>
-          <mc:Fallback>
+          <mc:Fallback xmlns="">
             <p:pic>
               <p:nvPicPr>
                 <p:cNvPr id="1032" name="Ink 1031">
@@ -20323,8 +20323,8 @@
             </p:pic>
           </mc:Fallback>
         </mc:AlternateContent>
-        <mc:AlternateContent xmlns:mc="http://schemas.openxmlformats.org/markup-compatibility/2006">
-          <mc:Choice xmlns:p14="http://schemas.microsoft.com/office/powerpoint/2010/main" Requires="p14">
+        <mc:AlternateContent xmlns:mc="http://schemas.openxmlformats.org/markup-compatibility/2006" xmlns:p14="http://schemas.microsoft.com/office/powerpoint/2010/main">
+          <mc:Choice Requires="p14">
             <p:contentPart p14:bwMode="auto" r:id="rId75">
               <p14:nvContentPartPr>
                 <p14:cNvPr id="1037" name="Ink 1036">
@@ -20343,7 +20343,7 @@
               </p14:xfrm>
             </p:contentPart>
           </mc:Choice>
-          <mc:Fallback>
+          <mc:Fallback xmlns="">
             <p:pic>
               <p:nvPicPr>
                 <p:cNvPr id="1037" name="Ink 1036">
@@ -20374,8 +20374,8 @@
             </p:pic>
           </mc:Fallback>
         </mc:AlternateContent>
-        <mc:AlternateContent xmlns:mc="http://schemas.openxmlformats.org/markup-compatibility/2006">
-          <mc:Choice xmlns:p14="http://schemas.microsoft.com/office/powerpoint/2010/main" Requires="p14">
+        <mc:AlternateContent xmlns:mc="http://schemas.openxmlformats.org/markup-compatibility/2006" xmlns:p14="http://schemas.microsoft.com/office/powerpoint/2010/main">
+          <mc:Choice Requires="p14">
             <p:contentPart p14:bwMode="auto" r:id="rId77">
               <p14:nvContentPartPr>
                 <p14:cNvPr id="1038" name="Ink 1037">
@@ -20394,7 +20394,7 @@
               </p14:xfrm>
             </p:contentPart>
           </mc:Choice>
-          <mc:Fallback>
+          <mc:Fallback xmlns="">
             <p:pic>
               <p:nvPicPr>
                 <p:cNvPr id="1038" name="Ink 1037">
@@ -20425,8 +20425,8 @@
             </p:pic>
           </mc:Fallback>
         </mc:AlternateContent>
-        <mc:AlternateContent xmlns:mc="http://schemas.openxmlformats.org/markup-compatibility/2006">
-          <mc:Choice xmlns:p14="http://schemas.microsoft.com/office/powerpoint/2010/main" Requires="p14">
+        <mc:AlternateContent xmlns:mc="http://schemas.openxmlformats.org/markup-compatibility/2006" xmlns:p14="http://schemas.microsoft.com/office/powerpoint/2010/main">
+          <mc:Choice Requires="p14">
             <p:contentPart p14:bwMode="auto" r:id="rId79">
               <p14:nvContentPartPr>
                 <p14:cNvPr id="1039" name="Ink 1038">
@@ -20445,7 +20445,7 @@
               </p14:xfrm>
             </p:contentPart>
           </mc:Choice>
-          <mc:Fallback>
+          <mc:Fallback xmlns="">
             <p:pic>
               <p:nvPicPr>
                 <p:cNvPr id="1039" name="Ink 1038">
@@ -20476,8 +20476,8 @@
             </p:pic>
           </mc:Fallback>
         </mc:AlternateContent>
-        <mc:AlternateContent xmlns:mc="http://schemas.openxmlformats.org/markup-compatibility/2006">
-          <mc:Choice xmlns:p14="http://schemas.microsoft.com/office/powerpoint/2010/main" Requires="p14">
+        <mc:AlternateContent xmlns:mc="http://schemas.openxmlformats.org/markup-compatibility/2006" xmlns:p14="http://schemas.microsoft.com/office/powerpoint/2010/main">
+          <mc:Choice Requires="p14">
             <p:contentPart p14:bwMode="auto" r:id="rId81">
               <p14:nvContentPartPr>
                 <p14:cNvPr id="1040" name="Ink 1039">
@@ -20496,7 +20496,7 @@
               </p14:xfrm>
             </p:contentPart>
           </mc:Choice>
-          <mc:Fallback>
+          <mc:Fallback xmlns="">
             <p:pic>
               <p:nvPicPr>
                 <p:cNvPr id="1040" name="Ink 1039">
@@ -20527,8 +20527,8 @@
             </p:pic>
           </mc:Fallback>
         </mc:AlternateContent>
-        <mc:AlternateContent xmlns:mc="http://schemas.openxmlformats.org/markup-compatibility/2006">
-          <mc:Choice xmlns:p14="http://schemas.microsoft.com/office/powerpoint/2010/main" Requires="p14">
+        <mc:AlternateContent xmlns:mc="http://schemas.openxmlformats.org/markup-compatibility/2006" xmlns:p14="http://schemas.microsoft.com/office/powerpoint/2010/main">
+          <mc:Choice Requires="p14">
             <p:contentPart p14:bwMode="auto" r:id="rId83">
               <p14:nvContentPartPr>
                 <p14:cNvPr id="1041" name="Ink 1040">
@@ -20547,7 +20547,7 @@
               </p14:xfrm>
             </p:contentPart>
           </mc:Choice>
-          <mc:Fallback>
+          <mc:Fallback xmlns="">
             <p:pic>
               <p:nvPicPr>
                 <p:cNvPr id="1041" name="Ink 1040">
@@ -20578,8 +20578,8 @@
             </p:pic>
           </mc:Fallback>
         </mc:AlternateContent>
-        <mc:AlternateContent xmlns:mc="http://schemas.openxmlformats.org/markup-compatibility/2006">
-          <mc:Choice xmlns:p14="http://schemas.microsoft.com/office/powerpoint/2010/main" Requires="p14">
+        <mc:AlternateContent xmlns:mc="http://schemas.openxmlformats.org/markup-compatibility/2006" xmlns:p14="http://schemas.microsoft.com/office/powerpoint/2010/main">
+          <mc:Choice Requires="p14">
             <p:contentPart p14:bwMode="auto" r:id="rId85">
               <p14:nvContentPartPr>
                 <p14:cNvPr id="1042" name="Ink 1041">
@@ -20598,7 +20598,7 @@
               </p14:xfrm>
             </p:contentPart>
           </mc:Choice>
-          <mc:Fallback>
+          <mc:Fallback xmlns="">
             <p:pic>
               <p:nvPicPr>
                 <p:cNvPr id="1042" name="Ink 1041">
@@ -20629,8 +20629,8 @@
             </p:pic>
           </mc:Fallback>
         </mc:AlternateContent>
-        <mc:AlternateContent xmlns:mc="http://schemas.openxmlformats.org/markup-compatibility/2006">
-          <mc:Choice xmlns:p14="http://schemas.microsoft.com/office/powerpoint/2010/main" Requires="p14">
+        <mc:AlternateContent xmlns:mc="http://schemas.openxmlformats.org/markup-compatibility/2006" xmlns:p14="http://schemas.microsoft.com/office/powerpoint/2010/main">
+          <mc:Choice Requires="p14">
             <p:contentPart p14:bwMode="auto" r:id="rId87">
               <p14:nvContentPartPr>
                 <p14:cNvPr id="1043" name="Ink 1042">
@@ -20649,7 +20649,7 @@
               </p14:xfrm>
             </p:contentPart>
           </mc:Choice>
-          <mc:Fallback>
+          <mc:Fallback xmlns="">
             <p:pic>
               <p:nvPicPr>
                 <p:cNvPr id="1043" name="Ink 1042">
@@ -20680,8 +20680,8 @@
             </p:pic>
           </mc:Fallback>
         </mc:AlternateContent>
-        <mc:AlternateContent xmlns:mc="http://schemas.openxmlformats.org/markup-compatibility/2006">
-          <mc:Choice xmlns:p14="http://schemas.microsoft.com/office/powerpoint/2010/main" Requires="p14">
+        <mc:AlternateContent xmlns:mc="http://schemas.openxmlformats.org/markup-compatibility/2006" xmlns:p14="http://schemas.microsoft.com/office/powerpoint/2010/main">
+          <mc:Choice Requires="p14">
             <p:contentPart p14:bwMode="auto" r:id="rId89">
               <p14:nvContentPartPr>
                 <p14:cNvPr id="1044" name="Ink 1043">
@@ -20700,7 +20700,7 @@
               </p14:xfrm>
             </p:contentPart>
           </mc:Choice>
-          <mc:Fallback>
+          <mc:Fallback xmlns="">
             <p:pic>
               <p:nvPicPr>
                 <p:cNvPr id="1044" name="Ink 1043">
@@ -20731,8 +20731,8 @@
             </p:pic>
           </mc:Fallback>
         </mc:AlternateContent>
-        <mc:AlternateContent xmlns:mc="http://schemas.openxmlformats.org/markup-compatibility/2006">
-          <mc:Choice xmlns:p14="http://schemas.microsoft.com/office/powerpoint/2010/main" Requires="p14">
+        <mc:AlternateContent xmlns:mc="http://schemas.openxmlformats.org/markup-compatibility/2006" xmlns:p14="http://schemas.microsoft.com/office/powerpoint/2010/main">
+          <mc:Choice Requires="p14">
             <p:contentPart p14:bwMode="auto" r:id="rId91">
               <p14:nvContentPartPr>
                 <p14:cNvPr id="1047" name="Ink 1046">
@@ -20751,7 +20751,7 @@
               </p14:xfrm>
             </p:contentPart>
           </mc:Choice>
-          <mc:Fallback>
+          <mc:Fallback xmlns="">
             <p:pic>
               <p:nvPicPr>
                 <p:cNvPr id="1047" name="Ink 1046">
@@ -20782,8 +20782,8 @@
             </p:pic>
           </mc:Fallback>
         </mc:AlternateContent>
-        <mc:AlternateContent xmlns:mc="http://schemas.openxmlformats.org/markup-compatibility/2006">
-          <mc:Choice xmlns:p14="http://schemas.microsoft.com/office/powerpoint/2010/main" Requires="p14">
+        <mc:AlternateContent xmlns:mc="http://schemas.openxmlformats.org/markup-compatibility/2006" xmlns:p14="http://schemas.microsoft.com/office/powerpoint/2010/main">
+          <mc:Choice Requires="p14">
             <p:contentPart p14:bwMode="auto" r:id="rId93">
               <p14:nvContentPartPr>
                 <p14:cNvPr id="1048" name="Ink 1047">
@@ -20802,7 +20802,7 @@
               </p14:xfrm>
             </p:contentPart>
           </mc:Choice>
-          <mc:Fallback>
+          <mc:Fallback xmlns="">
             <p:pic>
               <p:nvPicPr>
                 <p:cNvPr id="1048" name="Ink 1047">
@@ -20833,8 +20833,8 @@
             </p:pic>
           </mc:Fallback>
         </mc:AlternateContent>
-        <mc:AlternateContent xmlns:mc="http://schemas.openxmlformats.org/markup-compatibility/2006">
-          <mc:Choice xmlns:p14="http://schemas.microsoft.com/office/powerpoint/2010/main" Requires="p14">
+        <mc:AlternateContent xmlns:mc="http://schemas.openxmlformats.org/markup-compatibility/2006" xmlns:p14="http://schemas.microsoft.com/office/powerpoint/2010/main">
+          <mc:Choice Requires="p14">
             <p:contentPart p14:bwMode="auto" r:id="rId95">
               <p14:nvContentPartPr>
                 <p14:cNvPr id="1049" name="Ink 1048">
@@ -20853,7 +20853,7 @@
               </p14:xfrm>
             </p:contentPart>
           </mc:Choice>
-          <mc:Fallback>
+          <mc:Fallback xmlns="">
             <p:pic>
               <p:nvPicPr>
                 <p:cNvPr id="1049" name="Ink 1048">
@@ -20884,8 +20884,8 @@
             </p:pic>
           </mc:Fallback>
         </mc:AlternateContent>
-        <mc:AlternateContent xmlns:mc="http://schemas.openxmlformats.org/markup-compatibility/2006">
-          <mc:Choice xmlns:p14="http://schemas.microsoft.com/office/powerpoint/2010/main" Requires="p14">
+        <mc:AlternateContent xmlns:mc="http://schemas.openxmlformats.org/markup-compatibility/2006" xmlns:p14="http://schemas.microsoft.com/office/powerpoint/2010/main">
+          <mc:Choice Requires="p14">
             <p:contentPart p14:bwMode="auto" r:id="rId97">
               <p14:nvContentPartPr>
                 <p14:cNvPr id="1050" name="Ink 1049">
@@ -20904,7 +20904,7 @@
               </p14:xfrm>
             </p:contentPart>
           </mc:Choice>
-          <mc:Fallback>
+          <mc:Fallback xmlns="">
             <p:pic>
               <p:nvPicPr>
                 <p:cNvPr id="1050" name="Ink 1049">
@@ -20935,8 +20935,8 @@
             </p:pic>
           </mc:Fallback>
         </mc:AlternateContent>
-        <mc:AlternateContent xmlns:mc="http://schemas.openxmlformats.org/markup-compatibility/2006">
-          <mc:Choice xmlns:p14="http://schemas.microsoft.com/office/powerpoint/2010/main" Requires="p14">
+        <mc:AlternateContent xmlns:mc="http://schemas.openxmlformats.org/markup-compatibility/2006" xmlns:p14="http://schemas.microsoft.com/office/powerpoint/2010/main">
+          <mc:Choice Requires="p14">
             <p:contentPart p14:bwMode="auto" r:id="rId99">
               <p14:nvContentPartPr>
                 <p14:cNvPr id="1052" name="Ink 1051">
@@ -20955,7 +20955,7 @@
               </p14:xfrm>
             </p:contentPart>
           </mc:Choice>
-          <mc:Fallback>
+          <mc:Fallback xmlns="">
             <p:pic>
               <p:nvPicPr>
                 <p:cNvPr id="1052" name="Ink 1051">
@@ -20986,8 +20986,8 @@
             </p:pic>
           </mc:Fallback>
         </mc:AlternateContent>
-        <mc:AlternateContent xmlns:mc="http://schemas.openxmlformats.org/markup-compatibility/2006">
-          <mc:Choice xmlns:p14="http://schemas.microsoft.com/office/powerpoint/2010/main" Requires="p14">
+        <mc:AlternateContent xmlns:mc="http://schemas.openxmlformats.org/markup-compatibility/2006" xmlns:p14="http://schemas.microsoft.com/office/powerpoint/2010/main">
+          <mc:Choice Requires="p14">
             <p:contentPart p14:bwMode="auto" r:id="rId101">
               <p14:nvContentPartPr>
                 <p14:cNvPr id="1053" name="Ink 1052">
@@ -21006,7 +21006,7 @@
               </p14:xfrm>
             </p:contentPart>
           </mc:Choice>
-          <mc:Fallback>
+          <mc:Fallback xmlns="">
             <p:pic>
               <p:nvPicPr>
                 <p:cNvPr id="1053" name="Ink 1052">
@@ -21037,8 +21037,8 @@
             </p:pic>
           </mc:Fallback>
         </mc:AlternateContent>
-        <mc:AlternateContent xmlns:mc="http://schemas.openxmlformats.org/markup-compatibility/2006">
-          <mc:Choice xmlns:p14="http://schemas.microsoft.com/office/powerpoint/2010/main" Requires="p14">
+        <mc:AlternateContent xmlns:mc="http://schemas.openxmlformats.org/markup-compatibility/2006" xmlns:p14="http://schemas.microsoft.com/office/powerpoint/2010/main">
+          <mc:Choice Requires="p14">
             <p:contentPart p14:bwMode="auto" r:id="rId103">
               <p14:nvContentPartPr>
                 <p14:cNvPr id="1054" name="Ink 1053">
@@ -21057,7 +21057,7 @@
               </p14:xfrm>
             </p:contentPart>
           </mc:Choice>
-          <mc:Fallback>
+          <mc:Fallback xmlns="">
             <p:pic>
               <p:nvPicPr>
                 <p:cNvPr id="1054" name="Ink 1053">
@@ -21088,8 +21088,8 @@
             </p:pic>
           </mc:Fallback>
         </mc:AlternateContent>
-        <mc:AlternateContent xmlns:mc="http://schemas.openxmlformats.org/markup-compatibility/2006">
-          <mc:Choice xmlns:p14="http://schemas.microsoft.com/office/powerpoint/2010/main" Requires="p14">
+        <mc:AlternateContent xmlns:mc="http://schemas.openxmlformats.org/markup-compatibility/2006" xmlns:p14="http://schemas.microsoft.com/office/powerpoint/2010/main">
+          <mc:Choice Requires="p14">
             <p:contentPart p14:bwMode="auto" r:id="rId105">
               <p14:nvContentPartPr>
                 <p14:cNvPr id="1055" name="Ink 1054">
@@ -21108,7 +21108,7 @@
               </p14:xfrm>
             </p:contentPart>
           </mc:Choice>
-          <mc:Fallback>
+          <mc:Fallback xmlns="">
             <p:pic>
               <p:nvPicPr>
                 <p:cNvPr id="1055" name="Ink 1054">
@@ -21139,8 +21139,8 @@
             </p:pic>
           </mc:Fallback>
         </mc:AlternateContent>
-        <mc:AlternateContent xmlns:mc="http://schemas.openxmlformats.org/markup-compatibility/2006">
-          <mc:Choice xmlns:p14="http://schemas.microsoft.com/office/powerpoint/2010/main" Requires="p14">
+        <mc:AlternateContent xmlns:mc="http://schemas.openxmlformats.org/markup-compatibility/2006" xmlns:p14="http://schemas.microsoft.com/office/powerpoint/2010/main">
+          <mc:Choice Requires="p14">
             <p:contentPart p14:bwMode="auto" r:id="rId107">
               <p14:nvContentPartPr>
                 <p14:cNvPr id="1056" name="Ink 1055">
@@ -21159,7 +21159,7 @@
               </p14:xfrm>
             </p:contentPart>
           </mc:Choice>
-          <mc:Fallback>
+          <mc:Fallback xmlns="">
             <p:pic>
               <p:nvPicPr>
                 <p:cNvPr id="1056" name="Ink 1055">
@@ -21190,8 +21190,8 @@
             </p:pic>
           </mc:Fallback>
         </mc:AlternateContent>
-        <mc:AlternateContent xmlns:mc="http://schemas.openxmlformats.org/markup-compatibility/2006">
-          <mc:Choice xmlns:p14="http://schemas.microsoft.com/office/powerpoint/2010/main" Requires="p14">
+        <mc:AlternateContent xmlns:mc="http://schemas.openxmlformats.org/markup-compatibility/2006" xmlns:p14="http://schemas.microsoft.com/office/powerpoint/2010/main">
+          <mc:Choice Requires="p14">
             <p:contentPart p14:bwMode="auto" r:id="rId109">
               <p14:nvContentPartPr>
                 <p14:cNvPr id="1057" name="Ink 1056">
@@ -21210,7 +21210,7 @@
               </p14:xfrm>
             </p:contentPart>
           </mc:Choice>
-          <mc:Fallback>
+          <mc:Fallback xmlns="">
             <p:pic>
               <p:nvPicPr>
                 <p:cNvPr id="1057" name="Ink 1056">
@@ -21241,8 +21241,8 @@
             </p:pic>
           </mc:Fallback>
         </mc:AlternateContent>
-        <mc:AlternateContent xmlns:mc="http://schemas.openxmlformats.org/markup-compatibility/2006">
-          <mc:Choice xmlns:p14="http://schemas.microsoft.com/office/powerpoint/2010/main" Requires="p14">
+        <mc:AlternateContent xmlns:mc="http://schemas.openxmlformats.org/markup-compatibility/2006" xmlns:p14="http://schemas.microsoft.com/office/powerpoint/2010/main">
+          <mc:Choice Requires="p14">
             <p:contentPart p14:bwMode="auto" r:id="rId111">
               <p14:nvContentPartPr>
                 <p14:cNvPr id="1058" name="Ink 1057">
@@ -21261,7 +21261,7 @@
               </p14:xfrm>
             </p:contentPart>
           </mc:Choice>
-          <mc:Fallback>
+          <mc:Fallback xmlns="">
             <p:pic>
               <p:nvPicPr>
                 <p:cNvPr id="1058" name="Ink 1057">
@@ -21292,8 +21292,8 @@
             </p:pic>
           </mc:Fallback>
         </mc:AlternateContent>
-        <mc:AlternateContent xmlns:mc="http://schemas.openxmlformats.org/markup-compatibility/2006">
-          <mc:Choice xmlns:p14="http://schemas.microsoft.com/office/powerpoint/2010/main" Requires="p14">
+        <mc:AlternateContent xmlns:mc="http://schemas.openxmlformats.org/markup-compatibility/2006" xmlns:p14="http://schemas.microsoft.com/office/powerpoint/2010/main">
+          <mc:Choice Requires="p14">
             <p:contentPart p14:bwMode="auto" r:id="rId113">
               <p14:nvContentPartPr>
                 <p14:cNvPr id="1059" name="Ink 1058">
@@ -21312,7 +21312,7 @@
               </p14:xfrm>
             </p:contentPart>
           </mc:Choice>
-          <mc:Fallback>
+          <mc:Fallback xmlns="">
             <p:pic>
               <p:nvPicPr>
                 <p:cNvPr id="1059" name="Ink 1058">
@@ -21343,8 +21343,8 @@
             </p:pic>
           </mc:Fallback>
         </mc:AlternateContent>
-        <mc:AlternateContent xmlns:mc="http://schemas.openxmlformats.org/markup-compatibility/2006">
-          <mc:Choice xmlns:p14="http://schemas.microsoft.com/office/powerpoint/2010/main" Requires="p14">
+        <mc:AlternateContent xmlns:mc="http://schemas.openxmlformats.org/markup-compatibility/2006" xmlns:p14="http://schemas.microsoft.com/office/powerpoint/2010/main">
+          <mc:Choice Requires="p14">
             <p:contentPart p14:bwMode="auto" r:id="rId115">
               <p14:nvContentPartPr>
                 <p14:cNvPr id="1061" name="Ink 1060">
@@ -21363,7 +21363,7 @@
               </p14:xfrm>
             </p:contentPart>
           </mc:Choice>
-          <mc:Fallback>
+          <mc:Fallback xmlns="">
             <p:pic>
               <p:nvPicPr>
                 <p:cNvPr id="1061" name="Ink 1060">
@@ -21394,8 +21394,8 @@
             </p:pic>
           </mc:Fallback>
         </mc:AlternateContent>
-        <mc:AlternateContent xmlns:mc="http://schemas.openxmlformats.org/markup-compatibility/2006">
-          <mc:Choice xmlns:p14="http://schemas.microsoft.com/office/powerpoint/2010/main" Requires="p14">
+        <mc:AlternateContent xmlns:mc="http://schemas.openxmlformats.org/markup-compatibility/2006" xmlns:p14="http://schemas.microsoft.com/office/powerpoint/2010/main">
+          <mc:Choice Requires="p14">
             <p:contentPart p14:bwMode="auto" r:id="rId117">
               <p14:nvContentPartPr>
                 <p14:cNvPr id="1062" name="Ink 1061">
@@ -21414,7 +21414,7 @@
               </p14:xfrm>
             </p:contentPart>
           </mc:Choice>
-          <mc:Fallback>
+          <mc:Fallback xmlns="">
             <p:pic>
               <p:nvPicPr>
                 <p:cNvPr id="1062" name="Ink 1061">
@@ -21445,8 +21445,8 @@
             </p:pic>
           </mc:Fallback>
         </mc:AlternateContent>
-        <mc:AlternateContent xmlns:mc="http://schemas.openxmlformats.org/markup-compatibility/2006">
-          <mc:Choice xmlns:p14="http://schemas.microsoft.com/office/powerpoint/2010/main" Requires="p14">
+        <mc:AlternateContent xmlns:mc="http://schemas.openxmlformats.org/markup-compatibility/2006" xmlns:p14="http://schemas.microsoft.com/office/powerpoint/2010/main">
+          <mc:Choice Requires="p14">
             <p:contentPart p14:bwMode="auto" r:id="rId119">
               <p14:nvContentPartPr>
                 <p14:cNvPr id="1063" name="Ink 1062">
@@ -21465,7 +21465,7 @@
               </p14:xfrm>
             </p:contentPart>
           </mc:Choice>
-          <mc:Fallback>
+          <mc:Fallback xmlns="">
             <p:pic>
               <p:nvPicPr>
                 <p:cNvPr id="1063" name="Ink 1062">
@@ -21496,8 +21496,8 @@
             </p:pic>
           </mc:Fallback>
         </mc:AlternateContent>
-        <mc:AlternateContent xmlns:mc="http://schemas.openxmlformats.org/markup-compatibility/2006">
-          <mc:Choice xmlns:p14="http://schemas.microsoft.com/office/powerpoint/2010/main" Requires="p14">
+        <mc:AlternateContent xmlns:mc="http://schemas.openxmlformats.org/markup-compatibility/2006" xmlns:p14="http://schemas.microsoft.com/office/powerpoint/2010/main">
+          <mc:Choice Requires="p14">
             <p:contentPart p14:bwMode="auto" r:id="rId121">
               <p14:nvContentPartPr>
                 <p14:cNvPr id="1064" name="Ink 1063">
@@ -21516,7 +21516,7 @@
               </p14:xfrm>
             </p:contentPart>
           </mc:Choice>
-          <mc:Fallback>
+          <mc:Fallback xmlns="">
             <p:pic>
               <p:nvPicPr>
                 <p:cNvPr id="1064" name="Ink 1063">
@@ -21547,8 +21547,8 @@
             </p:pic>
           </mc:Fallback>
         </mc:AlternateContent>
-        <mc:AlternateContent xmlns:mc="http://schemas.openxmlformats.org/markup-compatibility/2006">
-          <mc:Choice xmlns:p14="http://schemas.microsoft.com/office/powerpoint/2010/main" Requires="p14">
+        <mc:AlternateContent xmlns:mc="http://schemas.openxmlformats.org/markup-compatibility/2006" xmlns:p14="http://schemas.microsoft.com/office/powerpoint/2010/main">
+          <mc:Choice Requires="p14">
             <p:contentPart p14:bwMode="auto" r:id="rId123">
               <p14:nvContentPartPr>
                 <p14:cNvPr id="1065" name="Ink 1064">
@@ -21567,7 +21567,7 @@
               </p14:xfrm>
             </p:contentPart>
           </mc:Choice>
-          <mc:Fallback>
+          <mc:Fallback xmlns="">
             <p:pic>
               <p:nvPicPr>
                 <p:cNvPr id="1065" name="Ink 1064">
@@ -21598,8 +21598,8 @@
             </p:pic>
           </mc:Fallback>
         </mc:AlternateContent>
-        <mc:AlternateContent xmlns:mc="http://schemas.openxmlformats.org/markup-compatibility/2006">
-          <mc:Choice xmlns:p14="http://schemas.microsoft.com/office/powerpoint/2010/main" Requires="p14">
+        <mc:AlternateContent xmlns:mc="http://schemas.openxmlformats.org/markup-compatibility/2006" xmlns:p14="http://schemas.microsoft.com/office/powerpoint/2010/main">
+          <mc:Choice Requires="p14">
             <p:contentPart p14:bwMode="auto" r:id="rId125">
               <p14:nvContentPartPr>
                 <p14:cNvPr id="1066" name="Ink 1065">
@@ -21618,7 +21618,7 @@
               </p14:xfrm>
             </p:contentPart>
           </mc:Choice>
-          <mc:Fallback>
+          <mc:Fallback xmlns="">
             <p:pic>
               <p:nvPicPr>
                 <p:cNvPr id="1066" name="Ink 1065">
@@ -21649,8 +21649,8 @@
             </p:pic>
           </mc:Fallback>
         </mc:AlternateContent>
-        <mc:AlternateContent xmlns:mc="http://schemas.openxmlformats.org/markup-compatibility/2006">
-          <mc:Choice xmlns:p14="http://schemas.microsoft.com/office/powerpoint/2010/main" Requires="p14">
+        <mc:AlternateContent xmlns:mc="http://schemas.openxmlformats.org/markup-compatibility/2006" xmlns:p14="http://schemas.microsoft.com/office/powerpoint/2010/main">
+          <mc:Choice Requires="p14">
             <p:contentPart p14:bwMode="auto" r:id="rId127">
               <p14:nvContentPartPr>
                 <p14:cNvPr id="1067" name="Ink 1066">
@@ -21669,7 +21669,7 @@
               </p14:xfrm>
             </p:contentPart>
           </mc:Choice>
-          <mc:Fallback>
+          <mc:Fallback xmlns="">
             <p:pic>
               <p:nvPicPr>
                 <p:cNvPr id="1067" name="Ink 1066">
@@ -21700,8 +21700,8 @@
             </p:pic>
           </mc:Fallback>
         </mc:AlternateContent>
-        <mc:AlternateContent xmlns:mc="http://schemas.openxmlformats.org/markup-compatibility/2006">
-          <mc:Choice xmlns:p14="http://schemas.microsoft.com/office/powerpoint/2010/main" Requires="p14">
+        <mc:AlternateContent xmlns:mc="http://schemas.openxmlformats.org/markup-compatibility/2006" xmlns:p14="http://schemas.microsoft.com/office/powerpoint/2010/main">
+          <mc:Choice Requires="p14">
             <p:contentPart p14:bwMode="auto" r:id="rId129">
               <p14:nvContentPartPr>
                 <p14:cNvPr id="1068" name="Ink 1067">
@@ -21720,7 +21720,7 @@
               </p14:xfrm>
             </p:contentPart>
           </mc:Choice>
-          <mc:Fallback>
+          <mc:Fallback xmlns="">
             <p:pic>
               <p:nvPicPr>
                 <p:cNvPr id="1068" name="Ink 1067">
@@ -21751,8 +21751,8 @@
             </p:pic>
           </mc:Fallback>
         </mc:AlternateContent>
-        <mc:AlternateContent xmlns:mc="http://schemas.openxmlformats.org/markup-compatibility/2006">
-          <mc:Choice xmlns:p14="http://schemas.microsoft.com/office/powerpoint/2010/main" Requires="p14">
+        <mc:AlternateContent xmlns:mc="http://schemas.openxmlformats.org/markup-compatibility/2006" xmlns:p14="http://schemas.microsoft.com/office/powerpoint/2010/main">
+          <mc:Choice Requires="p14">
             <p:contentPart p14:bwMode="auto" r:id="rId131">
               <p14:nvContentPartPr>
                 <p14:cNvPr id="1069" name="Ink 1068">
@@ -21771,7 +21771,7 @@
               </p14:xfrm>
             </p:contentPart>
           </mc:Choice>
-          <mc:Fallback>
+          <mc:Fallback xmlns="">
             <p:pic>
               <p:nvPicPr>
                 <p:cNvPr id="1069" name="Ink 1068">
@@ -21802,8 +21802,8 @@
             </p:pic>
           </mc:Fallback>
         </mc:AlternateContent>
-        <mc:AlternateContent xmlns:mc="http://schemas.openxmlformats.org/markup-compatibility/2006">
-          <mc:Choice xmlns:p14="http://schemas.microsoft.com/office/powerpoint/2010/main" Requires="p14">
+        <mc:AlternateContent xmlns:mc="http://schemas.openxmlformats.org/markup-compatibility/2006" xmlns:p14="http://schemas.microsoft.com/office/powerpoint/2010/main">
+          <mc:Choice Requires="p14">
             <p:contentPart p14:bwMode="auto" r:id="rId133">
               <p14:nvContentPartPr>
                 <p14:cNvPr id="1070" name="Ink 1069">
@@ -21822,7 +21822,7 @@
               </p14:xfrm>
             </p:contentPart>
           </mc:Choice>
-          <mc:Fallback>
+          <mc:Fallback xmlns="">
             <p:pic>
               <p:nvPicPr>
                 <p:cNvPr id="1070" name="Ink 1069">
@@ -21853,8 +21853,8 @@
             </p:pic>
           </mc:Fallback>
         </mc:AlternateContent>
-        <mc:AlternateContent xmlns:mc="http://schemas.openxmlformats.org/markup-compatibility/2006">
-          <mc:Choice xmlns:p14="http://schemas.microsoft.com/office/powerpoint/2010/main" Requires="p14">
+        <mc:AlternateContent xmlns:mc="http://schemas.openxmlformats.org/markup-compatibility/2006" xmlns:p14="http://schemas.microsoft.com/office/powerpoint/2010/main">
+          <mc:Choice Requires="p14">
             <p:contentPart p14:bwMode="auto" r:id="rId135">
               <p14:nvContentPartPr>
                 <p14:cNvPr id="1071" name="Ink 1070">
@@ -21873,7 +21873,7 @@
               </p14:xfrm>
             </p:contentPart>
           </mc:Choice>
-          <mc:Fallback>
+          <mc:Fallback xmlns="">
             <p:pic>
               <p:nvPicPr>
                 <p:cNvPr id="1071" name="Ink 1070">
@@ -21904,8 +21904,8 @@
             </p:pic>
           </mc:Fallback>
         </mc:AlternateContent>
-        <mc:AlternateContent xmlns:mc="http://schemas.openxmlformats.org/markup-compatibility/2006">
-          <mc:Choice xmlns:p14="http://schemas.microsoft.com/office/powerpoint/2010/main" Requires="p14">
+        <mc:AlternateContent xmlns:mc="http://schemas.openxmlformats.org/markup-compatibility/2006" xmlns:p14="http://schemas.microsoft.com/office/powerpoint/2010/main">
+          <mc:Choice Requires="p14">
             <p:contentPart p14:bwMode="auto" r:id="rId137">
               <p14:nvContentPartPr>
                 <p14:cNvPr id="1072" name="Ink 1071">
@@ -21924,7 +21924,7 @@
               </p14:xfrm>
             </p:contentPart>
           </mc:Choice>
-          <mc:Fallback>
+          <mc:Fallback xmlns="">
             <p:pic>
               <p:nvPicPr>
                 <p:cNvPr id="1072" name="Ink 1071">
@@ -21956,8 +21956,8 @@
           </mc:Fallback>
         </mc:AlternateContent>
       </p:grpSp>
-      <mc:AlternateContent xmlns:mc="http://schemas.openxmlformats.org/markup-compatibility/2006">
-        <mc:Choice xmlns:p14="http://schemas.microsoft.com/office/powerpoint/2010/main" Requires="p14">
+      <mc:AlternateContent xmlns:mc="http://schemas.openxmlformats.org/markup-compatibility/2006" xmlns:p14="http://schemas.microsoft.com/office/powerpoint/2010/main">
+        <mc:Choice Requires="p14">
           <p:contentPart p14:bwMode="auto" r:id="rId139">
             <p14:nvContentPartPr>
               <p14:cNvPr id="1074" name="Ink 1073">
@@ -21976,7 +21976,7 @@
             </p14:xfrm>
           </p:contentPart>
         </mc:Choice>
-        <mc:Fallback>
+        <mc:Fallback xmlns="">
           <p:pic>
             <p:nvPicPr>
               <p:cNvPr id="1074" name="Ink 1073">
@@ -22027,8 +22027,8 @@
             <a:chExt cx="401040" cy="220680"/>
           </a:xfrm>
         </p:grpSpPr>
-        <mc:AlternateContent xmlns:mc="http://schemas.openxmlformats.org/markup-compatibility/2006">
-          <mc:Choice xmlns:p14="http://schemas.microsoft.com/office/powerpoint/2010/main" Requires="p14">
+        <mc:AlternateContent xmlns:mc="http://schemas.openxmlformats.org/markup-compatibility/2006" xmlns:p14="http://schemas.microsoft.com/office/powerpoint/2010/main">
+          <mc:Choice Requires="p14">
             <p:contentPart p14:bwMode="auto" r:id="rId141">
               <p14:nvContentPartPr>
                 <p14:cNvPr id="1075" name="Ink 1074">
@@ -22047,7 +22047,7 @@
               </p14:xfrm>
             </p:contentPart>
           </mc:Choice>
-          <mc:Fallback>
+          <mc:Fallback xmlns="">
             <p:pic>
               <p:nvPicPr>
                 <p:cNvPr id="1075" name="Ink 1074">
@@ -22078,8 +22078,8 @@
             </p:pic>
           </mc:Fallback>
         </mc:AlternateContent>
-        <mc:AlternateContent xmlns:mc="http://schemas.openxmlformats.org/markup-compatibility/2006">
-          <mc:Choice xmlns:p14="http://schemas.microsoft.com/office/powerpoint/2010/main" Requires="p14">
+        <mc:AlternateContent xmlns:mc="http://schemas.openxmlformats.org/markup-compatibility/2006" xmlns:p14="http://schemas.microsoft.com/office/powerpoint/2010/main">
+          <mc:Choice Requires="p14">
             <p:contentPart p14:bwMode="auto" r:id="rId143">
               <p14:nvContentPartPr>
                 <p14:cNvPr id="1076" name="Ink 1075">
@@ -22098,7 +22098,7 @@
               </p14:xfrm>
             </p:contentPart>
           </mc:Choice>
-          <mc:Fallback>
+          <mc:Fallback xmlns="">
             <p:pic>
               <p:nvPicPr>
                 <p:cNvPr id="1076" name="Ink 1075">
@@ -22160,6 +22160,161 @@
           <a:chExt cx="0" cy="0"/>
         </a:xfrm>
       </p:grpSpPr>
+      <p:sp>
+        <p:nvSpPr>
+          <p:cNvPr id="2" name="TextBox 1">
+            <a:extLst>
+              <a:ext uri="{FF2B5EF4-FFF2-40B4-BE49-F238E27FC236}">
+                <a16:creationId xmlns:a16="http://schemas.microsoft.com/office/drawing/2014/main" id="{7C1DA4F9-F864-A531-9793-89102DDD0460}"/>
+              </a:ext>
+            </a:extLst>
+          </p:cNvPr>
+          <p:cNvSpPr txBox="1"/>
+          <p:nvPr/>
+        </p:nvSpPr>
+        <p:spPr>
+          <a:xfrm>
+            <a:off x="691896" y="237744"/>
+            <a:ext cx="5404104" cy="2585323"/>
+          </a:xfrm>
+          <a:prstGeom prst="rect">
+            <a:avLst/>
+          </a:prstGeom>
+          <a:noFill/>
+        </p:spPr>
+        <p:txBody>
+          <a:bodyPr wrap="square" rtlCol="0">
+            <a:spAutoFit/>
+          </a:bodyPr>
+          <a:lstStyle/>
+          <a:p>
+            <a:r>
+              <a:rPr lang="en-US" dirty="0"/>
+              <a:t>New message on header</a:t>
+            </a:r>
+          </a:p>
+          <a:p>
+            <a:r>
+              <a:rPr lang="en-US" dirty="0"/>
+              <a:t>New message on </a:t>
+            </a:r>
+            <a:r>
+              <a:rPr lang="en-US" dirty="0" err="1"/>
+              <a:t>chatbox</a:t>
+            </a:r>
+            <a:r>
+              <a:rPr lang="en-US" dirty="0"/>
+              <a:t> side bar</a:t>
+            </a:r>
+          </a:p>
+          <a:p>
+            <a:r>
+              <a:rPr lang="en-US" dirty="0"/>
+              <a:t>Arrange sidebar (only when reloaded)</a:t>
+            </a:r>
+          </a:p>
+          <a:p>
+            <a:endParaRPr lang="en-US" dirty="0"/>
+          </a:p>
+          <a:p>
+            <a:r>
+              <a:rPr lang="en-US" dirty="0"/>
+              <a:t>Deploy</a:t>
+            </a:r>
+          </a:p>
+          <a:p>
+            <a:endParaRPr lang="en-US" dirty="0"/>
+          </a:p>
+          <a:p>
+            <a:r>
+              <a:rPr lang="en-US" dirty="0"/>
+              <a:t>Test features</a:t>
+            </a:r>
+          </a:p>
+          <a:p>
+            <a:endParaRPr lang="en-US" dirty="0"/>
+          </a:p>
+          <a:p>
+            <a:r>
+              <a:rPr lang="en-US" dirty="0"/>
+              <a:t>Make videos</a:t>
+            </a:r>
+          </a:p>
+        </p:txBody>
+      </p:sp>
+      <p:sp>
+        <p:nvSpPr>
+          <p:cNvPr id="3" name="TextBox 2">
+            <a:extLst>
+              <a:ext uri="{FF2B5EF4-FFF2-40B4-BE49-F238E27FC236}">
+                <a16:creationId xmlns:a16="http://schemas.microsoft.com/office/drawing/2014/main" id="{1ABBEDAB-5538-5B55-56B7-88BB52A9A331}"/>
+              </a:ext>
+            </a:extLst>
+          </p:cNvPr>
+          <p:cNvSpPr txBox="1"/>
+          <p:nvPr/>
+        </p:nvSpPr>
+        <p:spPr>
+          <a:xfrm>
+            <a:off x="762000" y="4197096"/>
+            <a:ext cx="5404104" cy="369332"/>
+          </a:xfrm>
+          <a:prstGeom prst="rect">
+            <a:avLst/>
+          </a:prstGeom>
+          <a:noFill/>
+        </p:spPr>
+        <p:txBody>
+          <a:bodyPr wrap="square" rtlCol="0">
+            <a:spAutoFit/>
+          </a:bodyPr>
+          <a:lstStyle/>
+          <a:p>
+            <a:r>
+              <a:rPr lang="en-US" dirty="0"/>
+              <a:t>Make notes</a:t>
+            </a:r>
+          </a:p>
+        </p:txBody>
+      </p:sp>
+      <p:cxnSp>
+        <p:nvCxnSpPr>
+          <p:cNvPr id="5" name="Straight Connector 4">
+            <a:extLst>
+              <a:ext uri="{FF2B5EF4-FFF2-40B4-BE49-F238E27FC236}">
+                <a16:creationId xmlns:a16="http://schemas.microsoft.com/office/drawing/2014/main" id="{C5A55EBA-EB4E-42B5-910E-AE5712AA756A}"/>
+              </a:ext>
+            </a:extLst>
+          </p:cNvPr>
+          <p:cNvCxnSpPr>
+            <a:cxnSpLocks/>
+          </p:cNvCxnSpPr>
+          <p:nvPr/>
+        </p:nvCxnSpPr>
+        <p:spPr>
+          <a:xfrm flipV="1">
+            <a:off x="621792" y="3218688"/>
+            <a:ext cx="7552944" cy="73152"/>
+          </a:xfrm>
+          <a:prstGeom prst="line">
+            <a:avLst/>
+          </a:prstGeom>
+        </p:spPr>
+        <p:style>
+          <a:lnRef idx="2">
+            <a:schemeClr val="accent1"/>
+          </a:lnRef>
+          <a:fillRef idx="0">
+            <a:schemeClr val="accent1"/>
+          </a:fillRef>
+          <a:effectRef idx="1">
+            <a:schemeClr val="accent1"/>
+          </a:effectRef>
+          <a:fontRef idx="minor">
+            <a:schemeClr val="tx1"/>
+          </a:fontRef>
+        </p:style>
+      </p:cxnSp>
     </p:spTree>
     <p:extLst>
       <p:ext uri="{BB962C8B-B14F-4D97-AF65-F5344CB8AC3E}">

--- a/draft.pptx
+++ b/draft.pptx
@@ -6058,7 +6058,7 @@
           <a:p>
             <a:fld id="{7313C947-0C62-40F7-BC48-6B3EDD12B3DE}" type="datetimeFigureOut">
               <a:rPr lang="en-US" smtClean="0"/>
-              <a:t>10-Feb-26</a:t>
+              <a:t>11-Feb-26</a:t>
             </a:fld>
             <a:endParaRPr lang="en-US"/>
           </a:p>
@@ -6256,7 +6256,7 @@
           <a:p>
             <a:fld id="{7313C947-0C62-40F7-BC48-6B3EDD12B3DE}" type="datetimeFigureOut">
               <a:rPr lang="en-US" smtClean="0"/>
-              <a:t>10-Feb-26</a:t>
+              <a:t>11-Feb-26</a:t>
             </a:fld>
             <a:endParaRPr lang="en-US"/>
           </a:p>
@@ -6464,7 +6464,7 @@
           <a:p>
             <a:fld id="{7313C947-0C62-40F7-BC48-6B3EDD12B3DE}" type="datetimeFigureOut">
               <a:rPr lang="en-US" smtClean="0"/>
-              <a:t>10-Feb-26</a:t>
+              <a:t>11-Feb-26</a:t>
             </a:fld>
             <a:endParaRPr lang="en-US"/>
           </a:p>
@@ -6662,7 +6662,7 @@
           <a:p>
             <a:fld id="{7313C947-0C62-40F7-BC48-6B3EDD12B3DE}" type="datetimeFigureOut">
               <a:rPr lang="en-US" smtClean="0"/>
-              <a:t>10-Feb-26</a:t>
+              <a:t>11-Feb-26</a:t>
             </a:fld>
             <a:endParaRPr lang="en-US"/>
           </a:p>
@@ -6937,7 +6937,7 @@
           <a:p>
             <a:fld id="{7313C947-0C62-40F7-BC48-6B3EDD12B3DE}" type="datetimeFigureOut">
               <a:rPr lang="en-US" smtClean="0"/>
-              <a:t>10-Feb-26</a:t>
+              <a:t>11-Feb-26</a:t>
             </a:fld>
             <a:endParaRPr lang="en-US"/>
           </a:p>
@@ -7202,7 +7202,7 @@
           <a:p>
             <a:fld id="{7313C947-0C62-40F7-BC48-6B3EDD12B3DE}" type="datetimeFigureOut">
               <a:rPr lang="en-US" smtClean="0"/>
-              <a:t>10-Feb-26</a:t>
+              <a:t>11-Feb-26</a:t>
             </a:fld>
             <a:endParaRPr lang="en-US"/>
           </a:p>
@@ -7614,7 +7614,7 @@
           <a:p>
             <a:fld id="{7313C947-0C62-40F7-BC48-6B3EDD12B3DE}" type="datetimeFigureOut">
               <a:rPr lang="en-US" smtClean="0"/>
-              <a:t>10-Feb-26</a:t>
+              <a:t>11-Feb-26</a:t>
             </a:fld>
             <a:endParaRPr lang="en-US"/>
           </a:p>
@@ -7755,7 +7755,7 @@
           <a:p>
             <a:fld id="{7313C947-0C62-40F7-BC48-6B3EDD12B3DE}" type="datetimeFigureOut">
               <a:rPr lang="en-US" smtClean="0"/>
-              <a:t>10-Feb-26</a:t>
+              <a:t>11-Feb-26</a:t>
             </a:fld>
             <a:endParaRPr lang="en-US"/>
           </a:p>
@@ -7868,7 +7868,7 @@
           <a:p>
             <a:fld id="{7313C947-0C62-40F7-BC48-6B3EDD12B3DE}" type="datetimeFigureOut">
               <a:rPr lang="en-US" smtClean="0"/>
-              <a:t>10-Feb-26</a:t>
+              <a:t>11-Feb-26</a:t>
             </a:fld>
             <a:endParaRPr lang="en-US"/>
           </a:p>
@@ -8179,7 +8179,7 @@
           <a:p>
             <a:fld id="{7313C947-0C62-40F7-BC48-6B3EDD12B3DE}" type="datetimeFigureOut">
               <a:rPr lang="en-US" smtClean="0"/>
-              <a:t>10-Feb-26</a:t>
+              <a:t>11-Feb-26</a:t>
             </a:fld>
             <a:endParaRPr lang="en-US"/>
           </a:p>
@@ -8467,7 +8467,7 @@
           <a:p>
             <a:fld id="{7313C947-0C62-40F7-BC48-6B3EDD12B3DE}" type="datetimeFigureOut">
               <a:rPr lang="en-US" smtClean="0"/>
-              <a:t>10-Feb-26</a:t>
+              <a:t>11-Feb-26</a:t>
             </a:fld>
             <a:endParaRPr lang="en-US"/>
           </a:p>
@@ -8708,7 +8708,7 @@
           <a:p>
             <a:fld id="{7313C947-0C62-40F7-BC48-6B3EDD12B3DE}" type="datetimeFigureOut">
               <a:rPr lang="en-US" smtClean="0"/>
-              <a:t>10-Feb-26</a:t>
+              <a:t>11-Feb-26</a:t>
             </a:fld>
             <a:endParaRPr lang="en-US"/>
           </a:p>
@@ -22175,7 +22175,7 @@
         <p:spPr>
           <a:xfrm>
             <a:off x="691896" y="237744"/>
-            <a:ext cx="5404104" cy="2585323"/>
+            <a:ext cx="5404104" cy="2862322"/>
           </a:xfrm>
           <a:prstGeom prst="rect">
             <a:avLst/>
@@ -22211,6 +22211,12 @@
             <a:r>
               <a:rPr lang="en-US" dirty="0"/>
               <a:t>Arrange sidebar (only when reloaded)</a:t>
+            </a:r>
+          </a:p>
+          <a:p>
+            <a:r>
+              <a:rPr lang="en-US" dirty="0"/>
+              <a:t>Img error for paddle</a:t>
             </a:r>
           </a:p>
           <a:p>
